--- a/slides/exports/redhat-ai-tax-administration.pptx
+++ b/slides/exports/redhat-ai-tax-administration.pptx
@@ -581,7 +581,7 @@
           <a:lstStyle/>
           <a:p>
             <a:r>
-              <a:t>This is the slide that unblocks the deal. Every row is a control the platform provides, mapped to the question an authorizing official actually asks. Expect interruptions here — let them happen, this is the conversation you want. Offer to take the table offline with their ISSO.</a:t>
+              <a:t>This is the slide that unblocks the deal. Every row is a control the platform provides, mapped to the question an authorizing official actually asks. Expect interruptions here — let them happen, this is the conversation you want. Pick a few rows and drill in rather than reading the table. Say it plainly: do not roll your own validations, reach out and we connect you with a specialist. Offer to take the table offline with their ISSO.</a:t>
             </a:r>
           </a:p>
         </p:txBody>
@@ -1071,7 +1071,7 @@
           <a:lstStyle/>
           <a:p>
             <a:r>
-              <a:t>Close with a specific ask, not a thank-you. The architecture workshop is the natural next step. Then hand off to Four Inc. and Carahsoft for the contract vehicle conversation.</a:t>
+              <a:t>Close with a specific ask, not a thank-you. Step zero is the lab walk-through: an hour running the seven labs together to find the point in the stack where they want to prove value, which scopes the pilot. The architecture workshop follows, then hand off to Four Inc. and Carahsoft for the contract vehicle conversation. Point at the contact panel: Brad's email is there deliberately, and if nothing else he is the connector to the right person. Ask for the cyber team by name: if nobody from IRS cyber is on, get a referral to the ISSO and run the appendix for them in depth.</a:t>
             </a:r>
           </a:p>
         </p:txBody>
@@ -4201,7 +4201,469 @@
       </p:sp>
       <p:sp>
         <p:nvSpPr>
-          <p:cNvPr id="3" name="TextBox 2"/>
+          <p:cNvPr id="3" name="Freeform 2"/>
+          <p:cNvSpPr/>
+          <p:nvPr/>
+        </p:nvSpPr>
+        <p:spPr>
+          <a:xfrm>
+            <a:off x="10129418" y="119481"/>
+            <a:ext cx="112166" cy="87783"/>
+          </a:xfrm>
+          <a:custGeom>
+            <a:avLst/>
+            <a:gdLst/>
+            <a:ahLst/>
+            <a:cxnLst/>
+            <a:rect l="l" t="t" r="r" b="b"/>
+            <a:pathLst>
+              <a:path w="112166" h="87783">
+                <a:moveTo>
+                  <a:pt x="56083" y="0"/>
+                </a:moveTo>
+                <a:lnTo>
+                  <a:pt x="112166" y="87783"/>
+                </a:lnTo>
+                <a:lnTo>
+                  <a:pt x="0" y="87783"/>
+                </a:lnTo>
+                <a:close/>
+              </a:path>
+            </a:pathLst>
+          </a:custGeom>
+          <a:solidFill>
+            <a:srgbClr val="5B2E91"/>
+          </a:solidFill>
+          <a:ln>
+            <a:noFill/>
+          </a:ln>
+          <a:effectLst/>
+        </p:spPr>
+        <p:txBody>
+          <a:bodyPr rtlCol="0" anchor="ctr"/>
+          <a:lstStyle/>
+          <a:p>
+            <a:pPr algn="ctr"/>
+          </a:p>
+        </p:txBody>
+      </p:sp>
+      <p:sp>
+        <p:nvSpPr>
+          <p:cNvPr id="4" name="Freeform 3"/>
+          <p:cNvSpPr/>
+          <p:nvPr/>
+        </p:nvSpPr>
+        <p:spPr>
+          <a:xfrm>
+            <a:off x="10119447" y="207264"/>
+            <a:ext cx="132107" cy="15605"/>
+          </a:xfrm>
+          <a:custGeom>
+            <a:avLst/>
+            <a:gdLst/>
+            <a:ahLst/>
+            <a:cxnLst/>
+            <a:rect l="l" t="t" r="r" b="b"/>
+            <a:pathLst>
+              <a:path w="132107" h="15605">
+                <a:moveTo>
+                  <a:pt x="9971" y="0"/>
+                </a:moveTo>
+                <a:lnTo>
+                  <a:pt x="122137" y="0"/>
+                </a:lnTo>
+                <a:lnTo>
+                  <a:pt x="132107" y="15605"/>
+                </a:lnTo>
+                <a:lnTo>
+                  <a:pt x="0" y="15605"/>
+                </a:lnTo>
+                <a:close/>
+              </a:path>
+            </a:pathLst>
+          </a:custGeom>
+          <a:solidFill>
+            <a:srgbClr val="1D4ED8"/>
+          </a:solidFill>
+          <a:ln>
+            <a:noFill/>
+          </a:ln>
+          <a:effectLst/>
+        </p:spPr>
+        <p:txBody>
+          <a:bodyPr rtlCol="0" anchor="ctr"/>
+          <a:lstStyle/>
+          <a:p>
+            <a:pPr algn="ctr"/>
+          </a:p>
+        </p:txBody>
+      </p:sp>
+      <p:sp>
+        <p:nvSpPr>
+          <p:cNvPr id="5" name="Freeform 4"/>
+          <p:cNvSpPr/>
+          <p:nvPr/>
+        </p:nvSpPr>
+        <p:spPr>
+          <a:xfrm>
+            <a:off x="10063987" y="222869"/>
+            <a:ext cx="243028" cy="86807"/>
+          </a:xfrm>
+          <a:custGeom>
+            <a:avLst/>
+            <a:gdLst/>
+            <a:ahLst/>
+            <a:cxnLst/>
+            <a:rect l="l" t="t" r="r" b="b"/>
+            <a:pathLst>
+              <a:path w="243028" h="86807">
+                <a:moveTo>
+                  <a:pt x="55460" y="0"/>
+                </a:moveTo>
+                <a:lnTo>
+                  <a:pt x="187567" y="0"/>
+                </a:lnTo>
+                <a:lnTo>
+                  <a:pt x="243028" y="86807"/>
+                </a:lnTo>
+                <a:lnTo>
+                  <a:pt x="0" y="86807"/>
+                </a:lnTo>
+                <a:close/>
+              </a:path>
+            </a:pathLst>
+          </a:custGeom>
+          <a:solidFill>
+            <a:srgbClr val="1E7A55"/>
+          </a:solidFill>
+          <a:ln>
+            <a:noFill/>
+          </a:ln>
+          <a:effectLst/>
+        </p:spPr>
+        <p:txBody>
+          <a:bodyPr rtlCol="0" anchor="ctr"/>
+          <a:lstStyle/>
+          <a:p>
+            <a:pPr algn="ctr"/>
+          </a:p>
+        </p:txBody>
+      </p:sp>
+      <p:sp>
+        <p:nvSpPr>
+          <p:cNvPr id="6" name="Freeform 5"/>
+          <p:cNvSpPr/>
+          <p:nvPr/>
+        </p:nvSpPr>
+        <p:spPr>
+          <a:xfrm>
+            <a:off x="10054640" y="309676"/>
+            <a:ext cx="261722" cy="14631"/>
+          </a:xfrm>
+          <a:custGeom>
+            <a:avLst/>
+            <a:gdLst/>
+            <a:ahLst/>
+            <a:cxnLst/>
+            <a:rect l="l" t="t" r="r" b="b"/>
+            <a:pathLst>
+              <a:path w="261722" h="14631">
+                <a:moveTo>
+                  <a:pt x="9347" y="0"/>
+                </a:moveTo>
+                <a:lnTo>
+                  <a:pt x="252375" y="0"/>
+                </a:lnTo>
+                <a:lnTo>
+                  <a:pt x="261722" y="14631"/>
+                </a:lnTo>
+                <a:lnTo>
+                  <a:pt x="0" y="14631"/>
+                </a:lnTo>
+                <a:close/>
+              </a:path>
+            </a:pathLst>
+          </a:custGeom>
+          <a:solidFill>
+            <a:srgbClr val="D99A00"/>
+          </a:solidFill>
+          <a:ln>
+            <a:noFill/>
+          </a:ln>
+          <a:effectLst/>
+        </p:spPr>
+        <p:txBody>
+          <a:bodyPr rtlCol="0" anchor="ctr"/>
+          <a:lstStyle/>
+          <a:p>
+            <a:pPr algn="ctr"/>
+          </a:p>
+        </p:txBody>
+      </p:sp>
+      <p:sp>
+        <p:nvSpPr>
+          <p:cNvPr id="7" name="Freeform 6"/>
+          <p:cNvSpPr/>
+          <p:nvPr/>
+        </p:nvSpPr>
+        <p:spPr>
+          <a:xfrm>
+            <a:off x="10004788" y="324307"/>
+            <a:ext cx="361425" cy="78029"/>
+          </a:xfrm>
+          <a:custGeom>
+            <a:avLst/>
+            <a:gdLst/>
+            <a:ahLst/>
+            <a:cxnLst/>
+            <a:rect l="l" t="t" r="r" b="b"/>
+            <a:pathLst>
+              <a:path w="361425" h="78029">
+                <a:moveTo>
+                  <a:pt x="49852" y="0"/>
+                </a:moveTo>
+                <a:lnTo>
+                  <a:pt x="311574" y="0"/>
+                </a:lnTo>
+                <a:lnTo>
+                  <a:pt x="361425" y="78029"/>
+                </a:lnTo>
+                <a:lnTo>
+                  <a:pt x="0" y="78029"/>
+                </a:lnTo>
+                <a:close/>
+              </a:path>
+            </a:pathLst>
+          </a:custGeom>
+          <a:solidFill>
+            <a:srgbClr val="C2410C"/>
+          </a:solidFill>
+          <a:ln>
+            <a:noFill/>
+          </a:ln>
+          <a:effectLst/>
+        </p:spPr>
+        <p:txBody>
+          <a:bodyPr rtlCol="0" anchor="ctr"/>
+          <a:lstStyle/>
+          <a:p>
+            <a:pPr algn="ctr"/>
+          </a:p>
+        </p:txBody>
+      </p:sp>
+      <p:sp>
+        <p:nvSpPr>
+          <p:cNvPr id="8" name="Freeform 7"/>
+          <p:cNvSpPr/>
+          <p:nvPr/>
+        </p:nvSpPr>
+        <p:spPr>
+          <a:xfrm>
+            <a:off x="9961168" y="402336"/>
+            <a:ext cx="448666" cy="68275"/>
+          </a:xfrm>
+          <a:custGeom>
+            <a:avLst/>
+            <a:gdLst/>
+            <a:ahLst/>
+            <a:cxnLst/>
+            <a:rect l="l" t="t" r="r" b="b"/>
+            <a:pathLst>
+              <a:path w="448666" h="68275">
+                <a:moveTo>
+                  <a:pt x="43620" y="0"/>
+                </a:moveTo>
+                <a:lnTo>
+                  <a:pt x="405045" y="0"/>
+                </a:lnTo>
+                <a:lnTo>
+                  <a:pt x="448666" y="68275"/>
+                </a:lnTo>
+                <a:lnTo>
+                  <a:pt x="0" y="68275"/>
+                </a:lnTo>
+                <a:close/>
+              </a:path>
+            </a:pathLst>
+          </a:custGeom>
+          <a:solidFill>
+            <a:srgbClr val="CC0000"/>
+          </a:solidFill>
+          <a:ln>
+            <a:noFill/>
+          </a:ln>
+          <a:effectLst/>
+        </p:spPr>
+        <p:txBody>
+          <a:bodyPr rtlCol="0" anchor="ctr"/>
+          <a:lstStyle/>
+          <a:p>
+            <a:pPr algn="ctr"/>
+          </a:p>
+        </p:txBody>
+      </p:sp>
+      <p:sp>
+        <p:nvSpPr>
+          <p:cNvPr id="9" name="Freeform 8"/>
+          <p:cNvSpPr/>
+          <p:nvPr/>
+        </p:nvSpPr>
+        <p:spPr>
+          <a:xfrm>
+            <a:off x="9961168" y="119481"/>
+            <a:ext cx="448666" cy="351130"/>
+          </a:xfrm>
+          <a:custGeom>
+            <a:avLst/>
+            <a:gdLst/>
+            <a:ahLst/>
+            <a:cxnLst/>
+            <a:rect l="l" t="t" r="r" b="b"/>
+            <a:pathLst>
+              <a:path w="448666" h="351130">
+                <a:moveTo>
+                  <a:pt x="224333" y="0"/>
+                </a:moveTo>
+                <a:lnTo>
+                  <a:pt x="448666" y="351130"/>
+                </a:lnTo>
+                <a:lnTo>
+                  <a:pt x="0" y="351130"/>
+                </a:lnTo>
+                <a:close/>
+              </a:path>
+            </a:pathLst>
+          </a:custGeom>
+          <a:noFill/>
+          <a:ln w="6350">
+            <a:solidFill>
+              <a:srgbClr val="CFC2BE"/>
+            </a:solidFill>
+          </a:ln>
+          <a:effectLst/>
+        </p:spPr>
+        <p:txBody>
+          <a:bodyPr rtlCol="0" anchor="ctr"/>
+          <a:lstStyle/>
+          <a:p>
+            <a:pPr algn="ctr"/>
+          </a:p>
+        </p:txBody>
+      </p:sp>
+      <p:sp>
+        <p:nvSpPr>
+          <p:cNvPr id="10" name="TextBox 9"/>
+          <p:cNvSpPr txBox="1"/>
+          <p:nvPr/>
+        </p:nvSpPr>
+        <p:spPr>
+          <a:xfrm>
+            <a:off x="10478109" y="117530"/>
+            <a:ext cx="936345" cy="351129"/>
+          </a:xfrm>
+          <a:prstGeom prst="rect">
+            <a:avLst/>
+          </a:prstGeom>
+          <a:noFill/>
+        </p:spPr>
+        <p:txBody>
+          <a:bodyPr wrap="none" lIns="0" rIns="0" tIns="0" bIns="0">
+            <a:spAutoFit/>
+          </a:bodyPr>
+          <a:lstStyle/>
+          <a:p>
+            <a:pPr>
+              <a:lnSpc>
+                <a:spcPts val="691"/>
+              </a:lnSpc>
+              <a:spcBef>
+                <a:spcPts val="0"/>
+              </a:spcBef>
+              <a:spcAft>
+                <a:spcPts val="0"/>
+              </a:spcAft>
+            </a:pPr>
+            <a:r>
+              <a:rPr sz="700" b="1">
+                <a:solidFill>
+                  <a:srgbClr val="1B1211"/>
+                </a:solidFill>
+                <a:latin typeface="Red Hat Mono"/>
+              </a:rPr>
+              <a:t>JUDGEMENT</a:t>
+            </a:r>
+          </a:p>
+          <a:p>
+            <a:pPr>
+              <a:lnSpc>
+                <a:spcPts val="691"/>
+              </a:lnSpc>
+              <a:spcBef>
+                <a:spcPts val="0"/>
+              </a:spcBef>
+              <a:spcAft>
+                <a:spcPts val="0"/>
+              </a:spcAft>
+            </a:pPr>
+            <a:r>
+              <a:rPr sz="700" b="1">
+                <a:solidFill>
+                  <a:srgbClr val="1B1211"/>
+                </a:solidFill>
+                <a:latin typeface="Red Hat Mono"/>
+              </a:rPr>
+              <a:t>KNOWLEDGE</a:t>
+            </a:r>
+          </a:p>
+          <a:p>
+            <a:pPr>
+              <a:lnSpc>
+                <a:spcPts val="691"/>
+              </a:lnSpc>
+              <a:spcBef>
+                <a:spcPts val="0"/>
+              </a:spcBef>
+              <a:spcAft>
+                <a:spcPts val="0"/>
+              </a:spcAft>
+            </a:pPr>
+            <a:r>
+              <a:rPr sz="700" b="1">
+                <a:solidFill>
+                  <a:srgbClr val="1B1211"/>
+                </a:solidFill>
+                <a:latin typeface="Red Hat Mono"/>
+              </a:rPr>
+              <a:t>INFORMATION</a:t>
+            </a:r>
+          </a:p>
+          <a:p>
+            <a:pPr>
+              <a:lnSpc>
+                <a:spcPts val="691"/>
+              </a:lnSpc>
+              <a:spcBef>
+                <a:spcPts val="0"/>
+              </a:spcBef>
+              <a:spcAft>
+                <a:spcPts val="0"/>
+              </a:spcAft>
+            </a:pPr>
+            <a:r>
+              <a:rPr sz="700" b="1">
+                <a:solidFill>
+                  <a:srgbClr val="1B1211"/>
+                </a:solidFill>
+                <a:latin typeface="Red Hat Mono"/>
+              </a:rPr>
+              <a:t>DATA</a:t>
+            </a:r>
+          </a:p>
+        </p:txBody>
+      </p:sp>
+      <p:sp>
+        <p:nvSpPr>
+          <p:cNvPr id="11" name="TextBox 10"/>
           <p:cNvSpPr txBox="1"/>
           <p:nvPr/>
         </p:nvSpPr>
@@ -4240,7 +4702,7 @@
       </p:sp>
       <p:sp>
         <p:nvSpPr>
-          <p:cNvPr id="4" name="TextBox 3"/>
+          <p:cNvPr id="12" name="TextBox 11"/>
           <p:cNvSpPr txBox="1"/>
           <p:nvPr/>
         </p:nvSpPr>
@@ -4279,7 +4741,7 @@
       </p:sp>
       <p:sp>
         <p:nvSpPr>
-          <p:cNvPr id="5" name="TextBox 4"/>
+          <p:cNvPr id="13" name="TextBox 12"/>
           <p:cNvSpPr txBox="1"/>
           <p:nvPr/>
         </p:nvSpPr>
@@ -4318,7 +4780,7 @@
       </p:sp>
       <p:sp>
         <p:nvSpPr>
-          <p:cNvPr id="6" name="TextBox 5"/>
+          <p:cNvPr id="14" name="TextBox 13"/>
           <p:cNvSpPr txBox="1"/>
           <p:nvPr/>
         </p:nvSpPr>
@@ -4427,7 +4889,469 @@
       </p:sp>
       <p:sp>
         <p:nvSpPr>
-          <p:cNvPr id="3" name="TextBox 2"/>
+          <p:cNvPr id="3" name="Freeform 2"/>
+          <p:cNvSpPr/>
+          <p:nvPr/>
+        </p:nvSpPr>
+        <p:spPr>
+          <a:xfrm>
+            <a:off x="10129418" y="119481"/>
+            <a:ext cx="112166" cy="87783"/>
+          </a:xfrm>
+          <a:custGeom>
+            <a:avLst/>
+            <a:gdLst/>
+            <a:ahLst/>
+            <a:cxnLst/>
+            <a:rect l="l" t="t" r="r" b="b"/>
+            <a:pathLst>
+              <a:path w="112166" h="87783">
+                <a:moveTo>
+                  <a:pt x="56083" y="0"/>
+                </a:moveTo>
+                <a:lnTo>
+                  <a:pt x="112166" y="87783"/>
+                </a:lnTo>
+                <a:lnTo>
+                  <a:pt x="0" y="87783"/>
+                </a:lnTo>
+                <a:close/>
+              </a:path>
+            </a:pathLst>
+          </a:custGeom>
+          <a:solidFill>
+            <a:srgbClr val="5B2E91"/>
+          </a:solidFill>
+          <a:ln>
+            <a:noFill/>
+          </a:ln>
+          <a:effectLst/>
+        </p:spPr>
+        <p:txBody>
+          <a:bodyPr rtlCol="0" anchor="ctr"/>
+          <a:lstStyle/>
+          <a:p>
+            <a:pPr algn="ctr"/>
+          </a:p>
+        </p:txBody>
+      </p:sp>
+      <p:sp>
+        <p:nvSpPr>
+          <p:cNvPr id="4" name="Freeform 3"/>
+          <p:cNvSpPr/>
+          <p:nvPr/>
+        </p:nvSpPr>
+        <p:spPr>
+          <a:xfrm>
+            <a:off x="10119447" y="207264"/>
+            <a:ext cx="132107" cy="15605"/>
+          </a:xfrm>
+          <a:custGeom>
+            <a:avLst/>
+            <a:gdLst/>
+            <a:ahLst/>
+            <a:cxnLst/>
+            <a:rect l="l" t="t" r="r" b="b"/>
+            <a:pathLst>
+              <a:path w="132107" h="15605">
+                <a:moveTo>
+                  <a:pt x="9971" y="0"/>
+                </a:moveTo>
+                <a:lnTo>
+                  <a:pt x="122137" y="0"/>
+                </a:lnTo>
+                <a:lnTo>
+                  <a:pt x="132107" y="15605"/>
+                </a:lnTo>
+                <a:lnTo>
+                  <a:pt x="0" y="15605"/>
+                </a:lnTo>
+                <a:close/>
+              </a:path>
+            </a:pathLst>
+          </a:custGeom>
+          <a:solidFill>
+            <a:srgbClr val="D2DCF7"/>
+          </a:solidFill>
+          <a:ln>
+            <a:noFill/>
+          </a:ln>
+          <a:effectLst/>
+        </p:spPr>
+        <p:txBody>
+          <a:bodyPr rtlCol="0" anchor="ctr"/>
+          <a:lstStyle/>
+          <a:p>
+            <a:pPr algn="ctr"/>
+          </a:p>
+        </p:txBody>
+      </p:sp>
+      <p:sp>
+        <p:nvSpPr>
+          <p:cNvPr id="5" name="Freeform 4"/>
+          <p:cNvSpPr/>
+          <p:nvPr/>
+        </p:nvSpPr>
+        <p:spPr>
+          <a:xfrm>
+            <a:off x="10063987" y="222869"/>
+            <a:ext cx="243028" cy="86807"/>
+          </a:xfrm>
+          <a:custGeom>
+            <a:avLst/>
+            <a:gdLst/>
+            <a:ahLst/>
+            <a:cxnLst/>
+            <a:rect l="l" t="t" r="r" b="b"/>
+            <a:pathLst>
+              <a:path w="243028" h="86807">
+                <a:moveTo>
+                  <a:pt x="55460" y="0"/>
+                </a:moveTo>
+                <a:lnTo>
+                  <a:pt x="187567" y="0"/>
+                </a:lnTo>
+                <a:lnTo>
+                  <a:pt x="243028" y="86807"/>
+                </a:lnTo>
+                <a:lnTo>
+                  <a:pt x="0" y="86807"/>
+                </a:lnTo>
+                <a:close/>
+              </a:path>
+            </a:pathLst>
+          </a:custGeom>
+          <a:solidFill>
+            <a:srgbClr val="D2E4DD"/>
+          </a:solidFill>
+          <a:ln>
+            <a:noFill/>
+          </a:ln>
+          <a:effectLst/>
+        </p:spPr>
+        <p:txBody>
+          <a:bodyPr rtlCol="0" anchor="ctr"/>
+          <a:lstStyle/>
+          <a:p>
+            <a:pPr algn="ctr"/>
+          </a:p>
+        </p:txBody>
+      </p:sp>
+      <p:sp>
+        <p:nvSpPr>
+          <p:cNvPr id="6" name="Freeform 5"/>
+          <p:cNvSpPr/>
+          <p:nvPr/>
+        </p:nvSpPr>
+        <p:spPr>
+          <a:xfrm>
+            <a:off x="10054640" y="309676"/>
+            <a:ext cx="261722" cy="14631"/>
+          </a:xfrm>
+          <a:custGeom>
+            <a:avLst/>
+            <a:gdLst/>
+            <a:ahLst/>
+            <a:cxnLst/>
+            <a:rect l="l" t="t" r="r" b="b"/>
+            <a:pathLst>
+              <a:path w="261722" h="14631">
+                <a:moveTo>
+                  <a:pt x="9347" y="0"/>
+                </a:moveTo>
+                <a:lnTo>
+                  <a:pt x="252375" y="0"/>
+                </a:lnTo>
+                <a:lnTo>
+                  <a:pt x="261722" y="14631"/>
+                </a:lnTo>
+                <a:lnTo>
+                  <a:pt x="0" y="14631"/>
+                </a:lnTo>
+                <a:close/>
+              </a:path>
+            </a:pathLst>
+          </a:custGeom>
+          <a:solidFill>
+            <a:srgbClr val="F7EBCC"/>
+          </a:solidFill>
+          <a:ln>
+            <a:noFill/>
+          </a:ln>
+          <a:effectLst/>
+        </p:spPr>
+        <p:txBody>
+          <a:bodyPr rtlCol="0" anchor="ctr"/>
+          <a:lstStyle/>
+          <a:p>
+            <a:pPr algn="ctr"/>
+          </a:p>
+        </p:txBody>
+      </p:sp>
+      <p:sp>
+        <p:nvSpPr>
+          <p:cNvPr id="7" name="Freeform 6"/>
+          <p:cNvSpPr/>
+          <p:nvPr/>
+        </p:nvSpPr>
+        <p:spPr>
+          <a:xfrm>
+            <a:off x="10004788" y="324307"/>
+            <a:ext cx="361425" cy="78029"/>
+          </a:xfrm>
+          <a:custGeom>
+            <a:avLst/>
+            <a:gdLst/>
+            <a:ahLst/>
+            <a:cxnLst/>
+            <a:rect l="l" t="t" r="r" b="b"/>
+            <a:pathLst>
+              <a:path w="361425" h="78029">
+                <a:moveTo>
+                  <a:pt x="49852" y="0"/>
+                </a:moveTo>
+                <a:lnTo>
+                  <a:pt x="311574" y="0"/>
+                </a:lnTo>
+                <a:lnTo>
+                  <a:pt x="361425" y="78029"/>
+                </a:lnTo>
+                <a:lnTo>
+                  <a:pt x="0" y="78029"/>
+                </a:lnTo>
+                <a:close/>
+              </a:path>
+            </a:pathLst>
+          </a:custGeom>
+          <a:solidFill>
+            <a:srgbClr val="C2410C"/>
+          </a:solidFill>
+          <a:ln>
+            <a:noFill/>
+          </a:ln>
+          <a:effectLst/>
+        </p:spPr>
+        <p:txBody>
+          <a:bodyPr rtlCol="0" anchor="ctr"/>
+          <a:lstStyle/>
+          <a:p>
+            <a:pPr algn="ctr"/>
+          </a:p>
+        </p:txBody>
+      </p:sp>
+      <p:sp>
+        <p:nvSpPr>
+          <p:cNvPr id="8" name="Freeform 7"/>
+          <p:cNvSpPr/>
+          <p:nvPr/>
+        </p:nvSpPr>
+        <p:spPr>
+          <a:xfrm>
+            <a:off x="9961168" y="402336"/>
+            <a:ext cx="448666" cy="68275"/>
+          </a:xfrm>
+          <a:custGeom>
+            <a:avLst/>
+            <a:gdLst/>
+            <a:ahLst/>
+            <a:cxnLst/>
+            <a:rect l="l" t="t" r="r" b="b"/>
+            <a:pathLst>
+              <a:path w="448666" h="68275">
+                <a:moveTo>
+                  <a:pt x="43620" y="0"/>
+                </a:moveTo>
+                <a:lnTo>
+                  <a:pt x="405045" y="0"/>
+                </a:lnTo>
+                <a:lnTo>
+                  <a:pt x="448666" y="68275"/>
+                </a:lnTo>
+                <a:lnTo>
+                  <a:pt x="0" y="68275"/>
+                </a:lnTo>
+                <a:close/>
+              </a:path>
+            </a:pathLst>
+          </a:custGeom>
+          <a:solidFill>
+            <a:srgbClr val="F5CCCC"/>
+          </a:solidFill>
+          <a:ln>
+            <a:noFill/>
+          </a:ln>
+          <a:effectLst/>
+        </p:spPr>
+        <p:txBody>
+          <a:bodyPr rtlCol="0" anchor="ctr"/>
+          <a:lstStyle/>
+          <a:p>
+            <a:pPr algn="ctr"/>
+          </a:p>
+        </p:txBody>
+      </p:sp>
+      <p:sp>
+        <p:nvSpPr>
+          <p:cNvPr id="9" name="Freeform 8"/>
+          <p:cNvSpPr/>
+          <p:nvPr/>
+        </p:nvSpPr>
+        <p:spPr>
+          <a:xfrm>
+            <a:off x="9961168" y="119481"/>
+            <a:ext cx="448666" cy="351130"/>
+          </a:xfrm>
+          <a:custGeom>
+            <a:avLst/>
+            <a:gdLst/>
+            <a:ahLst/>
+            <a:cxnLst/>
+            <a:rect l="l" t="t" r="r" b="b"/>
+            <a:pathLst>
+              <a:path w="448666" h="351130">
+                <a:moveTo>
+                  <a:pt x="224333" y="0"/>
+                </a:moveTo>
+                <a:lnTo>
+                  <a:pt x="448666" y="351130"/>
+                </a:lnTo>
+                <a:lnTo>
+                  <a:pt x="0" y="351130"/>
+                </a:lnTo>
+                <a:close/>
+              </a:path>
+            </a:pathLst>
+          </a:custGeom>
+          <a:noFill/>
+          <a:ln w="6350">
+            <a:solidFill>
+              <a:srgbClr val="CFC2BE"/>
+            </a:solidFill>
+          </a:ln>
+          <a:effectLst/>
+        </p:spPr>
+        <p:txBody>
+          <a:bodyPr rtlCol="0" anchor="ctr"/>
+          <a:lstStyle/>
+          <a:p>
+            <a:pPr algn="ctr"/>
+          </a:p>
+        </p:txBody>
+      </p:sp>
+      <p:sp>
+        <p:nvSpPr>
+          <p:cNvPr id="10" name="TextBox 9"/>
+          <p:cNvSpPr txBox="1"/>
+          <p:nvPr/>
+        </p:nvSpPr>
+        <p:spPr>
+          <a:xfrm>
+            <a:off x="10478109" y="117530"/>
+            <a:ext cx="936345" cy="351129"/>
+          </a:xfrm>
+          <a:prstGeom prst="rect">
+            <a:avLst/>
+          </a:prstGeom>
+          <a:noFill/>
+        </p:spPr>
+        <p:txBody>
+          <a:bodyPr wrap="none" lIns="0" rIns="0" tIns="0" bIns="0">
+            <a:spAutoFit/>
+          </a:bodyPr>
+          <a:lstStyle/>
+          <a:p>
+            <a:pPr>
+              <a:lnSpc>
+                <a:spcPts val="691"/>
+              </a:lnSpc>
+              <a:spcBef>
+                <a:spcPts val="0"/>
+              </a:spcBef>
+              <a:spcAft>
+                <a:spcPts val="0"/>
+              </a:spcAft>
+            </a:pPr>
+            <a:r>
+              <a:rPr sz="700" b="1">
+                <a:solidFill>
+                  <a:srgbClr val="1B1211"/>
+                </a:solidFill>
+                <a:latin typeface="Red Hat Mono"/>
+              </a:rPr>
+              <a:t>JUDGEMENT</a:t>
+            </a:r>
+          </a:p>
+          <a:p>
+            <a:pPr>
+              <a:lnSpc>
+                <a:spcPts val="691"/>
+              </a:lnSpc>
+              <a:spcBef>
+                <a:spcPts val="0"/>
+              </a:spcBef>
+              <a:spcAft>
+                <a:spcPts val="0"/>
+              </a:spcAft>
+            </a:pPr>
+            <a:r>
+              <a:rPr sz="700" b="0">
+                <a:solidFill>
+                  <a:srgbClr val="7E6A64"/>
+                </a:solidFill>
+                <a:latin typeface="Red Hat Mono"/>
+              </a:rPr>
+              <a:t>KNOWLEDGE</a:t>
+            </a:r>
+          </a:p>
+          <a:p>
+            <a:pPr>
+              <a:lnSpc>
+                <a:spcPts val="691"/>
+              </a:lnSpc>
+              <a:spcBef>
+                <a:spcPts val="0"/>
+              </a:spcBef>
+              <a:spcAft>
+                <a:spcPts val="0"/>
+              </a:spcAft>
+            </a:pPr>
+            <a:r>
+              <a:rPr sz="700" b="1">
+                <a:solidFill>
+                  <a:srgbClr val="1B1211"/>
+                </a:solidFill>
+                <a:latin typeface="Red Hat Mono"/>
+              </a:rPr>
+              <a:t>INFORMATION</a:t>
+            </a:r>
+          </a:p>
+          <a:p>
+            <a:pPr>
+              <a:lnSpc>
+                <a:spcPts val="691"/>
+              </a:lnSpc>
+              <a:spcBef>
+                <a:spcPts val="0"/>
+              </a:spcBef>
+              <a:spcAft>
+                <a:spcPts val="0"/>
+              </a:spcAft>
+            </a:pPr>
+            <a:r>
+              <a:rPr sz="700" b="0">
+                <a:solidFill>
+                  <a:srgbClr val="7E6A64"/>
+                </a:solidFill>
+                <a:latin typeface="Red Hat Mono"/>
+              </a:rPr>
+              <a:t>DATA</a:t>
+            </a:r>
+          </a:p>
+        </p:txBody>
+      </p:sp>
+      <p:sp>
+        <p:nvSpPr>
+          <p:cNvPr id="11" name="TextBox 10"/>
           <p:cNvSpPr txBox="1"/>
           <p:nvPr/>
         </p:nvSpPr>
@@ -4466,7 +5390,7 @@
       </p:sp>
       <p:sp>
         <p:nvSpPr>
-          <p:cNvPr id="4" name="TextBox 3"/>
+          <p:cNvPr id="12" name="TextBox 11"/>
           <p:cNvSpPr txBox="1"/>
           <p:nvPr/>
         </p:nvSpPr>
@@ -4505,7 +5429,7 @@
       </p:sp>
       <p:graphicFrame>
         <p:nvGraphicFramePr>
-          <p:cNvPr id="5" name="Table 4"/>
+          <p:cNvPr id="13" name="Table 12"/>
           <p:cNvGraphicFramePr>
             <a:graphicFrameLocks noGrp="1"/>
           </p:cNvGraphicFramePr>
@@ -4513,7 +5437,7 @@
         </p:nvGraphicFramePr>
         <p:xfrm>
           <a:off x="777240" y="2103120"/>
-          <a:ext cx="10607040" cy="2633472"/>
+          <a:ext cx="10607040" cy="3621024"/>
         </p:xfrm>
         <a:graphic>
           <a:graphicData uri="http://schemas.openxmlformats.org/drawingml/2006/table">
@@ -4522,9 +5446,10 @@
                 <a:tableStyleId>{5C22544A-7EE6-4342-B048-85BDC9FD1C3A}</a:tableStyleId>
               </a:tblPr>
               <a:tblGrid>
-                <a:gridCol w="3291840"/>
-                <a:gridCol w="5394960"/>
-                <a:gridCol w="1920240"/>
+                <a:gridCol w="2651760"/>
+                <a:gridCol w="4480560"/>
+                <a:gridCol w="1783080"/>
+                <a:gridCol w="1691640"/>
               </a:tblGrid>
               <a:tr h="329184">
                 <a:tc>
@@ -4543,7 +5468,7 @@
                       </a:r>
                     </a:p>
                   </a:txBody>
-                  <a:tcPr marL="109728" marR="109728" marT="45720" marB="45720">
+                  <a:tcPr marL="109728" marR="109728" marT="27432" marB="27432">
                     <a:solidFill>
                       <a:srgbClr val="F4EFED"/>
                     </a:solidFill>
@@ -4565,7 +5490,7 @@
                       </a:r>
                     </a:p>
                   </a:txBody>
-                  <a:tcPr marL="109728" marR="109728" marT="45720" marB="45720">
+                  <a:tcPr marL="109728" marR="109728" marT="27432" marB="27432">
                     <a:solidFill>
                       <a:srgbClr val="F4EFED"/>
                     </a:solidFill>
@@ -4583,11 +5508,33 @@
                           </a:solidFill>
                           <a:latin typeface="Red Hat Mono"/>
                         </a:rPr>
-                        <a:t>Where</a:t>
+                        <a:t>Where it lives</a:t>
                       </a:r>
                     </a:p>
                   </a:txBody>
-                  <a:tcPr marL="109728" marR="109728" marT="45720" marB="45720">
+                  <a:tcPr marL="109728" marR="109728" marT="27432" marB="27432">
+                    <a:solidFill>
+                      <a:srgbClr val="F4EFED"/>
+                    </a:solidFill>
+                  </a:tcPr>
+                </a:tc>
+                <a:tc>
+                  <a:txBody>
+                    <a:bodyPr wrap="square"/>
+                    <a:lstStyle/>
+                    <a:p>
+                      <a:r>
+                        <a:rPr sz="1050" b="1">
+                          <a:solidFill>
+                            <a:srgbClr val="7E6A64"/>
+                          </a:solidFill>
+                          <a:latin typeface="Red Hat Mono"/>
+                        </a:rPr>
+                        <a:t>Proven in</a:t>
+                      </a:r>
+                    </a:p>
+                  </a:txBody>
+                  <a:tcPr marL="109728" marR="109728" marT="27432" marB="27432">
                     <a:solidFill>
                       <a:srgbClr val="F4EFED"/>
                     </a:solidFill>
@@ -4601,17 +5548,17 @@
                     <a:lstStyle/>
                     <a:p>
                       <a:r>
-                        <a:rPr sz="1200" b="0">
+                        <a:rPr sz="900" b="0">
                           <a:solidFill>
                             <a:srgbClr val="1B1211"/>
                           </a:solidFill>
                           <a:latin typeface="Red Hat Text"/>
                         </a:rPr>
-                        <a:t>Where does our data go?</a:t>
+                        <a:t>Where does our data go when someone prompts the model?</a:t>
                       </a:r>
                     </a:p>
                   </a:txBody>
-                  <a:tcPr marL="109728" marR="109728" marT="45720" marB="45720">
+                  <a:tcPr marL="109728" marR="109728" marT="27432" marB="27432">
                     <a:solidFill>
                       <a:srgbClr val="FBF9F8"/>
                     </a:solidFill>
@@ -4623,17 +5570,17 @@
                     <a:lstStyle/>
                     <a:p>
                       <a:r>
-                        <a:rPr sz="1200" b="0">
+                        <a:rPr sz="900" b="0">
                           <a:solidFill>
                             <a:srgbClr val="1B1211"/>
                           </a:solidFill>
                           <a:latin typeface="Red Hat Text"/>
                         </a:rPr>
-                        <a:t>Nowhere. Inference runs on your cluster, your accelerators.</a:t>
+                        <a:t>Nowhere. Inference runs on your cluster, in your enclave, on your accelerators.</a:t>
                       </a:r>
                     </a:p>
                   </a:txBody>
-                  <a:tcPr marL="109728" marR="109728" marT="45720" marB="45720">
+                  <a:tcPr marL="109728" marR="109728" marT="27432" marB="27432">
                     <a:solidFill>
                       <a:srgbClr val="FBF9F8"/>
                     </a:solidFill>
@@ -4645,17 +5592,39 @@
                     <a:lstStyle/>
                     <a:p>
                       <a:r>
-                        <a:rPr sz="1200" b="0">
+                        <a:rPr sz="900" b="0">
                           <a:solidFill>
                             <a:srgbClr val="1B1211"/>
                           </a:solidFill>
                           <a:latin typeface="Red Hat Mono"/>
                         </a:rPr>
-                        <a:t>AI Inference</a:t>
+                        <a:t>AI Inference Server · OpenShift AI</a:t>
                       </a:r>
                     </a:p>
                   </a:txBody>
-                  <a:tcPr marL="109728" marR="109728" marT="45720" marB="45720">
+                  <a:tcPr marL="109728" marR="109728" marT="27432" marB="27432">
+                    <a:solidFill>
+                      <a:srgbClr val="FBF9F8"/>
+                    </a:solidFill>
+                  </a:tcPr>
+                </a:tc>
+                <a:tc>
+                  <a:txBody>
+                    <a:bodyPr wrap="square"/>
+                    <a:lstStyle/>
+                    <a:p>
+                      <a:r>
+                        <a:rPr sz="900" b="0">
+                          <a:solidFill>
+                            <a:srgbClr val="1B1211"/>
+                          </a:solidFill>
+                          <a:latin typeface="Red Hat Mono"/>
+                        </a:rPr>
+                        <a:t>Lab 01 · 127.0.0.1, no egress</a:t>
+                      </a:r>
+                    </a:p>
+                  </a:txBody>
+                  <a:tcPr marL="109728" marR="109728" marT="27432" marB="27432">
                     <a:solidFill>
                       <a:srgbClr val="FBF9F8"/>
                     </a:solidFill>
@@ -4669,17 +5638,17 @@
                     <a:lstStyle/>
                     <a:p>
                       <a:r>
-                        <a:rPr sz="1200" b="0">
+                        <a:rPr sz="900" b="0">
                           <a:solidFill>
                             <a:srgbClr val="1B1211"/>
                           </a:solidFill>
                           <a:latin typeface="Red Hat Text"/>
                         </a:rPr>
-                        <a:t>Is this the model we approved?</a:t>
+                        <a:t>Can you prove this model is the one we approved?</a:t>
                       </a:r>
                     </a:p>
                   </a:txBody>
-                  <a:tcPr marL="109728" marR="109728" marT="45720" marB="45720">
+                  <a:tcPr marL="109728" marR="109728" marT="27432" marB="27432">
                     <a:solidFill>
                       <a:srgbClr val="FBF9F8"/>
                     </a:solidFill>
@@ -4691,17 +5660,17 @@
                     <a:lstStyle/>
                     <a:p>
                       <a:r>
-                        <a:rPr sz="1200" b="0">
+                        <a:rPr sz="900" b="0">
                           <a:solidFill>
                             <a:srgbClr val="1B1211"/>
                           </a:solidFill>
                           <a:latin typeface="Red Hat Text"/>
                         </a:rPr>
-                        <a:t>Artifacts signed and verified before admission</a:t>
+                        <a:t>Model artifacts are signed and verified before they are admitted to the cluster.</a:t>
                       </a:r>
                     </a:p>
                   </a:txBody>
-                  <a:tcPr marL="109728" marR="109728" marT="45720" marB="45720">
+                  <a:tcPr marL="109728" marR="109728" marT="27432" marB="27432">
                     <a:solidFill>
                       <a:srgbClr val="FBF9F8"/>
                     </a:solidFill>
@@ -4713,17 +5682,39 @@
                     <a:lstStyle/>
                     <a:p>
                       <a:r>
-                        <a:rPr sz="1200" b="0">
+                        <a:rPr sz="900" b="0">
                           <a:solidFill>
                             <a:srgbClr val="1B1211"/>
                           </a:solidFill>
                           <a:latin typeface="Red Hat Mono"/>
                         </a:rPr>
-                        <a:t>Sigstore</a:t>
+                        <a:t>Sigstore / cosign</a:t>
                       </a:r>
                     </a:p>
                   </a:txBody>
-                  <a:tcPr marL="109728" marR="109728" marT="45720" marB="45720">
+                  <a:tcPr marL="109728" marR="109728" marT="27432" marB="27432">
+                    <a:solidFill>
+                      <a:srgbClr val="FBF9F8"/>
+                    </a:solidFill>
+                  </a:tcPr>
+                </a:tc>
+                <a:tc>
+                  <a:txBody>
+                    <a:bodyPr wrap="square"/>
+                    <a:lstStyle/>
+                    <a:p>
+                      <a:r>
+                        <a:rPr sz="900" b="0">
+                          <a:solidFill>
+                            <a:srgbClr val="1B1211"/>
+                          </a:solidFill>
+                          <a:latin typeface="Red Hat Mono"/>
+                        </a:rPr>
+                        <a:t>Lab 06 · cosign verify</a:t>
+                      </a:r>
+                    </a:p>
+                  </a:txBody>
+                  <a:tcPr marL="109728" marR="109728" marT="27432" marB="27432">
                     <a:solidFill>
                       <a:srgbClr val="FBF9F8"/>
                     </a:solidFill>
@@ -4737,7 +5728,7 @@
                     <a:lstStyle/>
                     <a:p>
                       <a:r>
-                        <a:rPr sz="1200" b="0">
+                        <a:rPr sz="900" b="0">
                           <a:solidFill>
                             <a:srgbClr val="1B1211"/>
                           </a:solidFill>
@@ -4747,7 +5738,7 @@
                       </a:r>
                     </a:p>
                   </a:txBody>
-                  <a:tcPr marL="109728" marR="109728" marT="45720" marB="45720">
+                  <a:tcPr marL="109728" marR="109728" marT="27432" marB="27432">
                     <a:solidFill>
                       <a:srgbClr val="FBF9F8"/>
                     </a:solidFill>
@@ -4759,17 +5750,17 @@
                     <a:lstStyle/>
                     <a:p>
                       <a:r>
-                        <a:rPr sz="1200" b="0">
+                        <a:rPr sz="900" b="0">
                           <a:solidFill>
                             <a:srgbClr val="1B1211"/>
                           </a:solidFill>
                           <a:latin typeface="Red Hat Text"/>
                         </a:rPr>
-                        <a:t>FIPS mode is a supported operating state</a:t>
+                        <a:t>FIPS mode is set once in RHEL CoreOS and inherited up the chain by OpenShift and OpenShift AI; where a component is not inherited, the exception is documented and covered by compensating controls.</a:t>
                       </a:r>
                     </a:p>
                   </a:txBody>
-                  <a:tcPr marL="109728" marR="109728" marT="45720" marB="45720">
+                  <a:tcPr marL="109728" marR="109728" marT="27432" marB="27432">
                     <a:solidFill>
                       <a:srgbClr val="FBF9F8"/>
                     </a:solidFill>
@@ -4781,17 +5772,39 @@
                     <a:lstStyle/>
                     <a:p>
                       <a:r>
-                        <a:rPr sz="1200" b="0">
+                        <a:rPr sz="900" b="0">
                           <a:solidFill>
                             <a:srgbClr val="1B1211"/>
                           </a:solidFill>
                           <a:latin typeface="Red Hat Mono"/>
                         </a:rPr>
-                        <a:t>RHEL</a:t>
+                        <a:t>RHEL FIPS mode</a:t>
                       </a:r>
                     </a:p>
                   </a:txBody>
-                  <a:tcPr marL="109728" marR="109728" marT="45720" marB="45720">
+                  <a:tcPr marL="109728" marR="109728" marT="27432" marB="27432">
+                    <a:solidFill>
+                      <a:srgbClr val="FBF9F8"/>
+                    </a:solidFill>
+                  </a:tcPr>
+                </a:tc>
+                <a:tc>
+                  <a:txBody>
+                    <a:bodyPr wrap="square"/>
+                    <a:lstStyle/>
+                    <a:p>
+                      <a:r>
+                        <a:rPr sz="900" b="0">
+                          <a:solidFill>
+                            <a:srgbClr val="1B1211"/>
+                          </a:solidFill>
+                          <a:latin typeface="Red Hat Mono"/>
+                        </a:rPr>
+                        <a:t>Lab 06 · fips-mode-setup, sestatus</a:t>
+                      </a:r>
+                    </a:p>
+                  </a:txBody>
+                  <a:tcPr marL="109728" marR="109728" marT="27432" marB="27432">
                     <a:solidFill>
                       <a:srgbClr val="FBF9F8"/>
                     </a:solidFill>
@@ -4805,17 +5818,17 @@
                     <a:lstStyle/>
                     <a:p>
                       <a:r>
-                        <a:rPr sz="1200" b="0">
+                        <a:rPr sz="900" b="0">
                           <a:solidFill>
                             <a:srgbClr val="1B1211"/>
                           </a:solidFill>
                           <a:latin typeface="Red Hat Text"/>
                         </a:rPr>
-                        <a:t>Still compliant next quarter?</a:t>
+                        <a:t>Does it work with our smart cards and hardware crypto?</a:t>
                       </a:r>
                     </a:p>
                   </a:txBody>
-                  <a:tcPr marL="109728" marR="109728" marT="45720" marB="45720">
+                  <a:tcPr marL="109728" marR="109728" marT="27432" marB="27432">
                     <a:solidFill>
                       <a:srgbClr val="FBF9F8"/>
                     </a:solidFill>
@@ -4827,17 +5840,17 @@
                     <a:lstStyle/>
                     <a:p>
                       <a:r>
-                        <a:rPr sz="1200" b="0">
+                        <a:rPr sz="900" b="0">
                           <a:solidFill>
                             <a:srgbClr val="1B1211"/>
                           </a:solidFill>
                           <a:latin typeface="Red Hat Text"/>
                         </a:rPr>
-                        <a:t>Scheduled scans, machine-readable results</a:t>
+                        <a:t>Tested with the hardware vendors: TPM, PIV/CAC smart-card authentication and hardware cryptography supported from the operating system up, on mainframes included.</a:t>
                       </a:r>
                     </a:p>
                   </a:txBody>
-                  <a:tcPr marL="109728" marR="109728" marT="45720" marB="45720">
+                  <a:tcPr marL="109728" marR="109728" marT="27432" marB="27432">
                     <a:solidFill>
                       <a:srgbClr val="FBF9F8"/>
                     </a:solidFill>
@@ -4849,17 +5862,39 @@
                     <a:lstStyle/>
                     <a:p>
                       <a:r>
-                        <a:rPr sz="1200" b="0">
+                        <a:rPr sz="900" b="0">
                           <a:solidFill>
                             <a:srgbClr val="1B1211"/>
                           </a:solidFill>
                           <a:latin typeface="Red Hat Mono"/>
                         </a:rPr>
-                        <a:t>Compliance Op.</a:t>
+                        <a:t>RHEL · hardware certification</a:t>
                       </a:r>
                     </a:p>
                   </a:txBody>
-                  <a:tcPr marL="109728" marR="109728" marT="45720" marB="45720">
+                  <a:tcPr marL="109728" marR="109728" marT="27432" marB="27432">
+                    <a:solidFill>
+                      <a:srgbClr val="FBF9F8"/>
+                    </a:solidFill>
+                  </a:tcPr>
+                </a:tc>
+                <a:tc>
+                  <a:txBody>
+                    <a:bodyPr wrap="square"/>
+                    <a:lstStyle/>
+                    <a:p>
+                      <a:r>
+                        <a:rPr sz="900" b="0">
+                          <a:solidFill>
+                            <a:srgbClr val="1B1211"/>
+                          </a:solidFill>
+                          <a:latin typeface="Red Hat Mono"/>
+                        </a:rPr>
+                        <a:t>Slide 09 · base band</a:t>
+                      </a:r>
+                    </a:p>
+                  </a:txBody>
+                  <a:tcPr marL="109728" marR="109728" marT="27432" marB="27432">
                     <a:solidFill>
                       <a:srgbClr val="FBF9F8"/>
                     </a:solidFill>
@@ -4873,17 +5908,17 @@
                     <a:lstStyle/>
                     <a:p>
                       <a:r>
-                        <a:rPr sz="1200" b="0">
+                        <a:rPr sz="900" b="0">
                           <a:solidFill>
                             <a:srgbClr val="1B1211"/>
                           </a:solidFill>
                           <a:latin typeface="Red Hat Text"/>
                         </a:rPr>
-                        <a:t>How do we detect drift?</a:t>
+                        <a:t>Can this land in our FISMA moderate or high boundary?</a:t>
                       </a:r>
                     </a:p>
                   </a:txBody>
-                  <a:tcPr marL="109728" marR="109728" marT="45720" marB="45720">
+                  <a:tcPr marL="109728" marR="109728" marT="27432" marB="27432">
                     <a:solidFill>
                       <a:srgbClr val="FBF9F8"/>
                     </a:solidFill>
@@ -4895,17 +5930,17 @@
                     <a:lstStyle/>
                     <a:p>
                       <a:r>
-                        <a:rPr sz="1200" b="0">
+                        <a:rPr sz="900" b="0">
                           <a:solidFill>
                             <a:srgbClr val="1B1211"/>
                           </a:solidFill>
                           <a:latin typeface="Red Hat Text"/>
                         </a:rPr>
-                        <a:t>Drift and fairness metrics on live traffic</a:t>
+                        <a:t>Platform controls map to the NIST 800-53 moderate and high baselines; your FIPS 199 categorization picks the venue — the platform is the same in all of them.</a:t>
                       </a:r>
                     </a:p>
                   </a:txBody>
-                  <a:tcPr marL="109728" marR="109728" marT="45720" marB="45720">
+                  <a:tcPr marL="109728" marR="109728" marT="27432" marB="27432">
                     <a:solidFill>
                       <a:srgbClr val="FBF9F8"/>
                     </a:solidFill>
@@ -4917,17 +5952,39 @@
                     <a:lstStyle/>
                     <a:p>
                       <a:r>
-                        <a:rPr sz="1200" b="0">
+                        <a:rPr sz="900" b="0">
                           <a:solidFill>
                             <a:srgbClr val="1B1211"/>
                           </a:solidFill>
                           <a:latin typeface="Red Hat Mono"/>
                         </a:rPr>
-                        <a:t>TrustyAI</a:t>
+                        <a:t>RHEL · OpenShift</a:t>
                       </a:r>
                     </a:p>
                   </a:txBody>
-                  <a:tcPr marL="109728" marR="109728" marT="45720" marB="45720">
+                  <a:tcPr marL="109728" marR="109728" marT="27432" marB="27432">
+                    <a:solidFill>
+                      <a:srgbClr val="FBF9F8"/>
+                    </a:solidFill>
+                  </a:tcPr>
+                </a:tc>
+                <a:tc>
+                  <a:txBody>
+                    <a:bodyPr wrap="square"/>
+                    <a:lstStyle/>
+                    <a:p>
+                      <a:r>
+                        <a:rPr sz="900" b="0">
+                          <a:solidFill>
+                            <a:srgbClr val="1B1211"/>
+                          </a:solidFill>
+                          <a:latin typeface="Red Hat Mono"/>
+                        </a:rPr>
+                        <a:t>Slide 11 · one manifest</a:t>
+                      </a:r>
+                    </a:p>
+                  </a:txBody>
+                  <a:tcPr marL="109728" marR="109728" marT="27432" marB="27432">
                     <a:solidFill>
                       <a:srgbClr val="FBF9F8"/>
                     </a:solidFill>
@@ -4941,17 +5998,17 @@
                     <a:lstStyle/>
                     <a:p>
                       <a:r>
-                        <a:rPr sz="1200" b="0">
+                        <a:rPr sz="900" b="0">
                           <a:solidFill>
                             <a:srgbClr val="1B1211"/>
                           </a:solidFill>
                           <a:latin typeface="Red Hat Text"/>
                         </a:rPr>
-                        <a:t>What if we are air-gapped?</a:t>
+                        <a:t>How do we know it stays compliant next quarter?</a:t>
                       </a:r>
                     </a:p>
                   </a:txBody>
-                  <a:tcPr marL="109728" marR="109728" marT="45720" marB="45720">
+                  <a:tcPr marL="109728" marR="109728" marT="27432" marB="27432">
                     <a:solidFill>
                       <a:srgbClr val="FBF9F8"/>
                     </a:solidFill>
@@ -4963,17 +6020,17 @@
                     <a:lstStyle/>
                     <a:p>
                       <a:r>
-                        <a:rPr sz="1200" b="0">
+                        <a:rPr sz="900" b="0">
                           <a:solidFill>
                             <a:srgbClr val="1B1211"/>
                           </a:solidFill>
                           <a:latin typeface="Red Hat Text"/>
                         </a:rPr>
-                        <a:t>Mirror images and models into the enclave</a:t>
+                        <a:t>Scheduled scans against a hardening profile, with machine-readable results.</a:t>
                       </a:r>
                     </a:p>
                   </a:txBody>
-                  <a:tcPr marL="109728" marR="109728" marT="45720" marB="45720">
+                  <a:tcPr marL="109728" marR="109728" marT="27432" marB="27432">
                     <a:solidFill>
                       <a:srgbClr val="FBF9F8"/>
                     </a:solidFill>
@@ -4985,17 +6042,39 @@
                     <a:lstStyle/>
                     <a:p>
                       <a:r>
-                        <a:rPr sz="1200" b="0">
+                        <a:rPr sz="900" b="0">
                           <a:solidFill>
                             <a:srgbClr val="1B1211"/>
                           </a:solidFill>
                           <a:latin typeface="Red Hat Mono"/>
                         </a:rPr>
-                        <a:t>oc-mirror</a:t>
+                        <a:t>Compliance Operator</a:t>
                       </a:r>
                     </a:p>
                   </a:txBody>
-                  <a:tcPr marL="109728" marR="109728" marT="45720" marB="45720">
+                  <a:tcPr marL="109728" marR="109728" marT="27432" marB="27432">
+                    <a:solidFill>
+                      <a:srgbClr val="FBF9F8"/>
+                    </a:solidFill>
+                  </a:tcPr>
+                </a:tc>
+                <a:tc>
+                  <a:txBody>
+                    <a:bodyPr wrap="square"/>
+                    <a:lstStyle/>
+                    <a:p>
+                      <a:r>
+                        <a:rPr sz="900" b="0">
+                          <a:solidFill>
+                            <a:srgbClr val="1B1211"/>
+                          </a:solidFill>
+                          <a:latin typeface="Red Hat Mono"/>
+                        </a:rPr>
+                        <a:t>Lab 06 · compliancescan</a:t>
+                      </a:r>
+                    </a:p>
+                  </a:txBody>
+                  <a:tcPr marL="109728" marR="109728" marT="27432" marB="27432">
                     <a:solidFill>
                       <a:srgbClr val="FBF9F8"/>
                     </a:solidFill>
@@ -5009,17 +6088,17 @@
                     <a:lstStyle/>
                     <a:p>
                       <a:r>
-                        <a:rPr sz="1200" b="0">
+                        <a:rPr sz="900" b="0">
                           <a:solidFill>
                             <a:srgbClr val="1B1211"/>
                           </a:solidFill>
                           <a:latin typeface="Red Hat Text"/>
                         </a:rPr>
-                        <a:t>Who is accountable?</a:t>
+                        <a:t>What about the applications and containers we build on it?</a:t>
                       </a:r>
                     </a:p>
                   </a:txBody>
-                  <a:tcPr marL="109728" marR="109728" marT="45720" marB="45720">
+                  <a:tcPr marL="109728" marR="109728" marT="27432" marB="27432">
                     <a:solidFill>
                       <a:srgbClr val="FBF9F8"/>
                     </a:solidFill>
@@ -5031,17 +6110,17 @@
                     <a:lstStyle/>
                     <a:p>
                       <a:r>
-                        <a:rPr sz="1200" b="0">
+                        <a:rPr sz="900" b="0">
                           <a:solidFill>
                             <a:srgbClr val="1B1211"/>
                           </a:solidFill>
                           <a:latin typeface="Red Hat Text"/>
                         </a:rPr>
-                        <a:t>A named reviewer. The model drafts; it never sends.</a:t>
+                        <a:t>The same tooling spans your own application lifecycle on the platform: signing, scanning and admission policy at build, at deploy and at run time.</a:t>
                       </a:r>
                     </a:p>
                   </a:txBody>
-                  <a:tcPr marL="109728" marR="109728" marT="45720" marB="45720">
+                  <a:tcPr marL="109728" marR="109728" marT="27432" marB="27432">
                     <a:solidFill>
                       <a:srgbClr val="FBF9F8"/>
                     </a:solidFill>
@@ -5053,17 +6132,309 @@
                     <a:lstStyle/>
                     <a:p>
                       <a:r>
-                        <a:rPr sz="1200" b="0">
+                        <a:rPr sz="900" b="0">
                           <a:solidFill>
                             <a:srgbClr val="1B1211"/>
                           </a:solidFill>
                           <a:latin typeface="Red Hat Mono"/>
                         </a:rPr>
-                        <a:t>Workflow</a:t>
+                        <a:t>OpenShift build · registry · admission</a:t>
                       </a:r>
                     </a:p>
                   </a:txBody>
-                  <a:tcPr marL="109728" marR="109728" marT="45720" marB="45720">
+                  <a:tcPr marL="109728" marR="109728" marT="27432" marB="27432">
+                    <a:solidFill>
+                      <a:srgbClr val="FBF9F8"/>
+                    </a:solidFill>
+                  </a:tcPr>
+                </a:tc>
+                <a:tc>
+                  <a:txBody>
+                    <a:bodyPr wrap="square"/>
+                    <a:lstStyle/>
+                    <a:p>
+                      <a:r>
+                        <a:rPr sz="900" b="0">
+                          <a:solidFill>
+                            <a:srgbClr val="1B1211"/>
+                          </a:solidFill>
+                          <a:latin typeface="Red Hat Mono"/>
+                        </a:rPr>
+                        <a:t>Lab 06 · signature gate</a:t>
+                      </a:r>
+                    </a:p>
+                  </a:txBody>
+                  <a:tcPr marL="109728" marR="109728" marT="27432" marB="27432">
+                    <a:solidFill>
+                      <a:srgbClr val="FBF9F8"/>
+                    </a:solidFill>
+                  </a:tcPr>
+                </a:tc>
+              </a:tr>
+              <a:tr h="329184">
+                <a:tc>
+                  <a:txBody>
+                    <a:bodyPr wrap="square"/>
+                    <a:lstStyle/>
+                    <a:p>
+                      <a:r>
+                        <a:rPr sz="900" b="0">
+                          <a:solidFill>
+                            <a:srgbClr val="1B1211"/>
+                          </a:solidFill>
+                          <a:latin typeface="Red Hat Text"/>
+                        </a:rPr>
+                        <a:t>How do we detect the model drifting or skewing?</a:t>
+                      </a:r>
+                    </a:p>
+                  </a:txBody>
+                  <a:tcPr marL="109728" marR="109728" marT="27432" marB="27432">
+                    <a:solidFill>
+                      <a:srgbClr val="FBF9F8"/>
+                    </a:solidFill>
+                  </a:tcPr>
+                </a:tc>
+                <a:tc>
+                  <a:txBody>
+                    <a:bodyPr wrap="square"/>
+                    <a:lstStyle/>
+                    <a:p>
+                      <a:r>
+                        <a:rPr sz="900" b="0">
+                          <a:solidFill>
+                            <a:srgbClr val="1B1211"/>
+                          </a:solidFill>
+                          <a:latin typeface="Red Hat Text"/>
+                        </a:rPr>
+                        <a:t>Continuous drift and fairness metrics on live inference traffic.</a:t>
+                      </a:r>
+                    </a:p>
+                  </a:txBody>
+                  <a:tcPr marL="109728" marR="109728" marT="27432" marB="27432">
+                    <a:solidFill>
+                      <a:srgbClr val="FBF9F8"/>
+                    </a:solidFill>
+                  </a:tcPr>
+                </a:tc>
+                <a:tc>
+                  <a:txBody>
+                    <a:bodyPr wrap="square"/>
+                    <a:lstStyle/>
+                    <a:p>
+                      <a:r>
+                        <a:rPr sz="900" b="0">
+                          <a:solidFill>
+                            <a:srgbClr val="1B1211"/>
+                          </a:solidFill>
+                          <a:latin typeface="Red Hat Mono"/>
+                        </a:rPr>
+                        <a:t>TrustyAI</a:t>
+                      </a:r>
+                    </a:p>
+                  </a:txBody>
+                  <a:tcPr marL="109728" marR="109728" marT="27432" marB="27432">
+                    <a:solidFill>
+                      <a:srgbClr val="FBF9F8"/>
+                    </a:solidFill>
+                  </a:tcPr>
+                </a:tc>
+                <a:tc>
+                  <a:txBody>
+                    <a:bodyPr wrap="square"/>
+                    <a:lstStyle/>
+                    <a:p>
+                      <a:r>
+                        <a:rPr sz="900" b="0">
+                          <a:solidFill>
+                            <a:srgbClr val="1B1211"/>
+                          </a:solidFill>
+                          <a:latin typeface="Red Hat Mono"/>
+                        </a:rPr>
+                        <a:t>Lab 06 · drift, fairness</a:t>
+                      </a:r>
+                    </a:p>
+                  </a:txBody>
+                  <a:tcPr marL="109728" marR="109728" marT="27432" marB="27432">
+                    <a:solidFill>
+                      <a:srgbClr val="FBF9F8"/>
+                    </a:solidFill>
+                  </a:tcPr>
+                </a:tc>
+              </a:tr>
+              <a:tr h="329184">
+                <a:tc>
+                  <a:txBody>
+                    <a:bodyPr wrap="square"/>
+                    <a:lstStyle/>
+                    <a:p>
+                      <a:r>
+                        <a:rPr sz="900" b="0">
+                          <a:solidFill>
+                            <a:srgbClr val="1B1211"/>
+                          </a:solidFill>
+                          <a:latin typeface="Red Hat Text"/>
+                        </a:rPr>
+                        <a:t>What if we have no internet at all?</a:t>
+                      </a:r>
+                    </a:p>
+                  </a:txBody>
+                  <a:tcPr marL="109728" marR="109728" marT="27432" marB="27432">
+                    <a:solidFill>
+                      <a:srgbClr val="FBF9F8"/>
+                    </a:solidFill>
+                  </a:tcPr>
+                </a:tc>
+                <a:tc>
+                  <a:txBody>
+                    <a:bodyPr wrap="square"/>
+                    <a:lstStyle/>
+                    <a:p>
+                      <a:r>
+                        <a:rPr sz="900" b="0">
+                          <a:solidFill>
+                            <a:srgbClr val="1B1211"/>
+                          </a:solidFill>
+                          <a:latin typeface="Red Hat Text"/>
+                        </a:rPr>
+                        <a:t>Mirror images and models into the enclave; the platform is built for disconnected operation.</a:t>
+                      </a:r>
+                    </a:p>
+                  </a:txBody>
+                  <a:tcPr marL="109728" marR="109728" marT="27432" marB="27432">
+                    <a:solidFill>
+                      <a:srgbClr val="FBF9F8"/>
+                    </a:solidFill>
+                  </a:tcPr>
+                </a:tc>
+                <a:tc>
+                  <a:txBody>
+                    <a:bodyPr wrap="square"/>
+                    <a:lstStyle/>
+                    <a:p>
+                      <a:r>
+                        <a:rPr sz="900" b="0">
+                          <a:solidFill>
+                            <a:srgbClr val="1B1211"/>
+                          </a:solidFill>
+                          <a:latin typeface="Red Hat Mono"/>
+                        </a:rPr>
+                        <a:t>oc-mirror · registry</a:t>
+                      </a:r>
+                    </a:p>
+                  </a:txBody>
+                  <a:tcPr marL="109728" marR="109728" marT="27432" marB="27432">
+                    <a:solidFill>
+                      <a:srgbClr val="FBF9F8"/>
+                    </a:solidFill>
+                  </a:tcPr>
+                </a:tc>
+                <a:tc>
+                  <a:txBody>
+                    <a:bodyPr wrap="square"/>
+                    <a:lstStyle/>
+                    <a:p>
+                      <a:r>
+                        <a:rPr sz="900" b="0">
+                          <a:solidFill>
+                            <a:srgbClr val="1B1211"/>
+                          </a:solidFill>
+                          <a:latin typeface="Red Hat Mono"/>
+                        </a:rPr>
+                        <a:t>Slide 11 · enclave</a:t>
+                      </a:r>
+                    </a:p>
+                  </a:txBody>
+                  <a:tcPr marL="109728" marR="109728" marT="27432" marB="27432">
+                    <a:solidFill>
+                      <a:srgbClr val="FBF9F8"/>
+                    </a:solidFill>
+                  </a:tcPr>
+                </a:tc>
+              </a:tr>
+              <a:tr h="329184">
+                <a:tc>
+                  <a:txBody>
+                    <a:bodyPr wrap="square"/>
+                    <a:lstStyle/>
+                    <a:p>
+                      <a:r>
+                        <a:rPr sz="900" b="0">
+                          <a:solidFill>
+                            <a:srgbClr val="1B1211"/>
+                          </a:solidFill>
+                          <a:latin typeface="Red Hat Text"/>
+                        </a:rPr>
+                        <a:t>Who is accountable when it is wrong?</a:t>
+                      </a:r>
+                    </a:p>
+                  </a:txBody>
+                  <a:tcPr marL="109728" marR="109728" marT="27432" marB="27432">
+                    <a:solidFill>
+                      <a:srgbClr val="FBF9F8"/>
+                    </a:solidFill>
+                  </a:tcPr>
+                </a:tc>
+                <a:tc>
+                  <a:txBody>
+                    <a:bodyPr wrap="square"/>
+                    <a:lstStyle/>
+                    <a:p>
+                      <a:r>
+                        <a:rPr sz="900" b="0">
+                          <a:solidFill>
+                            <a:srgbClr val="1B1211"/>
+                          </a:solidFill>
+                          <a:latin typeface="Red Hat Text"/>
+                        </a:rPr>
+                        <a:t>A named reviewer on the signature, and every automated action launched from one governed console under enterprise RBAC, so each action carries the identity that ran it.</a:t>
+                      </a:r>
+                    </a:p>
+                  </a:txBody>
+                  <a:tcPr marL="109728" marR="109728" marT="27432" marB="27432">
+                    <a:solidFill>
+                      <a:srgbClr val="FBF9F8"/>
+                    </a:solidFill>
+                  </a:tcPr>
+                </a:tc>
+                <a:tc>
+                  <a:txBody>
+                    <a:bodyPr wrap="square"/>
+                    <a:lstStyle/>
+                    <a:p>
+                      <a:r>
+                        <a:rPr sz="900" b="0">
+                          <a:solidFill>
+                            <a:srgbClr val="1B1211"/>
+                          </a:solidFill>
+                          <a:latin typeface="Red Hat Mono"/>
+                        </a:rPr>
+                        <a:t>Workflow design · Ansible Automation Platform</a:t>
+                      </a:r>
+                    </a:p>
+                  </a:txBody>
+                  <a:tcPr marL="109728" marR="109728" marT="27432" marB="27432">
+                    <a:solidFill>
+                      <a:srgbClr val="FBF9F8"/>
+                    </a:solidFill>
+                  </a:tcPr>
+                </a:tc>
+                <a:tc>
+                  <a:txBody>
+                    <a:bodyPr wrap="square"/>
+                    <a:lstStyle/>
+                    <a:p>
+                      <a:r>
+                        <a:rPr sz="900" b="0">
+                          <a:solidFill>
+                            <a:srgbClr val="1B1211"/>
+                          </a:solidFill>
+                          <a:latin typeface="Red Hat Mono"/>
+                        </a:rPr>
+                        <a:t>Lab 05 · job history</a:t>
+                      </a:r>
+                    </a:p>
+                  </a:txBody>
+                  <a:tcPr marL="109728" marR="109728" marT="27432" marB="27432">
                     <a:solidFill>
                       <a:srgbClr val="FBF9F8"/>
                     </a:solidFill>
@@ -5146,7 +6517,469 @@
       </p:sp>
       <p:sp>
         <p:nvSpPr>
-          <p:cNvPr id="3" name="TextBox 2"/>
+          <p:cNvPr id="3" name="Freeform 2"/>
+          <p:cNvSpPr/>
+          <p:nvPr/>
+        </p:nvSpPr>
+        <p:spPr>
+          <a:xfrm>
+            <a:off x="10129418" y="119481"/>
+            <a:ext cx="112166" cy="87783"/>
+          </a:xfrm>
+          <a:custGeom>
+            <a:avLst/>
+            <a:gdLst/>
+            <a:ahLst/>
+            <a:cxnLst/>
+            <a:rect l="l" t="t" r="r" b="b"/>
+            <a:pathLst>
+              <a:path w="112166" h="87783">
+                <a:moveTo>
+                  <a:pt x="56083" y="0"/>
+                </a:moveTo>
+                <a:lnTo>
+                  <a:pt x="112166" y="87783"/>
+                </a:lnTo>
+                <a:lnTo>
+                  <a:pt x="0" y="87783"/>
+                </a:lnTo>
+                <a:close/>
+              </a:path>
+            </a:pathLst>
+          </a:custGeom>
+          <a:solidFill>
+            <a:srgbClr val="5B2E91"/>
+          </a:solidFill>
+          <a:ln>
+            <a:noFill/>
+          </a:ln>
+          <a:effectLst/>
+        </p:spPr>
+        <p:txBody>
+          <a:bodyPr rtlCol="0" anchor="ctr"/>
+          <a:lstStyle/>
+          <a:p>
+            <a:pPr algn="ctr"/>
+          </a:p>
+        </p:txBody>
+      </p:sp>
+      <p:sp>
+        <p:nvSpPr>
+          <p:cNvPr id="4" name="Freeform 3"/>
+          <p:cNvSpPr/>
+          <p:nvPr/>
+        </p:nvSpPr>
+        <p:spPr>
+          <a:xfrm>
+            <a:off x="10119447" y="207264"/>
+            <a:ext cx="132107" cy="15605"/>
+          </a:xfrm>
+          <a:custGeom>
+            <a:avLst/>
+            <a:gdLst/>
+            <a:ahLst/>
+            <a:cxnLst/>
+            <a:rect l="l" t="t" r="r" b="b"/>
+            <a:pathLst>
+              <a:path w="132107" h="15605">
+                <a:moveTo>
+                  <a:pt x="9971" y="0"/>
+                </a:moveTo>
+                <a:lnTo>
+                  <a:pt x="122137" y="0"/>
+                </a:lnTo>
+                <a:lnTo>
+                  <a:pt x="132107" y="15605"/>
+                </a:lnTo>
+                <a:lnTo>
+                  <a:pt x="0" y="15605"/>
+                </a:lnTo>
+                <a:close/>
+              </a:path>
+            </a:pathLst>
+          </a:custGeom>
+          <a:solidFill>
+            <a:srgbClr val="1D4ED8"/>
+          </a:solidFill>
+          <a:ln>
+            <a:noFill/>
+          </a:ln>
+          <a:effectLst/>
+        </p:spPr>
+        <p:txBody>
+          <a:bodyPr rtlCol="0" anchor="ctr"/>
+          <a:lstStyle/>
+          <a:p>
+            <a:pPr algn="ctr"/>
+          </a:p>
+        </p:txBody>
+      </p:sp>
+      <p:sp>
+        <p:nvSpPr>
+          <p:cNvPr id="5" name="Freeform 4"/>
+          <p:cNvSpPr/>
+          <p:nvPr/>
+        </p:nvSpPr>
+        <p:spPr>
+          <a:xfrm>
+            <a:off x="10063987" y="222869"/>
+            <a:ext cx="243028" cy="86807"/>
+          </a:xfrm>
+          <a:custGeom>
+            <a:avLst/>
+            <a:gdLst/>
+            <a:ahLst/>
+            <a:cxnLst/>
+            <a:rect l="l" t="t" r="r" b="b"/>
+            <a:pathLst>
+              <a:path w="243028" h="86807">
+                <a:moveTo>
+                  <a:pt x="55460" y="0"/>
+                </a:moveTo>
+                <a:lnTo>
+                  <a:pt x="187567" y="0"/>
+                </a:lnTo>
+                <a:lnTo>
+                  <a:pt x="243028" y="86807"/>
+                </a:lnTo>
+                <a:lnTo>
+                  <a:pt x="0" y="86807"/>
+                </a:lnTo>
+                <a:close/>
+              </a:path>
+            </a:pathLst>
+          </a:custGeom>
+          <a:solidFill>
+            <a:srgbClr val="1E7A55"/>
+          </a:solidFill>
+          <a:ln>
+            <a:noFill/>
+          </a:ln>
+          <a:effectLst/>
+        </p:spPr>
+        <p:txBody>
+          <a:bodyPr rtlCol="0" anchor="ctr"/>
+          <a:lstStyle/>
+          <a:p>
+            <a:pPr algn="ctr"/>
+          </a:p>
+        </p:txBody>
+      </p:sp>
+      <p:sp>
+        <p:nvSpPr>
+          <p:cNvPr id="6" name="Freeform 5"/>
+          <p:cNvSpPr/>
+          <p:nvPr/>
+        </p:nvSpPr>
+        <p:spPr>
+          <a:xfrm>
+            <a:off x="10054640" y="309676"/>
+            <a:ext cx="261722" cy="14631"/>
+          </a:xfrm>
+          <a:custGeom>
+            <a:avLst/>
+            <a:gdLst/>
+            <a:ahLst/>
+            <a:cxnLst/>
+            <a:rect l="l" t="t" r="r" b="b"/>
+            <a:pathLst>
+              <a:path w="261722" h="14631">
+                <a:moveTo>
+                  <a:pt x="9347" y="0"/>
+                </a:moveTo>
+                <a:lnTo>
+                  <a:pt x="252375" y="0"/>
+                </a:lnTo>
+                <a:lnTo>
+                  <a:pt x="261722" y="14631"/>
+                </a:lnTo>
+                <a:lnTo>
+                  <a:pt x="0" y="14631"/>
+                </a:lnTo>
+                <a:close/>
+              </a:path>
+            </a:pathLst>
+          </a:custGeom>
+          <a:solidFill>
+            <a:srgbClr val="D99A00"/>
+          </a:solidFill>
+          <a:ln>
+            <a:noFill/>
+          </a:ln>
+          <a:effectLst/>
+        </p:spPr>
+        <p:txBody>
+          <a:bodyPr rtlCol="0" anchor="ctr"/>
+          <a:lstStyle/>
+          <a:p>
+            <a:pPr algn="ctr"/>
+          </a:p>
+        </p:txBody>
+      </p:sp>
+      <p:sp>
+        <p:nvSpPr>
+          <p:cNvPr id="7" name="Freeform 6"/>
+          <p:cNvSpPr/>
+          <p:nvPr/>
+        </p:nvSpPr>
+        <p:spPr>
+          <a:xfrm>
+            <a:off x="10004788" y="324307"/>
+            <a:ext cx="361425" cy="78029"/>
+          </a:xfrm>
+          <a:custGeom>
+            <a:avLst/>
+            <a:gdLst/>
+            <a:ahLst/>
+            <a:cxnLst/>
+            <a:rect l="l" t="t" r="r" b="b"/>
+            <a:pathLst>
+              <a:path w="361425" h="78029">
+                <a:moveTo>
+                  <a:pt x="49852" y="0"/>
+                </a:moveTo>
+                <a:lnTo>
+                  <a:pt x="311574" y="0"/>
+                </a:lnTo>
+                <a:lnTo>
+                  <a:pt x="361425" y="78029"/>
+                </a:lnTo>
+                <a:lnTo>
+                  <a:pt x="0" y="78029"/>
+                </a:lnTo>
+                <a:close/>
+              </a:path>
+            </a:pathLst>
+          </a:custGeom>
+          <a:solidFill>
+            <a:srgbClr val="C2410C"/>
+          </a:solidFill>
+          <a:ln>
+            <a:noFill/>
+          </a:ln>
+          <a:effectLst/>
+        </p:spPr>
+        <p:txBody>
+          <a:bodyPr rtlCol="0" anchor="ctr"/>
+          <a:lstStyle/>
+          <a:p>
+            <a:pPr algn="ctr"/>
+          </a:p>
+        </p:txBody>
+      </p:sp>
+      <p:sp>
+        <p:nvSpPr>
+          <p:cNvPr id="8" name="Freeform 7"/>
+          <p:cNvSpPr/>
+          <p:nvPr/>
+        </p:nvSpPr>
+        <p:spPr>
+          <a:xfrm>
+            <a:off x="9961168" y="402336"/>
+            <a:ext cx="448666" cy="68275"/>
+          </a:xfrm>
+          <a:custGeom>
+            <a:avLst/>
+            <a:gdLst/>
+            <a:ahLst/>
+            <a:cxnLst/>
+            <a:rect l="l" t="t" r="r" b="b"/>
+            <a:pathLst>
+              <a:path w="448666" h="68275">
+                <a:moveTo>
+                  <a:pt x="43620" y="0"/>
+                </a:moveTo>
+                <a:lnTo>
+                  <a:pt x="405045" y="0"/>
+                </a:lnTo>
+                <a:lnTo>
+                  <a:pt x="448666" y="68275"/>
+                </a:lnTo>
+                <a:lnTo>
+                  <a:pt x="0" y="68275"/>
+                </a:lnTo>
+                <a:close/>
+              </a:path>
+            </a:pathLst>
+          </a:custGeom>
+          <a:solidFill>
+            <a:srgbClr val="CC0000"/>
+          </a:solidFill>
+          <a:ln>
+            <a:noFill/>
+          </a:ln>
+          <a:effectLst/>
+        </p:spPr>
+        <p:txBody>
+          <a:bodyPr rtlCol="0" anchor="ctr"/>
+          <a:lstStyle/>
+          <a:p>
+            <a:pPr algn="ctr"/>
+          </a:p>
+        </p:txBody>
+      </p:sp>
+      <p:sp>
+        <p:nvSpPr>
+          <p:cNvPr id="9" name="Freeform 8"/>
+          <p:cNvSpPr/>
+          <p:nvPr/>
+        </p:nvSpPr>
+        <p:spPr>
+          <a:xfrm>
+            <a:off x="9961168" y="119481"/>
+            <a:ext cx="448666" cy="351130"/>
+          </a:xfrm>
+          <a:custGeom>
+            <a:avLst/>
+            <a:gdLst/>
+            <a:ahLst/>
+            <a:cxnLst/>
+            <a:rect l="l" t="t" r="r" b="b"/>
+            <a:pathLst>
+              <a:path w="448666" h="351130">
+                <a:moveTo>
+                  <a:pt x="224333" y="0"/>
+                </a:moveTo>
+                <a:lnTo>
+                  <a:pt x="448666" y="351130"/>
+                </a:lnTo>
+                <a:lnTo>
+                  <a:pt x="0" y="351130"/>
+                </a:lnTo>
+                <a:close/>
+              </a:path>
+            </a:pathLst>
+          </a:custGeom>
+          <a:noFill/>
+          <a:ln w="6350">
+            <a:solidFill>
+              <a:srgbClr val="CFC2BE"/>
+            </a:solidFill>
+          </a:ln>
+          <a:effectLst/>
+        </p:spPr>
+        <p:txBody>
+          <a:bodyPr rtlCol="0" anchor="ctr"/>
+          <a:lstStyle/>
+          <a:p>
+            <a:pPr algn="ctr"/>
+          </a:p>
+        </p:txBody>
+      </p:sp>
+      <p:sp>
+        <p:nvSpPr>
+          <p:cNvPr id="10" name="TextBox 9"/>
+          <p:cNvSpPr txBox="1"/>
+          <p:nvPr/>
+        </p:nvSpPr>
+        <p:spPr>
+          <a:xfrm>
+            <a:off x="10478109" y="117530"/>
+            <a:ext cx="936345" cy="351129"/>
+          </a:xfrm>
+          <a:prstGeom prst="rect">
+            <a:avLst/>
+          </a:prstGeom>
+          <a:noFill/>
+        </p:spPr>
+        <p:txBody>
+          <a:bodyPr wrap="none" lIns="0" rIns="0" tIns="0" bIns="0">
+            <a:spAutoFit/>
+          </a:bodyPr>
+          <a:lstStyle/>
+          <a:p>
+            <a:pPr>
+              <a:lnSpc>
+                <a:spcPts val="691"/>
+              </a:lnSpc>
+              <a:spcBef>
+                <a:spcPts val="0"/>
+              </a:spcBef>
+              <a:spcAft>
+                <a:spcPts val="0"/>
+              </a:spcAft>
+            </a:pPr>
+            <a:r>
+              <a:rPr sz="700" b="1">
+                <a:solidFill>
+                  <a:srgbClr val="1B1211"/>
+                </a:solidFill>
+                <a:latin typeface="Red Hat Mono"/>
+              </a:rPr>
+              <a:t>JUDGEMENT</a:t>
+            </a:r>
+          </a:p>
+          <a:p>
+            <a:pPr>
+              <a:lnSpc>
+                <a:spcPts val="691"/>
+              </a:lnSpc>
+              <a:spcBef>
+                <a:spcPts val="0"/>
+              </a:spcBef>
+              <a:spcAft>
+                <a:spcPts val="0"/>
+              </a:spcAft>
+            </a:pPr>
+            <a:r>
+              <a:rPr sz="700" b="1">
+                <a:solidFill>
+                  <a:srgbClr val="1B1211"/>
+                </a:solidFill>
+                <a:latin typeface="Red Hat Mono"/>
+              </a:rPr>
+              <a:t>KNOWLEDGE</a:t>
+            </a:r>
+          </a:p>
+          <a:p>
+            <a:pPr>
+              <a:lnSpc>
+                <a:spcPts val="691"/>
+              </a:lnSpc>
+              <a:spcBef>
+                <a:spcPts val="0"/>
+              </a:spcBef>
+              <a:spcAft>
+                <a:spcPts val="0"/>
+              </a:spcAft>
+            </a:pPr>
+            <a:r>
+              <a:rPr sz="700" b="1">
+                <a:solidFill>
+                  <a:srgbClr val="1B1211"/>
+                </a:solidFill>
+                <a:latin typeface="Red Hat Mono"/>
+              </a:rPr>
+              <a:t>INFORMATION</a:t>
+            </a:r>
+          </a:p>
+          <a:p>
+            <a:pPr>
+              <a:lnSpc>
+                <a:spcPts val="691"/>
+              </a:lnSpc>
+              <a:spcBef>
+                <a:spcPts val="0"/>
+              </a:spcBef>
+              <a:spcAft>
+                <a:spcPts val="0"/>
+              </a:spcAft>
+            </a:pPr>
+            <a:r>
+              <a:rPr sz="700" b="1">
+                <a:solidFill>
+                  <a:srgbClr val="1B1211"/>
+                </a:solidFill>
+                <a:latin typeface="Red Hat Mono"/>
+              </a:rPr>
+              <a:t>DATA</a:t>
+            </a:r>
+          </a:p>
+        </p:txBody>
+      </p:sp>
+      <p:sp>
+        <p:nvSpPr>
+          <p:cNvPr id="11" name="TextBox 10"/>
           <p:cNvSpPr txBox="1"/>
           <p:nvPr/>
         </p:nvSpPr>
@@ -5185,7 +7018,7 @@
       </p:sp>
       <p:sp>
         <p:nvSpPr>
-          <p:cNvPr id="4" name="TextBox 3"/>
+          <p:cNvPr id="12" name="TextBox 11"/>
           <p:cNvSpPr txBox="1"/>
           <p:nvPr/>
         </p:nvSpPr>
@@ -5224,7 +7057,7 @@
       </p:sp>
       <p:sp>
         <p:nvSpPr>
-          <p:cNvPr id="5" name="TextBox 4"/>
+          <p:cNvPr id="13" name="TextBox 12"/>
           <p:cNvSpPr txBox="1"/>
           <p:nvPr/>
         </p:nvSpPr>
@@ -5263,7 +7096,7 @@
       </p:sp>
       <p:sp>
         <p:nvSpPr>
-          <p:cNvPr id="6" name="Rounded Rectangle 5"/>
+          <p:cNvPr id="14" name="Rounded Rectangle 13"/>
           <p:cNvSpPr/>
           <p:nvPr/>
         </p:nvSpPr>
@@ -5311,7 +7144,7 @@
       </p:sp>
       <p:sp>
         <p:nvSpPr>
-          <p:cNvPr id="7" name="Rectangle 6"/>
+          <p:cNvPr id="15" name="Rectangle 14"/>
           <p:cNvSpPr/>
           <p:nvPr/>
         </p:nvSpPr>
@@ -5355,7 +7188,7 @@
       </p:sp>
       <p:sp>
         <p:nvSpPr>
-          <p:cNvPr id="8" name="TextBox 7"/>
+          <p:cNvPr id="16" name="TextBox 15"/>
           <p:cNvSpPr txBox="1"/>
           <p:nvPr/>
         </p:nvSpPr>
@@ -5426,7 +7259,7 @@
       </p:sp>
       <p:sp>
         <p:nvSpPr>
-          <p:cNvPr id="9" name="Right Arrow 8"/>
+          <p:cNvPr id="17" name="Right Arrow 16"/>
           <p:cNvSpPr/>
           <p:nvPr/>
         </p:nvSpPr>
@@ -5470,7 +7303,7 @@
       </p:sp>
       <p:sp>
         <p:nvSpPr>
-          <p:cNvPr id="10" name="Rounded Rectangle 9"/>
+          <p:cNvPr id="18" name="Rounded Rectangle 17"/>
           <p:cNvSpPr/>
           <p:nvPr/>
         </p:nvSpPr>
@@ -5518,7 +7351,7 @@
       </p:sp>
       <p:sp>
         <p:nvSpPr>
-          <p:cNvPr id="11" name="Rectangle 10"/>
+          <p:cNvPr id="19" name="Rectangle 18"/>
           <p:cNvSpPr/>
           <p:nvPr/>
         </p:nvSpPr>
@@ -5562,7 +7395,7 @@
       </p:sp>
       <p:sp>
         <p:nvSpPr>
-          <p:cNvPr id="12" name="TextBox 11"/>
+          <p:cNvPr id="20" name="TextBox 19"/>
           <p:cNvSpPr txBox="1"/>
           <p:nvPr/>
         </p:nvSpPr>
@@ -5633,7 +7466,7 @@
       </p:sp>
       <p:sp>
         <p:nvSpPr>
-          <p:cNvPr id="13" name="Right Arrow 12"/>
+          <p:cNvPr id="21" name="Right Arrow 20"/>
           <p:cNvSpPr/>
           <p:nvPr/>
         </p:nvSpPr>
@@ -5677,7 +7510,7 @@
       </p:sp>
       <p:sp>
         <p:nvSpPr>
-          <p:cNvPr id="14" name="Rounded Rectangle 13"/>
+          <p:cNvPr id="22" name="Rounded Rectangle 21"/>
           <p:cNvSpPr/>
           <p:nvPr/>
         </p:nvSpPr>
@@ -5725,7 +7558,7 @@
       </p:sp>
       <p:sp>
         <p:nvSpPr>
-          <p:cNvPr id="15" name="Rectangle 14"/>
+          <p:cNvPr id="23" name="Rectangle 22"/>
           <p:cNvSpPr/>
           <p:nvPr/>
         </p:nvSpPr>
@@ -5769,7 +7602,7 @@
       </p:sp>
       <p:sp>
         <p:nvSpPr>
-          <p:cNvPr id="16" name="TextBox 15"/>
+          <p:cNvPr id="24" name="TextBox 23"/>
           <p:cNvSpPr txBox="1"/>
           <p:nvPr/>
         </p:nvSpPr>
@@ -5840,7 +7673,7 @@
       </p:sp>
       <p:sp>
         <p:nvSpPr>
-          <p:cNvPr id="17" name="Right Arrow 16"/>
+          <p:cNvPr id="25" name="Right Arrow 24"/>
           <p:cNvSpPr/>
           <p:nvPr/>
         </p:nvSpPr>
@@ -5884,7 +7717,7 @@
       </p:sp>
       <p:sp>
         <p:nvSpPr>
-          <p:cNvPr id="18" name="Rounded Rectangle 17"/>
+          <p:cNvPr id="26" name="Rounded Rectangle 25"/>
           <p:cNvSpPr/>
           <p:nvPr/>
         </p:nvSpPr>
@@ -5932,7 +7765,7 @@
       </p:sp>
       <p:sp>
         <p:nvSpPr>
-          <p:cNvPr id="19" name="Rectangle 18"/>
+          <p:cNvPr id="27" name="Rectangle 26"/>
           <p:cNvSpPr/>
           <p:nvPr/>
         </p:nvSpPr>
@@ -5976,7 +7809,7 @@
       </p:sp>
       <p:sp>
         <p:nvSpPr>
-          <p:cNvPr id="20" name="TextBox 19"/>
+          <p:cNvPr id="28" name="TextBox 27"/>
           <p:cNvSpPr txBox="1"/>
           <p:nvPr/>
         </p:nvSpPr>
@@ -6117,7 +7950,469 @@
       </p:sp>
       <p:sp>
         <p:nvSpPr>
-          <p:cNvPr id="3" name="TextBox 2"/>
+          <p:cNvPr id="3" name="Freeform 2"/>
+          <p:cNvSpPr/>
+          <p:nvPr/>
+        </p:nvSpPr>
+        <p:spPr>
+          <a:xfrm>
+            <a:off x="10129418" y="119481"/>
+            <a:ext cx="112166" cy="87783"/>
+          </a:xfrm>
+          <a:custGeom>
+            <a:avLst/>
+            <a:gdLst/>
+            <a:ahLst/>
+            <a:cxnLst/>
+            <a:rect l="l" t="t" r="r" b="b"/>
+            <a:pathLst>
+              <a:path w="112166" h="87783">
+                <a:moveTo>
+                  <a:pt x="56083" y="0"/>
+                </a:moveTo>
+                <a:lnTo>
+                  <a:pt x="112166" y="87783"/>
+                </a:lnTo>
+                <a:lnTo>
+                  <a:pt x="0" y="87783"/>
+                </a:lnTo>
+                <a:close/>
+              </a:path>
+            </a:pathLst>
+          </a:custGeom>
+          <a:solidFill>
+            <a:srgbClr val="DED5E9"/>
+          </a:solidFill>
+          <a:ln>
+            <a:noFill/>
+          </a:ln>
+          <a:effectLst/>
+        </p:spPr>
+        <p:txBody>
+          <a:bodyPr rtlCol="0" anchor="ctr"/>
+          <a:lstStyle/>
+          <a:p>
+            <a:pPr algn="ctr"/>
+          </a:p>
+        </p:txBody>
+      </p:sp>
+      <p:sp>
+        <p:nvSpPr>
+          <p:cNvPr id="4" name="Freeform 3"/>
+          <p:cNvSpPr/>
+          <p:nvPr/>
+        </p:nvSpPr>
+        <p:spPr>
+          <a:xfrm>
+            <a:off x="10119447" y="207264"/>
+            <a:ext cx="132107" cy="15605"/>
+          </a:xfrm>
+          <a:custGeom>
+            <a:avLst/>
+            <a:gdLst/>
+            <a:ahLst/>
+            <a:cxnLst/>
+            <a:rect l="l" t="t" r="r" b="b"/>
+            <a:pathLst>
+              <a:path w="132107" h="15605">
+                <a:moveTo>
+                  <a:pt x="9971" y="0"/>
+                </a:moveTo>
+                <a:lnTo>
+                  <a:pt x="122137" y="0"/>
+                </a:lnTo>
+                <a:lnTo>
+                  <a:pt x="132107" y="15605"/>
+                </a:lnTo>
+                <a:lnTo>
+                  <a:pt x="0" y="15605"/>
+                </a:lnTo>
+                <a:close/>
+              </a:path>
+            </a:pathLst>
+          </a:custGeom>
+          <a:solidFill>
+            <a:srgbClr val="D2DCF7"/>
+          </a:solidFill>
+          <a:ln>
+            <a:noFill/>
+          </a:ln>
+          <a:effectLst/>
+        </p:spPr>
+        <p:txBody>
+          <a:bodyPr rtlCol="0" anchor="ctr"/>
+          <a:lstStyle/>
+          <a:p>
+            <a:pPr algn="ctr"/>
+          </a:p>
+        </p:txBody>
+      </p:sp>
+      <p:sp>
+        <p:nvSpPr>
+          <p:cNvPr id="5" name="Freeform 4"/>
+          <p:cNvSpPr/>
+          <p:nvPr/>
+        </p:nvSpPr>
+        <p:spPr>
+          <a:xfrm>
+            <a:off x="10063987" y="222869"/>
+            <a:ext cx="243028" cy="86807"/>
+          </a:xfrm>
+          <a:custGeom>
+            <a:avLst/>
+            <a:gdLst/>
+            <a:ahLst/>
+            <a:cxnLst/>
+            <a:rect l="l" t="t" r="r" b="b"/>
+            <a:pathLst>
+              <a:path w="243028" h="86807">
+                <a:moveTo>
+                  <a:pt x="55460" y="0"/>
+                </a:moveTo>
+                <a:lnTo>
+                  <a:pt x="187567" y="0"/>
+                </a:lnTo>
+                <a:lnTo>
+                  <a:pt x="243028" y="86807"/>
+                </a:lnTo>
+                <a:lnTo>
+                  <a:pt x="0" y="86807"/>
+                </a:lnTo>
+                <a:close/>
+              </a:path>
+            </a:pathLst>
+          </a:custGeom>
+          <a:solidFill>
+            <a:srgbClr val="D2E4DD"/>
+          </a:solidFill>
+          <a:ln>
+            <a:noFill/>
+          </a:ln>
+          <a:effectLst/>
+        </p:spPr>
+        <p:txBody>
+          <a:bodyPr rtlCol="0" anchor="ctr"/>
+          <a:lstStyle/>
+          <a:p>
+            <a:pPr algn="ctr"/>
+          </a:p>
+        </p:txBody>
+      </p:sp>
+      <p:sp>
+        <p:nvSpPr>
+          <p:cNvPr id="6" name="Freeform 5"/>
+          <p:cNvSpPr/>
+          <p:nvPr/>
+        </p:nvSpPr>
+        <p:spPr>
+          <a:xfrm>
+            <a:off x="10054640" y="309676"/>
+            <a:ext cx="261722" cy="14631"/>
+          </a:xfrm>
+          <a:custGeom>
+            <a:avLst/>
+            <a:gdLst/>
+            <a:ahLst/>
+            <a:cxnLst/>
+            <a:rect l="l" t="t" r="r" b="b"/>
+            <a:pathLst>
+              <a:path w="261722" h="14631">
+                <a:moveTo>
+                  <a:pt x="9347" y="0"/>
+                </a:moveTo>
+                <a:lnTo>
+                  <a:pt x="252375" y="0"/>
+                </a:lnTo>
+                <a:lnTo>
+                  <a:pt x="261722" y="14631"/>
+                </a:lnTo>
+                <a:lnTo>
+                  <a:pt x="0" y="14631"/>
+                </a:lnTo>
+                <a:close/>
+              </a:path>
+            </a:pathLst>
+          </a:custGeom>
+          <a:solidFill>
+            <a:srgbClr val="F7EBCC"/>
+          </a:solidFill>
+          <a:ln>
+            <a:noFill/>
+          </a:ln>
+          <a:effectLst/>
+        </p:spPr>
+        <p:txBody>
+          <a:bodyPr rtlCol="0" anchor="ctr"/>
+          <a:lstStyle/>
+          <a:p>
+            <a:pPr algn="ctr"/>
+          </a:p>
+        </p:txBody>
+      </p:sp>
+      <p:sp>
+        <p:nvSpPr>
+          <p:cNvPr id="7" name="Freeform 6"/>
+          <p:cNvSpPr/>
+          <p:nvPr/>
+        </p:nvSpPr>
+        <p:spPr>
+          <a:xfrm>
+            <a:off x="10004788" y="324307"/>
+            <a:ext cx="361425" cy="78029"/>
+          </a:xfrm>
+          <a:custGeom>
+            <a:avLst/>
+            <a:gdLst/>
+            <a:ahLst/>
+            <a:cxnLst/>
+            <a:rect l="l" t="t" r="r" b="b"/>
+            <a:pathLst>
+              <a:path w="361425" h="78029">
+                <a:moveTo>
+                  <a:pt x="49852" y="0"/>
+                </a:moveTo>
+                <a:lnTo>
+                  <a:pt x="311574" y="0"/>
+                </a:lnTo>
+                <a:lnTo>
+                  <a:pt x="361425" y="78029"/>
+                </a:lnTo>
+                <a:lnTo>
+                  <a:pt x="0" y="78029"/>
+                </a:lnTo>
+                <a:close/>
+              </a:path>
+            </a:pathLst>
+          </a:custGeom>
+          <a:solidFill>
+            <a:srgbClr val="F3D9CE"/>
+          </a:solidFill>
+          <a:ln>
+            <a:noFill/>
+          </a:ln>
+          <a:effectLst/>
+        </p:spPr>
+        <p:txBody>
+          <a:bodyPr rtlCol="0" anchor="ctr"/>
+          <a:lstStyle/>
+          <a:p>
+            <a:pPr algn="ctr"/>
+          </a:p>
+        </p:txBody>
+      </p:sp>
+      <p:sp>
+        <p:nvSpPr>
+          <p:cNvPr id="8" name="Freeform 7"/>
+          <p:cNvSpPr/>
+          <p:nvPr/>
+        </p:nvSpPr>
+        <p:spPr>
+          <a:xfrm>
+            <a:off x="9961168" y="402336"/>
+            <a:ext cx="448666" cy="68275"/>
+          </a:xfrm>
+          <a:custGeom>
+            <a:avLst/>
+            <a:gdLst/>
+            <a:ahLst/>
+            <a:cxnLst/>
+            <a:rect l="l" t="t" r="r" b="b"/>
+            <a:pathLst>
+              <a:path w="448666" h="68275">
+                <a:moveTo>
+                  <a:pt x="43620" y="0"/>
+                </a:moveTo>
+                <a:lnTo>
+                  <a:pt x="405045" y="0"/>
+                </a:lnTo>
+                <a:lnTo>
+                  <a:pt x="448666" y="68275"/>
+                </a:lnTo>
+                <a:lnTo>
+                  <a:pt x="0" y="68275"/>
+                </a:lnTo>
+                <a:close/>
+              </a:path>
+            </a:pathLst>
+          </a:custGeom>
+          <a:solidFill>
+            <a:srgbClr val="CC0000"/>
+          </a:solidFill>
+          <a:ln>
+            <a:noFill/>
+          </a:ln>
+          <a:effectLst/>
+        </p:spPr>
+        <p:txBody>
+          <a:bodyPr rtlCol="0" anchor="ctr"/>
+          <a:lstStyle/>
+          <a:p>
+            <a:pPr algn="ctr"/>
+          </a:p>
+        </p:txBody>
+      </p:sp>
+      <p:sp>
+        <p:nvSpPr>
+          <p:cNvPr id="9" name="Freeform 8"/>
+          <p:cNvSpPr/>
+          <p:nvPr/>
+        </p:nvSpPr>
+        <p:spPr>
+          <a:xfrm>
+            <a:off x="9961168" y="119481"/>
+            <a:ext cx="448666" cy="351130"/>
+          </a:xfrm>
+          <a:custGeom>
+            <a:avLst/>
+            <a:gdLst/>
+            <a:ahLst/>
+            <a:cxnLst/>
+            <a:rect l="l" t="t" r="r" b="b"/>
+            <a:pathLst>
+              <a:path w="448666" h="351130">
+                <a:moveTo>
+                  <a:pt x="224333" y="0"/>
+                </a:moveTo>
+                <a:lnTo>
+                  <a:pt x="448666" y="351130"/>
+                </a:lnTo>
+                <a:lnTo>
+                  <a:pt x="0" y="351130"/>
+                </a:lnTo>
+                <a:close/>
+              </a:path>
+            </a:pathLst>
+          </a:custGeom>
+          <a:noFill/>
+          <a:ln w="6350">
+            <a:solidFill>
+              <a:srgbClr val="CFC2BE"/>
+            </a:solidFill>
+          </a:ln>
+          <a:effectLst/>
+        </p:spPr>
+        <p:txBody>
+          <a:bodyPr rtlCol="0" anchor="ctr"/>
+          <a:lstStyle/>
+          <a:p>
+            <a:pPr algn="ctr"/>
+          </a:p>
+        </p:txBody>
+      </p:sp>
+      <p:sp>
+        <p:nvSpPr>
+          <p:cNvPr id="10" name="TextBox 9"/>
+          <p:cNvSpPr txBox="1"/>
+          <p:nvPr/>
+        </p:nvSpPr>
+        <p:spPr>
+          <a:xfrm>
+            <a:off x="10478109" y="117530"/>
+            <a:ext cx="936345" cy="351129"/>
+          </a:xfrm>
+          <a:prstGeom prst="rect">
+            <a:avLst/>
+          </a:prstGeom>
+          <a:noFill/>
+        </p:spPr>
+        <p:txBody>
+          <a:bodyPr wrap="none" lIns="0" rIns="0" tIns="0" bIns="0">
+            <a:spAutoFit/>
+          </a:bodyPr>
+          <a:lstStyle/>
+          <a:p>
+            <a:pPr>
+              <a:lnSpc>
+                <a:spcPts val="691"/>
+              </a:lnSpc>
+              <a:spcBef>
+                <a:spcPts val="0"/>
+              </a:spcBef>
+              <a:spcAft>
+                <a:spcPts val="0"/>
+              </a:spcAft>
+            </a:pPr>
+            <a:r>
+              <a:rPr sz="700" b="0">
+                <a:solidFill>
+                  <a:srgbClr val="7E6A64"/>
+                </a:solidFill>
+                <a:latin typeface="Red Hat Mono"/>
+              </a:rPr>
+              <a:t>JUDGEMENT</a:t>
+            </a:r>
+          </a:p>
+          <a:p>
+            <a:pPr>
+              <a:lnSpc>
+                <a:spcPts val="691"/>
+              </a:lnSpc>
+              <a:spcBef>
+                <a:spcPts val="0"/>
+              </a:spcBef>
+              <a:spcAft>
+                <a:spcPts val="0"/>
+              </a:spcAft>
+            </a:pPr>
+            <a:r>
+              <a:rPr sz="700" b="0">
+                <a:solidFill>
+                  <a:srgbClr val="7E6A64"/>
+                </a:solidFill>
+                <a:latin typeface="Red Hat Mono"/>
+              </a:rPr>
+              <a:t>KNOWLEDGE</a:t>
+            </a:r>
+          </a:p>
+          <a:p>
+            <a:pPr>
+              <a:lnSpc>
+                <a:spcPts val="691"/>
+              </a:lnSpc>
+              <a:spcBef>
+                <a:spcPts val="0"/>
+              </a:spcBef>
+              <a:spcAft>
+                <a:spcPts val="0"/>
+              </a:spcAft>
+            </a:pPr>
+            <a:r>
+              <a:rPr sz="700" b="0">
+                <a:solidFill>
+                  <a:srgbClr val="7E6A64"/>
+                </a:solidFill>
+                <a:latin typeface="Red Hat Mono"/>
+              </a:rPr>
+              <a:t>INFORMATION</a:t>
+            </a:r>
+          </a:p>
+          <a:p>
+            <a:pPr>
+              <a:lnSpc>
+                <a:spcPts val="691"/>
+              </a:lnSpc>
+              <a:spcBef>
+                <a:spcPts val="0"/>
+              </a:spcBef>
+              <a:spcAft>
+                <a:spcPts val="0"/>
+              </a:spcAft>
+            </a:pPr>
+            <a:r>
+              <a:rPr sz="700" b="1">
+                <a:solidFill>
+                  <a:srgbClr val="1B1211"/>
+                </a:solidFill>
+                <a:latin typeface="Red Hat Mono"/>
+              </a:rPr>
+              <a:t>DATA</a:t>
+            </a:r>
+          </a:p>
+        </p:txBody>
+      </p:sp>
+      <p:sp>
+        <p:nvSpPr>
+          <p:cNvPr id="11" name="TextBox 10"/>
           <p:cNvSpPr txBox="1"/>
           <p:nvPr/>
         </p:nvSpPr>
@@ -6156,7 +8451,7 @@
       </p:sp>
       <p:sp>
         <p:nvSpPr>
-          <p:cNvPr id="4" name="TextBox 3"/>
+          <p:cNvPr id="12" name="TextBox 11"/>
           <p:cNvSpPr txBox="1"/>
           <p:nvPr/>
         </p:nvSpPr>
@@ -6195,7 +8490,7 @@
       </p:sp>
       <p:sp>
         <p:nvSpPr>
-          <p:cNvPr id="5" name="Rounded Rectangle 4"/>
+          <p:cNvPr id="13" name="Rounded Rectangle 12"/>
           <p:cNvSpPr/>
           <p:nvPr/>
         </p:nvSpPr>
@@ -6242,7 +8537,7 @@
       </p:sp>
       <p:sp>
         <p:nvSpPr>
-          <p:cNvPr id="6" name="TextBox 5"/>
+          <p:cNvPr id="14" name="TextBox 13"/>
           <p:cNvSpPr txBox="1"/>
           <p:nvPr/>
         </p:nvSpPr>
@@ -6297,7 +8592,7 @@
       </p:sp>
       <p:cxnSp>
         <p:nvCxnSpPr>
-          <p:cNvPr id="7" name="Connector 6"/>
+          <p:cNvPr id="15" name="Connector 14"/>
           <p:cNvCxnSpPr/>
           <p:nvPr/>
         </p:nvCxnSpPr>
@@ -6333,7 +8628,7 @@
       </p:cxnSp>
       <p:cxnSp>
         <p:nvCxnSpPr>
-          <p:cNvPr id="8" name="Connector 7"/>
+          <p:cNvPr id="16" name="Connector 15"/>
           <p:cNvCxnSpPr/>
           <p:nvPr/>
         </p:nvCxnSpPr>
@@ -6369,7 +8664,7 @@
       </p:cxnSp>
       <p:cxnSp>
         <p:nvCxnSpPr>
-          <p:cNvPr id="9" name="Connector 8"/>
+          <p:cNvPr id="17" name="Connector 16"/>
           <p:cNvCxnSpPr/>
           <p:nvPr/>
         </p:nvCxnSpPr>
@@ -6405,7 +8700,7 @@
       </p:cxnSp>
       <p:sp>
         <p:nvSpPr>
-          <p:cNvPr id="10" name="Freeform 9"/>
+          <p:cNvPr id="18" name="Freeform 17"/>
           <p:cNvSpPr/>
           <p:nvPr/>
         </p:nvSpPr>
@@ -6797,7 +9092,7 @@
       </p:sp>
       <p:sp>
         <p:nvSpPr>
-          <p:cNvPr id="11" name="Freeform 10"/>
+          <p:cNvPr id="19" name="Freeform 18"/>
           <p:cNvSpPr/>
           <p:nvPr/>
         </p:nvSpPr>
@@ -6919,7 +9214,7 @@
       </p:sp>
       <p:sp>
         <p:nvSpPr>
-          <p:cNvPr id="12" name="Freeform 11"/>
+          <p:cNvPr id="20" name="Freeform 19"/>
           <p:cNvSpPr/>
           <p:nvPr/>
         </p:nvSpPr>
@@ -7304,7 +9599,7 @@
       </p:sp>
       <p:cxnSp>
         <p:nvCxnSpPr>
-          <p:cNvPr id="13" name="Connector 12"/>
+          <p:cNvPr id="21" name="Connector 20"/>
           <p:cNvCxnSpPr/>
           <p:nvPr/>
         </p:nvCxnSpPr>
@@ -7340,7 +9635,7 @@
       </p:cxnSp>
       <p:sp>
         <p:nvSpPr>
-          <p:cNvPr id="14" name="Oval 13"/>
+          <p:cNvPr id="22" name="Oval 21"/>
           <p:cNvSpPr/>
           <p:nvPr/>
         </p:nvSpPr>
@@ -7386,7 +9681,7 @@
       </p:sp>
       <p:sp>
         <p:nvSpPr>
-          <p:cNvPr id="15" name="TextBox 14"/>
+          <p:cNvPr id="23" name="TextBox 22"/>
           <p:cNvSpPr txBox="1"/>
           <p:nvPr/>
         </p:nvSpPr>
@@ -7425,7 +9720,7 @@
       </p:sp>
       <p:sp>
         <p:nvSpPr>
-          <p:cNvPr id="16" name="TextBox 15"/>
+          <p:cNvPr id="24" name="TextBox 23"/>
           <p:cNvSpPr txBox="1"/>
           <p:nvPr/>
         </p:nvSpPr>
@@ -7464,7 +9759,7 @@
       </p:sp>
       <p:sp>
         <p:nvSpPr>
-          <p:cNvPr id="17" name="TextBox 16"/>
+          <p:cNvPr id="25" name="TextBox 24"/>
           <p:cNvSpPr txBox="1"/>
           <p:nvPr/>
         </p:nvSpPr>
@@ -7503,7 +9798,7 @@
       </p:sp>
       <p:sp>
         <p:nvSpPr>
-          <p:cNvPr id="18" name="TextBox 17"/>
+          <p:cNvPr id="26" name="TextBox 25"/>
           <p:cNvSpPr txBox="1"/>
           <p:nvPr/>
         </p:nvSpPr>
@@ -7542,7 +9837,7 @@
       </p:sp>
       <p:sp>
         <p:nvSpPr>
-          <p:cNvPr id="19" name="TextBox 18"/>
+          <p:cNvPr id="27" name="TextBox 26"/>
           <p:cNvSpPr txBox="1"/>
           <p:nvPr/>
         </p:nvSpPr>
@@ -7581,7 +9876,7 @@
       </p:sp>
       <p:sp>
         <p:nvSpPr>
-          <p:cNvPr id="20" name="TextBox 19"/>
+          <p:cNvPr id="28" name="TextBox 27"/>
           <p:cNvSpPr txBox="1"/>
           <p:nvPr/>
         </p:nvSpPr>
@@ -7620,7 +9915,7 @@
       </p:sp>
       <p:sp>
         <p:nvSpPr>
-          <p:cNvPr id="21" name="TextBox 20"/>
+          <p:cNvPr id="29" name="TextBox 28"/>
           <p:cNvSpPr txBox="1"/>
           <p:nvPr/>
         </p:nvSpPr>
@@ -7659,7 +9954,7 @@
       </p:sp>
       <p:sp>
         <p:nvSpPr>
-          <p:cNvPr id="22" name="TextBox 21"/>
+          <p:cNvPr id="30" name="TextBox 29"/>
           <p:cNvSpPr txBox="1"/>
           <p:nvPr/>
         </p:nvSpPr>
@@ -7698,7 +9993,7 @@
       </p:sp>
       <p:sp>
         <p:nvSpPr>
-          <p:cNvPr id="23" name="TextBox 22"/>
+          <p:cNvPr id="31" name="TextBox 30"/>
           <p:cNvSpPr txBox="1"/>
           <p:nvPr/>
         </p:nvSpPr>
@@ -7737,7 +10032,7 @@
       </p:sp>
       <p:sp>
         <p:nvSpPr>
-          <p:cNvPr id="24" name="TextBox 23"/>
+          <p:cNvPr id="32" name="TextBox 31"/>
           <p:cNvSpPr txBox="1"/>
           <p:nvPr/>
         </p:nvSpPr>
@@ -7776,7 +10071,7 @@
       </p:sp>
       <p:sp>
         <p:nvSpPr>
-          <p:cNvPr id="25" name="TextBox 24"/>
+          <p:cNvPr id="33" name="TextBox 32"/>
           <p:cNvSpPr txBox="1"/>
           <p:nvPr/>
         </p:nvSpPr>
@@ -7815,7 +10110,7 @@
       </p:sp>
       <p:sp>
         <p:nvSpPr>
-          <p:cNvPr id="26" name="TextBox 25"/>
+          <p:cNvPr id="34" name="TextBox 33"/>
           <p:cNvSpPr txBox="1"/>
           <p:nvPr/>
         </p:nvSpPr>
@@ -7854,7 +10149,7 @@
       </p:sp>
       <p:sp>
         <p:nvSpPr>
-          <p:cNvPr id="27" name="TextBox 26"/>
+          <p:cNvPr id="35" name="TextBox 34"/>
           <p:cNvSpPr txBox="1"/>
           <p:nvPr/>
         </p:nvSpPr>
@@ -7893,7 +10188,7 @@
       </p:sp>
       <p:sp>
         <p:nvSpPr>
-          <p:cNvPr id="28" name="TextBox 27"/>
+          <p:cNvPr id="36" name="TextBox 35"/>
           <p:cNvSpPr txBox="1"/>
           <p:nvPr/>
         </p:nvSpPr>
@@ -7932,7 +10227,7 @@
       </p:sp>
       <p:sp>
         <p:nvSpPr>
-          <p:cNvPr id="29" name="TextBox 28"/>
+          <p:cNvPr id="37" name="TextBox 36"/>
           <p:cNvSpPr txBox="1"/>
           <p:nvPr/>
         </p:nvSpPr>
@@ -7971,7 +10266,7 @@
       </p:sp>
       <p:sp>
         <p:nvSpPr>
-          <p:cNvPr id="30" name="TextBox 29"/>
+          <p:cNvPr id="38" name="TextBox 37"/>
           <p:cNvSpPr txBox="1"/>
           <p:nvPr/>
         </p:nvSpPr>
@@ -8010,7 +10305,7 @@
       </p:sp>
       <p:sp>
         <p:nvSpPr>
-          <p:cNvPr id="31" name="Rectangle 30"/>
+          <p:cNvPr id="39" name="Rectangle 38"/>
           <p:cNvSpPr/>
           <p:nvPr/>
         </p:nvSpPr>
@@ -8054,7 +10349,7 @@
       </p:sp>
       <p:sp>
         <p:nvSpPr>
-          <p:cNvPr id="32" name="TextBox 31"/>
+          <p:cNvPr id="40" name="TextBox 39"/>
           <p:cNvSpPr txBox="1"/>
           <p:nvPr/>
         </p:nvSpPr>
@@ -8125,7 +10420,7 @@
       </p:sp>
       <p:sp>
         <p:nvSpPr>
-          <p:cNvPr id="33" name="Rectangle 32"/>
+          <p:cNvPr id="41" name="Rectangle 40"/>
           <p:cNvSpPr/>
           <p:nvPr/>
         </p:nvSpPr>
@@ -8169,7 +10464,7 @@
       </p:sp>
       <p:sp>
         <p:nvSpPr>
-          <p:cNvPr id="34" name="TextBox 33"/>
+          <p:cNvPr id="42" name="TextBox 41"/>
           <p:cNvSpPr txBox="1"/>
           <p:nvPr/>
         </p:nvSpPr>
@@ -8240,7 +10535,7 @@
       </p:sp>
       <p:sp>
         <p:nvSpPr>
-          <p:cNvPr id="35" name="Rectangle 34"/>
+          <p:cNvPr id="43" name="Rectangle 42"/>
           <p:cNvSpPr/>
           <p:nvPr/>
         </p:nvSpPr>
@@ -8284,7 +10579,7 @@
       </p:sp>
       <p:sp>
         <p:nvSpPr>
-          <p:cNvPr id="36" name="TextBox 35"/>
+          <p:cNvPr id="44" name="TextBox 43"/>
           <p:cNvSpPr txBox="1"/>
           <p:nvPr/>
         </p:nvSpPr>
@@ -8355,7 +10650,7 @@
       </p:sp>
       <p:sp>
         <p:nvSpPr>
-          <p:cNvPr id="37" name="Rectangle 36"/>
+          <p:cNvPr id="45" name="Rectangle 44"/>
           <p:cNvSpPr/>
           <p:nvPr/>
         </p:nvSpPr>
@@ -8399,7 +10694,7 @@
       </p:sp>
       <p:sp>
         <p:nvSpPr>
-          <p:cNvPr id="38" name="TextBox 37"/>
+          <p:cNvPr id="46" name="TextBox 45"/>
           <p:cNvSpPr txBox="1"/>
           <p:nvPr/>
         </p:nvSpPr>
@@ -8540,7 +10835,469 @@
       </p:sp>
       <p:sp>
         <p:nvSpPr>
-          <p:cNvPr id="3" name="TextBox 2"/>
+          <p:cNvPr id="3" name="Freeform 2"/>
+          <p:cNvSpPr/>
+          <p:nvPr/>
+        </p:nvSpPr>
+        <p:spPr>
+          <a:xfrm>
+            <a:off x="10129418" y="119481"/>
+            <a:ext cx="112166" cy="87783"/>
+          </a:xfrm>
+          <a:custGeom>
+            <a:avLst/>
+            <a:gdLst/>
+            <a:ahLst/>
+            <a:cxnLst/>
+            <a:rect l="l" t="t" r="r" b="b"/>
+            <a:pathLst>
+              <a:path w="112166" h="87783">
+                <a:moveTo>
+                  <a:pt x="56083" y="0"/>
+                </a:moveTo>
+                <a:lnTo>
+                  <a:pt x="112166" y="87783"/>
+                </a:lnTo>
+                <a:lnTo>
+                  <a:pt x="0" y="87783"/>
+                </a:lnTo>
+                <a:close/>
+              </a:path>
+            </a:pathLst>
+          </a:custGeom>
+          <a:solidFill>
+            <a:srgbClr val="5B2E91"/>
+          </a:solidFill>
+          <a:ln>
+            <a:noFill/>
+          </a:ln>
+          <a:effectLst/>
+        </p:spPr>
+        <p:txBody>
+          <a:bodyPr rtlCol="0" anchor="ctr"/>
+          <a:lstStyle/>
+          <a:p>
+            <a:pPr algn="ctr"/>
+          </a:p>
+        </p:txBody>
+      </p:sp>
+      <p:sp>
+        <p:nvSpPr>
+          <p:cNvPr id="4" name="Freeform 3"/>
+          <p:cNvSpPr/>
+          <p:nvPr/>
+        </p:nvSpPr>
+        <p:spPr>
+          <a:xfrm>
+            <a:off x="10119447" y="207264"/>
+            <a:ext cx="132107" cy="15605"/>
+          </a:xfrm>
+          <a:custGeom>
+            <a:avLst/>
+            <a:gdLst/>
+            <a:ahLst/>
+            <a:cxnLst/>
+            <a:rect l="l" t="t" r="r" b="b"/>
+            <a:pathLst>
+              <a:path w="132107" h="15605">
+                <a:moveTo>
+                  <a:pt x="9971" y="0"/>
+                </a:moveTo>
+                <a:lnTo>
+                  <a:pt x="122137" y="0"/>
+                </a:lnTo>
+                <a:lnTo>
+                  <a:pt x="132107" y="15605"/>
+                </a:lnTo>
+                <a:lnTo>
+                  <a:pt x="0" y="15605"/>
+                </a:lnTo>
+                <a:close/>
+              </a:path>
+            </a:pathLst>
+          </a:custGeom>
+          <a:solidFill>
+            <a:srgbClr val="D2DCF7"/>
+          </a:solidFill>
+          <a:ln>
+            <a:noFill/>
+          </a:ln>
+          <a:effectLst/>
+        </p:spPr>
+        <p:txBody>
+          <a:bodyPr rtlCol="0" anchor="ctr"/>
+          <a:lstStyle/>
+          <a:p>
+            <a:pPr algn="ctr"/>
+          </a:p>
+        </p:txBody>
+      </p:sp>
+      <p:sp>
+        <p:nvSpPr>
+          <p:cNvPr id="5" name="Freeform 4"/>
+          <p:cNvSpPr/>
+          <p:nvPr/>
+        </p:nvSpPr>
+        <p:spPr>
+          <a:xfrm>
+            <a:off x="10063987" y="222869"/>
+            <a:ext cx="243028" cy="86807"/>
+          </a:xfrm>
+          <a:custGeom>
+            <a:avLst/>
+            <a:gdLst/>
+            <a:ahLst/>
+            <a:cxnLst/>
+            <a:rect l="l" t="t" r="r" b="b"/>
+            <a:pathLst>
+              <a:path w="243028" h="86807">
+                <a:moveTo>
+                  <a:pt x="55460" y="0"/>
+                </a:moveTo>
+                <a:lnTo>
+                  <a:pt x="187567" y="0"/>
+                </a:lnTo>
+                <a:lnTo>
+                  <a:pt x="243028" y="86807"/>
+                </a:lnTo>
+                <a:lnTo>
+                  <a:pt x="0" y="86807"/>
+                </a:lnTo>
+                <a:close/>
+              </a:path>
+            </a:pathLst>
+          </a:custGeom>
+          <a:solidFill>
+            <a:srgbClr val="D2E4DD"/>
+          </a:solidFill>
+          <a:ln>
+            <a:noFill/>
+          </a:ln>
+          <a:effectLst/>
+        </p:spPr>
+        <p:txBody>
+          <a:bodyPr rtlCol="0" anchor="ctr"/>
+          <a:lstStyle/>
+          <a:p>
+            <a:pPr algn="ctr"/>
+          </a:p>
+        </p:txBody>
+      </p:sp>
+      <p:sp>
+        <p:nvSpPr>
+          <p:cNvPr id="6" name="Freeform 5"/>
+          <p:cNvSpPr/>
+          <p:nvPr/>
+        </p:nvSpPr>
+        <p:spPr>
+          <a:xfrm>
+            <a:off x="10054640" y="309676"/>
+            <a:ext cx="261722" cy="14631"/>
+          </a:xfrm>
+          <a:custGeom>
+            <a:avLst/>
+            <a:gdLst/>
+            <a:ahLst/>
+            <a:cxnLst/>
+            <a:rect l="l" t="t" r="r" b="b"/>
+            <a:pathLst>
+              <a:path w="261722" h="14631">
+                <a:moveTo>
+                  <a:pt x="9347" y="0"/>
+                </a:moveTo>
+                <a:lnTo>
+                  <a:pt x="252375" y="0"/>
+                </a:lnTo>
+                <a:lnTo>
+                  <a:pt x="261722" y="14631"/>
+                </a:lnTo>
+                <a:lnTo>
+                  <a:pt x="0" y="14631"/>
+                </a:lnTo>
+                <a:close/>
+              </a:path>
+            </a:pathLst>
+          </a:custGeom>
+          <a:solidFill>
+            <a:srgbClr val="F7EBCC"/>
+          </a:solidFill>
+          <a:ln>
+            <a:noFill/>
+          </a:ln>
+          <a:effectLst/>
+        </p:spPr>
+        <p:txBody>
+          <a:bodyPr rtlCol="0" anchor="ctr"/>
+          <a:lstStyle/>
+          <a:p>
+            <a:pPr algn="ctr"/>
+          </a:p>
+        </p:txBody>
+      </p:sp>
+      <p:sp>
+        <p:nvSpPr>
+          <p:cNvPr id="7" name="Freeform 6"/>
+          <p:cNvSpPr/>
+          <p:nvPr/>
+        </p:nvSpPr>
+        <p:spPr>
+          <a:xfrm>
+            <a:off x="10004788" y="324307"/>
+            <a:ext cx="361425" cy="78029"/>
+          </a:xfrm>
+          <a:custGeom>
+            <a:avLst/>
+            <a:gdLst/>
+            <a:ahLst/>
+            <a:cxnLst/>
+            <a:rect l="l" t="t" r="r" b="b"/>
+            <a:pathLst>
+              <a:path w="361425" h="78029">
+                <a:moveTo>
+                  <a:pt x="49852" y="0"/>
+                </a:moveTo>
+                <a:lnTo>
+                  <a:pt x="311574" y="0"/>
+                </a:lnTo>
+                <a:lnTo>
+                  <a:pt x="361425" y="78029"/>
+                </a:lnTo>
+                <a:lnTo>
+                  <a:pt x="0" y="78029"/>
+                </a:lnTo>
+                <a:close/>
+              </a:path>
+            </a:pathLst>
+          </a:custGeom>
+          <a:solidFill>
+            <a:srgbClr val="F3D9CE"/>
+          </a:solidFill>
+          <a:ln>
+            <a:noFill/>
+          </a:ln>
+          <a:effectLst/>
+        </p:spPr>
+        <p:txBody>
+          <a:bodyPr rtlCol="0" anchor="ctr"/>
+          <a:lstStyle/>
+          <a:p>
+            <a:pPr algn="ctr"/>
+          </a:p>
+        </p:txBody>
+      </p:sp>
+      <p:sp>
+        <p:nvSpPr>
+          <p:cNvPr id="8" name="Freeform 7"/>
+          <p:cNvSpPr/>
+          <p:nvPr/>
+        </p:nvSpPr>
+        <p:spPr>
+          <a:xfrm>
+            <a:off x="9961168" y="402336"/>
+            <a:ext cx="448666" cy="68275"/>
+          </a:xfrm>
+          <a:custGeom>
+            <a:avLst/>
+            <a:gdLst/>
+            <a:ahLst/>
+            <a:cxnLst/>
+            <a:rect l="l" t="t" r="r" b="b"/>
+            <a:pathLst>
+              <a:path w="448666" h="68275">
+                <a:moveTo>
+                  <a:pt x="43620" y="0"/>
+                </a:moveTo>
+                <a:lnTo>
+                  <a:pt x="405045" y="0"/>
+                </a:lnTo>
+                <a:lnTo>
+                  <a:pt x="448666" y="68275"/>
+                </a:lnTo>
+                <a:lnTo>
+                  <a:pt x="0" y="68275"/>
+                </a:lnTo>
+                <a:close/>
+              </a:path>
+            </a:pathLst>
+          </a:custGeom>
+          <a:solidFill>
+            <a:srgbClr val="F5CCCC"/>
+          </a:solidFill>
+          <a:ln>
+            <a:noFill/>
+          </a:ln>
+          <a:effectLst/>
+        </p:spPr>
+        <p:txBody>
+          <a:bodyPr rtlCol="0" anchor="ctr"/>
+          <a:lstStyle/>
+          <a:p>
+            <a:pPr algn="ctr"/>
+          </a:p>
+        </p:txBody>
+      </p:sp>
+      <p:sp>
+        <p:nvSpPr>
+          <p:cNvPr id="9" name="Freeform 8"/>
+          <p:cNvSpPr/>
+          <p:nvPr/>
+        </p:nvSpPr>
+        <p:spPr>
+          <a:xfrm>
+            <a:off x="9961168" y="119481"/>
+            <a:ext cx="448666" cy="351130"/>
+          </a:xfrm>
+          <a:custGeom>
+            <a:avLst/>
+            <a:gdLst/>
+            <a:ahLst/>
+            <a:cxnLst/>
+            <a:rect l="l" t="t" r="r" b="b"/>
+            <a:pathLst>
+              <a:path w="448666" h="351130">
+                <a:moveTo>
+                  <a:pt x="224333" y="0"/>
+                </a:moveTo>
+                <a:lnTo>
+                  <a:pt x="448666" y="351130"/>
+                </a:lnTo>
+                <a:lnTo>
+                  <a:pt x="0" y="351130"/>
+                </a:lnTo>
+                <a:close/>
+              </a:path>
+            </a:pathLst>
+          </a:custGeom>
+          <a:noFill/>
+          <a:ln w="6350">
+            <a:solidFill>
+              <a:srgbClr val="CFC2BE"/>
+            </a:solidFill>
+          </a:ln>
+          <a:effectLst/>
+        </p:spPr>
+        <p:txBody>
+          <a:bodyPr rtlCol="0" anchor="ctr"/>
+          <a:lstStyle/>
+          <a:p>
+            <a:pPr algn="ctr"/>
+          </a:p>
+        </p:txBody>
+      </p:sp>
+      <p:sp>
+        <p:nvSpPr>
+          <p:cNvPr id="10" name="TextBox 9"/>
+          <p:cNvSpPr txBox="1"/>
+          <p:nvPr/>
+        </p:nvSpPr>
+        <p:spPr>
+          <a:xfrm>
+            <a:off x="10478109" y="117530"/>
+            <a:ext cx="936345" cy="351129"/>
+          </a:xfrm>
+          <a:prstGeom prst="rect">
+            <a:avLst/>
+          </a:prstGeom>
+          <a:noFill/>
+        </p:spPr>
+        <p:txBody>
+          <a:bodyPr wrap="none" lIns="0" rIns="0" tIns="0" bIns="0">
+            <a:spAutoFit/>
+          </a:bodyPr>
+          <a:lstStyle/>
+          <a:p>
+            <a:pPr>
+              <a:lnSpc>
+                <a:spcPts val="691"/>
+              </a:lnSpc>
+              <a:spcBef>
+                <a:spcPts val="0"/>
+              </a:spcBef>
+              <a:spcAft>
+                <a:spcPts val="0"/>
+              </a:spcAft>
+            </a:pPr>
+            <a:r>
+              <a:rPr sz="700" b="1">
+                <a:solidFill>
+                  <a:srgbClr val="1B1211"/>
+                </a:solidFill>
+                <a:latin typeface="Red Hat Mono"/>
+              </a:rPr>
+              <a:t>JUDGEMENT</a:t>
+            </a:r>
+          </a:p>
+          <a:p>
+            <a:pPr>
+              <a:lnSpc>
+                <a:spcPts val="691"/>
+              </a:lnSpc>
+              <a:spcBef>
+                <a:spcPts val="0"/>
+              </a:spcBef>
+              <a:spcAft>
+                <a:spcPts val="0"/>
+              </a:spcAft>
+            </a:pPr>
+            <a:r>
+              <a:rPr sz="700" b="0">
+                <a:solidFill>
+                  <a:srgbClr val="7E6A64"/>
+                </a:solidFill>
+                <a:latin typeface="Red Hat Mono"/>
+              </a:rPr>
+              <a:t>KNOWLEDGE</a:t>
+            </a:r>
+          </a:p>
+          <a:p>
+            <a:pPr>
+              <a:lnSpc>
+                <a:spcPts val="691"/>
+              </a:lnSpc>
+              <a:spcBef>
+                <a:spcPts val="0"/>
+              </a:spcBef>
+              <a:spcAft>
+                <a:spcPts val="0"/>
+              </a:spcAft>
+            </a:pPr>
+            <a:r>
+              <a:rPr sz="700" b="0">
+                <a:solidFill>
+                  <a:srgbClr val="7E6A64"/>
+                </a:solidFill>
+                <a:latin typeface="Red Hat Mono"/>
+              </a:rPr>
+              <a:t>INFORMATION</a:t>
+            </a:r>
+          </a:p>
+          <a:p>
+            <a:pPr>
+              <a:lnSpc>
+                <a:spcPts val="691"/>
+              </a:lnSpc>
+              <a:spcBef>
+                <a:spcPts val="0"/>
+              </a:spcBef>
+              <a:spcAft>
+                <a:spcPts val="0"/>
+              </a:spcAft>
+            </a:pPr>
+            <a:r>
+              <a:rPr sz="700" b="0">
+                <a:solidFill>
+                  <a:srgbClr val="7E6A64"/>
+                </a:solidFill>
+                <a:latin typeface="Red Hat Mono"/>
+              </a:rPr>
+              <a:t>DATA</a:t>
+            </a:r>
+          </a:p>
+        </p:txBody>
+      </p:sp>
+      <p:sp>
+        <p:nvSpPr>
+          <p:cNvPr id="11" name="TextBox 10"/>
           <p:cNvSpPr txBox="1"/>
           <p:nvPr/>
         </p:nvSpPr>
@@ -8579,7 +11336,7 @@
       </p:sp>
       <p:sp>
         <p:nvSpPr>
-          <p:cNvPr id="4" name="TextBox 3"/>
+          <p:cNvPr id="12" name="TextBox 11"/>
           <p:cNvSpPr txBox="1"/>
           <p:nvPr/>
         </p:nvSpPr>
@@ -8618,7 +11375,7 @@
       </p:sp>
       <p:sp>
         <p:nvSpPr>
-          <p:cNvPr id="5" name="TextBox 4"/>
+          <p:cNvPr id="13" name="TextBox 12"/>
           <p:cNvSpPr txBox="1"/>
           <p:nvPr/>
         </p:nvSpPr>
@@ -8657,7 +11414,7 @@
       </p:sp>
       <p:sp>
         <p:nvSpPr>
-          <p:cNvPr id="6" name="Chevron 5"/>
+          <p:cNvPr id="14" name="Chevron 13"/>
           <p:cNvSpPr/>
           <p:nvPr/>
         </p:nvSpPr>
@@ -8722,7 +11479,7 @@
       </p:sp>
       <p:sp>
         <p:nvSpPr>
-          <p:cNvPr id="7" name="TextBox 6"/>
+          <p:cNvPr id="15" name="TextBox 14"/>
           <p:cNvSpPr txBox="1"/>
           <p:nvPr/>
         </p:nvSpPr>
@@ -8761,7 +11518,7 @@
       </p:sp>
       <p:sp>
         <p:nvSpPr>
-          <p:cNvPr id="8" name="Rounded Rectangle 7"/>
+          <p:cNvPr id="16" name="Rounded Rectangle 15"/>
           <p:cNvSpPr/>
           <p:nvPr/>
         </p:nvSpPr>
@@ -8816,7 +11573,7 @@
       </p:sp>
       <p:sp>
         <p:nvSpPr>
-          <p:cNvPr id="9" name="Chevron 8"/>
+          <p:cNvPr id="17" name="Chevron 16"/>
           <p:cNvSpPr/>
           <p:nvPr/>
         </p:nvSpPr>
@@ -8869,7 +11626,7 @@
       </p:sp>
       <p:sp>
         <p:nvSpPr>
-          <p:cNvPr id="10" name="TextBox 9"/>
+          <p:cNvPr id="18" name="TextBox 17"/>
           <p:cNvSpPr txBox="1"/>
           <p:nvPr/>
         </p:nvSpPr>
@@ -8908,7 +11665,7 @@
       </p:sp>
       <p:sp>
         <p:nvSpPr>
-          <p:cNvPr id="11" name="Rounded Rectangle 10"/>
+          <p:cNvPr id="19" name="Rounded Rectangle 18"/>
           <p:cNvSpPr/>
           <p:nvPr/>
         </p:nvSpPr>
@@ -8963,7 +11720,7 @@
       </p:sp>
       <p:sp>
         <p:nvSpPr>
-          <p:cNvPr id="12" name="Chevron 11"/>
+          <p:cNvPr id="20" name="Chevron 19"/>
           <p:cNvSpPr/>
           <p:nvPr/>
         </p:nvSpPr>
@@ -9016,7 +11773,7 @@
       </p:sp>
       <p:sp>
         <p:nvSpPr>
-          <p:cNvPr id="13" name="TextBox 12"/>
+          <p:cNvPr id="21" name="TextBox 20"/>
           <p:cNvSpPr txBox="1"/>
           <p:nvPr/>
         </p:nvSpPr>
@@ -9055,7 +11812,7 @@
       </p:sp>
       <p:sp>
         <p:nvSpPr>
-          <p:cNvPr id="14" name="Rounded Rectangle 13"/>
+          <p:cNvPr id="22" name="Rounded Rectangle 21"/>
           <p:cNvSpPr/>
           <p:nvPr/>
         </p:nvSpPr>
@@ -9110,7 +11867,7 @@
       </p:sp>
       <p:sp>
         <p:nvSpPr>
-          <p:cNvPr id="15" name="Chevron 14"/>
+          <p:cNvPr id="23" name="Chevron 22"/>
           <p:cNvSpPr/>
           <p:nvPr/>
         </p:nvSpPr>
@@ -9175,7 +11932,7 @@
       </p:sp>
       <p:sp>
         <p:nvSpPr>
-          <p:cNvPr id="16" name="TextBox 15"/>
+          <p:cNvPr id="24" name="TextBox 23"/>
           <p:cNvSpPr txBox="1"/>
           <p:nvPr/>
         </p:nvSpPr>
@@ -9214,7 +11971,7 @@
       </p:sp>
       <p:sp>
         <p:nvSpPr>
-          <p:cNvPr id="17" name="Rounded Rectangle 16"/>
+          <p:cNvPr id="25" name="Rounded Rectangle 24"/>
           <p:cNvSpPr/>
           <p:nvPr/>
         </p:nvSpPr>
@@ -9269,7 +12026,7 @@
       </p:sp>
       <p:sp>
         <p:nvSpPr>
-          <p:cNvPr id="18" name="Chevron 17"/>
+          <p:cNvPr id="26" name="Chevron 25"/>
           <p:cNvSpPr/>
           <p:nvPr/>
         </p:nvSpPr>
@@ -9334,7 +12091,7 @@
       </p:sp>
       <p:sp>
         <p:nvSpPr>
-          <p:cNvPr id="19" name="TextBox 18"/>
+          <p:cNvPr id="27" name="TextBox 26"/>
           <p:cNvSpPr txBox="1"/>
           <p:nvPr/>
         </p:nvSpPr>
@@ -9373,7 +12130,7 @@
       </p:sp>
       <p:sp>
         <p:nvSpPr>
-          <p:cNvPr id="20" name="Rounded Rectangle 19"/>
+          <p:cNvPr id="28" name="Rounded Rectangle 27"/>
           <p:cNvSpPr/>
           <p:nvPr/>
         </p:nvSpPr>
@@ -9428,7 +12185,7 @@
       </p:sp>
       <p:sp>
         <p:nvSpPr>
-          <p:cNvPr id="21" name="Chevron 20"/>
+          <p:cNvPr id="29" name="Chevron 28"/>
           <p:cNvSpPr/>
           <p:nvPr/>
         </p:nvSpPr>
@@ -9493,7 +12250,7 @@
       </p:sp>
       <p:sp>
         <p:nvSpPr>
-          <p:cNvPr id="22" name="TextBox 21"/>
+          <p:cNvPr id="30" name="TextBox 29"/>
           <p:cNvSpPr txBox="1"/>
           <p:nvPr/>
         </p:nvSpPr>
@@ -9532,7 +12289,7 @@
       </p:sp>
       <p:sp>
         <p:nvSpPr>
-          <p:cNvPr id="23" name="Rounded Rectangle 22"/>
+          <p:cNvPr id="31" name="Rounded Rectangle 30"/>
           <p:cNvSpPr/>
           <p:nvPr/>
         </p:nvSpPr>
@@ -9587,7 +12344,7 @@
       </p:sp>
       <p:sp>
         <p:nvSpPr>
-          <p:cNvPr id="24" name="Rectangle 23"/>
+          <p:cNvPr id="32" name="Rectangle 31"/>
           <p:cNvSpPr/>
           <p:nvPr/>
         </p:nvSpPr>
@@ -9631,7 +12388,7 @@
       </p:sp>
       <p:sp>
         <p:nvSpPr>
-          <p:cNvPr id="25" name="TextBox 24"/>
+          <p:cNvPr id="33" name="TextBox 32"/>
           <p:cNvSpPr txBox="1"/>
           <p:nvPr/>
         </p:nvSpPr>
@@ -9686,7 +12443,7 @@
       </p:sp>
       <p:sp>
         <p:nvSpPr>
-          <p:cNvPr id="26" name="Rectangle 25"/>
+          <p:cNvPr id="34" name="Rectangle 33"/>
           <p:cNvSpPr/>
           <p:nvPr/>
         </p:nvSpPr>
@@ -9730,7 +12487,7 @@
       </p:sp>
       <p:sp>
         <p:nvSpPr>
-          <p:cNvPr id="27" name="TextBox 26"/>
+          <p:cNvPr id="35" name="TextBox 34"/>
           <p:cNvSpPr txBox="1"/>
           <p:nvPr/>
         </p:nvSpPr>
@@ -9855,7 +12612,469 @@
       </p:sp>
       <p:sp>
         <p:nvSpPr>
-          <p:cNvPr id="3" name="TextBox 2"/>
+          <p:cNvPr id="3" name="Freeform 2"/>
+          <p:cNvSpPr/>
+          <p:nvPr/>
+        </p:nvSpPr>
+        <p:spPr>
+          <a:xfrm>
+            <a:off x="10129418" y="119481"/>
+            <a:ext cx="112166" cy="87783"/>
+          </a:xfrm>
+          <a:custGeom>
+            <a:avLst/>
+            <a:gdLst/>
+            <a:ahLst/>
+            <a:cxnLst/>
+            <a:rect l="l" t="t" r="r" b="b"/>
+            <a:pathLst>
+              <a:path w="112166" h="87783">
+                <a:moveTo>
+                  <a:pt x="56083" y="0"/>
+                </a:moveTo>
+                <a:lnTo>
+                  <a:pt x="112166" y="87783"/>
+                </a:lnTo>
+                <a:lnTo>
+                  <a:pt x="0" y="87783"/>
+                </a:lnTo>
+                <a:close/>
+              </a:path>
+            </a:pathLst>
+          </a:custGeom>
+          <a:solidFill>
+            <a:srgbClr val="5B2E91"/>
+          </a:solidFill>
+          <a:ln>
+            <a:noFill/>
+          </a:ln>
+          <a:effectLst/>
+        </p:spPr>
+        <p:txBody>
+          <a:bodyPr rtlCol="0" anchor="ctr"/>
+          <a:lstStyle/>
+          <a:p>
+            <a:pPr algn="ctr"/>
+          </a:p>
+        </p:txBody>
+      </p:sp>
+      <p:sp>
+        <p:nvSpPr>
+          <p:cNvPr id="4" name="Freeform 3"/>
+          <p:cNvSpPr/>
+          <p:nvPr/>
+        </p:nvSpPr>
+        <p:spPr>
+          <a:xfrm>
+            <a:off x="10119447" y="207264"/>
+            <a:ext cx="132107" cy="15605"/>
+          </a:xfrm>
+          <a:custGeom>
+            <a:avLst/>
+            <a:gdLst/>
+            <a:ahLst/>
+            <a:cxnLst/>
+            <a:rect l="l" t="t" r="r" b="b"/>
+            <a:pathLst>
+              <a:path w="132107" h="15605">
+                <a:moveTo>
+                  <a:pt x="9971" y="0"/>
+                </a:moveTo>
+                <a:lnTo>
+                  <a:pt x="122137" y="0"/>
+                </a:lnTo>
+                <a:lnTo>
+                  <a:pt x="132107" y="15605"/>
+                </a:lnTo>
+                <a:lnTo>
+                  <a:pt x="0" y="15605"/>
+                </a:lnTo>
+                <a:close/>
+              </a:path>
+            </a:pathLst>
+          </a:custGeom>
+          <a:solidFill>
+            <a:srgbClr val="1D4ED8"/>
+          </a:solidFill>
+          <a:ln>
+            <a:noFill/>
+          </a:ln>
+          <a:effectLst/>
+        </p:spPr>
+        <p:txBody>
+          <a:bodyPr rtlCol="0" anchor="ctr"/>
+          <a:lstStyle/>
+          <a:p>
+            <a:pPr algn="ctr"/>
+          </a:p>
+        </p:txBody>
+      </p:sp>
+      <p:sp>
+        <p:nvSpPr>
+          <p:cNvPr id="5" name="Freeform 4"/>
+          <p:cNvSpPr/>
+          <p:nvPr/>
+        </p:nvSpPr>
+        <p:spPr>
+          <a:xfrm>
+            <a:off x="10063987" y="222869"/>
+            <a:ext cx="243028" cy="86807"/>
+          </a:xfrm>
+          <a:custGeom>
+            <a:avLst/>
+            <a:gdLst/>
+            <a:ahLst/>
+            <a:cxnLst/>
+            <a:rect l="l" t="t" r="r" b="b"/>
+            <a:pathLst>
+              <a:path w="243028" h="86807">
+                <a:moveTo>
+                  <a:pt x="55460" y="0"/>
+                </a:moveTo>
+                <a:lnTo>
+                  <a:pt x="187567" y="0"/>
+                </a:lnTo>
+                <a:lnTo>
+                  <a:pt x="243028" y="86807"/>
+                </a:lnTo>
+                <a:lnTo>
+                  <a:pt x="0" y="86807"/>
+                </a:lnTo>
+                <a:close/>
+              </a:path>
+            </a:pathLst>
+          </a:custGeom>
+          <a:solidFill>
+            <a:srgbClr val="1E7A55"/>
+          </a:solidFill>
+          <a:ln>
+            <a:noFill/>
+          </a:ln>
+          <a:effectLst/>
+        </p:spPr>
+        <p:txBody>
+          <a:bodyPr rtlCol="0" anchor="ctr"/>
+          <a:lstStyle/>
+          <a:p>
+            <a:pPr algn="ctr"/>
+          </a:p>
+        </p:txBody>
+      </p:sp>
+      <p:sp>
+        <p:nvSpPr>
+          <p:cNvPr id="6" name="Freeform 5"/>
+          <p:cNvSpPr/>
+          <p:nvPr/>
+        </p:nvSpPr>
+        <p:spPr>
+          <a:xfrm>
+            <a:off x="10054640" y="309676"/>
+            <a:ext cx="261722" cy="14631"/>
+          </a:xfrm>
+          <a:custGeom>
+            <a:avLst/>
+            <a:gdLst/>
+            <a:ahLst/>
+            <a:cxnLst/>
+            <a:rect l="l" t="t" r="r" b="b"/>
+            <a:pathLst>
+              <a:path w="261722" h="14631">
+                <a:moveTo>
+                  <a:pt x="9347" y="0"/>
+                </a:moveTo>
+                <a:lnTo>
+                  <a:pt x="252375" y="0"/>
+                </a:lnTo>
+                <a:lnTo>
+                  <a:pt x="261722" y="14631"/>
+                </a:lnTo>
+                <a:lnTo>
+                  <a:pt x="0" y="14631"/>
+                </a:lnTo>
+                <a:close/>
+              </a:path>
+            </a:pathLst>
+          </a:custGeom>
+          <a:solidFill>
+            <a:srgbClr val="D99A00"/>
+          </a:solidFill>
+          <a:ln>
+            <a:noFill/>
+          </a:ln>
+          <a:effectLst/>
+        </p:spPr>
+        <p:txBody>
+          <a:bodyPr rtlCol="0" anchor="ctr"/>
+          <a:lstStyle/>
+          <a:p>
+            <a:pPr algn="ctr"/>
+          </a:p>
+        </p:txBody>
+      </p:sp>
+      <p:sp>
+        <p:nvSpPr>
+          <p:cNvPr id="7" name="Freeform 6"/>
+          <p:cNvSpPr/>
+          <p:nvPr/>
+        </p:nvSpPr>
+        <p:spPr>
+          <a:xfrm>
+            <a:off x="10004788" y="324307"/>
+            <a:ext cx="361425" cy="78029"/>
+          </a:xfrm>
+          <a:custGeom>
+            <a:avLst/>
+            <a:gdLst/>
+            <a:ahLst/>
+            <a:cxnLst/>
+            <a:rect l="l" t="t" r="r" b="b"/>
+            <a:pathLst>
+              <a:path w="361425" h="78029">
+                <a:moveTo>
+                  <a:pt x="49852" y="0"/>
+                </a:moveTo>
+                <a:lnTo>
+                  <a:pt x="311574" y="0"/>
+                </a:lnTo>
+                <a:lnTo>
+                  <a:pt x="361425" y="78029"/>
+                </a:lnTo>
+                <a:lnTo>
+                  <a:pt x="0" y="78029"/>
+                </a:lnTo>
+                <a:close/>
+              </a:path>
+            </a:pathLst>
+          </a:custGeom>
+          <a:solidFill>
+            <a:srgbClr val="C2410C"/>
+          </a:solidFill>
+          <a:ln>
+            <a:noFill/>
+          </a:ln>
+          <a:effectLst/>
+        </p:spPr>
+        <p:txBody>
+          <a:bodyPr rtlCol="0" anchor="ctr"/>
+          <a:lstStyle/>
+          <a:p>
+            <a:pPr algn="ctr"/>
+          </a:p>
+        </p:txBody>
+      </p:sp>
+      <p:sp>
+        <p:nvSpPr>
+          <p:cNvPr id="8" name="Freeform 7"/>
+          <p:cNvSpPr/>
+          <p:nvPr/>
+        </p:nvSpPr>
+        <p:spPr>
+          <a:xfrm>
+            <a:off x="9961168" y="402336"/>
+            <a:ext cx="448666" cy="68275"/>
+          </a:xfrm>
+          <a:custGeom>
+            <a:avLst/>
+            <a:gdLst/>
+            <a:ahLst/>
+            <a:cxnLst/>
+            <a:rect l="l" t="t" r="r" b="b"/>
+            <a:pathLst>
+              <a:path w="448666" h="68275">
+                <a:moveTo>
+                  <a:pt x="43620" y="0"/>
+                </a:moveTo>
+                <a:lnTo>
+                  <a:pt x="405045" y="0"/>
+                </a:lnTo>
+                <a:lnTo>
+                  <a:pt x="448666" y="68275"/>
+                </a:lnTo>
+                <a:lnTo>
+                  <a:pt x="0" y="68275"/>
+                </a:lnTo>
+                <a:close/>
+              </a:path>
+            </a:pathLst>
+          </a:custGeom>
+          <a:solidFill>
+            <a:srgbClr val="CC0000"/>
+          </a:solidFill>
+          <a:ln>
+            <a:noFill/>
+          </a:ln>
+          <a:effectLst/>
+        </p:spPr>
+        <p:txBody>
+          <a:bodyPr rtlCol="0" anchor="ctr"/>
+          <a:lstStyle/>
+          <a:p>
+            <a:pPr algn="ctr"/>
+          </a:p>
+        </p:txBody>
+      </p:sp>
+      <p:sp>
+        <p:nvSpPr>
+          <p:cNvPr id="9" name="Freeform 8"/>
+          <p:cNvSpPr/>
+          <p:nvPr/>
+        </p:nvSpPr>
+        <p:spPr>
+          <a:xfrm>
+            <a:off x="9961168" y="119481"/>
+            <a:ext cx="448666" cy="351130"/>
+          </a:xfrm>
+          <a:custGeom>
+            <a:avLst/>
+            <a:gdLst/>
+            <a:ahLst/>
+            <a:cxnLst/>
+            <a:rect l="l" t="t" r="r" b="b"/>
+            <a:pathLst>
+              <a:path w="448666" h="351130">
+                <a:moveTo>
+                  <a:pt x="224333" y="0"/>
+                </a:moveTo>
+                <a:lnTo>
+                  <a:pt x="448666" y="351130"/>
+                </a:lnTo>
+                <a:lnTo>
+                  <a:pt x="0" y="351130"/>
+                </a:lnTo>
+                <a:close/>
+              </a:path>
+            </a:pathLst>
+          </a:custGeom>
+          <a:noFill/>
+          <a:ln w="6350">
+            <a:solidFill>
+              <a:srgbClr val="CFC2BE"/>
+            </a:solidFill>
+          </a:ln>
+          <a:effectLst/>
+        </p:spPr>
+        <p:txBody>
+          <a:bodyPr rtlCol="0" anchor="ctr"/>
+          <a:lstStyle/>
+          <a:p>
+            <a:pPr algn="ctr"/>
+          </a:p>
+        </p:txBody>
+      </p:sp>
+      <p:sp>
+        <p:nvSpPr>
+          <p:cNvPr id="10" name="TextBox 9"/>
+          <p:cNvSpPr txBox="1"/>
+          <p:nvPr/>
+        </p:nvSpPr>
+        <p:spPr>
+          <a:xfrm>
+            <a:off x="10478109" y="117530"/>
+            <a:ext cx="936345" cy="351129"/>
+          </a:xfrm>
+          <a:prstGeom prst="rect">
+            <a:avLst/>
+          </a:prstGeom>
+          <a:noFill/>
+        </p:spPr>
+        <p:txBody>
+          <a:bodyPr wrap="none" lIns="0" rIns="0" tIns="0" bIns="0">
+            <a:spAutoFit/>
+          </a:bodyPr>
+          <a:lstStyle/>
+          <a:p>
+            <a:pPr>
+              <a:lnSpc>
+                <a:spcPts val="691"/>
+              </a:lnSpc>
+              <a:spcBef>
+                <a:spcPts val="0"/>
+              </a:spcBef>
+              <a:spcAft>
+                <a:spcPts val="0"/>
+              </a:spcAft>
+            </a:pPr>
+            <a:r>
+              <a:rPr sz="700" b="1">
+                <a:solidFill>
+                  <a:srgbClr val="1B1211"/>
+                </a:solidFill>
+                <a:latin typeface="Red Hat Mono"/>
+              </a:rPr>
+              <a:t>JUDGEMENT</a:t>
+            </a:r>
+          </a:p>
+          <a:p>
+            <a:pPr>
+              <a:lnSpc>
+                <a:spcPts val="691"/>
+              </a:lnSpc>
+              <a:spcBef>
+                <a:spcPts val="0"/>
+              </a:spcBef>
+              <a:spcAft>
+                <a:spcPts val="0"/>
+              </a:spcAft>
+            </a:pPr>
+            <a:r>
+              <a:rPr sz="700" b="1">
+                <a:solidFill>
+                  <a:srgbClr val="1B1211"/>
+                </a:solidFill>
+                <a:latin typeface="Red Hat Mono"/>
+              </a:rPr>
+              <a:t>KNOWLEDGE</a:t>
+            </a:r>
+          </a:p>
+          <a:p>
+            <a:pPr>
+              <a:lnSpc>
+                <a:spcPts val="691"/>
+              </a:lnSpc>
+              <a:spcBef>
+                <a:spcPts val="0"/>
+              </a:spcBef>
+              <a:spcAft>
+                <a:spcPts val="0"/>
+              </a:spcAft>
+            </a:pPr>
+            <a:r>
+              <a:rPr sz="700" b="1">
+                <a:solidFill>
+                  <a:srgbClr val="1B1211"/>
+                </a:solidFill>
+                <a:latin typeface="Red Hat Mono"/>
+              </a:rPr>
+              <a:t>INFORMATION</a:t>
+            </a:r>
+          </a:p>
+          <a:p>
+            <a:pPr>
+              <a:lnSpc>
+                <a:spcPts val="691"/>
+              </a:lnSpc>
+              <a:spcBef>
+                <a:spcPts val="0"/>
+              </a:spcBef>
+              <a:spcAft>
+                <a:spcPts val="0"/>
+              </a:spcAft>
+            </a:pPr>
+            <a:r>
+              <a:rPr sz="700" b="1">
+                <a:solidFill>
+                  <a:srgbClr val="1B1211"/>
+                </a:solidFill>
+                <a:latin typeface="Red Hat Mono"/>
+              </a:rPr>
+              <a:t>DATA</a:t>
+            </a:r>
+          </a:p>
+        </p:txBody>
+      </p:sp>
+      <p:sp>
+        <p:nvSpPr>
+          <p:cNvPr id="11" name="TextBox 10"/>
           <p:cNvSpPr txBox="1"/>
           <p:nvPr/>
         </p:nvSpPr>
@@ -9894,7 +13113,7 @@
       </p:sp>
       <p:sp>
         <p:nvSpPr>
-          <p:cNvPr id="4" name="TextBox 3"/>
+          <p:cNvPr id="12" name="TextBox 11"/>
           <p:cNvSpPr txBox="1"/>
           <p:nvPr/>
         </p:nvSpPr>
@@ -9933,7 +13152,7 @@
       </p:sp>
       <p:graphicFrame>
         <p:nvGraphicFramePr>
-          <p:cNvPr id="5" name="Table 4"/>
+          <p:cNvPr id="13" name="Table 12"/>
           <p:cNvGraphicFramePr>
             <a:graphicFrameLocks noGrp="1"/>
           </p:cNvGraphicFramePr>
@@ -10080,7 +13299,7 @@
                           </a:solidFill>
                           <a:latin typeface="Red Hat Text"/>
                         </a:rPr>
-                        <a:t>Ansible Automation Platform, Event-Driven Ansible</a:t>
+                        <a:t>Ansible Automation Platform, Event-Driven Ansible, OpenShift</a:t>
                       </a:r>
                     </a:p>
                   </a:txBody>
@@ -10102,7 +13321,7 @@
                           </a:solidFill>
                           <a:latin typeface="Red Hat Mono"/>
                         </a:rPr>
-                        <a:t>05</a:t>
+                        <a:t>05, 07</a:t>
                       </a:r>
                     </a:p>
                   </a:txBody>
@@ -10499,6 +13718,61 @@
           </a:graphicData>
         </a:graphic>
       </p:graphicFrame>
+      <p:sp>
+        <p:nvSpPr>
+          <p:cNvPr id="14" name="TextBox 13"/>
+          <p:cNvSpPr txBox="1"/>
+          <p:nvPr/>
+        </p:nvSpPr>
+        <p:spPr>
+          <a:xfrm>
+            <a:off x="777240" y="4892040"/>
+            <a:ext cx="10515600" cy="1097280"/>
+          </a:xfrm>
+          <a:prstGeom prst="rect">
+            <a:avLst/>
+          </a:prstGeom>
+          <a:noFill/>
+        </p:spPr>
+        <p:txBody>
+          <a:bodyPr wrap="square">
+            <a:spAutoFit/>
+          </a:bodyPr>
+          <a:lstStyle/>
+          <a:p>
+            <a:pPr algn="l">
+              <a:spcAft>
+                <a:spcPts val="600"/>
+              </a:spcAft>
+            </a:pPr>
+            <a:r>
+              <a:rPr sz="1500" b="1">
+                <a:solidFill>
+                  <a:srgbClr val="1B1211"/>
+                </a:solidFill>
+                <a:latin typeface="Red Hat Display"/>
+              </a:rPr>
+              <a:t>Outcome 01 in practice: the closed loop</a:t>
+            </a:r>
+          </a:p>
+          <a:p>
+            <a:pPr algn="l">
+              <a:spcAft>
+                <a:spcPts val="0"/>
+              </a:spcAft>
+            </a:pPr>
+            <a:r>
+              <a:rPr sz="1250" b="0">
+                <a:solidFill>
+                  <a:srgbClr val="54423E"/>
+                </a:solidFill>
+                <a:latin typeface="Red Hat Text"/>
+              </a:rPr>
+              <a:t>Wrap legacy systems in intelligent workflows instead of rewriting them. An error string in a log fires an Event-Driven Ansible rule, a playbook runs on the right hosts, the on-call gets an email, and a ticket opens and closes in ServiceNow or Remedy. The system of record stays untouched.</a:t>
+            </a:r>
+          </a:p>
+        </p:txBody>
+      </p:sp>
     </p:spTree>
   </p:cSld>
   <p:clrMapOvr>
@@ -10571,7 +13845,469 @@
       </p:sp>
       <p:sp>
         <p:nvSpPr>
-          <p:cNvPr id="3" name="TextBox 2"/>
+          <p:cNvPr id="3" name="Freeform 2"/>
+          <p:cNvSpPr/>
+          <p:nvPr/>
+        </p:nvSpPr>
+        <p:spPr>
+          <a:xfrm>
+            <a:off x="10129418" y="119481"/>
+            <a:ext cx="112166" cy="87783"/>
+          </a:xfrm>
+          <a:custGeom>
+            <a:avLst/>
+            <a:gdLst/>
+            <a:ahLst/>
+            <a:cxnLst/>
+            <a:rect l="l" t="t" r="r" b="b"/>
+            <a:pathLst>
+              <a:path w="112166" h="87783">
+                <a:moveTo>
+                  <a:pt x="56083" y="0"/>
+                </a:moveTo>
+                <a:lnTo>
+                  <a:pt x="112166" y="87783"/>
+                </a:lnTo>
+                <a:lnTo>
+                  <a:pt x="0" y="87783"/>
+                </a:lnTo>
+                <a:close/>
+              </a:path>
+            </a:pathLst>
+          </a:custGeom>
+          <a:solidFill>
+            <a:srgbClr val="5B2E91"/>
+          </a:solidFill>
+          <a:ln>
+            <a:noFill/>
+          </a:ln>
+          <a:effectLst/>
+        </p:spPr>
+        <p:txBody>
+          <a:bodyPr rtlCol="0" anchor="ctr"/>
+          <a:lstStyle/>
+          <a:p>
+            <a:pPr algn="ctr"/>
+          </a:p>
+        </p:txBody>
+      </p:sp>
+      <p:sp>
+        <p:nvSpPr>
+          <p:cNvPr id="4" name="Freeform 3"/>
+          <p:cNvSpPr/>
+          <p:nvPr/>
+        </p:nvSpPr>
+        <p:spPr>
+          <a:xfrm>
+            <a:off x="10119447" y="207264"/>
+            <a:ext cx="132107" cy="15605"/>
+          </a:xfrm>
+          <a:custGeom>
+            <a:avLst/>
+            <a:gdLst/>
+            <a:ahLst/>
+            <a:cxnLst/>
+            <a:rect l="l" t="t" r="r" b="b"/>
+            <a:pathLst>
+              <a:path w="132107" h="15605">
+                <a:moveTo>
+                  <a:pt x="9971" y="0"/>
+                </a:moveTo>
+                <a:lnTo>
+                  <a:pt x="122137" y="0"/>
+                </a:lnTo>
+                <a:lnTo>
+                  <a:pt x="132107" y="15605"/>
+                </a:lnTo>
+                <a:lnTo>
+                  <a:pt x="0" y="15605"/>
+                </a:lnTo>
+                <a:close/>
+              </a:path>
+            </a:pathLst>
+          </a:custGeom>
+          <a:solidFill>
+            <a:srgbClr val="1D4ED8"/>
+          </a:solidFill>
+          <a:ln>
+            <a:noFill/>
+          </a:ln>
+          <a:effectLst/>
+        </p:spPr>
+        <p:txBody>
+          <a:bodyPr rtlCol="0" anchor="ctr"/>
+          <a:lstStyle/>
+          <a:p>
+            <a:pPr algn="ctr"/>
+          </a:p>
+        </p:txBody>
+      </p:sp>
+      <p:sp>
+        <p:nvSpPr>
+          <p:cNvPr id="5" name="Freeform 4"/>
+          <p:cNvSpPr/>
+          <p:nvPr/>
+        </p:nvSpPr>
+        <p:spPr>
+          <a:xfrm>
+            <a:off x="10063987" y="222869"/>
+            <a:ext cx="243028" cy="86807"/>
+          </a:xfrm>
+          <a:custGeom>
+            <a:avLst/>
+            <a:gdLst/>
+            <a:ahLst/>
+            <a:cxnLst/>
+            <a:rect l="l" t="t" r="r" b="b"/>
+            <a:pathLst>
+              <a:path w="243028" h="86807">
+                <a:moveTo>
+                  <a:pt x="55460" y="0"/>
+                </a:moveTo>
+                <a:lnTo>
+                  <a:pt x="187567" y="0"/>
+                </a:lnTo>
+                <a:lnTo>
+                  <a:pt x="243028" y="86807"/>
+                </a:lnTo>
+                <a:lnTo>
+                  <a:pt x="0" y="86807"/>
+                </a:lnTo>
+                <a:close/>
+              </a:path>
+            </a:pathLst>
+          </a:custGeom>
+          <a:solidFill>
+            <a:srgbClr val="1E7A55"/>
+          </a:solidFill>
+          <a:ln>
+            <a:noFill/>
+          </a:ln>
+          <a:effectLst/>
+        </p:spPr>
+        <p:txBody>
+          <a:bodyPr rtlCol="0" anchor="ctr"/>
+          <a:lstStyle/>
+          <a:p>
+            <a:pPr algn="ctr"/>
+          </a:p>
+        </p:txBody>
+      </p:sp>
+      <p:sp>
+        <p:nvSpPr>
+          <p:cNvPr id="6" name="Freeform 5"/>
+          <p:cNvSpPr/>
+          <p:nvPr/>
+        </p:nvSpPr>
+        <p:spPr>
+          <a:xfrm>
+            <a:off x="10054640" y="309676"/>
+            <a:ext cx="261722" cy="14631"/>
+          </a:xfrm>
+          <a:custGeom>
+            <a:avLst/>
+            <a:gdLst/>
+            <a:ahLst/>
+            <a:cxnLst/>
+            <a:rect l="l" t="t" r="r" b="b"/>
+            <a:pathLst>
+              <a:path w="261722" h="14631">
+                <a:moveTo>
+                  <a:pt x="9347" y="0"/>
+                </a:moveTo>
+                <a:lnTo>
+                  <a:pt x="252375" y="0"/>
+                </a:lnTo>
+                <a:lnTo>
+                  <a:pt x="261722" y="14631"/>
+                </a:lnTo>
+                <a:lnTo>
+                  <a:pt x="0" y="14631"/>
+                </a:lnTo>
+                <a:close/>
+              </a:path>
+            </a:pathLst>
+          </a:custGeom>
+          <a:solidFill>
+            <a:srgbClr val="D99A00"/>
+          </a:solidFill>
+          <a:ln>
+            <a:noFill/>
+          </a:ln>
+          <a:effectLst/>
+        </p:spPr>
+        <p:txBody>
+          <a:bodyPr rtlCol="0" anchor="ctr"/>
+          <a:lstStyle/>
+          <a:p>
+            <a:pPr algn="ctr"/>
+          </a:p>
+        </p:txBody>
+      </p:sp>
+      <p:sp>
+        <p:nvSpPr>
+          <p:cNvPr id="7" name="Freeform 6"/>
+          <p:cNvSpPr/>
+          <p:nvPr/>
+        </p:nvSpPr>
+        <p:spPr>
+          <a:xfrm>
+            <a:off x="10004788" y="324307"/>
+            <a:ext cx="361425" cy="78029"/>
+          </a:xfrm>
+          <a:custGeom>
+            <a:avLst/>
+            <a:gdLst/>
+            <a:ahLst/>
+            <a:cxnLst/>
+            <a:rect l="l" t="t" r="r" b="b"/>
+            <a:pathLst>
+              <a:path w="361425" h="78029">
+                <a:moveTo>
+                  <a:pt x="49852" y="0"/>
+                </a:moveTo>
+                <a:lnTo>
+                  <a:pt x="311574" y="0"/>
+                </a:lnTo>
+                <a:lnTo>
+                  <a:pt x="361425" y="78029"/>
+                </a:lnTo>
+                <a:lnTo>
+                  <a:pt x="0" y="78029"/>
+                </a:lnTo>
+                <a:close/>
+              </a:path>
+            </a:pathLst>
+          </a:custGeom>
+          <a:solidFill>
+            <a:srgbClr val="C2410C"/>
+          </a:solidFill>
+          <a:ln>
+            <a:noFill/>
+          </a:ln>
+          <a:effectLst/>
+        </p:spPr>
+        <p:txBody>
+          <a:bodyPr rtlCol="0" anchor="ctr"/>
+          <a:lstStyle/>
+          <a:p>
+            <a:pPr algn="ctr"/>
+          </a:p>
+        </p:txBody>
+      </p:sp>
+      <p:sp>
+        <p:nvSpPr>
+          <p:cNvPr id="8" name="Freeform 7"/>
+          <p:cNvSpPr/>
+          <p:nvPr/>
+        </p:nvSpPr>
+        <p:spPr>
+          <a:xfrm>
+            <a:off x="9961168" y="402336"/>
+            <a:ext cx="448666" cy="68275"/>
+          </a:xfrm>
+          <a:custGeom>
+            <a:avLst/>
+            <a:gdLst/>
+            <a:ahLst/>
+            <a:cxnLst/>
+            <a:rect l="l" t="t" r="r" b="b"/>
+            <a:pathLst>
+              <a:path w="448666" h="68275">
+                <a:moveTo>
+                  <a:pt x="43620" y="0"/>
+                </a:moveTo>
+                <a:lnTo>
+                  <a:pt x="405045" y="0"/>
+                </a:lnTo>
+                <a:lnTo>
+                  <a:pt x="448666" y="68275"/>
+                </a:lnTo>
+                <a:lnTo>
+                  <a:pt x="0" y="68275"/>
+                </a:lnTo>
+                <a:close/>
+              </a:path>
+            </a:pathLst>
+          </a:custGeom>
+          <a:solidFill>
+            <a:srgbClr val="CC0000"/>
+          </a:solidFill>
+          <a:ln>
+            <a:noFill/>
+          </a:ln>
+          <a:effectLst/>
+        </p:spPr>
+        <p:txBody>
+          <a:bodyPr rtlCol="0" anchor="ctr"/>
+          <a:lstStyle/>
+          <a:p>
+            <a:pPr algn="ctr"/>
+          </a:p>
+        </p:txBody>
+      </p:sp>
+      <p:sp>
+        <p:nvSpPr>
+          <p:cNvPr id="9" name="Freeform 8"/>
+          <p:cNvSpPr/>
+          <p:nvPr/>
+        </p:nvSpPr>
+        <p:spPr>
+          <a:xfrm>
+            <a:off x="9961168" y="119481"/>
+            <a:ext cx="448666" cy="351130"/>
+          </a:xfrm>
+          <a:custGeom>
+            <a:avLst/>
+            <a:gdLst/>
+            <a:ahLst/>
+            <a:cxnLst/>
+            <a:rect l="l" t="t" r="r" b="b"/>
+            <a:pathLst>
+              <a:path w="448666" h="351130">
+                <a:moveTo>
+                  <a:pt x="224333" y="0"/>
+                </a:moveTo>
+                <a:lnTo>
+                  <a:pt x="448666" y="351130"/>
+                </a:lnTo>
+                <a:lnTo>
+                  <a:pt x="0" y="351130"/>
+                </a:lnTo>
+                <a:close/>
+              </a:path>
+            </a:pathLst>
+          </a:custGeom>
+          <a:noFill/>
+          <a:ln w="6350">
+            <a:solidFill>
+              <a:srgbClr val="CFC2BE"/>
+            </a:solidFill>
+          </a:ln>
+          <a:effectLst/>
+        </p:spPr>
+        <p:txBody>
+          <a:bodyPr rtlCol="0" anchor="ctr"/>
+          <a:lstStyle/>
+          <a:p>
+            <a:pPr algn="ctr"/>
+          </a:p>
+        </p:txBody>
+      </p:sp>
+      <p:sp>
+        <p:nvSpPr>
+          <p:cNvPr id="10" name="TextBox 9"/>
+          <p:cNvSpPr txBox="1"/>
+          <p:nvPr/>
+        </p:nvSpPr>
+        <p:spPr>
+          <a:xfrm>
+            <a:off x="10478109" y="117530"/>
+            <a:ext cx="936345" cy="351129"/>
+          </a:xfrm>
+          <a:prstGeom prst="rect">
+            <a:avLst/>
+          </a:prstGeom>
+          <a:noFill/>
+        </p:spPr>
+        <p:txBody>
+          <a:bodyPr wrap="none" lIns="0" rIns="0" tIns="0" bIns="0">
+            <a:spAutoFit/>
+          </a:bodyPr>
+          <a:lstStyle/>
+          <a:p>
+            <a:pPr>
+              <a:lnSpc>
+                <a:spcPts val="691"/>
+              </a:lnSpc>
+              <a:spcBef>
+                <a:spcPts val="0"/>
+              </a:spcBef>
+              <a:spcAft>
+                <a:spcPts val="0"/>
+              </a:spcAft>
+            </a:pPr>
+            <a:r>
+              <a:rPr sz="700" b="1">
+                <a:solidFill>
+                  <a:srgbClr val="1B1211"/>
+                </a:solidFill>
+                <a:latin typeface="Red Hat Mono"/>
+              </a:rPr>
+              <a:t>JUDGEMENT</a:t>
+            </a:r>
+          </a:p>
+          <a:p>
+            <a:pPr>
+              <a:lnSpc>
+                <a:spcPts val="691"/>
+              </a:lnSpc>
+              <a:spcBef>
+                <a:spcPts val="0"/>
+              </a:spcBef>
+              <a:spcAft>
+                <a:spcPts val="0"/>
+              </a:spcAft>
+            </a:pPr>
+            <a:r>
+              <a:rPr sz="700" b="1">
+                <a:solidFill>
+                  <a:srgbClr val="1B1211"/>
+                </a:solidFill>
+                <a:latin typeface="Red Hat Mono"/>
+              </a:rPr>
+              <a:t>KNOWLEDGE</a:t>
+            </a:r>
+          </a:p>
+          <a:p>
+            <a:pPr>
+              <a:lnSpc>
+                <a:spcPts val="691"/>
+              </a:lnSpc>
+              <a:spcBef>
+                <a:spcPts val="0"/>
+              </a:spcBef>
+              <a:spcAft>
+                <a:spcPts val="0"/>
+              </a:spcAft>
+            </a:pPr>
+            <a:r>
+              <a:rPr sz="700" b="1">
+                <a:solidFill>
+                  <a:srgbClr val="1B1211"/>
+                </a:solidFill>
+                <a:latin typeface="Red Hat Mono"/>
+              </a:rPr>
+              <a:t>INFORMATION</a:t>
+            </a:r>
+          </a:p>
+          <a:p>
+            <a:pPr>
+              <a:lnSpc>
+                <a:spcPts val="691"/>
+              </a:lnSpc>
+              <a:spcBef>
+                <a:spcPts val="0"/>
+              </a:spcBef>
+              <a:spcAft>
+                <a:spcPts val="0"/>
+              </a:spcAft>
+            </a:pPr>
+            <a:r>
+              <a:rPr sz="700" b="1">
+                <a:solidFill>
+                  <a:srgbClr val="1B1211"/>
+                </a:solidFill>
+                <a:latin typeface="Red Hat Mono"/>
+              </a:rPr>
+              <a:t>DATA</a:t>
+            </a:r>
+          </a:p>
+        </p:txBody>
+      </p:sp>
+      <p:sp>
+        <p:nvSpPr>
+          <p:cNvPr id="11" name="TextBox 10"/>
           <p:cNvSpPr txBox="1"/>
           <p:nvPr/>
         </p:nvSpPr>
@@ -10610,7 +14346,7 @@
       </p:sp>
       <p:sp>
         <p:nvSpPr>
-          <p:cNvPr id="4" name="TextBox 3"/>
+          <p:cNvPr id="12" name="TextBox 11"/>
           <p:cNvSpPr txBox="1"/>
           <p:nvPr/>
         </p:nvSpPr>
@@ -10649,7 +14385,7 @@
       </p:sp>
       <p:sp>
         <p:nvSpPr>
-          <p:cNvPr id="5" name="Rounded Rectangle 4"/>
+          <p:cNvPr id="13" name="Rounded Rectangle 12"/>
           <p:cNvSpPr/>
           <p:nvPr/>
         </p:nvSpPr>
@@ -10697,7 +14433,7 @@
       </p:sp>
       <p:sp>
         <p:nvSpPr>
-          <p:cNvPr id="6" name="TextBox 5"/>
+          <p:cNvPr id="14" name="TextBox 13"/>
           <p:cNvSpPr txBox="1"/>
           <p:nvPr/>
         </p:nvSpPr>
@@ -10864,7 +14600,7 @@
       </p:sp>
       <p:sp>
         <p:nvSpPr>
-          <p:cNvPr id="7" name="Rounded Rectangle 6"/>
+          <p:cNvPr id="15" name="Rounded Rectangle 14"/>
           <p:cNvSpPr/>
           <p:nvPr/>
         </p:nvSpPr>
@@ -10912,7 +14648,7 @@
       </p:sp>
       <p:sp>
         <p:nvSpPr>
-          <p:cNvPr id="8" name="TextBox 7"/>
+          <p:cNvPr id="16" name="TextBox 15"/>
           <p:cNvSpPr txBox="1"/>
           <p:nvPr/>
         </p:nvSpPr>
@@ -11063,7 +14799,7 @@
       </p:sp>
       <p:sp>
         <p:nvSpPr>
-          <p:cNvPr id="9" name="Rounded Rectangle 8"/>
+          <p:cNvPr id="17" name="Rounded Rectangle 16"/>
           <p:cNvSpPr/>
           <p:nvPr/>
         </p:nvSpPr>
@@ -11111,7 +14847,7 @@
       </p:sp>
       <p:sp>
         <p:nvSpPr>
-          <p:cNvPr id="10" name="TextBox 9"/>
+          <p:cNvPr id="18" name="TextBox 17"/>
           <p:cNvSpPr txBox="1"/>
           <p:nvPr/>
         </p:nvSpPr>
@@ -11166,7 +14902,7 @@
       </p:sp>
       <p:sp>
         <p:nvSpPr>
-          <p:cNvPr id="11" name="Oval 10"/>
+          <p:cNvPr id="19" name="Oval 18"/>
           <p:cNvSpPr/>
           <p:nvPr/>
         </p:nvSpPr>
@@ -11210,7 +14946,7 @@
       </p:sp>
       <p:sp>
         <p:nvSpPr>
-          <p:cNvPr id="12" name="Oval 11"/>
+          <p:cNvPr id="20" name="Oval 19"/>
           <p:cNvSpPr/>
           <p:nvPr/>
         </p:nvSpPr>
@@ -11254,7 +14990,7 @@
       </p:sp>
       <p:sp>
         <p:nvSpPr>
-          <p:cNvPr id="13" name="Oval 12"/>
+          <p:cNvPr id="21" name="Oval 20"/>
           <p:cNvSpPr/>
           <p:nvPr/>
         </p:nvSpPr>
@@ -11298,7 +15034,7 @@
       </p:sp>
       <p:sp>
         <p:nvSpPr>
-          <p:cNvPr id="14" name="Oval 13"/>
+          <p:cNvPr id="22" name="Oval 21"/>
           <p:cNvSpPr/>
           <p:nvPr/>
         </p:nvSpPr>
@@ -11342,7 +15078,7 @@
       </p:sp>
       <p:sp>
         <p:nvSpPr>
-          <p:cNvPr id="15" name="Rounded Rectangle 14"/>
+          <p:cNvPr id="23" name="Rounded Rectangle 22"/>
           <p:cNvSpPr/>
           <p:nvPr/>
         </p:nvSpPr>
@@ -11390,7 +15126,7 @@
       </p:sp>
       <p:sp>
         <p:nvSpPr>
-          <p:cNvPr id="16" name="TextBox 15"/>
+          <p:cNvPr id="24" name="TextBox 23"/>
           <p:cNvSpPr txBox="1"/>
           <p:nvPr/>
         </p:nvSpPr>
@@ -11445,7 +15181,7 @@
       </p:sp>
       <p:sp>
         <p:nvSpPr>
-          <p:cNvPr id="17" name="TextBox 16"/>
+          <p:cNvPr id="25" name="TextBox 24"/>
           <p:cNvSpPr txBox="1"/>
           <p:nvPr/>
         </p:nvSpPr>
@@ -11484,7 +15220,7 @@
       </p:sp>
       <p:sp>
         <p:nvSpPr>
-          <p:cNvPr id="18" name="Rounded Rectangle 17"/>
+          <p:cNvPr id="26" name="Rounded Rectangle 25"/>
           <p:cNvSpPr/>
           <p:nvPr/>
         </p:nvSpPr>
@@ -11532,7 +15268,7 @@
       </p:sp>
       <p:sp>
         <p:nvSpPr>
-          <p:cNvPr id="19" name="TextBox 18"/>
+          <p:cNvPr id="27" name="TextBox 26"/>
           <p:cNvSpPr txBox="1"/>
           <p:nvPr/>
         </p:nvSpPr>
@@ -11587,7 +15323,7 @@
       </p:sp>
       <p:sp>
         <p:nvSpPr>
-          <p:cNvPr id="20" name="Rounded Rectangle 19"/>
+          <p:cNvPr id="28" name="Rounded Rectangle 27"/>
           <p:cNvSpPr/>
           <p:nvPr/>
         </p:nvSpPr>
@@ -11635,7 +15371,7 @@
       </p:sp>
       <p:sp>
         <p:nvSpPr>
-          <p:cNvPr id="21" name="TextBox 20"/>
+          <p:cNvPr id="29" name="TextBox 28"/>
           <p:cNvSpPr txBox="1"/>
           <p:nvPr/>
         </p:nvSpPr>
@@ -11690,7 +15426,7 @@
       </p:sp>
       <p:sp>
         <p:nvSpPr>
-          <p:cNvPr id="22" name="Rounded Rectangle 21"/>
+          <p:cNvPr id="30" name="Rounded Rectangle 29"/>
           <p:cNvSpPr/>
           <p:nvPr/>
         </p:nvSpPr>
@@ -11738,7 +15474,7 @@
       </p:sp>
       <p:sp>
         <p:nvSpPr>
-          <p:cNvPr id="23" name="TextBox 22"/>
+          <p:cNvPr id="31" name="TextBox 30"/>
           <p:cNvSpPr txBox="1"/>
           <p:nvPr/>
         </p:nvSpPr>
@@ -11793,7 +15529,7 @@
       </p:sp>
       <p:sp>
         <p:nvSpPr>
-          <p:cNvPr id="24" name="Rounded Rectangle 23"/>
+          <p:cNvPr id="32" name="Rounded Rectangle 31"/>
           <p:cNvSpPr/>
           <p:nvPr/>
         </p:nvSpPr>
@@ -11841,7 +15577,7 @@
       </p:sp>
       <p:sp>
         <p:nvSpPr>
-          <p:cNvPr id="25" name="TextBox 24"/>
+          <p:cNvPr id="33" name="TextBox 32"/>
           <p:cNvSpPr txBox="1"/>
           <p:nvPr/>
         </p:nvSpPr>
@@ -11896,7 +15632,7 @@
       </p:sp>
       <p:sp>
         <p:nvSpPr>
-          <p:cNvPr id="26" name="Rounded Rectangle 25"/>
+          <p:cNvPr id="34" name="Rounded Rectangle 33"/>
           <p:cNvSpPr/>
           <p:nvPr/>
         </p:nvSpPr>
@@ -11944,7 +15680,7 @@
       </p:sp>
       <p:sp>
         <p:nvSpPr>
-          <p:cNvPr id="27" name="TextBox 26"/>
+          <p:cNvPr id="35" name="TextBox 34"/>
           <p:cNvSpPr txBox="1"/>
           <p:nvPr/>
         </p:nvSpPr>
@@ -11999,7 +15735,7 @@
       </p:sp>
       <p:sp>
         <p:nvSpPr>
-          <p:cNvPr id="28" name="Rounded Rectangle 27"/>
+          <p:cNvPr id="36" name="Rounded Rectangle 35"/>
           <p:cNvSpPr/>
           <p:nvPr/>
         </p:nvSpPr>
@@ -12047,7 +15783,7 @@
       </p:sp>
       <p:sp>
         <p:nvSpPr>
-          <p:cNvPr id="29" name="TextBox 28"/>
+          <p:cNvPr id="37" name="TextBox 36"/>
           <p:cNvSpPr txBox="1"/>
           <p:nvPr/>
         </p:nvSpPr>
@@ -12085,24 +15821,40 @@
           <a:p>
             <a:pPr algn="l">
               <a:spcAft>
+                <a:spcPts val="300"/>
+              </a:spcAft>
+            </a:pPr>
+            <a:r>
+              <a:rPr sz="950" b="0">
+                <a:solidFill>
+                  <a:srgbClr val="54423E"/>
+                </a:solidFill>
+                <a:latin typeface="Red Hat Text"/>
+              </a:rPr>
+              <a:t>Bare metal GPU nodes · virtualized datacenter · accredited cloud · classified enclave</a:t>
+            </a:r>
+          </a:p>
+          <a:p>
+            <a:pPr algn="l">
+              <a:spcAft>
                 <a:spcPts val="0"/>
               </a:spcAft>
             </a:pPr>
             <a:r>
-              <a:rPr sz="950" b="0">
-                <a:solidFill>
-                  <a:srgbClr val="54423E"/>
+              <a:rPr sz="850" b="1">
+                <a:solidFill>
+                  <a:srgbClr val="286C88"/>
                 </a:solidFill>
                 <a:latin typeface="Red Hat Text"/>
               </a:rPr>
-              <a:t>Bare metal GPU nodes · virtualized datacenter · accredited cloud · classified enclave</a:t>
-            </a:r>
-          </a:p>
-        </p:txBody>
-      </p:sp>
-      <p:sp>
-        <p:nvSpPr>
-          <p:cNvPr id="30" name="TextBox 29"/>
+              <a:t>Tested with the hardware: mainframes · TPM · PIV/CAC cryptography</a:t>
+            </a:r>
+          </a:p>
+        </p:txBody>
+      </p:sp>
+      <p:sp>
+        <p:nvSpPr>
+          <p:cNvPr id="38" name="TextBox 37"/>
           <p:cNvSpPr txBox="1"/>
           <p:nvPr/>
         </p:nvSpPr>
@@ -12141,7 +15893,7 @@
       </p:sp>
       <p:sp>
         <p:nvSpPr>
-          <p:cNvPr id="31" name="Rounded Rectangle 30"/>
+          <p:cNvPr id="39" name="Rounded Rectangle 38"/>
           <p:cNvSpPr/>
           <p:nvPr/>
         </p:nvSpPr>
@@ -12196,7 +15948,7 @@
       </p:sp>
       <p:sp>
         <p:nvSpPr>
-          <p:cNvPr id="32" name="Rounded Rectangle 31"/>
+          <p:cNvPr id="40" name="Rounded Rectangle 39"/>
           <p:cNvSpPr/>
           <p:nvPr/>
         </p:nvSpPr>
@@ -12251,7 +16003,7 @@
       </p:sp>
       <p:sp>
         <p:nvSpPr>
-          <p:cNvPr id="33" name="Up Arrow 32"/>
+          <p:cNvPr id="41" name="Up Arrow 40"/>
           <p:cNvSpPr/>
           <p:nvPr/>
         </p:nvSpPr>
@@ -12295,7 +16047,7 @@
       </p:sp>
       <p:sp>
         <p:nvSpPr>
-          <p:cNvPr id="34" name="Up Arrow 33"/>
+          <p:cNvPr id="42" name="Up Arrow 41"/>
           <p:cNvSpPr/>
           <p:nvPr/>
         </p:nvSpPr>
@@ -12339,7 +16091,7 @@
       </p:sp>
       <p:sp>
         <p:nvSpPr>
-          <p:cNvPr id="35" name="Up Arrow 34"/>
+          <p:cNvPr id="43" name="Up Arrow 42"/>
           <p:cNvSpPr/>
           <p:nvPr/>
         </p:nvSpPr>
@@ -12453,7 +16205,469 @@
       </p:sp>
       <p:sp>
         <p:nvSpPr>
-          <p:cNvPr id="3" name="TextBox 2"/>
+          <p:cNvPr id="3" name="Freeform 2"/>
+          <p:cNvSpPr/>
+          <p:nvPr/>
+        </p:nvSpPr>
+        <p:spPr>
+          <a:xfrm>
+            <a:off x="10129418" y="119481"/>
+            <a:ext cx="112166" cy="87783"/>
+          </a:xfrm>
+          <a:custGeom>
+            <a:avLst/>
+            <a:gdLst/>
+            <a:ahLst/>
+            <a:cxnLst/>
+            <a:rect l="l" t="t" r="r" b="b"/>
+            <a:pathLst>
+              <a:path w="112166" h="87783">
+                <a:moveTo>
+                  <a:pt x="56083" y="0"/>
+                </a:moveTo>
+                <a:lnTo>
+                  <a:pt x="112166" y="87783"/>
+                </a:lnTo>
+                <a:lnTo>
+                  <a:pt x="0" y="87783"/>
+                </a:lnTo>
+                <a:close/>
+              </a:path>
+            </a:pathLst>
+          </a:custGeom>
+          <a:solidFill>
+            <a:srgbClr val="DED5E9"/>
+          </a:solidFill>
+          <a:ln>
+            <a:noFill/>
+          </a:ln>
+          <a:effectLst/>
+        </p:spPr>
+        <p:txBody>
+          <a:bodyPr rtlCol="0" anchor="ctr"/>
+          <a:lstStyle/>
+          <a:p>
+            <a:pPr algn="ctr"/>
+          </a:p>
+        </p:txBody>
+      </p:sp>
+      <p:sp>
+        <p:nvSpPr>
+          <p:cNvPr id="4" name="Freeform 3"/>
+          <p:cNvSpPr/>
+          <p:nvPr/>
+        </p:nvSpPr>
+        <p:spPr>
+          <a:xfrm>
+            <a:off x="10119447" y="207264"/>
+            <a:ext cx="132107" cy="15605"/>
+          </a:xfrm>
+          <a:custGeom>
+            <a:avLst/>
+            <a:gdLst/>
+            <a:ahLst/>
+            <a:cxnLst/>
+            <a:rect l="l" t="t" r="r" b="b"/>
+            <a:pathLst>
+              <a:path w="132107" h="15605">
+                <a:moveTo>
+                  <a:pt x="9971" y="0"/>
+                </a:moveTo>
+                <a:lnTo>
+                  <a:pt x="122137" y="0"/>
+                </a:lnTo>
+                <a:lnTo>
+                  <a:pt x="132107" y="15605"/>
+                </a:lnTo>
+                <a:lnTo>
+                  <a:pt x="0" y="15605"/>
+                </a:lnTo>
+                <a:close/>
+              </a:path>
+            </a:pathLst>
+          </a:custGeom>
+          <a:solidFill>
+            <a:srgbClr val="D2DCF7"/>
+          </a:solidFill>
+          <a:ln>
+            <a:noFill/>
+          </a:ln>
+          <a:effectLst/>
+        </p:spPr>
+        <p:txBody>
+          <a:bodyPr rtlCol="0" anchor="ctr"/>
+          <a:lstStyle/>
+          <a:p>
+            <a:pPr algn="ctr"/>
+          </a:p>
+        </p:txBody>
+      </p:sp>
+      <p:sp>
+        <p:nvSpPr>
+          <p:cNvPr id="5" name="Freeform 4"/>
+          <p:cNvSpPr/>
+          <p:nvPr/>
+        </p:nvSpPr>
+        <p:spPr>
+          <a:xfrm>
+            <a:off x="10063987" y="222869"/>
+            <a:ext cx="243028" cy="86807"/>
+          </a:xfrm>
+          <a:custGeom>
+            <a:avLst/>
+            <a:gdLst/>
+            <a:ahLst/>
+            <a:cxnLst/>
+            <a:rect l="l" t="t" r="r" b="b"/>
+            <a:pathLst>
+              <a:path w="243028" h="86807">
+                <a:moveTo>
+                  <a:pt x="55460" y="0"/>
+                </a:moveTo>
+                <a:lnTo>
+                  <a:pt x="187567" y="0"/>
+                </a:lnTo>
+                <a:lnTo>
+                  <a:pt x="243028" y="86807"/>
+                </a:lnTo>
+                <a:lnTo>
+                  <a:pt x="0" y="86807"/>
+                </a:lnTo>
+                <a:close/>
+              </a:path>
+            </a:pathLst>
+          </a:custGeom>
+          <a:solidFill>
+            <a:srgbClr val="1E7A55"/>
+          </a:solidFill>
+          <a:ln>
+            <a:noFill/>
+          </a:ln>
+          <a:effectLst/>
+        </p:spPr>
+        <p:txBody>
+          <a:bodyPr rtlCol="0" anchor="ctr"/>
+          <a:lstStyle/>
+          <a:p>
+            <a:pPr algn="ctr"/>
+          </a:p>
+        </p:txBody>
+      </p:sp>
+      <p:sp>
+        <p:nvSpPr>
+          <p:cNvPr id="6" name="Freeform 5"/>
+          <p:cNvSpPr/>
+          <p:nvPr/>
+        </p:nvSpPr>
+        <p:spPr>
+          <a:xfrm>
+            <a:off x="10054640" y="309676"/>
+            <a:ext cx="261722" cy="14631"/>
+          </a:xfrm>
+          <a:custGeom>
+            <a:avLst/>
+            <a:gdLst/>
+            <a:ahLst/>
+            <a:cxnLst/>
+            <a:rect l="l" t="t" r="r" b="b"/>
+            <a:pathLst>
+              <a:path w="261722" h="14631">
+                <a:moveTo>
+                  <a:pt x="9347" y="0"/>
+                </a:moveTo>
+                <a:lnTo>
+                  <a:pt x="252375" y="0"/>
+                </a:lnTo>
+                <a:lnTo>
+                  <a:pt x="261722" y="14631"/>
+                </a:lnTo>
+                <a:lnTo>
+                  <a:pt x="0" y="14631"/>
+                </a:lnTo>
+                <a:close/>
+              </a:path>
+            </a:pathLst>
+          </a:custGeom>
+          <a:solidFill>
+            <a:srgbClr val="D99A00"/>
+          </a:solidFill>
+          <a:ln>
+            <a:noFill/>
+          </a:ln>
+          <a:effectLst/>
+        </p:spPr>
+        <p:txBody>
+          <a:bodyPr rtlCol="0" anchor="ctr"/>
+          <a:lstStyle/>
+          <a:p>
+            <a:pPr algn="ctr"/>
+          </a:p>
+        </p:txBody>
+      </p:sp>
+      <p:sp>
+        <p:nvSpPr>
+          <p:cNvPr id="7" name="Freeform 6"/>
+          <p:cNvSpPr/>
+          <p:nvPr/>
+        </p:nvSpPr>
+        <p:spPr>
+          <a:xfrm>
+            <a:off x="10004788" y="324307"/>
+            <a:ext cx="361425" cy="78029"/>
+          </a:xfrm>
+          <a:custGeom>
+            <a:avLst/>
+            <a:gdLst/>
+            <a:ahLst/>
+            <a:cxnLst/>
+            <a:rect l="l" t="t" r="r" b="b"/>
+            <a:pathLst>
+              <a:path w="361425" h="78029">
+                <a:moveTo>
+                  <a:pt x="49852" y="0"/>
+                </a:moveTo>
+                <a:lnTo>
+                  <a:pt x="311574" y="0"/>
+                </a:lnTo>
+                <a:lnTo>
+                  <a:pt x="361425" y="78029"/>
+                </a:lnTo>
+                <a:lnTo>
+                  <a:pt x="0" y="78029"/>
+                </a:lnTo>
+                <a:close/>
+              </a:path>
+            </a:pathLst>
+          </a:custGeom>
+          <a:solidFill>
+            <a:srgbClr val="C2410C"/>
+          </a:solidFill>
+          <a:ln>
+            <a:noFill/>
+          </a:ln>
+          <a:effectLst/>
+        </p:spPr>
+        <p:txBody>
+          <a:bodyPr rtlCol="0" anchor="ctr"/>
+          <a:lstStyle/>
+          <a:p>
+            <a:pPr algn="ctr"/>
+          </a:p>
+        </p:txBody>
+      </p:sp>
+      <p:sp>
+        <p:nvSpPr>
+          <p:cNvPr id="8" name="Freeform 7"/>
+          <p:cNvSpPr/>
+          <p:nvPr/>
+        </p:nvSpPr>
+        <p:spPr>
+          <a:xfrm>
+            <a:off x="9961168" y="402336"/>
+            <a:ext cx="448666" cy="68275"/>
+          </a:xfrm>
+          <a:custGeom>
+            <a:avLst/>
+            <a:gdLst/>
+            <a:ahLst/>
+            <a:cxnLst/>
+            <a:rect l="l" t="t" r="r" b="b"/>
+            <a:pathLst>
+              <a:path w="448666" h="68275">
+                <a:moveTo>
+                  <a:pt x="43620" y="0"/>
+                </a:moveTo>
+                <a:lnTo>
+                  <a:pt x="405045" y="0"/>
+                </a:lnTo>
+                <a:lnTo>
+                  <a:pt x="448666" y="68275"/>
+                </a:lnTo>
+                <a:lnTo>
+                  <a:pt x="0" y="68275"/>
+                </a:lnTo>
+                <a:close/>
+              </a:path>
+            </a:pathLst>
+          </a:custGeom>
+          <a:solidFill>
+            <a:srgbClr val="CC0000"/>
+          </a:solidFill>
+          <a:ln>
+            <a:noFill/>
+          </a:ln>
+          <a:effectLst/>
+        </p:spPr>
+        <p:txBody>
+          <a:bodyPr rtlCol="0" anchor="ctr"/>
+          <a:lstStyle/>
+          <a:p>
+            <a:pPr algn="ctr"/>
+          </a:p>
+        </p:txBody>
+      </p:sp>
+      <p:sp>
+        <p:nvSpPr>
+          <p:cNvPr id="9" name="Freeform 8"/>
+          <p:cNvSpPr/>
+          <p:nvPr/>
+        </p:nvSpPr>
+        <p:spPr>
+          <a:xfrm>
+            <a:off x="9961168" y="119481"/>
+            <a:ext cx="448666" cy="351130"/>
+          </a:xfrm>
+          <a:custGeom>
+            <a:avLst/>
+            <a:gdLst/>
+            <a:ahLst/>
+            <a:cxnLst/>
+            <a:rect l="l" t="t" r="r" b="b"/>
+            <a:pathLst>
+              <a:path w="448666" h="351130">
+                <a:moveTo>
+                  <a:pt x="224333" y="0"/>
+                </a:moveTo>
+                <a:lnTo>
+                  <a:pt x="448666" y="351130"/>
+                </a:lnTo>
+                <a:lnTo>
+                  <a:pt x="0" y="351130"/>
+                </a:lnTo>
+                <a:close/>
+              </a:path>
+            </a:pathLst>
+          </a:custGeom>
+          <a:noFill/>
+          <a:ln w="6350">
+            <a:solidFill>
+              <a:srgbClr val="CFC2BE"/>
+            </a:solidFill>
+          </a:ln>
+          <a:effectLst/>
+        </p:spPr>
+        <p:txBody>
+          <a:bodyPr rtlCol="0" anchor="ctr"/>
+          <a:lstStyle/>
+          <a:p>
+            <a:pPr algn="ctr"/>
+          </a:p>
+        </p:txBody>
+      </p:sp>
+      <p:sp>
+        <p:nvSpPr>
+          <p:cNvPr id="10" name="TextBox 9"/>
+          <p:cNvSpPr txBox="1"/>
+          <p:nvPr/>
+        </p:nvSpPr>
+        <p:spPr>
+          <a:xfrm>
+            <a:off x="10478109" y="117530"/>
+            <a:ext cx="936345" cy="351129"/>
+          </a:xfrm>
+          <a:prstGeom prst="rect">
+            <a:avLst/>
+          </a:prstGeom>
+          <a:noFill/>
+        </p:spPr>
+        <p:txBody>
+          <a:bodyPr wrap="none" lIns="0" rIns="0" tIns="0" bIns="0">
+            <a:spAutoFit/>
+          </a:bodyPr>
+          <a:lstStyle/>
+          <a:p>
+            <a:pPr>
+              <a:lnSpc>
+                <a:spcPts val="691"/>
+              </a:lnSpc>
+              <a:spcBef>
+                <a:spcPts val="0"/>
+              </a:spcBef>
+              <a:spcAft>
+                <a:spcPts val="0"/>
+              </a:spcAft>
+            </a:pPr>
+            <a:r>
+              <a:rPr sz="700" b="0">
+                <a:solidFill>
+                  <a:srgbClr val="7E6A64"/>
+                </a:solidFill>
+                <a:latin typeface="Red Hat Mono"/>
+              </a:rPr>
+              <a:t>JUDGEMENT</a:t>
+            </a:r>
+          </a:p>
+          <a:p>
+            <a:pPr>
+              <a:lnSpc>
+                <a:spcPts val="691"/>
+              </a:lnSpc>
+              <a:spcBef>
+                <a:spcPts val="0"/>
+              </a:spcBef>
+              <a:spcAft>
+                <a:spcPts val="0"/>
+              </a:spcAft>
+            </a:pPr>
+            <a:r>
+              <a:rPr sz="700" b="1">
+                <a:solidFill>
+                  <a:srgbClr val="1B1211"/>
+                </a:solidFill>
+                <a:latin typeface="Red Hat Mono"/>
+              </a:rPr>
+              <a:t>KNOWLEDGE</a:t>
+            </a:r>
+          </a:p>
+          <a:p>
+            <a:pPr>
+              <a:lnSpc>
+                <a:spcPts val="691"/>
+              </a:lnSpc>
+              <a:spcBef>
+                <a:spcPts val="0"/>
+              </a:spcBef>
+              <a:spcAft>
+                <a:spcPts val="0"/>
+              </a:spcAft>
+            </a:pPr>
+            <a:r>
+              <a:rPr sz="700" b="1">
+                <a:solidFill>
+                  <a:srgbClr val="1B1211"/>
+                </a:solidFill>
+                <a:latin typeface="Red Hat Mono"/>
+              </a:rPr>
+              <a:t>INFORMATION</a:t>
+            </a:r>
+          </a:p>
+          <a:p>
+            <a:pPr>
+              <a:lnSpc>
+                <a:spcPts val="691"/>
+              </a:lnSpc>
+              <a:spcBef>
+                <a:spcPts val="0"/>
+              </a:spcBef>
+              <a:spcAft>
+                <a:spcPts val="0"/>
+              </a:spcAft>
+            </a:pPr>
+            <a:r>
+              <a:rPr sz="700" b="1">
+                <a:solidFill>
+                  <a:srgbClr val="1B1211"/>
+                </a:solidFill>
+                <a:latin typeface="Red Hat Mono"/>
+              </a:rPr>
+              <a:t>DATA</a:t>
+            </a:r>
+          </a:p>
+        </p:txBody>
+      </p:sp>
+      <p:sp>
+        <p:nvSpPr>
+          <p:cNvPr id="11" name="TextBox 10"/>
           <p:cNvSpPr txBox="1"/>
           <p:nvPr/>
         </p:nvSpPr>
@@ -12492,7 +16706,7 @@
       </p:sp>
       <p:sp>
         <p:nvSpPr>
-          <p:cNvPr id="4" name="TextBox 3"/>
+          <p:cNvPr id="12" name="TextBox 11"/>
           <p:cNvSpPr txBox="1"/>
           <p:nvPr/>
         </p:nvSpPr>
@@ -12531,7 +16745,7 @@
       </p:sp>
       <p:sp>
         <p:nvSpPr>
-          <p:cNvPr id="5" name="TextBox 4"/>
+          <p:cNvPr id="13" name="TextBox 12"/>
           <p:cNvSpPr txBox="1"/>
           <p:nvPr/>
         </p:nvSpPr>
@@ -12570,7 +16784,7 @@
       </p:sp>
       <p:cxnSp>
         <p:nvCxnSpPr>
-          <p:cNvPr id="6" name="Connector 5"/>
+          <p:cNvPr id="14" name="Connector 13"/>
           <p:cNvCxnSpPr/>
           <p:nvPr/>
         </p:nvCxnSpPr>
@@ -12606,7 +16820,7 @@
       </p:cxnSp>
       <p:sp>
         <p:nvSpPr>
-          <p:cNvPr id="7" name="Rounded Rectangle 6"/>
+          <p:cNvPr id="15" name="Rounded Rectangle 14"/>
           <p:cNvSpPr/>
           <p:nvPr/>
         </p:nvSpPr>
@@ -12652,7 +16866,7 @@
       </p:sp>
       <p:sp>
         <p:nvSpPr>
-          <p:cNvPr id="8" name="TextBox 7"/>
+          <p:cNvPr id="16" name="TextBox 15"/>
           <p:cNvSpPr txBox="1"/>
           <p:nvPr/>
         </p:nvSpPr>
@@ -12691,7 +16905,7 @@
       </p:sp>
       <p:sp>
         <p:nvSpPr>
-          <p:cNvPr id="9" name="Rounded Rectangle 8"/>
+          <p:cNvPr id="17" name="Rounded Rectangle 16"/>
           <p:cNvSpPr/>
           <p:nvPr/>
         </p:nvSpPr>
@@ -12737,7 +16951,7 @@
       </p:sp>
       <p:sp>
         <p:nvSpPr>
-          <p:cNvPr id="10" name="TextBox 9"/>
+          <p:cNvPr id="18" name="TextBox 17"/>
           <p:cNvSpPr txBox="1"/>
           <p:nvPr/>
         </p:nvSpPr>
@@ -12776,7 +16990,7 @@
       </p:sp>
       <p:sp>
         <p:nvSpPr>
-          <p:cNvPr id="11" name="Rounded Rectangle 10"/>
+          <p:cNvPr id="19" name="Rounded Rectangle 18"/>
           <p:cNvSpPr/>
           <p:nvPr/>
         </p:nvSpPr>
@@ -12822,7 +17036,7 @@
       </p:sp>
       <p:sp>
         <p:nvSpPr>
-          <p:cNvPr id="12" name="TextBox 11"/>
+          <p:cNvPr id="20" name="TextBox 19"/>
           <p:cNvSpPr txBox="1"/>
           <p:nvPr/>
         </p:nvSpPr>
@@ -12861,7 +17075,7 @@
       </p:sp>
       <p:sp>
         <p:nvSpPr>
-          <p:cNvPr id="13" name="Oval 12"/>
+          <p:cNvPr id="21" name="Oval 20"/>
           <p:cNvSpPr/>
           <p:nvPr/>
         </p:nvSpPr>
@@ -12907,7 +17121,7 @@
       </p:sp>
       <p:sp>
         <p:nvSpPr>
-          <p:cNvPr id="14" name="TextBox 13"/>
+          <p:cNvPr id="22" name="TextBox 21"/>
           <p:cNvSpPr txBox="1"/>
           <p:nvPr/>
         </p:nvSpPr>
@@ -12946,7 +17160,7 @@
       </p:sp>
       <p:sp>
         <p:nvSpPr>
-          <p:cNvPr id="15" name="Oval 14"/>
+          <p:cNvPr id="23" name="Oval 22"/>
           <p:cNvSpPr/>
           <p:nvPr/>
         </p:nvSpPr>
@@ -12992,7 +17206,7 @@
       </p:sp>
       <p:sp>
         <p:nvSpPr>
-          <p:cNvPr id="16" name="TextBox 15"/>
+          <p:cNvPr id="24" name="TextBox 23"/>
           <p:cNvSpPr txBox="1"/>
           <p:nvPr/>
         </p:nvSpPr>
@@ -13031,7 +17245,7 @@
       </p:sp>
       <p:sp>
         <p:nvSpPr>
-          <p:cNvPr id="17" name="Oval 16"/>
+          <p:cNvPr id="25" name="Oval 24"/>
           <p:cNvSpPr/>
           <p:nvPr/>
         </p:nvSpPr>
@@ -13077,7 +17291,7 @@
       </p:sp>
       <p:sp>
         <p:nvSpPr>
-          <p:cNvPr id="18" name="TextBox 17"/>
+          <p:cNvPr id="26" name="TextBox 25"/>
           <p:cNvSpPr txBox="1"/>
           <p:nvPr/>
         </p:nvSpPr>
@@ -13116,7 +17330,7 @@
       </p:sp>
       <p:sp>
         <p:nvSpPr>
-          <p:cNvPr id="19" name="Oval 18"/>
+          <p:cNvPr id="27" name="Oval 26"/>
           <p:cNvSpPr/>
           <p:nvPr/>
         </p:nvSpPr>
@@ -13162,7 +17376,7 @@
       </p:sp>
       <p:sp>
         <p:nvSpPr>
-          <p:cNvPr id="20" name="TextBox 19"/>
+          <p:cNvPr id="28" name="TextBox 27"/>
           <p:cNvSpPr txBox="1"/>
           <p:nvPr/>
         </p:nvSpPr>
@@ -13201,7 +17415,7 @@
       </p:sp>
       <p:sp>
         <p:nvSpPr>
-          <p:cNvPr id="21" name="Rounded Rectangle 20"/>
+          <p:cNvPr id="29" name="Rounded Rectangle 28"/>
           <p:cNvSpPr/>
           <p:nvPr/>
         </p:nvSpPr>
@@ -13247,7 +17461,7 @@
       </p:sp>
       <p:sp>
         <p:nvSpPr>
-          <p:cNvPr id="22" name="TextBox 21"/>
+          <p:cNvPr id="30" name="TextBox 29"/>
           <p:cNvSpPr txBox="1"/>
           <p:nvPr/>
         </p:nvSpPr>
@@ -13286,7 +17500,7 @@
       </p:sp>
       <p:sp>
         <p:nvSpPr>
-          <p:cNvPr id="23" name="TextBox 22"/>
+          <p:cNvPr id="31" name="TextBox 30"/>
           <p:cNvSpPr txBox="1"/>
           <p:nvPr/>
         </p:nvSpPr>
@@ -13389,7 +17603,7 @@
       </p:sp>
       <p:sp>
         <p:nvSpPr>
-          <p:cNvPr id="24" name="Rounded Rectangle 23"/>
+          <p:cNvPr id="32" name="Rounded Rectangle 31"/>
           <p:cNvSpPr/>
           <p:nvPr/>
         </p:nvSpPr>
@@ -13435,7 +17649,7 @@
       </p:sp>
       <p:sp>
         <p:nvSpPr>
-          <p:cNvPr id="25" name="TextBox 24"/>
+          <p:cNvPr id="33" name="TextBox 32"/>
           <p:cNvSpPr txBox="1"/>
           <p:nvPr/>
         </p:nvSpPr>
@@ -13474,7 +17688,7 @@
       </p:sp>
       <p:sp>
         <p:nvSpPr>
-          <p:cNvPr id="26" name="TextBox 25"/>
+          <p:cNvPr id="34" name="TextBox 33"/>
           <p:cNvSpPr txBox="1"/>
           <p:nvPr/>
         </p:nvSpPr>
@@ -13577,7 +17791,7 @@
       </p:sp>
       <p:sp>
         <p:nvSpPr>
-          <p:cNvPr id="27" name="Rounded Rectangle 26"/>
+          <p:cNvPr id="35" name="Rounded Rectangle 34"/>
           <p:cNvSpPr/>
           <p:nvPr/>
         </p:nvSpPr>
@@ -13623,7 +17837,7 @@
       </p:sp>
       <p:sp>
         <p:nvSpPr>
-          <p:cNvPr id="28" name="TextBox 27"/>
+          <p:cNvPr id="36" name="TextBox 35"/>
           <p:cNvSpPr txBox="1"/>
           <p:nvPr/>
         </p:nvSpPr>
@@ -13662,7 +17876,7 @@
       </p:sp>
       <p:sp>
         <p:nvSpPr>
-          <p:cNvPr id="29" name="TextBox 28"/>
+          <p:cNvPr id="37" name="TextBox 36"/>
           <p:cNvSpPr txBox="1"/>
           <p:nvPr/>
         </p:nvSpPr>
@@ -13835,7 +18049,469 @@
       </p:sp>
       <p:sp>
         <p:nvSpPr>
-          <p:cNvPr id="3" name="TextBox 2"/>
+          <p:cNvPr id="3" name="Freeform 2"/>
+          <p:cNvSpPr/>
+          <p:nvPr/>
+        </p:nvSpPr>
+        <p:spPr>
+          <a:xfrm>
+            <a:off x="10129418" y="119481"/>
+            <a:ext cx="112166" cy="87783"/>
+          </a:xfrm>
+          <a:custGeom>
+            <a:avLst/>
+            <a:gdLst/>
+            <a:ahLst/>
+            <a:cxnLst/>
+            <a:rect l="l" t="t" r="r" b="b"/>
+            <a:pathLst>
+              <a:path w="112166" h="87783">
+                <a:moveTo>
+                  <a:pt x="56083" y="0"/>
+                </a:moveTo>
+                <a:lnTo>
+                  <a:pt x="112166" y="87783"/>
+                </a:lnTo>
+                <a:lnTo>
+                  <a:pt x="0" y="87783"/>
+                </a:lnTo>
+                <a:close/>
+              </a:path>
+            </a:pathLst>
+          </a:custGeom>
+          <a:solidFill>
+            <a:srgbClr val="5B2E91"/>
+          </a:solidFill>
+          <a:ln>
+            <a:noFill/>
+          </a:ln>
+          <a:effectLst/>
+        </p:spPr>
+        <p:txBody>
+          <a:bodyPr rtlCol="0" anchor="ctr"/>
+          <a:lstStyle/>
+          <a:p>
+            <a:pPr algn="ctr"/>
+          </a:p>
+        </p:txBody>
+      </p:sp>
+      <p:sp>
+        <p:nvSpPr>
+          <p:cNvPr id="4" name="Freeform 3"/>
+          <p:cNvSpPr/>
+          <p:nvPr/>
+        </p:nvSpPr>
+        <p:spPr>
+          <a:xfrm>
+            <a:off x="10119447" y="207264"/>
+            <a:ext cx="132107" cy="15605"/>
+          </a:xfrm>
+          <a:custGeom>
+            <a:avLst/>
+            <a:gdLst/>
+            <a:ahLst/>
+            <a:cxnLst/>
+            <a:rect l="l" t="t" r="r" b="b"/>
+            <a:pathLst>
+              <a:path w="132107" h="15605">
+                <a:moveTo>
+                  <a:pt x="9971" y="0"/>
+                </a:moveTo>
+                <a:lnTo>
+                  <a:pt x="122137" y="0"/>
+                </a:lnTo>
+                <a:lnTo>
+                  <a:pt x="132107" y="15605"/>
+                </a:lnTo>
+                <a:lnTo>
+                  <a:pt x="0" y="15605"/>
+                </a:lnTo>
+                <a:close/>
+              </a:path>
+            </a:pathLst>
+          </a:custGeom>
+          <a:solidFill>
+            <a:srgbClr val="D2DCF7"/>
+          </a:solidFill>
+          <a:ln>
+            <a:noFill/>
+          </a:ln>
+          <a:effectLst/>
+        </p:spPr>
+        <p:txBody>
+          <a:bodyPr rtlCol="0" anchor="ctr"/>
+          <a:lstStyle/>
+          <a:p>
+            <a:pPr algn="ctr"/>
+          </a:p>
+        </p:txBody>
+      </p:sp>
+      <p:sp>
+        <p:nvSpPr>
+          <p:cNvPr id="5" name="Freeform 4"/>
+          <p:cNvSpPr/>
+          <p:nvPr/>
+        </p:nvSpPr>
+        <p:spPr>
+          <a:xfrm>
+            <a:off x="10063987" y="222869"/>
+            <a:ext cx="243028" cy="86807"/>
+          </a:xfrm>
+          <a:custGeom>
+            <a:avLst/>
+            <a:gdLst/>
+            <a:ahLst/>
+            <a:cxnLst/>
+            <a:rect l="l" t="t" r="r" b="b"/>
+            <a:pathLst>
+              <a:path w="243028" h="86807">
+                <a:moveTo>
+                  <a:pt x="55460" y="0"/>
+                </a:moveTo>
+                <a:lnTo>
+                  <a:pt x="187567" y="0"/>
+                </a:lnTo>
+                <a:lnTo>
+                  <a:pt x="243028" y="86807"/>
+                </a:lnTo>
+                <a:lnTo>
+                  <a:pt x="0" y="86807"/>
+                </a:lnTo>
+                <a:close/>
+              </a:path>
+            </a:pathLst>
+          </a:custGeom>
+          <a:solidFill>
+            <a:srgbClr val="D2E4DD"/>
+          </a:solidFill>
+          <a:ln>
+            <a:noFill/>
+          </a:ln>
+          <a:effectLst/>
+        </p:spPr>
+        <p:txBody>
+          <a:bodyPr rtlCol="0" anchor="ctr"/>
+          <a:lstStyle/>
+          <a:p>
+            <a:pPr algn="ctr"/>
+          </a:p>
+        </p:txBody>
+      </p:sp>
+      <p:sp>
+        <p:nvSpPr>
+          <p:cNvPr id="6" name="Freeform 5"/>
+          <p:cNvSpPr/>
+          <p:nvPr/>
+        </p:nvSpPr>
+        <p:spPr>
+          <a:xfrm>
+            <a:off x="10054640" y="309676"/>
+            <a:ext cx="261722" cy="14631"/>
+          </a:xfrm>
+          <a:custGeom>
+            <a:avLst/>
+            <a:gdLst/>
+            <a:ahLst/>
+            <a:cxnLst/>
+            <a:rect l="l" t="t" r="r" b="b"/>
+            <a:pathLst>
+              <a:path w="261722" h="14631">
+                <a:moveTo>
+                  <a:pt x="9347" y="0"/>
+                </a:moveTo>
+                <a:lnTo>
+                  <a:pt x="252375" y="0"/>
+                </a:lnTo>
+                <a:lnTo>
+                  <a:pt x="261722" y="14631"/>
+                </a:lnTo>
+                <a:lnTo>
+                  <a:pt x="0" y="14631"/>
+                </a:lnTo>
+                <a:close/>
+              </a:path>
+            </a:pathLst>
+          </a:custGeom>
+          <a:solidFill>
+            <a:srgbClr val="F7EBCC"/>
+          </a:solidFill>
+          <a:ln>
+            <a:noFill/>
+          </a:ln>
+          <a:effectLst/>
+        </p:spPr>
+        <p:txBody>
+          <a:bodyPr rtlCol="0" anchor="ctr"/>
+          <a:lstStyle/>
+          <a:p>
+            <a:pPr algn="ctr"/>
+          </a:p>
+        </p:txBody>
+      </p:sp>
+      <p:sp>
+        <p:nvSpPr>
+          <p:cNvPr id="7" name="Freeform 6"/>
+          <p:cNvSpPr/>
+          <p:nvPr/>
+        </p:nvSpPr>
+        <p:spPr>
+          <a:xfrm>
+            <a:off x="10004788" y="324307"/>
+            <a:ext cx="361425" cy="78029"/>
+          </a:xfrm>
+          <a:custGeom>
+            <a:avLst/>
+            <a:gdLst/>
+            <a:ahLst/>
+            <a:cxnLst/>
+            <a:rect l="l" t="t" r="r" b="b"/>
+            <a:pathLst>
+              <a:path w="361425" h="78029">
+                <a:moveTo>
+                  <a:pt x="49852" y="0"/>
+                </a:moveTo>
+                <a:lnTo>
+                  <a:pt x="311574" y="0"/>
+                </a:lnTo>
+                <a:lnTo>
+                  <a:pt x="361425" y="78029"/>
+                </a:lnTo>
+                <a:lnTo>
+                  <a:pt x="0" y="78029"/>
+                </a:lnTo>
+                <a:close/>
+              </a:path>
+            </a:pathLst>
+          </a:custGeom>
+          <a:solidFill>
+            <a:srgbClr val="F3D9CE"/>
+          </a:solidFill>
+          <a:ln>
+            <a:noFill/>
+          </a:ln>
+          <a:effectLst/>
+        </p:spPr>
+        <p:txBody>
+          <a:bodyPr rtlCol="0" anchor="ctr"/>
+          <a:lstStyle/>
+          <a:p>
+            <a:pPr algn="ctr"/>
+          </a:p>
+        </p:txBody>
+      </p:sp>
+      <p:sp>
+        <p:nvSpPr>
+          <p:cNvPr id="8" name="Freeform 7"/>
+          <p:cNvSpPr/>
+          <p:nvPr/>
+        </p:nvSpPr>
+        <p:spPr>
+          <a:xfrm>
+            <a:off x="9961168" y="402336"/>
+            <a:ext cx="448666" cy="68275"/>
+          </a:xfrm>
+          <a:custGeom>
+            <a:avLst/>
+            <a:gdLst/>
+            <a:ahLst/>
+            <a:cxnLst/>
+            <a:rect l="l" t="t" r="r" b="b"/>
+            <a:pathLst>
+              <a:path w="448666" h="68275">
+                <a:moveTo>
+                  <a:pt x="43620" y="0"/>
+                </a:moveTo>
+                <a:lnTo>
+                  <a:pt x="405045" y="0"/>
+                </a:lnTo>
+                <a:lnTo>
+                  <a:pt x="448666" y="68275"/>
+                </a:lnTo>
+                <a:lnTo>
+                  <a:pt x="0" y="68275"/>
+                </a:lnTo>
+                <a:close/>
+              </a:path>
+            </a:pathLst>
+          </a:custGeom>
+          <a:solidFill>
+            <a:srgbClr val="F5CCCC"/>
+          </a:solidFill>
+          <a:ln>
+            <a:noFill/>
+          </a:ln>
+          <a:effectLst/>
+        </p:spPr>
+        <p:txBody>
+          <a:bodyPr rtlCol="0" anchor="ctr"/>
+          <a:lstStyle/>
+          <a:p>
+            <a:pPr algn="ctr"/>
+          </a:p>
+        </p:txBody>
+      </p:sp>
+      <p:sp>
+        <p:nvSpPr>
+          <p:cNvPr id="9" name="Freeform 8"/>
+          <p:cNvSpPr/>
+          <p:nvPr/>
+        </p:nvSpPr>
+        <p:spPr>
+          <a:xfrm>
+            <a:off x="9961168" y="119481"/>
+            <a:ext cx="448666" cy="351130"/>
+          </a:xfrm>
+          <a:custGeom>
+            <a:avLst/>
+            <a:gdLst/>
+            <a:ahLst/>
+            <a:cxnLst/>
+            <a:rect l="l" t="t" r="r" b="b"/>
+            <a:pathLst>
+              <a:path w="448666" h="351130">
+                <a:moveTo>
+                  <a:pt x="224333" y="0"/>
+                </a:moveTo>
+                <a:lnTo>
+                  <a:pt x="448666" y="351130"/>
+                </a:lnTo>
+                <a:lnTo>
+                  <a:pt x="0" y="351130"/>
+                </a:lnTo>
+                <a:close/>
+              </a:path>
+            </a:pathLst>
+          </a:custGeom>
+          <a:noFill/>
+          <a:ln w="6350">
+            <a:solidFill>
+              <a:srgbClr val="CFC2BE"/>
+            </a:solidFill>
+          </a:ln>
+          <a:effectLst/>
+        </p:spPr>
+        <p:txBody>
+          <a:bodyPr rtlCol="0" anchor="ctr"/>
+          <a:lstStyle/>
+          <a:p>
+            <a:pPr algn="ctr"/>
+          </a:p>
+        </p:txBody>
+      </p:sp>
+      <p:sp>
+        <p:nvSpPr>
+          <p:cNvPr id="10" name="TextBox 9"/>
+          <p:cNvSpPr txBox="1"/>
+          <p:nvPr/>
+        </p:nvSpPr>
+        <p:spPr>
+          <a:xfrm>
+            <a:off x="10478109" y="117530"/>
+            <a:ext cx="936345" cy="351129"/>
+          </a:xfrm>
+          <a:prstGeom prst="rect">
+            <a:avLst/>
+          </a:prstGeom>
+          <a:noFill/>
+        </p:spPr>
+        <p:txBody>
+          <a:bodyPr wrap="none" lIns="0" rIns="0" tIns="0" bIns="0">
+            <a:spAutoFit/>
+          </a:bodyPr>
+          <a:lstStyle/>
+          <a:p>
+            <a:pPr>
+              <a:lnSpc>
+                <a:spcPts val="691"/>
+              </a:lnSpc>
+              <a:spcBef>
+                <a:spcPts val="0"/>
+              </a:spcBef>
+              <a:spcAft>
+                <a:spcPts val="0"/>
+              </a:spcAft>
+            </a:pPr>
+            <a:r>
+              <a:rPr sz="700" b="1">
+                <a:solidFill>
+                  <a:srgbClr val="1B1211"/>
+                </a:solidFill>
+                <a:latin typeface="Red Hat Mono"/>
+              </a:rPr>
+              <a:t>JUDGEMENT</a:t>
+            </a:r>
+          </a:p>
+          <a:p>
+            <a:pPr>
+              <a:lnSpc>
+                <a:spcPts val="691"/>
+              </a:lnSpc>
+              <a:spcBef>
+                <a:spcPts val="0"/>
+              </a:spcBef>
+              <a:spcAft>
+                <a:spcPts val="0"/>
+              </a:spcAft>
+            </a:pPr>
+            <a:r>
+              <a:rPr sz="700" b="0">
+                <a:solidFill>
+                  <a:srgbClr val="7E6A64"/>
+                </a:solidFill>
+                <a:latin typeface="Red Hat Mono"/>
+              </a:rPr>
+              <a:t>KNOWLEDGE</a:t>
+            </a:r>
+          </a:p>
+          <a:p>
+            <a:pPr>
+              <a:lnSpc>
+                <a:spcPts val="691"/>
+              </a:lnSpc>
+              <a:spcBef>
+                <a:spcPts val="0"/>
+              </a:spcBef>
+              <a:spcAft>
+                <a:spcPts val="0"/>
+              </a:spcAft>
+            </a:pPr>
+            <a:r>
+              <a:rPr sz="700" b="0">
+                <a:solidFill>
+                  <a:srgbClr val="7E6A64"/>
+                </a:solidFill>
+                <a:latin typeface="Red Hat Mono"/>
+              </a:rPr>
+              <a:t>INFORMATION</a:t>
+            </a:r>
+          </a:p>
+          <a:p>
+            <a:pPr>
+              <a:lnSpc>
+                <a:spcPts val="691"/>
+              </a:lnSpc>
+              <a:spcBef>
+                <a:spcPts val="0"/>
+              </a:spcBef>
+              <a:spcAft>
+                <a:spcPts val="0"/>
+              </a:spcAft>
+            </a:pPr>
+            <a:r>
+              <a:rPr sz="700" b="0">
+                <a:solidFill>
+                  <a:srgbClr val="7E6A64"/>
+                </a:solidFill>
+                <a:latin typeface="Red Hat Mono"/>
+              </a:rPr>
+              <a:t>DATA</a:t>
+            </a:r>
+          </a:p>
+        </p:txBody>
+      </p:sp>
+      <p:sp>
+        <p:nvSpPr>
+          <p:cNvPr id="11" name="TextBox 10"/>
           <p:cNvSpPr txBox="1"/>
           <p:nvPr/>
         </p:nvSpPr>
@@ -13874,7 +18550,7 @@
       </p:sp>
       <p:sp>
         <p:nvSpPr>
-          <p:cNvPr id="4" name="TextBox 3"/>
+          <p:cNvPr id="12" name="TextBox 11"/>
           <p:cNvSpPr txBox="1"/>
           <p:nvPr/>
         </p:nvSpPr>
@@ -13913,14 +18589,14 @@
       </p:sp>
       <p:sp>
         <p:nvSpPr>
-          <p:cNvPr id="5" name="Rectangle 4"/>
+          <p:cNvPr id="13" name="Rectangle 12"/>
           <p:cNvSpPr/>
           <p:nvPr/>
         </p:nvSpPr>
         <p:spPr>
           <a:xfrm>
-            <a:off x="777240" y="2240280"/>
-            <a:ext cx="41148" cy="1737360"/>
+            <a:off x="777240" y="1828800"/>
+            <a:ext cx="41148" cy="1325880"/>
           </a:xfrm>
           <a:prstGeom prst="rect">
             <a:avLst/>
@@ -13957,14 +18633,14 @@
       </p:sp>
       <p:sp>
         <p:nvSpPr>
-          <p:cNvPr id="6" name="TextBox 5"/>
+          <p:cNvPr id="14" name="TextBox 13"/>
           <p:cNvSpPr txBox="1"/>
           <p:nvPr/>
         </p:nvSpPr>
         <p:spPr>
           <a:xfrm>
-            <a:off x="941832" y="2240280"/>
-            <a:ext cx="3186074" cy="1737360"/>
+            <a:off x="923544" y="1783080"/>
+            <a:ext cx="2307259" cy="1325880"/>
           </a:xfrm>
           <a:prstGeom prst="rect">
             <a:avLst/>
@@ -13979,17 +18655,33 @@
           <a:p>
             <a:pPr algn="l">
               <a:spcAft>
-                <a:spcPts val="600"/>
+                <a:spcPts val="300"/>
               </a:spcAft>
             </a:pPr>
             <a:r>
-              <a:rPr sz="1500" b="1">
+              <a:rPr sz="850" b="1">
+                <a:solidFill>
+                  <a:srgbClr val="7E6A64"/>
+                </a:solidFill>
+                <a:latin typeface="Red Hat Mono"/>
+              </a:rPr>
+              <a:t>STEP ZERO</a:t>
+            </a:r>
+          </a:p>
+          <a:p>
+            <a:pPr algn="l">
+              <a:spcAft>
+                <a:spcPts val="300"/>
+              </a:spcAft>
+            </a:pPr>
+            <a:r>
+              <a:rPr sz="1300" b="1">
                 <a:solidFill>
                   <a:srgbClr val="1B1211"/>
                 </a:solidFill>
                 <a:latin typeface="Red Hat Display"/>
               </a:rPr>
-              <a:t>Architecture workshop</a:t>
+              <a:t>Lab walk-through</a:t>
             </a:r>
           </a:p>
           <a:p>
@@ -13999,27 +18691,27 @@
               </a:spcAft>
             </a:pPr>
             <a:r>
-              <a:rPr sz="1200" b="0">
+              <a:rPr sz="1000" b="0">
                 <a:solidFill>
                   <a:srgbClr val="54423E"/>
                 </a:solidFill>
                 <a:latin typeface="Red Hat Text"/>
               </a:rPr>
-              <a:t>Half a day with your platform and security teams to size accelerators, place the first workload and name the data classes in scope.</a:t>
-            </a:r>
-          </a:p>
-        </p:txBody>
-      </p:sp>
-      <p:sp>
-        <p:nvSpPr>
-          <p:cNvPr id="7" name="Rectangle 6"/>
+              <a:t>An hour where we run the seven labs together, show and tell, and find the point in the stack where you want to prove value. That scopes the pilot.</a:t>
+            </a:r>
+          </a:p>
+        </p:txBody>
+      </p:sp>
+      <p:sp>
+        <p:nvSpPr>
+          <p:cNvPr id="15" name="Rectangle 14"/>
           <p:cNvSpPr/>
           <p:nvPr/>
         </p:nvSpPr>
         <p:spPr>
           <a:xfrm>
-            <a:off x="4420514" y="2240280"/>
-            <a:ext cx="41148" cy="1737360"/>
+            <a:off x="3505123" y="1828800"/>
+            <a:ext cx="41148" cy="1325880"/>
           </a:xfrm>
           <a:prstGeom prst="rect">
             <a:avLst/>
@@ -14056,14 +18748,14 @@
       </p:sp>
       <p:sp>
         <p:nvSpPr>
-          <p:cNvPr id="8" name="TextBox 7"/>
+          <p:cNvPr id="16" name="TextBox 15"/>
           <p:cNvSpPr txBox="1"/>
           <p:nvPr/>
         </p:nvSpPr>
         <p:spPr>
           <a:xfrm>
-            <a:off x="4585106" y="2240280"/>
-            <a:ext cx="3186074" cy="1737360"/>
+            <a:off x="3651427" y="1783080"/>
+            <a:ext cx="2307259" cy="1325880"/>
           </a:xfrm>
           <a:prstGeom prst="rect">
             <a:avLst/>
@@ -14078,17 +18770,33 @@
           <a:p>
             <a:pPr algn="l">
               <a:spcAft>
-                <a:spcPts val="600"/>
+                <a:spcPts val="300"/>
               </a:spcAft>
             </a:pPr>
             <a:r>
-              <a:rPr sz="1500" b="1">
+              <a:rPr sz="850" b="1">
+                <a:solidFill>
+                  <a:srgbClr val="7E6A64"/>
+                </a:solidFill>
+                <a:latin typeface="Red Hat Mono"/>
+              </a:rPr>
+              <a:t>STEP ONE</a:t>
+            </a:r>
+          </a:p>
+          <a:p>
+            <a:pPr algn="l">
+              <a:spcAft>
+                <a:spcPts val="300"/>
+              </a:spcAft>
+            </a:pPr>
+            <a:r>
+              <a:rPr sz="1300" b="1">
                 <a:solidFill>
                   <a:srgbClr val="1B1211"/>
                 </a:solidFill>
                 <a:latin typeface="Red Hat Display"/>
               </a:rPr>
-              <a:t>Guided pilot</a:t>
+              <a:t>Architecture workshop</a:t>
             </a:r>
           </a:p>
           <a:p>
@@ -14098,27 +18806,27 @@
               </a:spcAft>
             </a:pPr>
             <a:r>
-              <a:rPr sz="1200" b="0">
+              <a:rPr sz="1000" b="0">
                 <a:solidFill>
                   <a:srgbClr val="54423E"/>
                 </a:solidFill>
                 <a:latin typeface="Red Hat Text"/>
               </a:rPr>
-              <a:t>One workflow, on your infrastructure, with a measured baseline and an agreed definition of success before we start.</a:t>
-            </a:r>
-          </a:p>
-        </p:txBody>
-      </p:sp>
-      <p:sp>
-        <p:nvSpPr>
-          <p:cNvPr id="9" name="Rectangle 8"/>
+              <a:t>A half-day with your platform and security teams to size accelerators, place the first workload and name the data classes in scope.</a:t>
+            </a:r>
+          </a:p>
+        </p:txBody>
+      </p:sp>
+      <p:sp>
+        <p:nvSpPr>
+          <p:cNvPr id="17" name="Rectangle 16"/>
           <p:cNvSpPr/>
           <p:nvPr/>
         </p:nvSpPr>
         <p:spPr>
           <a:xfrm>
-            <a:off x="8063788" y="2240280"/>
-            <a:ext cx="41148" cy="1737360"/>
+            <a:off x="6233006" y="1828800"/>
+            <a:ext cx="41148" cy="1325880"/>
           </a:xfrm>
           <a:prstGeom prst="rect">
             <a:avLst/>
@@ -14155,14 +18863,248 @@
       </p:sp>
       <p:sp>
         <p:nvSpPr>
-          <p:cNvPr id="10" name="TextBox 9"/>
+          <p:cNvPr id="18" name="TextBox 17"/>
           <p:cNvSpPr txBox="1"/>
           <p:nvPr/>
         </p:nvSpPr>
         <p:spPr>
           <a:xfrm>
-            <a:off x="8228380" y="2240280"/>
-            <a:ext cx="3186074" cy="1737360"/>
+            <a:off x="6379310" y="1783080"/>
+            <a:ext cx="2307259" cy="1325880"/>
+          </a:xfrm>
+          <a:prstGeom prst="rect">
+            <a:avLst/>
+          </a:prstGeom>
+          <a:noFill/>
+        </p:spPr>
+        <p:txBody>
+          <a:bodyPr wrap="square">
+            <a:spAutoFit/>
+          </a:bodyPr>
+          <a:lstStyle/>
+          <a:p>
+            <a:pPr algn="l">
+              <a:spcAft>
+                <a:spcPts val="300"/>
+              </a:spcAft>
+            </a:pPr>
+            <a:r>
+              <a:rPr sz="850" b="1">
+                <a:solidFill>
+                  <a:srgbClr val="7E6A64"/>
+                </a:solidFill>
+                <a:latin typeface="Red Hat Mono"/>
+              </a:rPr>
+              <a:t>STEP TWO</a:t>
+            </a:r>
+          </a:p>
+          <a:p>
+            <a:pPr algn="l">
+              <a:spcAft>
+                <a:spcPts val="300"/>
+              </a:spcAft>
+            </a:pPr>
+            <a:r>
+              <a:rPr sz="1300" b="1">
+                <a:solidFill>
+                  <a:srgbClr val="1B1211"/>
+                </a:solidFill>
+                <a:latin typeface="Red Hat Display"/>
+              </a:rPr>
+              <a:t>Guided pilot</a:t>
+            </a:r>
+          </a:p>
+          <a:p>
+            <a:pPr algn="l">
+              <a:spcAft>
+                <a:spcPts val="0"/>
+              </a:spcAft>
+            </a:pPr>
+            <a:r>
+              <a:rPr sz="1000" b="0">
+                <a:solidFill>
+                  <a:srgbClr val="54423E"/>
+                </a:solidFill>
+                <a:latin typeface="Red Hat Text"/>
+              </a:rPr>
+              <a:t>One workflow, on your infrastructure, with a measured baseline and an agreed definition of success before we start.</a:t>
+            </a:r>
+          </a:p>
+        </p:txBody>
+      </p:sp>
+      <p:sp>
+        <p:nvSpPr>
+          <p:cNvPr id="19" name="Rectangle 18"/>
+          <p:cNvSpPr/>
+          <p:nvPr/>
+        </p:nvSpPr>
+        <p:spPr>
+          <a:xfrm>
+            <a:off x="8960889" y="1828800"/>
+            <a:ext cx="41148" cy="1325880"/>
+          </a:xfrm>
+          <a:prstGeom prst="rect">
+            <a:avLst/>
+          </a:prstGeom>
+          <a:solidFill>
+            <a:srgbClr val="CC0000"/>
+          </a:solidFill>
+          <a:ln>
+            <a:noFill/>
+          </a:ln>
+          <a:effectLst/>
+        </p:spPr>
+        <p:style>
+          <a:lnRef idx="1">
+            <a:schemeClr val="accent1"/>
+          </a:lnRef>
+          <a:fillRef idx="3">
+            <a:schemeClr val="accent1"/>
+          </a:fillRef>
+          <a:effectRef idx="2">
+            <a:schemeClr val="accent1"/>
+          </a:effectRef>
+          <a:fontRef idx="minor">
+            <a:schemeClr val="lt1"/>
+          </a:fontRef>
+        </p:style>
+        <p:txBody>
+          <a:bodyPr rtlCol="0" anchor="ctr"/>
+          <a:lstStyle/>
+          <a:p>
+            <a:pPr algn="ctr"/>
+          </a:p>
+        </p:txBody>
+      </p:sp>
+      <p:sp>
+        <p:nvSpPr>
+          <p:cNvPr id="20" name="TextBox 19"/>
+          <p:cNvSpPr txBox="1"/>
+          <p:nvPr/>
+        </p:nvSpPr>
+        <p:spPr>
+          <a:xfrm>
+            <a:off x="9107193" y="1783080"/>
+            <a:ext cx="2307259" cy="1325880"/>
+          </a:xfrm>
+          <a:prstGeom prst="rect">
+            <a:avLst/>
+          </a:prstGeom>
+          <a:noFill/>
+        </p:spPr>
+        <p:txBody>
+          <a:bodyPr wrap="square">
+            <a:spAutoFit/>
+          </a:bodyPr>
+          <a:lstStyle/>
+          <a:p>
+            <a:pPr algn="l">
+              <a:spcAft>
+                <a:spcPts val="300"/>
+              </a:spcAft>
+            </a:pPr>
+            <a:r>
+              <a:rPr sz="850" b="1">
+                <a:solidFill>
+                  <a:srgbClr val="7E6A64"/>
+                </a:solidFill>
+                <a:latin typeface="Red Hat Mono"/>
+              </a:rPr>
+              <a:t>STEP THREE</a:t>
+            </a:r>
+          </a:p>
+          <a:p>
+            <a:pPr algn="l">
+              <a:spcAft>
+                <a:spcPts val="300"/>
+              </a:spcAft>
+            </a:pPr>
+            <a:r>
+              <a:rPr sz="1300" b="1">
+                <a:solidFill>
+                  <a:srgbClr val="1B1211"/>
+                </a:solidFill>
+                <a:latin typeface="Red Hat Display"/>
+              </a:rPr>
+              <a:t>Acquisition path</a:t>
+            </a:r>
+          </a:p>
+          <a:p>
+            <a:pPr algn="l">
+              <a:spcAft>
+                <a:spcPts val="0"/>
+              </a:spcAft>
+            </a:pPr>
+            <a:r>
+              <a:rPr sz="1000" b="0">
+                <a:solidFill>
+                  <a:srgbClr val="54423E"/>
+                </a:solidFill>
+                <a:latin typeface="Red Hat Text"/>
+              </a:rPr>
+              <a:t>Four Inc. and Carahsoft carry the vehicles and pricing — bring them in early, not at the end.</a:t>
+            </a:r>
+          </a:p>
+        </p:txBody>
+      </p:sp>
+      <p:sp>
+        <p:nvSpPr>
+          <p:cNvPr id="21" name="Rounded Rectangle 20"/>
+          <p:cNvSpPr/>
+          <p:nvPr/>
+        </p:nvSpPr>
+        <p:spPr>
+          <a:xfrm>
+            <a:off x="777240" y="3291840"/>
+            <a:ext cx="5029200" cy="2560320"/>
+          </a:xfrm>
+          <a:prstGeom prst="roundRect">
+            <a:avLst>
+              <a:gd name="adj" fmla="val 5000"/>
+            </a:avLst>
+          </a:prstGeom>
+          <a:solidFill>
+            <a:srgbClr val="FFFFFF"/>
+          </a:solidFill>
+          <a:ln w="12700">
+            <a:solidFill>
+              <a:srgbClr val="E6DDDA"/>
+            </a:solidFill>
+          </a:ln>
+          <a:effectLst/>
+        </p:spPr>
+        <p:style>
+          <a:lnRef idx="1">
+            <a:schemeClr val="accent1"/>
+          </a:lnRef>
+          <a:fillRef idx="3">
+            <a:schemeClr val="accent1"/>
+          </a:fillRef>
+          <a:effectRef idx="2">
+            <a:schemeClr val="accent1"/>
+          </a:effectRef>
+          <a:fontRef idx="minor">
+            <a:schemeClr val="lt1"/>
+          </a:fontRef>
+        </p:style>
+        <p:txBody>
+          <a:bodyPr rtlCol="0" anchor="ctr"/>
+          <a:lstStyle/>
+          <a:p>
+            <a:pPr algn="ctr"/>
+          </a:p>
+        </p:txBody>
+      </p:sp>
+      <p:sp>
+        <p:nvSpPr>
+          <p:cNvPr id="22" name="TextBox 21"/>
+          <p:cNvSpPr txBox="1"/>
+          <p:nvPr/>
+        </p:nvSpPr>
+        <p:spPr>
+          <a:xfrm>
+            <a:off x="960120" y="3401568"/>
+            <a:ext cx="4663440" cy="2377440"/>
           </a:xfrm>
           <a:prstGeom prst="rect">
             <a:avLst/>
@@ -14181,13 +19123,93 @@
               </a:spcAft>
             </a:pPr>
             <a:r>
-              <a:rPr sz="1500" b="1">
+              <a:rPr sz="850" b="1">
+                <a:solidFill>
+                  <a:srgbClr val="7E6A64"/>
+                </a:solidFill>
+                <a:latin typeface="Red Hat Mono"/>
+              </a:rPr>
+              <a:t>POINT OF CONTACT — BRAD WILL FOLLOW UP</a:t>
+            </a:r>
+          </a:p>
+          <a:p>
+            <a:pPr algn="l">
+              <a:spcAft>
+                <a:spcPts val="100"/>
+              </a:spcAft>
+            </a:pPr>
+            <a:r>
+              <a:rPr sz="1600" b="1">
                 <a:solidFill>
                   <a:srgbClr val="1B1211"/>
                 </a:solidFill>
                 <a:latin typeface="Red Hat Display"/>
               </a:rPr>
-              <a:t>Acquisition path</a:t>
+              <a:t>Brad Scalio</a:t>
+            </a:r>
+          </a:p>
+          <a:p>
+            <a:pPr algn="l">
+              <a:spcAft>
+                <a:spcPts val="200"/>
+              </a:spcAft>
+            </a:pPr>
+            <a:r>
+              <a:rPr sz="1000" b="0">
+                <a:solidFill>
+                  <a:srgbClr val="54423E"/>
+                </a:solidFill>
+                <a:latin typeface="Red Hat Text"/>
+              </a:rPr>
+              <a:t>Red Hat · if nothing else, he will get you to the right person</a:t>
+            </a:r>
+          </a:p>
+          <a:p>
+            <a:pPr algn="l">
+              <a:spcAft>
+                <a:spcPts val="500"/>
+              </a:spcAft>
+            </a:pPr>
+            <a:r>
+              <a:rPr sz="1100" b="1">
+                <a:solidFill>
+                  <a:srgbClr val="A30000"/>
+                </a:solidFill>
+                <a:latin typeface="Red Hat Mono"/>
+              </a:rPr>
+              <a:t>bscalio@redhat.com</a:t>
+            </a:r>
+          </a:p>
+          <a:p>
+            <a:pPr algn="l">
+              <a:spcAft>
+                <a:spcPts val="800"/>
+              </a:spcAft>
+            </a:pPr>
+            <a:r>
+              <a:rPr sz="1000" b="0">
+                <a:solidFill>
+                  <a:srgbClr val="54423E"/>
+                </a:solidFill>
+                <a:latin typeface="Red Hat Text"/>
+              </a:rPr>
+              <a:t>IRS account executive: Ted Craig, Red Hat. Everyone else, email Brad and he connects you to yours.</a:t>
+            </a:r>
+          </a:p>
+          <a:p>
+            <a:pPr algn="l">
+              <a:spcAft>
+                <a:spcPts val="600"/>
+              </a:spcAft>
+            </a:pPr>
+            <a:r>
+              <a:rPr sz="850" b="1">
+                <a:solidFill>
+                  <a:srgbClr val="7E6A64"/>
+                </a:solidFill>
+                <a:latin typeface="Red Hat Mono"/>
+              </a:rPr>
+              <a:t>RED HAT  ·  FOUR INC.  ·  CARAHSOFT</a:t>
             </a:r>
           </a:p>
           <a:p>
@@ -14197,27 +19219,27 @@
               </a:spcAft>
             </a:pPr>
             <a:r>
-              <a:rPr sz="1200" b="0">
-                <a:solidFill>
-                  <a:srgbClr val="54423E"/>
+              <a:rPr sz="900" b="0">
+                <a:solidFill>
+                  <a:srgbClr val="7E6A64"/>
                 </a:solidFill>
                 <a:latin typeface="Red Hat Text"/>
               </a:rPr>
-              <a:t>Four Inc. and Carahsoft carry the vehicles and pricing. Bring them into the conversation early, not at the end.</a:t>
-            </a:r>
-          </a:p>
-        </p:txBody>
-      </p:sp>
-      <p:sp>
-        <p:nvSpPr>
-          <p:cNvPr id="11" name="TextBox 10"/>
+              <a:t>Everything from today — deck, labs, guides — at nommsweymx.github.io/redhat-ai-tax-labs. The seven labs are the commands your engineers will run on day one. Follow it on your own: …/adventure.html.</a:t>
+            </a:r>
+          </a:p>
+        </p:txBody>
+      </p:sp>
+      <p:sp>
+        <p:nvSpPr>
+          <p:cNvPr id="23" name="TextBox 22"/>
           <p:cNvSpPr txBox="1"/>
           <p:nvPr/>
         </p:nvSpPr>
         <p:spPr>
           <a:xfrm>
-            <a:off x="777240" y="4663440"/>
-            <a:ext cx="10515600" cy="1188720"/>
+            <a:off x="6126480" y="3246120"/>
+            <a:ext cx="5287975" cy="2560320"/>
           </a:xfrm>
           <a:prstGeom prst="rect">
             <a:avLst/>
@@ -14232,33 +19254,145 @@
           <a:p>
             <a:pPr algn="l">
               <a:spcAft>
-                <a:spcPts val="800"/>
+                <a:spcPts val="600"/>
               </a:spcAft>
             </a:pPr>
             <a:r>
-              <a:rPr sz="1700" b="1">
-                <a:solidFill>
-                  <a:srgbClr val="1B1211"/>
-                </a:solidFill>
-                <a:latin typeface="Red Hat Display"/>
-              </a:rPr>
-              <a:t>One thing to remember</a:t>
+              <a:rPr sz="850" b="1">
+                <a:solidFill>
+                  <a:srgbClr val="7E6A64"/>
+                </a:solidFill>
+                <a:latin typeface="Red Hat Mono"/>
+              </a:rPr>
+              <a:t>YOUR MOVE</a:t>
             </a:r>
           </a:p>
           <a:p>
             <a:pPr algn="l">
               <a:spcAft>
-                <a:spcPts val="0"/>
+                <a:spcPts val="100"/>
               </a:spcAft>
             </a:pPr>
             <a:r>
-              <a:rPr sz="1400" b="0">
+              <a:rPr sz="1100" b="1">
+                <a:solidFill>
+                  <a:srgbClr val="1B1211"/>
+                </a:solidFill>
+                <a:latin typeface="Red Hat Text"/>
+              </a:rPr>
+              <a:t>Already a Red Hat customer? Ask for your Solution Architect.</a:t>
+            </a:r>
+          </a:p>
+          <a:p>
+            <a:pPr algn="l">
+              <a:spcAft>
+                <a:spcPts val="700"/>
+              </a:spcAft>
+            </a:pPr>
+            <a:r>
+              <a:rPr sz="950" b="0">
                 <a:solidFill>
                   <a:srgbClr val="54423E"/>
                 </a:solidFill>
                 <a:latin typeface="Red Hat Text"/>
               </a:rPr>
-              <a:t>Nothing in these seven labs required a public model endpoint, an internet connection at inference time, or a rewrite of a system of record. That is the whole argument.</a:t>
+              <a:t>Not sure who that is? Email Brad, open a ticket in the Customer Portal and ask support, or ask through your management line. The foundational questions are free to ask and expensive to skip.</a:t>
+            </a:r>
+          </a:p>
+          <a:p>
+            <a:pPr algn="l">
+              <a:spcAft>
+                <a:spcPts val="100"/>
+              </a:spcAft>
+            </a:pPr>
+            <a:r>
+              <a:rPr sz="1100" b="1">
+                <a:solidFill>
+                  <a:srgbClr val="1B1211"/>
+                </a:solidFill>
+                <a:latin typeface="Red Hat Text"/>
+              </a:rPr>
+              <a:t>Start a community of practice.</a:t>
+            </a:r>
+          </a:p>
+          <a:p>
+            <a:pPr algn="l">
+              <a:spcAft>
+                <a:spcPts val="700"/>
+              </a:spcAft>
+            </a:pPr>
+            <a:r>
+              <a:rPr sz="950" b="0">
+                <a:solidFill>
+                  <a:srgbClr val="54423E"/>
+                </a:solidFill>
+                <a:latin typeface="Red Hat Text"/>
+              </a:rPr>
+              <a:t>A standing group across platform, security and mission teams, built around one workflow. We will help seed it and we will show up.</a:t>
+            </a:r>
+          </a:p>
+          <a:p>
+            <a:pPr algn="l">
+              <a:spcAft>
+                <a:spcPts val="100"/>
+              </a:spcAft>
+            </a:pPr>
+            <a:r>
+              <a:rPr sz="1100" b="1">
+                <a:solidFill>
+                  <a:srgbClr val="1B1211"/>
+                </a:solidFill>
+                <a:latin typeface="Red Hat Text"/>
+              </a:rPr>
+              <a:t>Bring your hardest question.</a:t>
+            </a:r>
+          </a:p>
+          <a:p>
+            <a:pPr algn="l">
+              <a:spcAft>
+                <a:spcPts val="700"/>
+              </a:spcAft>
+            </a:pPr>
+            <a:r>
+              <a:rPr sz="950" b="0">
+                <a:solidFill>
+                  <a:srgbClr val="54423E"/>
+                </a:solidFill>
+                <a:latin typeface="Red Hat Text"/>
+              </a:rPr>
+              <a:t>Air-gapped operation, FedRAMP boundaries, accelerator scarcity, model provenance. If you did not see it here today, that does not mean it does not exist — ask.</a:t>
+            </a:r>
+          </a:p>
+          <a:p>
+            <a:pPr algn="l">
+              <a:spcAft>
+                <a:spcPts val="100"/>
+              </a:spcAft>
+            </a:pPr>
+            <a:r>
+              <a:rPr sz="1100" b="1">
+                <a:solidFill>
+                  <a:srgbClr val="1B1211"/>
+                </a:solidFill>
+                <a:latin typeface="Red Hat Text"/>
+              </a:rPr>
+              <a:t>Bring your cyber team.</a:t>
+            </a:r>
+          </a:p>
+          <a:p>
+            <a:pPr algn="l">
+              <a:spcAft>
+                <a:spcPts val="700"/>
+              </a:spcAft>
+            </a:pPr>
+            <a:r>
+              <a:rPr sz="950" b="0">
+                <a:solidFill>
+                  <a:srgbClr val="54423E"/>
+                </a:solidFill>
+                <a:latin typeface="Red Hat Text"/>
+              </a:rPr>
+              <a:t>If nobody from IRS cyber is on today, refer us to your ISSO or security lead. We will run a dedicated security session for them: the appendix, in depth.</a:t>
             </a:r>
           </a:p>
         </p:txBody>
@@ -14335,7 +19469,469 @@
       </p:sp>
       <p:sp>
         <p:nvSpPr>
-          <p:cNvPr id="3" name="TextBox 2"/>
+          <p:cNvPr id="3" name="Freeform 2"/>
+          <p:cNvSpPr/>
+          <p:nvPr/>
+        </p:nvSpPr>
+        <p:spPr>
+          <a:xfrm>
+            <a:off x="10129418" y="119481"/>
+            <a:ext cx="112166" cy="87783"/>
+          </a:xfrm>
+          <a:custGeom>
+            <a:avLst/>
+            <a:gdLst/>
+            <a:ahLst/>
+            <a:cxnLst/>
+            <a:rect l="l" t="t" r="r" b="b"/>
+            <a:pathLst>
+              <a:path w="112166" h="87783">
+                <a:moveTo>
+                  <a:pt x="56083" y="0"/>
+                </a:moveTo>
+                <a:lnTo>
+                  <a:pt x="112166" y="87783"/>
+                </a:lnTo>
+                <a:lnTo>
+                  <a:pt x="0" y="87783"/>
+                </a:lnTo>
+                <a:close/>
+              </a:path>
+            </a:pathLst>
+          </a:custGeom>
+          <a:solidFill>
+            <a:srgbClr val="5B2E91"/>
+          </a:solidFill>
+          <a:ln>
+            <a:noFill/>
+          </a:ln>
+          <a:effectLst/>
+        </p:spPr>
+        <p:txBody>
+          <a:bodyPr rtlCol="0" anchor="ctr"/>
+          <a:lstStyle/>
+          <a:p>
+            <a:pPr algn="ctr"/>
+          </a:p>
+        </p:txBody>
+      </p:sp>
+      <p:sp>
+        <p:nvSpPr>
+          <p:cNvPr id="4" name="Freeform 3"/>
+          <p:cNvSpPr/>
+          <p:nvPr/>
+        </p:nvSpPr>
+        <p:spPr>
+          <a:xfrm>
+            <a:off x="10119447" y="207264"/>
+            <a:ext cx="132107" cy="15605"/>
+          </a:xfrm>
+          <a:custGeom>
+            <a:avLst/>
+            <a:gdLst/>
+            <a:ahLst/>
+            <a:cxnLst/>
+            <a:rect l="l" t="t" r="r" b="b"/>
+            <a:pathLst>
+              <a:path w="132107" h="15605">
+                <a:moveTo>
+                  <a:pt x="9971" y="0"/>
+                </a:moveTo>
+                <a:lnTo>
+                  <a:pt x="122137" y="0"/>
+                </a:lnTo>
+                <a:lnTo>
+                  <a:pt x="132107" y="15605"/>
+                </a:lnTo>
+                <a:lnTo>
+                  <a:pt x="0" y="15605"/>
+                </a:lnTo>
+                <a:close/>
+              </a:path>
+            </a:pathLst>
+          </a:custGeom>
+          <a:solidFill>
+            <a:srgbClr val="1D4ED8"/>
+          </a:solidFill>
+          <a:ln>
+            <a:noFill/>
+          </a:ln>
+          <a:effectLst/>
+        </p:spPr>
+        <p:txBody>
+          <a:bodyPr rtlCol="0" anchor="ctr"/>
+          <a:lstStyle/>
+          <a:p>
+            <a:pPr algn="ctr"/>
+          </a:p>
+        </p:txBody>
+      </p:sp>
+      <p:sp>
+        <p:nvSpPr>
+          <p:cNvPr id="5" name="Freeform 4"/>
+          <p:cNvSpPr/>
+          <p:nvPr/>
+        </p:nvSpPr>
+        <p:spPr>
+          <a:xfrm>
+            <a:off x="10063987" y="222869"/>
+            <a:ext cx="243028" cy="86807"/>
+          </a:xfrm>
+          <a:custGeom>
+            <a:avLst/>
+            <a:gdLst/>
+            <a:ahLst/>
+            <a:cxnLst/>
+            <a:rect l="l" t="t" r="r" b="b"/>
+            <a:pathLst>
+              <a:path w="243028" h="86807">
+                <a:moveTo>
+                  <a:pt x="55460" y="0"/>
+                </a:moveTo>
+                <a:lnTo>
+                  <a:pt x="187567" y="0"/>
+                </a:lnTo>
+                <a:lnTo>
+                  <a:pt x="243028" y="86807"/>
+                </a:lnTo>
+                <a:lnTo>
+                  <a:pt x="0" y="86807"/>
+                </a:lnTo>
+                <a:close/>
+              </a:path>
+            </a:pathLst>
+          </a:custGeom>
+          <a:solidFill>
+            <a:srgbClr val="1E7A55"/>
+          </a:solidFill>
+          <a:ln>
+            <a:noFill/>
+          </a:ln>
+          <a:effectLst/>
+        </p:spPr>
+        <p:txBody>
+          <a:bodyPr rtlCol="0" anchor="ctr"/>
+          <a:lstStyle/>
+          <a:p>
+            <a:pPr algn="ctr"/>
+          </a:p>
+        </p:txBody>
+      </p:sp>
+      <p:sp>
+        <p:nvSpPr>
+          <p:cNvPr id="6" name="Freeform 5"/>
+          <p:cNvSpPr/>
+          <p:nvPr/>
+        </p:nvSpPr>
+        <p:spPr>
+          <a:xfrm>
+            <a:off x="10054640" y="309676"/>
+            <a:ext cx="261722" cy="14631"/>
+          </a:xfrm>
+          <a:custGeom>
+            <a:avLst/>
+            <a:gdLst/>
+            <a:ahLst/>
+            <a:cxnLst/>
+            <a:rect l="l" t="t" r="r" b="b"/>
+            <a:pathLst>
+              <a:path w="261722" h="14631">
+                <a:moveTo>
+                  <a:pt x="9347" y="0"/>
+                </a:moveTo>
+                <a:lnTo>
+                  <a:pt x="252375" y="0"/>
+                </a:lnTo>
+                <a:lnTo>
+                  <a:pt x="261722" y="14631"/>
+                </a:lnTo>
+                <a:lnTo>
+                  <a:pt x="0" y="14631"/>
+                </a:lnTo>
+                <a:close/>
+              </a:path>
+            </a:pathLst>
+          </a:custGeom>
+          <a:solidFill>
+            <a:srgbClr val="D99A00"/>
+          </a:solidFill>
+          <a:ln>
+            <a:noFill/>
+          </a:ln>
+          <a:effectLst/>
+        </p:spPr>
+        <p:txBody>
+          <a:bodyPr rtlCol="0" anchor="ctr"/>
+          <a:lstStyle/>
+          <a:p>
+            <a:pPr algn="ctr"/>
+          </a:p>
+        </p:txBody>
+      </p:sp>
+      <p:sp>
+        <p:nvSpPr>
+          <p:cNvPr id="7" name="Freeform 6"/>
+          <p:cNvSpPr/>
+          <p:nvPr/>
+        </p:nvSpPr>
+        <p:spPr>
+          <a:xfrm>
+            <a:off x="10004788" y="324307"/>
+            <a:ext cx="361425" cy="78029"/>
+          </a:xfrm>
+          <a:custGeom>
+            <a:avLst/>
+            <a:gdLst/>
+            <a:ahLst/>
+            <a:cxnLst/>
+            <a:rect l="l" t="t" r="r" b="b"/>
+            <a:pathLst>
+              <a:path w="361425" h="78029">
+                <a:moveTo>
+                  <a:pt x="49852" y="0"/>
+                </a:moveTo>
+                <a:lnTo>
+                  <a:pt x="311574" y="0"/>
+                </a:lnTo>
+                <a:lnTo>
+                  <a:pt x="361425" y="78029"/>
+                </a:lnTo>
+                <a:lnTo>
+                  <a:pt x="0" y="78029"/>
+                </a:lnTo>
+                <a:close/>
+              </a:path>
+            </a:pathLst>
+          </a:custGeom>
+          <a:solidFill>
+            <a:srgbClr val="C2410C"/>
+          </a:solidFill>
+          <a:ln>
+            <a:noFill/>
+          </a:ln>
+          <a:effectLst/>
+        </p:spPr>
+        <p:txBody>
+          <a:bodyPr rtlCol="0" anchor="ctr"/>
+          <a:lstStyle/>
+          <a:p>
+            <a:pPr algn="ctr"/>
+          </a:p>
+        </p:txBody>
+      </p:sp>
+      <p:sp>
+        <p:nvSpPr>
+          <p:cNvPr id="8" name="Freeform 7"/>
+          <p:cNvSpPr/>
+          <p:nvPr/>
+        </p:nvSpPr>
+        <p:spPr>
+          <a:xfrm>
+            <a:off x="9961168" y="402336"/>
+            <a:ext cx="448666" cy="68275"/>
+          </a:xfrm>
+          <a:custGeom>
+            <a:avLst/>
+            <a:gdLst/>
+            <a:ahLst/>
+            <a:cxnLst/>
+            <a:rect l="l" t="t" r="r" b="b"/>
+            <a:pathLst>
+              <a:path w="448666" h="68275">
+                <a:moveTo>
+                  <a:pt x="43620" y="0"/>
+                </a:moveTo>
+                <a:lnTo>
+                  <a:pt x="405045" y="0"/>
+                </a:lnTo>
+                <a:lnTo>
+                  <a:pt x="448666" y="68275"/>
+                </a:lnTo>
+                <a:lnTo>
+                  <a:pt x="0" y="68275"/>
+                </a:lnTo>
+                <a:close/>
+              </a:path>
+            </a:pathLst>
+          </a:custGeom>
+          <a:solidFill>
+            <a:srgbClr val="CC0000"/>
+          </a:solidFill>
+          <a:ln>
+            <a:noFill/>
+          </a:ln>
+          <a:effectLst/>
+        </p:spPr>
+        <p:txBody>
+          <a:bodyPr rtlCol="0" anchor="ctr"/>
+          <a:lstStyle/>
+          <a:p>
+            <a:pPr algn="ctr"/>
+          </a:p>
+        </p:txBody>
+      </p:sp>
+      <p:sp>
+        <p:nvSpPr>
+          <p:cNvPr id="9" name="Freeform 8"/>
+          <p:cNvSpPr/>
+          <p:nvPr/>
+        </p:nvSpPr>
+        <p:spPr>
+          <a:xfrm>
+            <a:off x="9961168" y="119481"/>
+            <a:ext cx="448666" cy="351130"/>
+          </a:xfrm>
+          <a:custGeom>
+            <a:avLst/>
+            <a:gdLst/>
+            <a:ahLst/>
+            <a:cxnLst/>
+            <a:rect l="l" t="t" r="r" b="b"/>
+            <a:pathLst>
+              <a:path w="448666" h="351130">
+                <a:moveTo>
+                  <a:pt x="224333" y="0"/>
+                </a:moveTo>
+                <a:lnTo>
+                  <a:pt x="448666" y="351130"/>
+                </a:lnTo>
+                <a:lnTo>
+                  <a:pt x="0" y="351130"/>
+                </a:lnTo>
+                <a:close/>
+              </a:path>
+            </a:pathLst>
+          </a:custGeom>
+          <a:noFill/>
+          <a:ln w="6350">
+            <a:solidFill>
+              <a:srgbClr val="CFC2BE"/>
+            </a:solidFill>
+          </a:ln>
+          <a:effectLst/>
+        </p:spPr>
+        <p:txBody>
+          <a:bodyPr rtlCol="0" anchor="ctr"/>
+          <a:lstStyle/>
+          <a:p>
+            <a:pPr algn="ctr"/>
+          </a:p>
+        </p:txBody>
+      </p:sp>
+      <p:sp>
+        <p:nvSpPr>
+          <p:cNvPr id="10" name="TextBox 9"/>
+          <p:cNvSpPr txBox="1"/>
+          <p:nvPr/>
+        </p:nvSpPr>
+        <p:spPr>
+          <a:xfrm>
+            <a:off x="10478109" y="117530"/>
+            <a:ext cx="936345" cy="351129"/>
+          </a:xfrm>
+          <a:prstGeom prst="rect">
+            <a:avLst/>
+          </a:prstGeom>
+          <a:noFill/>
+        </p:spPr>
+        <p:txBody>
+          <a:bodyPr wrap="none" lIns="0" rIns="0" tIns="0" bIns="0">
+            <a:spAutoFit/>
+          </a:bodyPr>
+          <a:lstStyle/>
+          <a:p>
+            <a:pPr>
+              <a:lnSpc>
+                <a:spcPts val="691"/>
+              </a:lnSpc>
+              <a:spcBef>
+                <a:spcPts val="0"/>
+              </a:spcBef>
+              <a:spcAft>
+                <a:spcPts val="0"/>
+              </a:spcAft>
+            </a:pPr>
+            <a:r>
+              <a:rPr sz="700" b="1">
+                <a:solidFill>
+                  <a:srgbClr val="1B1211"/>
+                </a:solidFill>
+                <a:latin typeface="Red Hat Mono"/>
+              </a:rPr>
+              <a:t>JUDGEMENT</a:t>
+            </a:r>
+          </a:p>
+          <a:p>
+            <a:pPr>
+              <a:lnSpc>
+                <a:spcPts val="691"/>
+              </a:lnSpc>
+              <a:spcBef>
+                <a:spcPts val="0"/>
+              </a:spcBef>
+              <a:spcAft>
+                <a:spcPts val="0"/>
+              </a:spcAft>
+            </a:pPr>
+            <a:r>
+              <a:rPr sz="700" b="1">
+                <a:solidFill>
+                  <a:srgbClr val="1B1211"/>
+                </a:solidFill>
+                <a:latin typeface="Red Hat Mono"/>
+              </a:rPr>
+              <a:t>KNOWLEDGE</a:t>
+            </a:r>
+          </a:p>
+          <a:p>
+            <a:pPr>
+              <a:lnSpc>
+                <a:spcPts val="691"/>
+              </a:lnSpc>
+              <a:spcBef>
+                <a:spcPts val="0"/>
+              </a:spcBef>
+              <a:spcAft>
+                <a:spcPts val="0"/>
+              </a:spcAft>
+            </a:pPr>
+            <a:r>
+              <a:rPr sz="700" b="1">
+                <a:solidFill>
+                  <a:srgbClr val="1B1211"/>
+                </a:solidFill>
+                <a:latin typeface="Red Hat Mono"/>
+              </a:rPr>
+              <a:t>INFORMATION</a:t>
+            </a:r>
+          </a:p>
+          <a:p>
+            <a:pPr>
+              <a:lnSpc>
+                <a:spcPts val="691"/>
+              </a:lnSpc>
+              <a:spcBef>
+                <a:spcPts val="0"/>
+              </a:spcBef>
+              <a:spcAft>
+                <a:spcPts val="0"/>
+              </a:spcAft>
+            </a:pPr>
+            <a:r>
+              <a:rPr sz="700" b="1">
+                <a:solidFill>
+                  <a:srgbClr val="1B1211"/>
+                </a:solidFill>
+                <a:latin typeface="Red Hat Mono"/>
+              </a:rPr>
+              <a:t>DATA</a:t>
+            </a:r>
+          </a:p>
+        </p:txBody>
+      </p:sp>
+      <p:sp>
+        <p:nvSpPr>
+          <p:cNvPr id="11" name="TextBox 10"/>
           <p:cNvSpPr txBox="1"/>
           <p:nvPr/>
         </p:nvSpPr>
@@ -14367,14 +19963,14 @@
                 </a:solidFill>
                 <a:latin typeface="Red Hat Mono"/>
               </a:rPr>
-              <a:t>HANDS ON</a:t>
-            </a:r>
-          </a:p>
-        </p:txBody>
-      </p:sp>
-      <p:sp>
-        <p:nvSpPr>
-          <p:cNvPr id="4" name="TextBox 3"/>
+              <a:t>HANDS ON · THE TAKEAWAY</a:t>
+            </a:r>
+          </a:p>
+        </p:txBody>
+      </p:sp>
+      <p:sp>
+        <p:nvSpPr>
+          <p:cNvPr id="12" name="TextBox 11"/>
           <p:cNvSpPr txBox="1"/>
           <p:nvPr/>
         </p:nvSpPr>
@@ -14413,13 +20009,13 @@
       </p:sp>
       <p:sp>
         <p:nvSpPr>
-          <p:cNvPr id="5" name="TextBox 4"/>
+          <p:cNvPr id="13" name="TextBox 12"/>
           <p:cNvSpPr txBox="1"/>
           <p:nvPr/>
         </p:nvSpPr>
         <p:spPr>
           <a:xfrm>
-            <a:off x="777240" y="1536192"/>
+            <a:off x="777240" y="1874519"/>
             <a:ext cx="9692640" cy="457200"/>
           </a:xfrm>
           <a:prstGeom prst="rect">
@@ -14445,21 +20041,21 @@
                 </a:solidFill>
                 <a:latin typeface="Red Hat Text"/>
               </a:rPr>
-              <a:t>Simulate mode needs no cluster, no GPU and no credentials. The Demo view plays them hands-free.</a:t>
+              <a:t>An opinionated path on a personal laptop — not an MVP, never production, never on a government computer. Free of charge and open to anyone: one self-contained HTML on the Carahsoft event page, source at nommsweymx.github.io/redhat-ai-tax-labs. Prove it to yourself: watch the model serve on 127.0.0.1.</a:t>
             </a:r>
           </a:p>
         </p:txBody>
       </p:sp>
       <p:graphicFrame>
         <p:nvGraphicFramePr>
-          <p:cNvPr id="6" name="Table 5"/>
+          <p:cNvPr id="14" name="Table 13"/>
           <p:cNvGraphicFramePr>
             <a:graphicFrameLocks noGrp="1"/>
           </p:cNvGraphicFramePr>
           <p:nvPr/>
         </p:nvGraphicFramePr>
         <p:xfrm>
-          <a:off x="777240" y="2194560"/>
+          <a:off x="777240" y="2834640"/>
           <a:ext cx="10607040" cy="2633472"/>
         </p:xfrm>
         <a:graphic>
@@ -15198,6 +20794,61 @@
           </a:graphicData>
         </a:graphic>
       </p:graphicFrame>
+      <p:sp>
+        <p:nvSpPr>
+          <p:cNvPr id="15" name="TextBox 14"/>
+          <p:cNvSpPr txBox="1"/>
+          <p:nvPr/>
+        </p:nvSpPr>
+        <p:spPr>
+          <a:xfrm>
+            <a:off x="777240" y="5577840"/>
+            <a:ext cx="10515600" cy="1005840"/>
+          </a:xfrm>
+          <a:prstGeom prst="rect">
+            <a:avLst/>
+          </a:prstGeom>
+          <a:noFill/>
+        </p:spPr>
+        <p:txBody>
+          <a:bodyPr wrap="square">
+            <a:spAutoFit/>
+          </a:bodyPr>
+          <a:lstStyle/>
+          <a:p>
+            <a:pPr algn="l">
+              <a:spcAft>
+                <a:spcPts val="500"/>
+              </a:spcAft>
+            </a:pPr>
+            <a:r>
+              <a:rPr sz="1500" b="1">
+                <a:solidFill>
+                  <a:srgbClr val="1B1211"/>
+                </a:solidFill>
+                <a:latin typeface="Red Hat Display"/>
+              </a:rPr>
+              <a:t>One thing to remember: nothing here needed a public endpoint</a:t>
+            </a:r>
+          </a:p>
+          <a:p>
+            <a:pPr algn="l">
+              <a:spcAft>
+                <a:spcPts val="0"/>
+              </a:spcAft>
+            </a:pPr>
+            <a:r>
+              <a:rPr sz="1200" b="0">
+                <a:solidFill>
+                  <a:srgbClr val="54423E"/>
+                </a:solidFill>
+                <a:latin typeface="Red Hat Text"/>
+              </a:rPr>
+              <a:t>No public model endpoint, no internet connection at inference time, no rewrite of a system of record. The labs run the upstream bits on a laptop; what an agency accredits is the supported Red Hat product built from them.</a:t>
+            </a:r>
+          </a:p>
+        </p:txBody>
+      </p:sp>
     </p:spTree>
   </p:cSld>
   <p:clrMapOvr>

--- a/slides/exports/redhat-ai-tax-administration.pptx
+++ b/slides/exports/redhat-ai-tax-administration.pptx
@@ -15,6 +15,7 @@
     <p:sldId id="263" r:id="rId15"/>
     <p:sldId id="264" r:id="rId16"/>
     <p:sldId id="265" r:id="rId17"/>
+    <p:sldId id="266" r:id="rId18"/>
   </p:sldIdLst>
   <p:sldSz cx="12191695" cy="6858000" type="screen4x3"/>
   <p:notesSz cx="6858000" cy="9144000"/>
@@ -581,6 +582,76 @@
           <a:lstStyle/>
           <a:p>
             <a:r>
+              <a:t>Lab 08 is the whole hour in one loop; run it if the room is operational, or walk the map. Read the map clockwise: logs from the mainframe and the servers land in Loki (data); the outage-risk model scores who fails next in the next 72 hours (information); Lightspeed drafts the playbook and the rulebook with citations (knowledge); a person reviews, edits and merges the pull request, and that merge is the promotion into the repo, AAP and the knowledge base (judgement); Event-Driven Ansible runs the approved job when the event fires, 42 seconds, no page; and the assistant answers from what the loop wrote, probing hosts through job templates a person approved. Say the two takeaways out loud: the platform is also the KM system and the documentation, because every promoted change is a cited record; and the assistant does not change anything, it launches approved jobs and reports with evidence. Ask the room: what is the last runbook you wrote that the on-call actually found? HAND-OFF: Jon takes the assistant questions, Brad takes the mainframe row.</a:t>
+            </a:r>
+          </a:p>
+        </p:txBody>
+      </p:sp>
+      <p:sp>
+        <p:nvSpPr>
+          <p:cNvPr id="4" name="Slide Number Placeholder 3"/>
+          <p:cNvSpPr>
+            <a:spLocks noGrp="1"/>
+          </p:cNvSpPr>
+          <p:nvPr>
+            <p:ph type="sldNum" idx="5" sz="quarter"/>
+          </p:nvPr>
+        </p:nvSpPr>
+        <p:spPr/>
+      </p:sp>
+    </p:spTree>
+  </p:cSld>
+  <p:clrMapOvr>
+    <a:masterClrMapping/>
+  </p:clrMapOvr>
+</p:notes>
+</file>
+
+<file path=ppt/notesSlides/notesSlide11.xml><?xml version="1.0" encoding="utf-8"?>
+<p:notes xmlns:a="http://schemas.openxmlformats.org/drawingml/2006/main" xmlns:p="http://schemas.openxmlformats.org/presentationml/2006/main" xmlns:r="http://schemas.openxmlformats.org/officeDocument/2006/relationships">
+  <p:cSld>
+    <p:spTree>
+      <p:nvGrpSpPr>
+        <p:cNvPr id="1" name=""/>
+        <p:cNvGrpSpPr/>
+        <p:nvPr/>
+      </p:nvGrpSpPr>
+      <p:grpSpPr>
+        <a:xfrm>
+          <a:off x="0" y="0"/>
+          <a:ext cx="0" cy="0"/>
+          <a:chOff x="0" y="0"/>
+          <a:chExt cx="0" cy="0"/>
+        </a:xfrm>
+      </p:grpSpPr>
+      <p:sp>
+        <p:nvSpPr>
+          <p:cNvPr id="2" name="Slide Image Placeholder 1"/>
+          <p:cNvSpPr>
+            <a:spLocks noGrp="1"/>
+          </p:cNvSpPr>
+          <p:nvPr>
+            <p:ph type="sldImg" idx="2"/>
+          </p:nvPr>
+        </p:nvSpPr>
+        <p:spPr/>
+      </p:sp>
+      <p:sp>
+        <p:nvSpPr>
+          <p:cNvPr id="3" name="Notes Placeholder 2"/>
+          <p:cNvSpPr>
+            <a:spLocks noGrp="1"/>
+          </p:cNvSpPr>
+          <p:nvPr>
+            <p:ph type="body" idx="3" sz="quarter"/>
+          </p:nvPr>
+        </p:nvSpPr>
+        <p:spPr/>
+        <p:txBody>
+          <a:bodyPr/>
+          <a:lstStyle/>
+          <a:p>
+            <a:r>
               <a:t>This is the slide that unblocks the deal. Every row is a control the platform provides, mapped to the question an authorizing official actually asks. Expect interruptions here — let them happen, this is the conversation you want. Pick a few rows and drill in rather than reading the table. Say it plainly: do not roll your own validations, reach out and we connect you with a specialist. Offer to take the table offline with their ISSO.</a:t>
             </a:r>
           </a:p>
@@ -1071,7 +1142,7 @@
           <a:lstStyle/>
           <a:p>
             <a:r>
-              <a:t>Close with a specific ask, not a thank-you. Step zero is the lab walk-through: an hour running the seven labs together to find the point in the stack where they want to prove value, which scopes the pilot. The architecture workshop follows, then hand off to Four Inc. and Carahsoft for the contract vehicle conversation. Point at the contact panel: Brad's email is there deliberately, and if nothing else he is the connector to the right person. Ask for the cyber team by name: if nobody from IRS cyber is on, get a referral to the ISSO and run the appendix for them in depth.</a:t>
+              <a:t>Close with a specific ask, not a thank-you. Step zero is the lab walk-through: an hour running the eight labs together to find the point in the stack where they want to prove value, which scopes the pilot. The architecture workshop follows, then hand off to Four Inc. and Carahsoft for the contract vehicle conversation. Point at the contact panel: Brad's email is there deliberately, and if nothing else he is the connector to the right person. Ask for the cyber team by name: if nobody from IRS cyber is on, get a referral to the ISSO and run the appendix for them in depth.</a:t>
             </a:r>
           </a:p>
         </p:txBody>
@@ -4773,7 +4844,7 @@
                 </a:solidFill>
                 <a:latin typeface="Red Hat Text"/>
               </a:rPr>
-              <a:t>What predictive AI, generative AI and LLMs actually do — then how Red Hat turns models, agency knowledge and automation into an operable mission capability, proven in seven labs you run yourself.</a:t>
+              <a:t>What predictive AI, generative AI and LLMs actually do — then how Red Hat turns models, agency knowledge and automation into an operable mission capability, proven in eight labs you run yourself.</a:t>
             </a:r>
           </a:p>
         </p:txBody>
@@ -4826,6 +4897,2647 @@
 </file>
 
 <file path=ppt/slides/slide10.xml><?xml version="1.0" encoding="utf-8"?>
+<p:sld xmlns:a="http://schemas.openxmlformats.org/drawingml/2006/main" xmlns:p="http://schemas.openxmlformats.org/presentationml/2006/main" xmlns:r="http://schemas.openxmlformats.org/officeDocument/2006/relationships">
+  <p:cSld>
+    <p:bg>
+      <p:bgPr>
+        <a:solidFill>
+          <a:srgbClr val="FBF9F8"/>
+        </a:solidFill>
+        <a:effectLst/>
+      </p:bgPr>
+    </p:bg>
+    <p:spTree>
+      <p:nvGrpSpPr>
+        <p:cNvPr id="1" name=""/>
+        <p:cNvGrpSpPr/>
+        <p:nvPr/>
+      </p:nvGrpSpPr>
+      <p:grpSpPr/>
+      <p:sp>
+        <p:nvSpPr>
+          <p:cNvPr id="2" name="Rectangle 1"/>
+          <p:cNvSpPr/>
+          <p:nvPr/>
+        </p:nvSpPr>
+        <p:spPr>
+          <a:xfrm>
+            <a:off x="0" y="0"/>
+            <a:ext cx="12191695" cy="45720"/>
+          </a:xfrm>
+          <a:prstGeom prst="rect">
+            <a:avLst/>
+          </a:prstGeom>
+          <a:solidFill>
+            <a:srgbClr val="CC0000"/>
+          </a:solidFill>
+          <a:ln>
+            <a:noFill/>
+          </a:ln>
+          <a:effectLst/>
+        </p:spPr>
+        <p:style>
+          <a:lnRef idx="1">
+            <a:schemeClr val="accent1"/>
+          </a:lnRef>
+          <a:fillRef idx="3">
+            <a:schemeClr val="accent1"/>
+          </a:fillRef>
+          <a:effectRef idx="2">
+            <a:schemeClr val="accent1"/>
+          </a:effectRef>
+          <a:fontRef idx="minor">
+            <a:schemeClr val="lt1"/>
+          </a:fontRef>
+        </p:style>
+        <p:txBody>
+          <a:bodyPr rtlCol="0" anchor="ctr"/>
+          <a:lstStyle/>
+          <a:p>
+            <a:pPr algn="ctr"/>
+          </a:p>
+        </p:txBody>
+      </p:sp>
+      <p:sp>
+        <p:nvSpPr>
+          <p:cNvPr id="3" name="Freeform 2"/>
+          <p:cNvSpPr/>
+          <p:nvPr/>
+        </p:nvSpPr>
+        <p:spPr>
+          <a:xfrm>
+            <a:off x="10129418" y="119481"/>
+            <a:ext cx="112166" cy="87783"/>
+          </a:xfrm>
+          <a:custGeom>
+            <a:avLst/>
+            <a:gdLst/>
+            <a:ahLst/>
+            <a:cxnLst/>
+            <a:rect l="l" t="t" r="r" b="b"/>
+            <a:pathLst>
+              <a:path w="112166" h="87783">
+                <a:moveTo>
+                  <a:pt x="56083" y="0"/>
+                </a:moveTo>
+                <a:lnTo>
+                  <a:pt x="112166" y="87783"/>
+                </a:lnTo>
+                <a:lnTo>
+                  <a:pt x="0" y="87783"/>
+                </a:lnTo>
+                <a:close/>
+              </a:path>
+            </a:pathLst>
+          </a:custGeom>
+          <a:solidFill>
+            <a:srgbClr val="5B2E91"/>
+          </a:solidFill>
+          <a:ln>
+            <a:noFill/>
+          </a:ln>
+          <a:effectLst/>
+        </p:spPr>
+        <p:txBody>
+          <a:bodyPr rtlCol="0" anchor="ctr"/>
+          <a:lstStyle/>
+          <a:p>
+            <a:pPr algn="ctr"/>
+          </a:p>
+        </p:txBody>
+      </p:sp>
+      <p:sp>
+        <p:nvSpPr>
+          <p:cNvPr id="4" name="Freeform 3"/>
+          <p:cNvSpPr/>
+          <p:nvPr/>
+        </p:nvSpPr>
+        <p:spPr>
+          <a:xfrm>
+            <a:off x="10119447" y="207264"/>
+            <a:ext cx="132107" cy="15605"/>
+          </a:xfrm>
+          <a:custGeom>
+            <a:avLst/>
+            <a:gdLst/>
+            <a:ahLst/>
+            <a:cxnLst/>
+            <a:rect l="l" t="t" r="r" b="b"/>
+            <a:pathLst>
+              <a:path w="132107" h="15605">
+                <a:moveTo>
+                  <a:pt x="9971" y="0"/>
+                </a:moveTo>
+                <a:lnTo>
+                  <a:pt x="122137" y="0"/>
+                </a:lnTo>
+                <a:lnTo>
+                  <a:pt x="132107" y="15605"/>
+                </a:lnTo>
+                <a:lnTo>
+                  <a:pt x="0" y="15605"/>
+                </a:lnTo>
+                <a:close/>
+              </a:path>
+            </a:pathLst>
+          </a:custGeom>
+          <a:solidFill>
+            <a:srgbClr val="1D4ED8"/>
+          </a:solidFill>
+          <a:ln>
+            <a:noFill/>
+          </a:ln>
+          <a:effectLst/>
+        </p:spPr>
+        <p:txBody>
+          <a:bodyPr rtlCol="0" anchor="ctr"/>
+          <a:lstStyle/>
+          <a:p>
+            <a:pPr algn="ctr"/>
+          </a:p>
+        </p:txBody>
+      </p:sp>
+      <p:sp>
+        <p:nvSpPr>
+          <p:cNvPr id="5" name="Freeform 4"/>
+          <p:cNvSpPr/>
+          <p:nvPr/>
+        </p:nvSpPr>
+        <p:spPr>
+          <a:xfrm>
+            <a:off x="10063987" y="222869"/>
+            <a:ext cx="243028" cy="86807"/>
+          </a:xfrm>
+          <a:custGeom>
+            <a:avLst/>
+            <a:gdLst/>
+            <a:ahLst/>
+            <a:cxnLst/>
+            <a:rect l="l" t="t" r="r" b="b"/>
+            <a:pathLst>
+              <a:path w="243028" h="86807">
+                <a:moveTo>
+                  <a:pt x="55460" y="0"/>
+                </a:moveTo>
+                <a:lnTo>
+                  <a:pt x="187567" y="0"/>
+                </a:lnTo>
+                <a:lnTo>
+                  <a:pt x="243028" y="86807"/>
+                </a:lnTo>
+                <a:lnTo>
+                  <a:pt x="0" y="86807"/>
+                </a:lnTo>
+                <a:close/>
+              </a:path>
+            </a:pathLst>
+          </a:custGeom>
+          <a:solidFill>
+            <a:srgbClr val="1E7A55"/>
+          </a:solidFill>
+          <a:ln>
+            <a:noFill/>
+          </a:ln>
+          <a:effectLst/>
+        </p:spPr>
+        <p:txBody>
+          <a:bodyPr rtlCol="0" anchor="ctr"/>
+          <a:lstStyle/>
+          <a:p>
+            <a:pPr algn="ctr"/>
+          </a:p>
+        </p:txBody>
+      </p:sp>
+      <p:sp>
+        <p:nvSpPr>
+          <p:cNvPr id="6" name="Freeform 5"/>
+          <p:cNvSpPr/>
+          <p:nvPr/>
+        </p:nvSpPr>
+        <p:spPr>
+          <a:xfrm>
+            <a:off x="10054640" y="309676"/>
+            <a:ext cx="261722" cy="14631"/>
+          </a:xfrm>
+          <a:custGeom>
+            <a:avLst/>
+            <a:gdLst/>
+            <a:ahLst/>
+            <a:cxnLst/>
+            <a:rect l="l" t="t" r="r" b="b"/>
+            <a:pathLst>
+              <a:path w="261722" h="14631">
+                <a:moveTo>
+                  <a:pt x="9347" y="0"/>
+                </a:moveTo>
+                <a:lnTo>
+                  <a:pt x="252375" y="0"/>
+                </a:lnTo>
+                <a:lnTo>
+                  <a:pt x="261722" y="14631"/>
+                </a:lnTo>
+                <a:lnTo>
+                  <a:pt x="0" y="14631"/>
+                </a:lnTo>
+                <a:close/>
+              </a:path>
+            </a:pathLst>
+          </a:custGeom>
+          <a:solidFill>
+            <a:srgbClr val="D99A00"/>
+          </a:solidFill>
+          <a:ln>
+            <a:noFill/>
+          </a:ln>
+          <a:effectLst/>
+        </p:spPr>
+        <p:txBody>
+          <a:bodyPr rtlCol="0" anchor="ctr"/>
+          <a:lstStyle/>
+          <a:p>
+            <a:pPr algn="ctr"/>
+          </a:p>
+        </p:txBody>
+      </p:sp>
+      <p:sp>
+        <p:nvSpPr>
+          <p:cNvPr id="7" name="Freeform 6"/>
+          <p:cNvSpPr/>
+          <p:nvPr/>
+        </p:nvSpPr>
+        <p:spPr>
+          <a:xfrm>
+            <a:off x="10004788" y="324307"/>
+            <a:ext cx="361425" cy="78029"/>
+          </a:xfrm>
+          <a:custGeom>
+            <a:avLst/>
+            <a:gdLst/>
+            <a:ahLst/>
+            <a:cxnLst/>
+            <a:rect l="l" t="t" r="r" b="b"/>
+            <a:pathLst>
+              <a:path w="361425" h="78029">
+                <a:moveTo>
+                  <a:pt x="49852" y="0"/>
+                </a:moveTo>
+                <a:lnTo>
+                  <a:pt x="311574" y="0"/>
+                </a:lnTo>
+                <a:lnTo>
+                  <a:pt x="361425" y="78029"/>
+                </a:lnTo>
+                <a:lnTo>
+                  <a:pt x="0" y="78029"/>
+                </a:lnTo>
+                <a:close/>
+              </a:path>
+            </a:pathLst>
+          </a:custGeom>
+          <a:solidFill>
+            <a:srgbClr val="C2410C"/>
+          </a:solidFill>
+          <a:ln>
+            <a:noFill/>
+          </a:ln>
+          <a:effectLst/>
+        </p:spPr>
+        <p:txBody>
+          <a:bodyPr rtlCol="0" anchor="ctr"/>
+          <a:lstStyle/>
+          <a:p>
+            <a:pPr algn="ctr"/>
+          </a:p>
+        </p:txBody>
+      </p:sp>
+      <p:sp>
+        <p:nvSpPr>
+          <p:cNvPr id="8" name="Freeform 7"/>
+          <p:cNvSpPr/>
+          <p:nvPr/>
+        </p:nvSpPr>
+        <p:spPr>
+          <a:xfrm>
+            <a:off x="9961168" y="402336"/>
+            <a:ext cx="448666" cy="68275"/>
+          </a:xfrm>
+          <a:custGeom>
+            <a:avLst/>
+            <a:gdLst/>
+            <a:ahLst/>
+            <a:cxnLst/>
+            <a:rect l="l" t="t" r="r" b="b"/>
+            <a:pathLst>
+              <a:path w="448666" h="68275">
+                <a:moveTo>
+                  <a:pt x="43620" y="0"/>
+                </a:moveTo>
+                <a:lnTo>
+                  <a:pt x="405045" y="0"/>
+                </a:lnTo>
+                <a:lnTo>
+                  <a:pt x="448666" y="68275"/>
+                </a:lnTo>
+                <a:lnTo>
+                  <a:pt x="0" y="68275"/>
+                </a:lnTo>
+                <a:close/>
+              </a:path>
+            </a:pathLst>
+          </a:custGeom>
+          <a:solidFill>
+            <a:srgbClr val="CC0000"/>
+          </a:solidFill>
+          <a:ln>
+            <a:noFill/>
+          </a:ln>
+          <a:effectLst/>
+        </p:spPr>
+        <p:txBody>
+          <a:bodyPr rtlCol="0" anchor="ctr"/>
+          <a:lstStyle/>
+          <a:p>
+            <a:pPr algn="ctr"/>
+          </a:p>
+        </p:txBody>
+      </p:sp>
+      <p:sp>
+        <p:nvSpPr>
+          <p:cNvPr id="9" name="Freeform 8"/>
+          <p:cNvSpPr/>
+          <p:nvPr/>
+        </p:nvSpPr>
+        <p:spPr>
+          <a:xfrm>
+            <a:off x="9961168" y="119481"/>
+            <a:ext cx="448666" cy="351130"/>
+          </a:xfrm>
+          <a:custGeom>
+            <a:avLst/>
+            <a:gdLst/>
+            <a:ahLst/>
+            <a:cxnLst/>
+            <a:rect l="l" t="t" r="r" b="b"/>
+            <a:pathLst>
+              <a:path w="448666" h="351130">
+                <a:moveTo>
+                  <a:pt x="224333" y="0"/>
+                </a:moveTo>
+                <a:lnTo>
+                  <a:pt x="448666" y="351130"/>
+                </a:lnTo>
+                <a:lnTo>
+                  <a:pt x="0" y="351130"/>
+                </a:lnTo>
+                <a:close/>
+              </a:path>
+            </a:pathLst>
+          </a:custGeom>
+          <a:noFill/>
+          <a:ln w="6350">
+            <a:solidFill>
+              <a:srgbClr val="CFC2BE"/>
+            </a:solidFill>
+          </a:ln>
+          <a:effectLst/>
+        </p:spPr>
+        <p:txBody>
+          <a:bodyPr rtlCol="0" anchor="ctr"/>
+          <a:lstStyle/>
+          <a:p>
+            <a:pPr algn="ctr"/>
+          </a:p>
+        </p:txBody>
+      </p:sp>
+      <p:sp>
+        <p:nvSpPr>
+          <p:cNvPr id="10" name="TextBox 9"/>
+          <p:cNvSpPr txBox="1"/>
+          <p:nvPr/>
+        </p:nvSpPr>
+        <p:spPr>
+          <a:xfrm>
+            <a:off x="10478109" y="117530"/>
+            <a:ext cx="936345" cy="351129"/>
+          </a:xfrm>
+          <a:prstGeom prst="rect">
+            <a:avLst/>
+          </a:prstGeom>
+          <a:noFill/>
+        </p:spPr>
+        <p:txBody>
+          <a:bodyPr wrap="none" lIns="0" rIns="0" tIns="0" bIns="0">
+            <a:spAutoFit/>
+          </a:bodyPr>
+          <a:lstStyle/>
+          <a:p>
+            <a:pPr>
+              <a:lnSpc>
+                <a:spcPts val="691"/>
+              </a:lnSpc>
+              <a:spcBef>
+                <a:spcPts val="0"/>
+              </a:spcBef>
+              <a:spcAft>
+                <a:spcPts val="0"/>
+              </a:spcAft>
+            </a:pPr>
+            <a:r>
+              <a:rPr sz="700" b="1">
+                <a:solidFill>
+                  <a:srgbClr val="1B1211"/>
+                </a:solidFill>
+                <a:latin typeface="Red Hat Mono"/>
+              </a:rPr>
+              <a:t>JUDGEMENT</a:t>
+            </a:r>
+          </a:p>
+          <a:p>
+            <a:pPr>
+              <a:lnSpc>
+                <a:spcPts val="691"/>
+              </a:lnSpc>
+              <a:spcBef>
+                <a:spcPts val="0"/>
+              </a:spcBef>
+              <a:spcAft>
+                <a:spcPts val="0"/>
+              </a:spcAft>
+            </a:pPr>
+            <a:r>
+              <a:rPr sz="700" b="1">
+                <a:solidFill>
+                  <a:srgbClr val="1B1211"/>
+                </a:solidFill>
+                <a:latin typeface="Red Hat Mono"/>
+              </a:rPr>
+              <a:t>KNOWLEDGE</a:t>
+            </a:r>
+          </a:p>
+          <a:p>
+            <a:pPr>
+              <a:lnSpc>
+                <a:spcPts val="691"/>
+              </a:lnSpc>
+              <a:spcBef>
+                <a:spcPts val="0"/>
+              </a:spcBef>
+              <a:spcAft>
+                <a:spcPts val="0"/>
+              </a:spcAft>
+            </a:pPr>
+            <a:r>
+              <a:rPr sz="700" b="1">
+                <a:solidFill>
+                  <a:srgbClr val="1B1211"/>
+                </a:solidFill>
+                <a:latin typeface="Red Hat Mono"/>
+              </a:rPr>
+              <a:t>INFORMATION</a:t>
+            </a:r>
+          </a:p>
+          <a:p>
+            <a:pPr>
+              <a:lnSpc>
+                <a:spcPts val="691"/>
+              </a:lnSpc>
+              <a:spcBef>
+                <a:spcPts val="0"/>
+              </a:spcBef>
+              <a:spcAft>
+                <a:spcPts val="0"/>
+              </a:spcAft>
+            </a:pPr>
+            <a:r>
+              <a:rPr sz="700" b="1">
+                <a:solidFill>
+                  <a:srgbClr val="1B1211"/>
+                </a:solidFill>
+                <a:latin typeface="Red Hat Mono"/>
+              </a:rPr>
+              <a:t>DATA</a:t>
+            </a:r>
+          </a:p>
+        </p:txBody>
+      </p:sp>
+      <p:sp>
+        <p:nvSpPr>
+          <p:cNvPr id="11" name="TextBox 10"/>
+          <p:cNvSpPr txBox="1"/>
+          <p:nvPr/>
+        </p:nvSpPr>
+        <p:spPr>
+          <a:xfrm>
+            <a:off x="777240" y="502920"/>
+            <a:ext cx="10637215" cy="310896"/>
+          </a:xfrm>
+          <a:prstGeom prst="rect">
+            <a:avLst/>
+          </a:prstGeom>
+          <a:noFill/>
+        </p:spPr>
+        <p:txBody>
+          <a:bodyPr wrap="square">
+            <a:spAutoFit/>
+          </a:bodyPr>
+          <a:lstStyle/>
+          <a:p>
+            <a:pPr algn="l">
+              <a:spcAft>
+                <a:spcPts val="0"/>
+              </a:spcAft>
+            </a:pPr>
+            <a:r>
+              <a:rPr sz="1100" b="1">
+                <a:solidFill>
+                  <a:srgbClr val="7E6A64"/>
+                </a:solidFill>
+                <a:latin typeface="Red Hat Mono"/>
+              </a:rPr>
+              <a:t>LAB 08 · THE WHOLE LOOP</a:t>
+            </a:r>
+          </a:p>
+        </p:txBody>
+      </p:sp>
+      <p:sp>
+        <p:nvSpPr>
+          <p:cNvPr id="12" name="TextBox 11"/>
+          <p:cNvSpPr txBox="1"/>
+          <p:nvPr/>
+        </p:nvSpPr>
+        <p:spPr>
+          <a:xfrm>
+            <a:off x="777240" y="868680"/>
+            <a:ext cx="10637215" cy="822960"/>
+          </a:xfrm>
+          <a:prstGeom prst="rect">
+            <a:avLst/>
+          </a:prstGeom>
+          <a:noFill/>
+        </p:spPr>
+        <p:txBody>
+          <a:bodyPr wrap="square">
+            <a:spAutoFit/>
+          </a:bodyPr>
+          <a:lstStyle/>
+          <a:p>
+            <a:pPr algn="l">
+              <a:spcAft>
+                <a:spcPts val="0"/>
+              </a:spcAft>
+            </a:pPr>
+            <a:r>
+              <a:rPr sz="3400" b="1">
+                <a:solidFill>
+                  <a:srgbClr val="1B1211"/>
+                </a:solidFill>
+                <a:latin typeface="Red Hat Display"/>
+              </a:rPr>
+              <a:t>One loop, end to end</a:t>
+            </a:r>
+          </a:p>
+        </p:txBody>
+      </p:sp>
+      <p:sp>
+        <p:nvSpPr>
+          <p:cNvPr id="13" name="TextBox 12"/>
+          <p:cNvSpPr txBox="1"/>
+          <p:nvPr/>
+        </p:nvSpPr>
+        <p:spPr>
+          <a:xfrm>
+            <a:off x="777240" y="1536192"/>
+            <a:ext cx="9692640" cy="457200"/>
+          </a:xfrm>
+          <a:prstGeom prst="rect">
+            <a:avLst/>
+          </a:prstGeom>
+          <a:noFill/>
+        </p:spPr>
+        <p:txBody>
+          <a:bodyPr wrap="square">
+            <a:spAutoFit/>
+          </a:bodyPr>
+          <a:lstStyle/>
+          <a:p>
+            <a:pPr algn="l">
+              <a:spcAft>
+                <a:spcPts val="0"/>
+              </a:spcAft>
+            </a:pPr>
+            <a:r>
+              <a:rPr sz="1400" b="0">
+                <a:solidFill>
+                  <a:srgbClr val="54423E"/>
+                </a:solidFill>
+                <a:latin typeface="Red Hat Text"/>
+              </a:rPr>
+              <a:t>Logs in, risk scored, fix drafted by Lightspeed, merged by a person, run by Event-Driven Ansible, remembered by the platform, so you can ask.</a:t>
+            </a:r>
+          </a:p>
+        </p:txBody>
+      </p:sp>
+      <p:sp>
+        <p:nvSpPr>
+          <p:cNvPr id="14" name="Rounded Rectangle 13"/>
+          <p:cNvSpPr/>
+          <p:nvPr/>
+        </p:nvSpPr>
+        <p:spPr>
+          <a:xfrm>
+            <a:off x="777240" y="2084831"/>
+            <a:ext cx="2508427" cy="786384"/>
+          </a:xfrm>
+          <a:prstGeom prst="roundRect">
+            <a:avLst>
+              <a:gd name="adj" fmla="val 8000"/>
+            </a:avLst>
+          </a:prstGeom>
+          <a:solidFill>
+            <a:srgbClr val="FFFFFF"/>
+          </a:solidFill>
+          <a:ln w="9525">
+            <a:solidFill>
+              <a:srgbClr val="CFC2BE"/>
+            </a:solidFill>
+          </a:ln>
+          <a:effectLst/>
+        </p:spPr>
+        <p:style>
+          <a:lnRef idx="1">
+            <a:schemeClr val="accent1"/>
+          </a:lnRef>
+          <a:fillRef idx="3">
+            <a:schemeClr val="accent1"/>
+          </a:fillRef>
+          <a:effectRef idx="2">
+            <a:schemeClr val="accent1"/>
+          </a:effectRef>
+          <a:fontRef idx="minor">
+            <a:schemeClr val="lt1"/>
+          </a:fontRef>
+        </p:style>
+        <p:txBody>
+          <a:bodyPr rtlCol="0" anchor="ctr"/>
+          <a:lstStyle/>
+          <a:p>
+            <a:pPr algn="ctr"/>
+          </a:p>
+        </p:txBody>
+      </p:sp>
+      <p:sp>
+        <p:nvSpPr>
+          <p:cNvPr id="15" name="Rectangle 14"/>
+          <p:cNvSpPr/>
+          <p:nvPr/>
+        </p:nvSpPr>
+        <p:spPr>
+          <a:xfrm>
+            <a:off x="868680" y="2194559"/>
+            <a:ext cx="45720" cy="566928"/>
+          </a:xfrm>
+          <a:prstGeom prst="rect">
+            <a:avLst/>
+          </a:prstGeom>
+          <a:solidFill>
+            <a:srgbClr val="CC0000"/>
+          </a:solidFill>
+          <a:ln>
+            <a:noFill/>
+          </a:ln>
+          <a:effectLst/>
+        </p:spPr>
+        <p:style>
+          <a:lnRef idx="1">
+            <a:schemeClr val="accent1"/>
+          </a:lnRef>
+          <a:fillRef idx="3">
+            <a:schemeClr val="accent1"/>
+          </a:fillRef>
+          <a:effectRef idx="2">
+            <a:schemeClr val="accent1"/>
+          </a:effectRef>
+          <a:fontRef idx="minor">
+            <a:schemeClr val="lt1"/>
+          </a:fontRef>
+        </p:style>
+        <p:txBody>
+          <a:bodyPr rtlCol="0" anchor="ctr"/>
+          <a:lstStyle/>
+          <a:p>
+            <a:pPr algn="ctr"/>
+          </a:p>
+        </p:txBody>
+      </p:sp>
+      <p:sp>
+        <p:nvSpPr>
+          <p:cNvPr id="16" name="TextBox 15"/>
+          <p:cNvSpPr txBox="1"/>
+          <p:nvPr/>
+        </p:nvSpPr>
+        <p:spPr>
+          <a:xfrm>
+            <a:off x="978408" y="2139695"/>
+            <a:ext cx="2234107" cy="694944"/>
+          </a:xfrm>
+          <a:prstGeom prst="rect">
+            <a:avLst/>
+          </a:prstGeom>
+          <a:noFill/>
+        </p:spPr>
+        <p:txBody>
+          <a:bodyPr wrap="square">
+            <a:spAutoFit/>
+          </a:bodyPr>
+          <a:lstStyle/>
+          <a:p>
+            <a:pPr algn="l">
+              <a:spcAft>
+                <a:spcPts val="0"/>
+              </a:spcAft>
+            </a:pPr>
+            <a:r>
+              <a:rPr sz="850" b="1">
+                <a:solidFill>
+                  <a:srgbClr val="CC0000"/>
+                </a:solidFill>
+                <a:latin typeface="Red Hat Mono"/>
+              </a:rPr>
+              <a:t>01</a:t>
+            </a:r>
+          </a:p>
+          <a:p>
+            <a:pPr algn="l">
+              <a:spcAft>
+                <a:spcPts val="0"/>
+              </a:spcAft>
+            </a:pPr>
+            <a:r>
+              <a:rPr sz="1100" b="1">
+                <a:solidFill>
+                  <a:srgbClr val="1B1211"/>
+                </a:solidFill>
+                <a:latin typeface="Red Hat Display"/>
+              </a:rPr>
+              <a:t>Mainframe + servers</a:t>
+            </a:r>
+          </a:p>
+          <a:p>
+            <a:pPr algn="l">
+              <a:spcAft>
+                <a:spcPts val="0"/>
+              </a:spcAft>
+            </a:pPr>
+            <a:r>
+              <a:rPr sz="850" b="0">
+                <a:solidFill>
+                  <a:srgbClr val="7E6A64"/>
+                </a:solidFill>
+                <a:latin typeface="Red Hat Mono"/>
+              </a:rPr>
+              <a:t>MVSA · server1..12</a:t>
+            </a:r>
+          </a:p>
+        </p:txBody>
+      </p:sp>
+      <p:sp>
+        <p:nvSpPr>
+          <p:cNvPr id="17" name="Rounded Rectangle 16"/>
+          <p:cNvSpPr/>
+          <p:nvPr/>
+        </p:nvSpPr>
+        <p:spPr>
+          <a:xfrm>
+            <a:off x="3486835" y="2084831"/>
+            <a:ext cx="2508427" cy="786384"/>
+          </a:xfrm>
+          <a:prstGeom prst="roundRect">
+            <a:avLst>
+              <a:gd name="adj" fmla="val 8000"/>
+            </a:avLst>
+          </a:prstGeom>
+          <a:solidFill>
+            <a:srgbClr val="FFFFFF"/>
+          </a:solidFill>
+          <a:ln w="9525">
+            <a:solidFill>
+              <a:srgbClr val="CFC2BE"/>
+            </a:solidFill>
+          </a:ln>
+          <a:effectLst/>
+        </p:spPr>
+        <p:style>
+          <a:lnRef idx="1">
+            <a:schemeClr val="accent1"/>
+          </a:lnRef>
+          <a:fillRef idx="3">
+            <a:schemeClr val="accent1"/>
+          </a:fillRef>
+          <a:effectRef idx="2">
+            <a:schemeClr val="accent1"/>
+          </a:effectRef>
+          <a:fontRef idx="minor">
+            <a:schemeClr val="lt1"/>
+          </a:fontRef>
+        </p:style>
+        <p:txBody>
+          <a:bodyPr rtlCol="0" anchor="ctr"/>
+          <a:lstStyle/>
+          <a:p>
+            <a:pPr algn="ctr"/>
+          </a:p>
+        </p:txBody>
+      </p:sp>
+      <p:sp>
+        <p:nvSpPr>
+          <p:cNvPr id="18" name="Rectangle 17"/>
+          <p:cNvSpPr/>
+          <p:nvPr/>
+        </p:nvSpPr>
+        <p:spPr>
+          <a:xfrm>
+            <a:off x="3578275" y="2194559"/>
+            <a:ext cx="45720" cy="566928"/>
+          </a:xfrm>
+          <a:prstGeom prst="rect">
+            <a:avLst/>
+          </a:prstGeom>
+          <a:solidFill>
+            <a:srgbClr val="CC0000"/>
+          </a:solidFill>
+          <a:ln>
+            <a:noFill/>
+          </a:ln>
+          <a:effectLst/>
+        </p:spPr>
+        <p:style>
+          <a:lnRef idx="1">
+            <a:schemeClr val="accent1"/>
+          </a:lnRef>
+          <a:fillRef idx="3">
+            <a:schemeClr val="accent1"/>
+          </a:fillRef>
+          <a:effectRef idx="2">
+            <a:schemeClr val="accent1"/>
+          </a:effectRef>
+          <a:fontRef idx="minor">
+            <a:schemeClr val="lt1"/>
+          </a:fontRef>
+        </p:style>
+        <p:txBody>
+          <a:bodyPr rtlCol="0" anchor="ctr"/>
+          <a:lstStyle/>
+          <a:p>
+            <a:pPr algn="ctr"/>
+          </a:p>
+        </p:txBody>
+      </p:sp>
+      <p:sp>
+        <p:nvSpPr>
+          <p:cNvPr id="19" name="TextBox 18"/>
+          <p:cNvSpPr txBox="1"/>
+          <p:nvPr/>
+        </p:nvSpPr>
+        <p:spPr>
+          <a:xfrm>
+            <a:off x="3688003" y="2139695"/>
+            <a:ext cx="2234107" cy="694944"/>
+          </a:xfrm>
+          <a:prstGeom prst="rect">
+            <a:avLst/>
+          </a:prstGeom>
+          <a:noFill/>
+        </p:spPr>
+        <p:txBody>
+          <a:bodyPr wrap="square">
+            <a:spAutoFit/>
+          </a:bodyPr>
+          <a:lstStyle/>
+          <a:p>
+            <a:pPr algn="l">
+              <a:spcAft>
+                <a:spcPts val="0"/>
+              </a:spcAft>
+            </a:pPr>
+            <a:r>
+              <a:rPr sz="850" b="1">
+                <a:solidFill>
+                  <a:srgbClr val="CC0000"/>
+                </a:solidFill>
+                <a:latin typeface="Red Hat Mono"/>
+              </a:rPr>
+              <a:t>02</a:t>
+            </a:r>
+          </a:p>
+          <a:p>
+            <a:pPr algn="l">
+              <a:spcAft>
+                <a:spcPts val="0"/>
+              </a:spcAft>
+            </a:pPr>
+            <a:r>
+              <a:rPr sz="1100" b="1">
+                <a:solidFill>
+                  <a:srgbClr val="1B1211"/>
+                </a:solidFill>
+                <a:latin typeface="Red Hat Display"/>
+              </a:rPr>
+              <a:t>Vector · Loki</a:t>
+            </a:r>
+          </a:p>
+          <a:p>
+            <a:pPr algn="l">
+              <a:spcAft>
+                <a:spcPts val="0"/>
+              </a:spcAft>
+            </a:pPr>
+            <a:r>
+              <a:rPr sz="850" b="0">
+                <a:solidFill>
+                  <a:srgbClr val="7E6A64"/>
+                </a:solidFill>
+                <a:latin typeface="Red Hat Mono"/>
+              </a:rPr>
+              <a:t>OpenShift Logging</a:t>
+            </a:r>
+          </a:p>
+        </p:txBody>
+      </p:sp>
+      <p:sp>
+        <p:nvSpPr>
+          <p:cNvPr id="20" name="Rounded Rectangle 19"/>
+          <p:cNvSpPr/>
+          <p:nvPr/>
+        </p:nvSpPr>
+        <p:spPr>
+          <a:xfrm>
+            <a:off x="6196430" y="2084831"/>
+            <a:ext cx="2508427" cy="786384"/>
+          </a:xfrm>
+          <a:prstGeom prst="roundRect">
+            <a:avLst>
+              <a:gd name="adj" fmla="val 8000"/>
+            </a:avLst>
+          </a:prstGeom>
+          <a:solidFill>
+            <a:srgbClr val="FFFFFF"/>
+          </a:solidFill>
+          <a:ln w="9525">
+            <a:solidFill>
+              <a:srgbClr val="CFC2BE"/>
+            </a:solidFill>
+          </a:ln>
+          <a:effectLst/>
+        </p:spPr>
+        <p:style>
+          <a:lnRef idx="1">
+            <a:schemeClr val="accent1"/>
+          </a:lnRef>
+          <a:fillRef idx="3">
+            <a:schemeClr val="accent1"/>
+          </a:fillRef>
+          <a:effectRef idx="2">
+            <a:schemeClr val="accent1"/>
+          </a:effectRef>
+          <a:fontRef idx="minor">
+            <a:schemeClr val="lt1"/>
+          </a:fontRef>
+        </p:style>
+        <p:txBody>
+          <a:bodyPr rtlCol="0" anchor="ctr"/>
+          <a:lstStyle/>
+          <a:p>
+            <a:pPr algn="ctr"/>
+          </a:p>
+        </p:txBody>
+      </p:sp>
+      <p:sp>
+        <p:nvSpPr>
+          <p:cNvPr id="21" name="Rectangle 20"/>
+          <p:cNvSpPr/>
+          <p:nvPr/>
+        </p:nvSpPr>
+        <p:spPr>
+          <a:xfrm>
+            <a:off x="6287870" y="2194559"/>
+            <a:ext cx="45720" cy="566928"/>
+          </a:xfrm>
+          <a:prstGeom prst="rect">
+            <a:avLst/>
+          </a:prstGeom>
+          <a:solidFill>
+            <a:srgbClr val="C2410C"/>
+          </a:solidFill>
+          <a:ln>
+            <a:noFill/>
+          </a:ln>
+          <a:effectLst/>
+        </p:spPr>
+        <p:style>
+          <a:lnRef idx="1">
+            <a:schemeClr val="accent1"/>
+          </a:lnRef>
+          <a:fillRef idx="3">
+            <a:schemeClr val="accent1"/>
+          </a:fillRef>
+          <a:effectRef idx="2">
+            <a:schemeClr val="accent1"/>
+          </a:effectRef>
+          <a:fontRef idx="minor">
+            <a:schemeClr val="lt1"/>
+          </a:fontRef>
+        </p:style>
+        <p:txBody>
+          <a:bodyPr rtlCol="0" anchor="ctr"/>
+          <a:lstStyle/>
+          <a:p>
+            <a:pPr algn="ctr"/>
+          </a:p>
+        </p:txBody>
+      </p:sp>
+      <p:sp>
+        <p:nvSpPr>
+          <p:cNvPr id="22" name="TextBox 21"/>
+          <p:cNvSpPr txBox="1"/>
+          <p:nvPr/>
+        </p:nvSpPr>
+        <p:spPr>
+          <a:xfrm>
+            <a:off x="6397598" y="2139695"/>
+            <a:ext cx="2234107" cy="694944"/>
+          </a:xfrm>
+          <a:prstGeom prst="rect">
+            <a:avLst/>
+          </a:prstGeom>
+          <a:noFill/>
+        </p:spPr>
+        <p:txBody>
+          <a:bodyPr wrap="square">
+            <a:spAutoFit/>
+          </a:bodyPr>
+          <a:lstStyle/>
+          <a:p>
+            <a:pPr algn="l">
+              <a:spcAft>
+                <a:spcPts val="0"/>
+              </a:spcAft>
+            </a:pPr>
+            <a:r>
+              <a:rPr sz="850" b="1">
+                <a:solidFill>
+                  <a:srgbClr val="C2410C"/>
+                </a:solidFill>
+                <a:latin typeface="Red Hat Mono"/>
+              </a:rPr>
+              <a:t>03</a:t>
+            </a:r>
+          </a:p>
+          <a:p>
+            <a:pPr algn="l">
+              <a:spcAft>
+                <a:spcPts val="0"/>
+              </a:spcAft>
+            </a:pPr>
+            <a:r>
+              <a:rPr sz="1100" b="1">
+                <a:solidFill>
+                  <a:srgbClr val="1B1211"/>
+                </a:solidFill>
+                <a:latin typeface="Red Hat Display"/>
+              </a:rPr>
+              <a:t>outage-risk scorer</a:t>
+            </a:r>
+          </a:p>
+          <a:p>
+            <a:pPr algn="l">
+              <a:spcAft>
+                <a:spcPts val="0"/>
+              </a:spcAft>
+            </a:pPr>
+            <a:r>
+              <a:rPr sz="850" b="0">
+                <a:solidFill>
+                  <a:srgbClr val="7E6A64"/>
+                </a:solidFill>
+                <a:latin typeface="Red Hat Mono"/>
+              </a:rPr>
+              <a:t>KServe · sklearn · OpenShift AI</a:t>
+            </a:r>
+          </a:p>
+        </p:txBody>
+      </p:sp>
+      <p:sp>
+        <p:nvSpPr>
+          <p:cNvPr id="23" name="Rounded Rectangle 22"/>
+          <p:cNvSpPr/>
+          <p:nvPr/>
+        </p:nvSpPr>
+        <p:spPr>
+          <a:xfrm>
+            <a:off x="8906025" y="2084831"/>
+            <a:ext cx="2508427" cy="786384"/>
+          </a:xfrm>
+          <a:prstGeom prst="roundRect">
+            <a:avLst>
+              <a:gd name="adj" fmla="val 8000"/>
+            </a:avLst>
+          </a:prstGeom>
+          <a:solidFill>
+            <a:srgbClr val="FFFFFF"/>
+          </a:solidFill>
+          <a:ln w="9525">
+            <a:solidFill>
+              <a:srgbClr val="CFC2BE"/>
+            </a:solidFill>
+          </a:ln>
+          <a:effectLst/>
+        </p:spPr>
+        <p:style>
+          <a:lnRef idx="1">
+            <a:schemeClr val="accent1"/>
+          </a:lnRef>
+          <a:fillRef idx="3">
+            <a:schemeClr val="accent1"/>
+          </a:fillRef>
+          <a:effectRef idx="2">
+            <a:schemeClr val="accent1"/>
+          </a:effectRef>
+          <a:fontRef idx="minor">
+            <a:schemeClr val="lt1"/>
+          </a:fontRef>
+        </p:style>
+        <p:txBody>
+          <a:bodyPr rtlCol="0" anchor="ctr"/>
+          <a:lstStyle/>
+          <a:p>
+            <a:pPr algn="ctr"/>
+          </a:p>
+        </p:txBody>
+      </p:sp>
+      <p:sp>
+        <p:nvSpPr>
+          <p:cNvPr id="24" name="Rectangle 23"/>
+          <p:cNvSpPr/>
+          <p:nvPr/>
+        </p:nvSpPr>
+        <p:spPr>
+          <a:xfrm>
+            <a:off x="8997465" y="2194559"/>
+            <a:ext cx="45720" cy="566928"/>
+          </a:xfrm>
+          <a:prstGeom prst="rect">
+            <a:avLst/>
+          </a:prstGeom>
+          <a:solidFill>
+            <a:srgbClr val="1E7A55"/>
+          </a:solidFill>
+          <a:ln>
+            <a:noFill/>
+          </a:ln>
+          <a:effectLst/>
+        </p:spPr>
+        <p:style>
+          <a:lnRef idx="1">
+            <a:schemeClr val="accent1"/>
+          </a:lnRef>
+          <a:fillRef idx="3">
+            <a:schemeClr val="accent1"/>
+          </a:fillRef>
+          <a:effectRef idx="2">
+            <a:schemeClr val="accent1"/>
+          </a:effectRef>
+          <a:fontRef idx="minor">
+            <a:schemeClr val="lt1"/>
+          </a:fontRef>
+        </p:style>
+        <p:txBody>
+          <a:bodyPr rtlCol="0" anchor="ctr"/>
+          <a:lstStyle/>
+          <a:p>
+            <a:pPr algn="ctr"/>
+          </a:p>
+        </p:txBody>
+      </p:sp>
+      <p:sp>
+        <p:nvSpPr>
+          <p:cNvPr id="25" name="TextBox 24"/>
+          <p:cNvSpPr txBox="1"/>
+          <p:nvPr/>
+        </p:nvSpPr>
+        <p:spPr>
+          <a:xfrm>
+            <a:off x="9107193" y="2139695"/>
+            <a:ext cx="2234107" cy="694944"/>
+          </a:xfrm>
+          <a:prstGeom prst="rect">
+            <a:avLst/>
+          </a:prstGeom>
+          <a:noFill/>
+        </p:spPr>
+        <p:txBody>
+          <a:bodyPr wrap="square">
+            <a:spAutoFit/>
+          </a:bodyPr>
+          <a:lstStyle/>
+          <a:p>
+            <a:pPr algn="l">
+              <a:spcAft>
+                <a:spcPts val="0"/>
+              </a:spcAft>
+            </a:pPr>
+            <a:r>
+              <a:rPr sz="850" b="1">
+                <a:solidFill>
+                  <a:srgbClr val="1E7A55"/>
+                </a:solidFill>
+                <a:latin typeface="Red Hat Mono"/>
+              </a:rPr>
+              <a:t>04</a:t>
+            </a:r>
+          </a:p>
+          <a:p>
+            <a:pPr algn="l">
+              <a:spcAft>
+                <a:spcPts val="0"/>
+              </a:spcAft>
+            </a:pPr>
+            <a:r>
+              <a:rPr sz="1100" b="1">
+                <a:solidFill>
+                  <a:srgbClr val="1B1211"/>
+                </a:solidFill>
+                <a:latin typeface="Red Hat Display"/>
+              </a:rPr>
+              <a:t>Granite · Lightspeed</a:t>
+            </a:r>
+          </a:p>
+          <a:p>
+            <a:pPr algn="l">
+              <a:spcAft>
+                <a:spcPts val="0"/>
+              </a:spcAft>
+            </a:pPr>
+            <a:r>
+              <a:rPr sz="850" b="0">
+                <a:solidFill>
+                  <a:srgbClr val="7E6A64"/>
+                </a:solidFill>
+                <a:latin typeface="Red Hat Mono"/>
+              </a:rPr>
+              <a:t>vLLM · OpenShift AI</a:t>
+            </a:r>
+          </a:p>
+        </p:txBody>
+      </p:sp>
+      <p:sp>
+        <p:nvSpPr>
+          <p:cNvPr id="26" name="Rounded Rectangle 25"/>
+          <p:cNvSpPr/>
+          <p:nvPr/>
+        </p:nvSpPr>
+        <p:spPr>
+          <a:xfrm>
+            <a:off x="777240" y="2999231"/>
+            <a:ext cx="2508427" cy="786384"/>
+          </a:xfrm>
+          <a:prstGeom prst="roundRect">
+            <a:avLst>
+              <a:gd name="adj" fmla="val 8000"/>
+            </a:avLst>
+          </a:prstGeom>
+          <a:solidFill>
+            <a:srgbClr val="FFFFFF"/>
+          </a:solidFill>
+          <a:ln w="9525">
+            <a:solidFill>
+              <a:srgbClr val="CFC2BE"/>
+            </a:solidFill>
+          </a:ln>
+          <a:effectLst/>
+        </p:spPr>
+        <p:style>
+          <a:lnRef idx="1">
+            <a:schemeClr val="accent1"/>
+          </a:lnRef>
+          <a:fillRef idx="3">
+            <a:schemeClr val="accent1"/>
+          </a:fillRef>
+          <a:effectRef idx="2">
+            <a:schemeClr val="accent1"/>
+          </a:effectRef>
+          <a:fontRef idx="minor">
+            <a:schemeClr val="lt1"/>
+          </a:fontRef>
+        </p:style>
+        <p:txBody>
+          <a:bodyPr rtlCol="0" anchor="ctr"/>
+          <a:lstStyle/>
+          <a:p>
+            <a:pPr algn="ctr"/>
+          </a:p>
+        </p:txBody>
+      </p:sp>
+      <p:sp>
+        <p:nvSpPr>
+          <p:cNvPr id="27" name="Rectangle 26"/>
+          <p:cNvSpPr/>
+          <p:nvPr/>
+        </p:nvSpPr>
+        <p:spPr>
+          <a:xfrm>
+            <a:off x="868680" y="3108959"/>
+            <a:ext cx="45720" cy="566928"/>
+          </a:xfrm>
+          <a:prstGeom prst="rect">
+            <a:avLst/>
+          </a:prstGeom>
+          <a:solidFill>
+            <a:srgbClr val="5B2E91"/>
+          </a:solidFill>
+          <a:ln>
+            <a:noFill/>
+          </a:ln>
+          <a:effectLst/>
+        </p:spPr>
+        <p:style>
+          <a:lnRef idx="1">
+            <a:schemeClr val="accent1"/>
+          </a:lnRef>
+          <a:fillRef idx="3">
+            <a:schemeClr val="accent1"/>
+          </a:fillRef>
+          <a:effectRef idx="2">
+            <a:schemeClr val="accent1"/>
+          </a:effectRef>
+          <a:fontRef idx="minor">
+            <a:schemeClr val="lt1"/>
+          </a:fontRef>
+        </p:style>
+        <p:txBody>
+          <a:bodyPr rtlCol="0" anchor="ctr"/>
+          <a:lstStyle/>
+          <a:p>
+            <a:pPr algn="ctr"/>
+          </a:p>
+        </p:txBody>
+      </p:sp>
+      <p:sp>
+        <p:nvSpPr>
+          <p:cNvPr id="28" name="TextBox 27"/>
+          <p:cNvSpPr txBox="1"/>
+          <p:nvPr/>
+        </p:nvSpPr>
+        <p:spPr>
+          <a:xfrm>
+            <a:off x="978408" y="3054095"/>
+            <a:ext cx="2234107" cy="694944"/>
+          </a:xfrm>
+          <a:prstGeom prst="rect">
+            <a:avLst/>
+          </a:prstGeom>
+          <a:noFill/>
+        </p:spPr>
+        <p:txBody>
+          <a:bodyPr wrap="square">
+            <a:spAutoFit/>
+          </a:bodyPr>
+          <a:lstStyle/>
+          <a:p>
+            <a:pPr algn="l">
+              <a:spcAft>
+                <a:spcPts val="0"/>
+              </a:spcAft>
+            </a:pPr>
+            <a:r>
+              <a:rPr sz="850" b="1">
+                <a:solidFill>
+                  <a:srgbClr val="5B2E91"/>
+                </a:solidFill>
+                <a:latin typeface="Red Hat Mono"/>
+              </a:rPr>
+              <a:t>05</a:t>
+            </a:r>
+          </a:p>
+          <a:p>
+            <a:pPr algn="l">
+              <a:spcAft>
+                <a:spcPts val="0"/>
+              </a:spcAft>
+            </a:pPr>
+            <a:r>
+              <a:rPr sz="1100" b="1">
+                <a:solidFill>
+                  <a:srgbClr val="1B1211"/>
+                </a:solidFill>
+                <a:latin typeface="Red Hat Display"/>
+              </a:rPr>
+              <a:t>Pull request</a:t>
+            </a:r>
+          </a:p>
+          <a:p>
+            <a:pPr algn="l">
+              <a:spcAft>
+                <a:spcPts val="0"/>
+              </a:spcAft>
+            </a:pPr>
+            <a:r>
+              <a:rPr sz="850" b="0">
+                <a:solidFill>
+                  <a:srgbClr val="7E6A64"/>
+                </a:solidFill>
+                <a:latin typeface="Red Hat Mono"/>
+              </a:rPr>
+              <a:t>a person reviews and merges</a:t>
+            </a:r>
+          </a:p>
+        </p:txBody>
+      </p:sp>
+      <p:sp>
+        <p:nvSpPr>
+          <p:cNvPr id="29" name="Rounded Rectangle 28"/>
+          <p:cNvSpPr/>
+          <p:nvPr/>
+        </p:nvSpPr>
+        <p:spPr>
+          <a:xfrm>
+            <a:off x="3486835" y="2999231"/>
+            <a:ext cx="2508427" cy="786384"/>
+          </a:xfrm>
+          <a:prstGeom prst="roundRect">
+            <a:avLst>
+              <a:gd name="adj" fmla="val 8000"/>
+            </a:avLst>
+          </a:prstGeom>
+          <a:solidFill>
+            <a:srgbClr val="FFFFFF"/>
+          </a:solidFill>
+          <a:ln w="9525">
+            <a:solidFill>
+              <a:srgbClr val="CFC2BE"/>
+            </a:solidFill>
+          </a:ln>
+          <a:effectLst/>
+        </p:spPr>
+        <p:style>
+          <a:lnRef idx="1">
+            <a:schemeClr val="accent1"/>
+          </a:lnRef>
+          <a:fillRef idx="3">
+            <a:schemeClr val="accent1"/>
+          </a:fillRef>
+          <a:effectRef idx="2">
+            <a:schemeClr val="accent1"/>
+          </a:effectRef>
+          <a:fontRef idx="minor">
+            <a:schemeClr val="lt1"/>
+          </a:fontRef>
+        </p:style>
+        <p:txBody>
+          <a:bodyPr rtlCol="0" anchor="ctr"/>
+          <a:lstStyle/>
+          <a:p>
+            <a:pPr algn="ctr"/>
+          </a:p>
+        </p:txBody>
+      </p:sp>
+      <p:sp>
+        <p:nvSpPr>
+          <p:cNvPr id="30" name="Rectangle 29"/>
+          <p:cNvSpPr/>
+          <p:nvPr/>
+        </p:nvSpPr>
+        <p:spPr>
+          <a:xfrm>
+            <a:off x="3578275" y="3108959"/>
+            <a:ext cx="45720" cy="566928"/>
+          </a:xfrm>
+          <a:prstGeom prst="rect">
+            <a:avLst/>
+          </a:prstGeom>
+          <a:solidFill>
+            <a:srgbClr val="5B2E91"/>
+          </a:solidFill>
+          <a:ln>
+            <a:noFill/>
+          </a:ln>
+          <a:effectLst/>
+        </p:spPr>
+        <p:style>
+          <a:lnRef idx="1">
+            <a:schemeClr val="accent1"/>
+          </a:lnRef>
+          <a:fillRef idx="3">
+            <a:schemeClr val="accent1"/>
+          </a:fillRef>
+          <a:effectRef idx="2">
+            <a:schemeClr val="accent1"/>
+          </a:effectRef>
+          <a:fontRef idx="minor">
+            <a:schemeClr val="lt1"/>
+          </a:fontRef>
+        </p:style>
+        <p:txBody>
+          <a:bodyPr rtlCol="0" anchor="ctr"/>
+          <a:lstStyle/>
+          <a:p>
+            <a:pPr algn="ctr"/>
+          </a:p>
+        </p:txBody>
+      </p:sp>
+      <p:sp>
+        <p:nvSpPr>
+          <p:cNvPr id="31" name="TextBox 30"/>
+          <p:cNvSpPr txBox="1"/>
+          <p:nvPr/>
+        </p:nvSpPr>
+        <p:spPr>
+          <a:xfrm>
+            <a:off x="3688003" y="3054095"/>
+            <a:ext cx="2234107" cy="694944"/>
+          </a:xfrm>
+          <a:prstGeom prst="rect">
+            <a:avLst/>
+          </a:prstGeom>
+          <a:noFill/>
+        </p:spPr>
+        <p:txBody>
+          <a:bodyPr wrap="square">
+            <a:spAutoFit/>
+          </a:bodyPr>
+          <a:lstStyle/>
+          <a:p>
+            <a:pPr algn="l">
+              <a:spcAft>
+                <a:spcPts val="0"/>
+              </a:spcAft>
+            </a:pPr>
+            <a:r>
+              <a:rPr sz="850" b="1">
+                <a:solidFill>
+                  <a:srgbClr val="5B2E91"/>
+                </a:solidFill>
+                <a:latin typeface="Red Hat Mono"/>
+              </a:rPr>
+              <a:t>06</a:t>
+            </a:r>
+          </a:p>
+          <a:p>
+            <a:pPr algn="l">
+              <a:spcAft>
+                <a:spcPts val="0"/>
+              </a:spcAft>
+            </a:pPr>
+            <a:r>
+              <a:rPr sz="1100" b="1">
+                <a:solidFill>
+                  <a:srgbClr val="1B1211"/>
+                </a:solidFill>
+                <a:latin typeface="Red Hat Display"/>
+              </a:rPr>
+              <a:t>Repo → AAP → EDA</a:t>
+            </a:r>
+          </a:p>
+          <a:p>
+            <a:pPr algn="l">
+              <a:spcAft>
+                <a:spcPts val="0"/>
+              </a:spcAft>
+            </a:pPr>
+            <a:r>
+              <a:rPr sz="850" b="0">
+                <a:solidFill>
+                  <a:srgbClr val="7E6A64"/>
+                </a:solidFill>
+                <a:latin typeface="Red Hat Mono"/>
+              </a:rPr>
+              <a:t>the merge is the promotion</a:t>
+            </a:r>
+          </a:p>
+        </p:txBody>
+      </p:sp>
+      <p:sp>
+        <p:nvSpPr>
+          <p:cNvPr id="32" name="Rounded Rectangle 31"/>
+          <p:cNvSpPr/>
+          <p:nvPr/>
+        </p:nvSpPr>
+        <p:spPr>
+          <a:xfrm>
+            <a:off x="6196430" y="2999231"/>
+            <a:ext cx="2508427" cy="786384"/>
+          </a:xfrm>
+          <a:prstGeom prst="roundRect">
+            <a:avLst>
+              <a:gd name="adj" fmla="val 8000"/>
+            </a:avLst>
+          </a:prstGeom>
+          <a:solidFill>
+            <a:srgbClr val="FFFFFF"/>
+          </a:solidFill>
+          <a:ln w="9525">
+            <a:solidFill>
+              <a:srgbClr val="CFC2BE"/>
+            </a:solidFill>
+          </a:ln>
+          <a:effectLst/>
+        </p:spPr>
+        <p:style>
+          <a:lnRef idx="1">
+            <a:schemeClr val="accent1"/>
+          </a:lnRef>
+          <a:fillRef idx="3">
+            <a:schemeClr val="accent1"/>
+          </a:fillRef>
+          <a:effectRef idx="2">
+            <a:schemeClr val="accent1"/>
+          </a:effectRef>
+          <a:fontRef idx="minor">
+            <a:schemeClr val="lt1"/>
+          </a:fontRef>
+        </p:style>
+        <p:txBody>
+          <a:bodyPr rtlCol="0" anchor="ctr"/>
+          <a:lstStyle/>
+          <a:p>
+            <a:pPr algn="ctr"/>
+          </a:p>
+        </p:txBody>
+      </p:sp>
+      <p:sp>
+        <p:nvSpPr>
+          <p:cNvPr id="33" name="Rectangle 32"/>
+          <p:cNvSpPr/>
+          <p:nvPr/>
+        </p:nvSpPr>
+        <p:spPr>
+          <a:xfrm>
+            <a:off x="6287870" y="3108959"/>
+            <a:ext cx="45720" cy="566928"/>
+          </a:xfrm>
+          <a:prstGeom prst="rect">
+            <a:avLst/>
+          </a:prstGeom>
+          <a:solidFill>
+            <a:srgbClr val="5B2E91"/>
+          </a:solidFill>
+          <a:ln>
+            <a:noFill/>
+          </a:ln>
+          <a:effectLst/>
+        </p:spPr>
+        <p:style>
+          <a:lnRef idx="1">
+            <a:schemeClr val="accent1"/>
+          </a:lnRef>
+          <a:fillRef idx="3">
+            <a:schemeClr val="accent1"/>
+          </a:fillRef>
+          <a:effectRef idx="2">
+            <a:schemeClr val="accent1"/>
+          </a:effectRef>
+          <a:fontRef idx="minor">
+            <a:schemeClr val="lt1"/>
+          </a:fontRef>
+        </p:style>
+        <p:txBody>
+          <a:bodyPr rtlCol="0" anchor="ctr"/>
+          <a:lstStyle/>
+          <a:p>
+            <a:pPr algn="ctr"/>
+          </a:p>
+        </p:txBody>
+      </p:sp>
+      <p:sp>
+        <p:nvSpPr>
+          <p:cNvPr id="34" name="TextBox 33"/>
+          <p:cNvSpPr txBox="1"/>
+          <p:nvPr/>
+        </p:nvSpPr>
+        <p:spPr>
+          <a:xfrm>
+            <a:off x="6397598" y="3054095"/>
+            <a:ext cx="2234107" cy="694944"/>
+          </a:xfrm>
+          <a:prstGeom prst="rect">
+            <a:avLst/>
+          </a:prstGeom>
+          <a:noFill/>
+        </p:spPr>
+        <p:txBody>
+          <a:bodyPr wrap="square">
+            <a:spAutoFit/>
+          </a:bodyPr>
+          <a:lstStyle/>
+          <a:p>
+            <a:pPr algn="l">
+              <a:spcAft>
+                <a:spcPts val="0"/>
+              </a:spcAft>
+            </a:pPr>
+            <a:r>
+              <a:rPr sz="850" b="1">
+                <a:solidFill>
+                  <a:srgbClr val="5B2E91"/>
+                </a:solidFill>
+                <a:latin typeface="Red Hat Mono"/>
+              </a:rPr>
+              <a:t>07</a:t>
+            </a:r>
+          </a:p>
+          <a:p>
+            <a:pPr algn="l">
+              <a:spcAft>
+                <a:spcPts val="0"/>
+              </a:spcAft>
+            </a:pPr>
+            <a:r>
+              <a:rPr sz="1100" b="1">
+                <a:solidFill>
+                  <a:srgbClr val="1B1211"/>
+                </a:solidFill>
+                <a:latin typeface="Red Hat Display"/>
+              </a:rPr>
+              <a:t>Event-Driven Ansible</a:t>
+            </a:r>
+          </a:p>
+          <a:p>
+            <a:pPr algn="l">
+              <a:spcAft>
+                <a:spcPts val="0"/>
+              </a:spcAft>
+            </a:pPr>
+            <a:r>
+              <a:rPr sz="850" b="0">
+                <a:solidFill>
+                  <a:srgbClr val="7E6A64"/>
+                </a:solidFill>
+                <a:latin typeface="Red Hat Mono"/>
+              </a:rPr>
+              <a:t>approved job templates</a:t>
+            </a:r>
+          </a:p>
+        </p:txBody>
+      </p:sp>
+      <p:sp>
+        <p:nvSpPr>
+          <p:cNvPr id="35" name="Rounded Rectangle 34"/>
+          <p:cNvSpPr/>
+          <p:nvPr/>
+        </p:nvSpPr>
+        <p:spPr>
+          <a:xfrm>
+            <a:off x="8906025" y="2999231"/>
+            <a:ext cx="2508427" cy="786384"/>
+          </a:xfrm>
+          <a:prstGeom prst="roundRect">
+            <a:avLst>
+              <a:gd name="adj" fmla="val 8000"/>
+            </a:avLst>
+          </a:prstGeom>
+          <a:solidFill>
+            <a:srgbClr val="FFFFFF"/>
+          </a:solidFill>
+          <a:ln w="9525">
+            <a:solidFill>
+              <a:srgbClr val="CFC2BE"/>
+            </a:solidFill>
+          </a:ln>
+          <a:effectLst/>
+        </p:spPr>
+        <p:style>
+          <a:lnRef idx="1">
+            <a:schemeClr val="accent1"/>
+          </a:lnRef>
+          <a:fillRef idx="3">
+            <a:schemeClr val="accent1"/>
+          </a:fillRef>
+          <a:effectRef idx="2">
+            <a:schemeClr val="accent1"/>
+          </a:effectRef>
+          <a:fontRef idx="minor">
+            <a:schemeClr val="lt1"/>
+          </a:fontRef>
+        </p:style>
+        <p:txBody>
+          <a:bodyPr rtlCol="0" anchor="ctr"/>
+          <a:lstStyle/>
+          <a:p>
+            <a:pPr algn="ctr"/>
+          </a:p>
+        </p:txBody>
+      </p:sp>
+      <p:sp>
+        <p:nvSpPr>
+          <p:cNvPr id="36" name="Rectangle 35"/>
+          <p:cNvSpPr/>
+          <p:nvPr/>
+        </p:nvSpPr>
+        <p:spPr>
+          <a:xfrm>
+            <a:off x="8997465" y="3108959"/>
+            <a:ext cx="45720" cy="566928"/>
+          </a:xfrm>
+          <a:prstGeom prst="rect">
+            <a:avLst/>
+          </a:prstGeom>
+          <a:solidFill>
+            <a:srgbClr val="1E7A55"/>
+          </a:solidFill>
+          <a:ln>
+            <a:noFill/>
+          </a:ln>
+          <a:effectLst/>
+        </p:spPr>
+        <p:style>
+          <a:lnRef idx="1">
+            <a:schemeClr val="accent1"/>
+          </a:lnRef>
+          <a:fillRef idx="3">
+            <a:schemeClr val="accent1"/>
+          </a:fillRef>
+          <a:effectRef idx="2">
+            <a:schemeClr val="accent1"/>
+          </a:effectRef>
+          <a:fontRef idx="minor">
+            <a:schemeClr val="lt1"/>
+          </a:fontRef>
+        </p:style>
+        <p:txBody>
+          <a:bodyPr rtlCol="0" anchor="ctr"/>
+          <a:lstStyle/>
+          <a:p>
+            <a:pPr algn="ctr"/>
+          </a:p>
+        </p:txBody>
+      </p:sp>
+      <p:sp>
+        <p:nvSpPr>
+          <p:cNvPr id="37" name="TextBox 36"/>
+          <p:cNvSpPr txBox="1"/>
+          <p:nvPr/>
+        </p:nvSpPr>
+        <p:spPr>
+          <a:xfrm>
+            <a:off x="9107193" y="3054095"/>
+            <a:ext cx="2234107" cy="694944"/>
+          </a:xfrm>
+          <a:prstGeom prst="rect">
+            <a:avLst/>
+          </a:prstGeom>
+          <a:noFill/>
+        </p:spPr>
+        <p:txBody>
+          <a:bodyPr wrap="square">
+            <a:spAutoFit/>
+          </a:bodyPr>
+          <a:lstStyle/>
+          <a:p>
+            <a:pPr algn="l">
+              <a:spcAft>
+                <a:spcPts val="0"/>
+              </a:spcAft>
+            </a:pPr>
+            <a:r>
+              <a:rPr sz="850" b="1">
+                <a:solidFill>
+                  <a:srgbClr val="1E7A55"/>
+                </a:solidFill>
+                <a:latin typeface="Red Hat Mono"/>
+              </a:rPr>
+              <a:t>08</a:t>
+            </a:r>
+          </a:p>
+          <a:p>
+            <a:pPr algn="l">
+              <a:spcAft>
+                <a:spcPts val="0"/>
+              </a:spcAft>
+            </a:pPr>
+            <a:r>
+              <a:rPr sz="1100" b="1">
+                <a:solidFill>
+                  <a:srgbClr val="1B1211"/>
+                </a:solidFill>
+                <a:latin typeface="Red Hat Display"/>
+              </a:rPr>
+              <a:t>Knowledge base + assistant</a:t>
+            </a:r>
+          </a:p>
+          <a:p>
+            <a:pPr algn="l">
+              <a:spcAft>
+                <a:spcPts val="0"/>
+              </a:spcAft>
+            </a:pPr>
+            <a:r>
+              <a:rPr sz="850" b="0">
+                <a:solidFill>
+                  <a:srgbClr val="7E6A64"/>
+                </a:solidFill>
+                <a:latin typeface="Red Hat Mono"/>
+              </a:rPr>
+              <a:t>pgvector · ops notebook</a:t>
+            </a:r>
+          </a:p>
+        </p:txBody>
+      </p:sp>
+      <p:sp>
+        <p:nvSpPr>
+          <p:cNvPr id="38" name="TextBox 37"/>
+          <p:cNvSpPr txBox="1"/>
+          <p:nvPr/>
+        </p:nvSpPr>
+        <p:spPr>
+          <a:xfrm>
+            <a:off x="777240" y="3803903"/>
+            <a:ext cx="10637215" cy="201168"/>
+          </a:xfrm>
+          <a:prstGeom prst="rect">
+            <a:avLst/>
+          </a:prstGeom>
+          <a:noFill/>
+        </p:spPr>
+        <p:txBody>
+          <a:bodyPr wrap="square">
+            <a:spAutoFit/>
+          </a:bodyPr>
+          <a:lstStyle/>
+          <a:p>
+            <a:pPr algn="r">
+              <a:spcAft>
+                <a:spcPts val="0"/>
+              </a:spcAft>
+            </a:pPr>
+            <a:r>
+              <a:rPr sz="850" b="1">
+                <a:solidFill>
+                  <a:srgbClr val="7E6A64"/>
+                </a:solidFill>
+                <a:latin typeface="Red Hat Mono"/>
+              </a:rPr>
+              <a:t>THE LOOP · ASK, THEN PROBE · 08 FEEDS 01</a:t>
+            </a:r>
+          </a:p>
+        </p:txBody>
+      </p:sp>
+      <p:sp>
+        <p:nvSpPr>
+          <p:cNvPr id="39" name="Rounded Rectangle 38"/>
+          <p:cNvSpPr/>
+          <p:nvPr/>
+        </p:nvSpPr>
+        <p:spPr>
+          <a:xfrm>
+            <a:off x="777240" y="4114800"/>
+            <a:ext cx="10637215" cy="1097280"/>
+          </a:xfrm>
+          <a:prstGeom prst="roundRect">
+            <a:avLst>
+              <a:gd name="adj" fmla="val 6000"/>
+            </a:avLst>
+          </a:prstGeom>
+          <a:solidFill>
+            <a:srgbClr val="FFFFFF"/>
+          </a:solidFill>
+          <a:ln w="12700">
+            <a:solidFill>
+              <a:srgbClr val="E6DDDA"/>
+            </a:solidFill>
+          </a:ln>
+          <a:effectLst/>
+        </p:spPr>
+        <p:style>
+          <a:lnRef idx="1">
+            <a:schemeClr val="accent1"/>
+          </a:lnRef>
+          <a:fillRef idx="3">
+            <a:schemeClr val="accent1"/>
+          </a:fillRef>
+          <a:effectRef idx="2">
+            <a:schemeClr val="accent1"/>
+          </a:effectRef>
+          <a:fontRef idx="minor">
+            <a:schemeClr val="lt1"/>
+          </a:fontRef>
+        </p:style>
+        <p:txBody>
+          <a:bodyPr rtlCol="0" anchor="ctr"/>
+          <a:lstStyle/>
+          <a:p>
+            <a:pPr algn="ctr"/>
+          </a:p>
+        </p:txBody>
+      </p:sp>
+      <p:sp>
+        <p:nvSpPr>
+          <p:cNvPr id="40" name="TextBox 39"/>
+          <p:cNvSpPr txBox="1"/>
+          <p:nvPr/>
+        </p:nvSpPr>
+        <p:spPr>
+          <a:xfrm>
+            <a:off x="941832" y="4160520"/>
+            <a:ext cx="10308031" cy="1005840"/>
+          </a:xfrm>
+          <a:prstGeom prst="rect">
+            <a:avLst/>
+          </a:prstGeom>
+          <a:noFill/>
+        </p:spPr>
+        <p:txBody>
+          <a:bodyPr wrap="square">
+            <a:spAutoFit/>
+          </a:bodyPr>
+          <a:lstStyle/>
+          <a:p>
+            <a:pPr>
+              <a:spcAft>
+                <a:spcPts val="300"/>
+              </a:spcAft>
+            </a:pPr>
+            <a:r>
+              <a:rPr sz="850" b="1">
+                <a:solidFill>
+                  <a:srgbClr val="7E6A64"/>
+                </a:solidFill>
+                <a:latin typeface="Red Hat Mono"/>
+              </a:rPr>
+              <a:t>ASK THE PLATFORM</a:t>
+            </a:r>
+          </a:p>
+          <a:p>
+            <a:pPr>
+              <a:spcAft>
+                <a:spcPts val="200"/>
+              </a:spcAft>
+            </a:pPr>
+            <a:r>
+              <a:rPr sz="900" b="1">
+                <a:solidFill>
+                  <a:srgbClr val="1B1211"/>
+                </a:solidFill>
+                <a:latin typeface="Red Hat Mono"/>
+              </a:rPr>
+              <a:t>How is server1-taxreturns?   </a:t>
+            </a:r>
+            <a:r>
+              <a:rPr sz="900" b="0">
+                <a:solidFill>
+                  <a:srgbClr val="54423E"/>
+                </a:solidFill>
+                <a:latin typeface="Red Hat Mono"/>
+              </a:rPr>
+              <a:t>Online, up 41d, mem 62%, 72h risk 0.22 and falling; last change CR-9088.  </a:t>
+            </a:r>
+            <a:r>
+              <a:rPr sz="900" b="0">
+                <a:solidFill>
+                  <a:srgbClr val="286C88"/>
+                </a:solidFill>
+                <a:latin typeface="Red Hat Mono"/>
+              </a:rPr>
+              <a:t>[job 40518 · journald · RB-214]</a:t>
+            </a:r>
+          </a:p>
+          <a:p>
+            <a:pPr>
+              <a:spcAft>
+                <a:spcPts val="200"/>
+              </a:spcAft>
+            </a:pPr>
+            <a:r>
+              <a:rPr sz="900" b="1">
+                <a:solidFill>
+                  <a:srgbClr val="1B1211"/>
+                </a:solidFill>
+                <a:latin typeface="Red Hat Mono"/>
+              </a:rPr>
+              <a:t>How is server8-audits?   </a:t>
+            </a:r>
+            <a:r>
+              <a:rPr sz="900" b="0">
+                <a:solidFill>
+                  <a:srgbClr val="54423E"/>
+                </a:solidFill>
+                <a:latin typeface="Red Hat Mono"/>
+              </a:rPr>
+              <a:t>Restored 03:13 by job 40512 (Xmx 7g); risk 0.91 → 0.34; PR #482 merged, INC-2340 closed.  </a:t>
+            </a:r>
+            <a:r>
+              <a:rPr sz="900" b="0">
+                <a:solidFill>
+                  <a:srgbClr val="286C88"/>
+                </a:solidFill>
+                <a:latin typeface="Red Hat Mono"/>
+              </a:rPr>
+              <a:t>[job 40519]</a:t>
+            </a:r>
+          </a:p>
+          <a:p>
+            <a:pPr>
+              <a:spcAft>
+                <a:spcPts val="200"/>
+              </a:spcAft>
+            </a:pPr>
+            <a:r>
+              <a:rPr sz="900" b="1">
+                <a:solidFill>
+                  <a:srgbClr val="1B1211"/>
+                </a:solidFill>
+                <a:latin typeface="Red Hat Mono"/>
+              </a:rPr>
+              <a:t>Which servers are showing online?   </a:t>
+            </a:r>
+            <a:r>
+              <a:rPr sz="900" b="0">
+                <a:solidFill>
+                  <a:srgbClr val="54423E"/>
+                </a:solidFill>
+                <a:latin typeface="Red Hat Mono"/>
+              </a:rPr>
+              <a:t>13 of 14: server1..12 ok, MVSA reachable, MVSB in its IPL window until 06:00.  </a:t>
+            </a:r>
+            <a:r>
+              <a:rPr sz="900" b="0">
+                <a:solidFill>
+                  <a:srgbClr val="286C88"/>
+                </a:solidFill>
+                <a:latin typeface="Red Hat Mono"/>
+              </a:rPr>
+              <a:t>[job 40520 · estate ping]</a:t>
+            </a:r>
+          </a:p>
+        </p:txBody>
+      </p:sp>
+      <p:sp>
+        <p:nvSpPr>
+          <p:cNvPr id="41" name="Rectangle 40"/>
+          <p:cNvSpPr/>
+          <p:nvPr/>
+        </p:nvSpPr>
+        <p:spPr>
+          <a:xfrm>
+            <a:off x="777240" y="5321808"/>
+            <a:ext cx="41148" cy="1371600"/>
+          </a:xfrm>
+          <a:prstGeom prst="rect">
+            <a:avLst/>
+          </a:prstGeom>
+          <a:solidFill>
+            <a:srgbClr val="CC0000"/>
+          </a:solidFill>
+          <a:ln>
+            <a:noFill/>
+          </a:ln>
+          <a:effectLst/>
+        </p:spPr>
+        <p:style>
+          <a:lnRef idx="1">
+            <a:schemeClr val="accent1"/>
+          </a:lnRef>
+          <a:fillRef idx="3">
+            <a:schemeClr val="accent1"/>
+          </a:fillRef>
+          <a:effectRef idx="2">
+            <a:schemeClr val="accent1"/>
+          </a:effectRef>
+          <a:fontRef idx="minor">
+            <a:schemeClr val="lt1"/>
+          </a:fontRef>
+        </p:style>
+        <p:txBody>
+          <a:bodyPr rtlCol="0" anchor="ctr"/>
+          <a:lstStyle/>
+          <a:p>
+            <a:pPr algn="ctr"/>
+          </a:p>
+        </p:txBody>
+      </p:sp>
+      <p:sp>
+        <p:nvSpPr>
+          <p:cNvPr id="42" name="TextBox 41"/>
+          <p:cNvSpPr txBox="1"/>
+          <p:nvPr/>
+        </p:nvSpPr>
+        <p:spPr>
+          <a:xfrm>
+            <a:off x="923544" y="5276088"/>
+            <a:ext cx="2307259" cy="1371600"/>
+          </a:xfrm>
+          <a:prstGeom prst="rect">
+            <a:avLst/>
+          </a:prstGeom>
+          <a:noFill/>
+        </p:spPr>
+        <p:txBody>
+          <a:bodyPr wrap="square">
+            <a:spAutoFit/>
+          </a:bodyPr>
+          <a:lstStyle/>
+          <a:p>
+            <a:pPr algn="l">
+              <a:spcAft>
+                <a:spcPts val="300"/>
+              </a:spcAft>
+            </a:pPr>
+            <a:r>
+              <a:rPr sz="850" b="1">
+                <a:solidFill>
+                  <a:srgbClr val="7E6A64"/>
+                </a:solidFill>
+                <a:latin typeface="Red Hat Mono"/>
+              </a:rPr>
+              <a:t>TAKEAWAY</a:t>
+            </a:r>
+          </a:p>
+          <a:p>
+            <a:pPr algn="l">
+              <a:spcAft>
+                <a:spcPts val="300"/>
+              </a:spcAft>
+            </a:pPr>
+            <a:r>
+              <a:rPr sz="1300" b="1">
+                <a:solidFill>
+                  <a:srgbClr val="1B1211"/>
+                </a:solidFill>
+                <a:latin typeface="Red Hat Display"/>
+              </a:rPr>
+              <a:t>The loop is the documentation</a:t>
+            </a:r>
+          </a:p>
+          <a:p>
+            <a:pPr algn="l">
+              <a:spcAft>
+                <a:spcPts val="0"/>
+              </a:spcAft>
+            </a:pPr>
+            <a:r>
+              <a:rPr sz="1000" b="0">
+                <a:solidFill>
+                  <a:srgbClr val="54423E"/>
+                </a:solidFill>
+                <a:latin typeface="Red Hat Text"/>
+              </a:rPr>
+              <a:t>Every promoted change, its review thread and its job outcome are indexed where the assistant searches. The KM system writes itself.</a:t>
+            </a:r>
+          </a:p>
+        </p:txBody>
+      </p:sp>
+      <p:sp>
+        <p:nvSpPr>
+          <p:cNvPr id="43" name="Rectangle 42"/>
+          <p:cNvSpPr/>
+          <p:nvPr/>
+        </p:nvSpPr>
+        <p:spPr>
+          <a:xfrm>
+            <a:off x="3505123" y="5321808"/>
+            <a:ext cx="41148" cy="1371600"/>
+          </a:xfrm>
+          <a:prstGeom prst="rect">
+            <a:avLst/>
+          </a:prstGeom>
+          <a:solidFill>
+            <a:srgbClr val="CC0000"/>
+          </a:solidFill>
+          <a:ln>
+            <a:noFill/>
+          </a:ln>
+          <a:effectLst/>
+        </p:spPr>
+        <p:style>
+          <a:lnRef idx="1">
+            <a:schemeClr val="accent1"/>
+          </a:lnRef>
+          <a:fillRef idx="3">
+            <a:schemeClr val="accent1"/>
+          </a:fillRef>
+          <a:effectRef idx="2">
+            <a:schemeClr val="accent1"/>
+          </a:effectRef>
+          <a:fontRef idx="minor">
+            <a:schemeClr val="lt1"/>
+          </a:fontRef>
+        </p:style>
+        <p:txBody>
+          <a:bodyPr rtlCol="0" anchor="ctr"/>
+          <a:lstStyle/>
+          <a:p>
+            <a:pPr algn="ctr"/>
+          </a:p>
+        </p:txBody>
+      </p:sp>
+      <p:sp>
+        <p:nvSpPr>
+          <p:cNvPr id="44" name="TextBox 43"/>
+          <p:cNvSpPr txBox="1"/>
+          <p:nvPr/>
+        </p:nvSpPr>
+        <p:spPr>
+          <a:xfrm>
+            <a:off x="3651427" y="5276088"/>
+            <a:ext cx="2307259" cy="1371600"/>
+          </a:xfrm>
+          <a:prstGeom prst="rect">
+            <a:avLst/>
+          </a:prstGeom>
+          <a:noFill/>
+        </p:spPr>
+        <p:txBody>
+          <a:bodyPr wrap="square">
+            <a:spAutoFit/>
+          </a:bodyPr>
+          <a:lstStyle/>
+          <a:p>
+            <a:pPr algn="l">
+              <a:spcAft>
+                <a:spcPts val="300"/>
+              </a:spcAft>
+            </a:pPr>
+            <a:r>
+              <a:rPr sz="850" b="1">
+                <a:solidFill>
+                  <a:srgbClr val="7E6A64"/>
+                </a:solidFill>
+                <a:latin typeface="Red Hat Mono"/>
+              </a:rPr>
+              <a:t>TAKEAWAY</a:t>
+            </a:r>
+          </a:p>
+          <a:p>
+            <a:pPr algn="l">
+              <a:spcAft>
+                <a:spcPts val="300"/>
+              </a:spcAft>
+            </a:pPr>
+            <a:r>
+              <a:rPr sz="1300" b="1">
+                <a:solidFill>
+                  <a:srgbClr val="1B1211"/>
+                </a:solidFill>
+                <a:latin typeface="Red Hat Display"/>
+              </a:rPr>
+              <a:t>Two kinds of AI, one platform</a:t>
+            </a:r>
+          </a:p>
+          <a:p>
+            <a:pPr algn="l">
+              <a:spcAft>
+                <a:spcPts val="0"/>
+              </a:spcAft>
+            </a:pPr>
+            <a:r>
+              <a:rPr sz="1000" b="0">
+                <a:solidFill>
+                  <a:srgbClr val="54423E"/>
+                </a:solidFill>
+                <a:latin typeface="Red Hat Text"/>
+              </a:rPr>
+              <a:t>The scorer and the drafter share a GPU node, a registry and an identity. Predictive and generative are pods, not projects.</a:t>
+            </a:r>
+          </a:p>
+        </p:txBody>
+      </p:sp>
+      <p:sp>
+        <p:nvSpPr>
+          <p:cNvPr id="45" name="Rectangle 44"/>
+          <p:cNvSpPr/>
+          <p:nvPr/>
+        </p:nvSpPr>
+        <p:spPr>
+          <a:xfrm>
+            <a:off x="6233006" y="5321808"/>
+            <a:ext cx="41148" cy="1371600"/>
+          </a:xfrm>
+          <a:prstGeom prst="rect">
+            <a:avLst/>
+          </a:prstGeom>
+          <a:solidFill>
+            <a:srgbClr val="CC0000"/>
+          </a:solidFill>
+          <a:ln>
+            <a:noFill/>
+          </a:ln>
+          <a:effectLst/>
+        </p:spPr>
+        <p:style>
+          <a:lnRef idx="1">
+            <a:schemeClr val="accent1"/>
+          </a:lnRef>
+          <a:fillRef idx="3">
+            <a:schemeClr val="accent1"/>
+          </a:fillRef>
+          <a:effectRef idx="2">
+            <a:schemeClr val="accent1"/>
+          </a:effectRef>
+          <a:fontRef idx="minor">
+            <a:schemeClr val="lt1"/>
+          </a:fontRef>
+        </p:style>
+        <p:txBody>
+          <a:bodyPr rtlCol="0" anchor="ctr"/>
+          <a:lstStyle/>
+          <a:p>
+            <a:pPr algn="ctr"/>
+          </a:p>
+        </p:txBody>
+      </p:sp>
+      <p:sp>
+        <p:nvSpPr>
+          <p:cNvPr id="46" name="TextBox 45"/>
+          <p:cNvSpPr txBox="1"/>
+          <p:nvPr/>
+        </p:nvSpPr>
+        <p:spPr>
+          <a:xfrm>
+            <a:off x="6379310" y="5276088"/>
+            <a:ext cx="2307259" cy="1371600"/>
+          </a:xfrm>
+          <a:prstGeom prst="rect">
+            <a:avLst/>
+          </a:prstGeom>
+          <a:noFill/>
+        </p:spPr>
+        <p:txBody>
+          <a:bodyPr wrap="square">
+            <a:spAutoFit/>
+          </a:bodyPr>
+          <a:lstStyle/>
+          <a:p>
+            <a:pPr algn="l">
+              <a:spcAft>
+                <a:spcPts val="300"/>
+              </a:spcAft>
+            </a:pPr>
+            <a:r>
+              <a:rPr sz="850" b="1">
+                <a:solidFill>
+                  <a:srgbClr val="7E6A64"/>
+                </a:solidFill>
+                <a:latin typeface="Red Hat Mono"/>
+              </a:rPr>
+              <a:t>TAKEAWAY</a:t>
+            </a:r>
+          </a:p>
+          <a:p>
+            <a:pPr algn="l">
+              <a:spcAft>
+                <a:spcPts val="300"/>
+              </a:spcAft>
+            </a:pPr>
+            <a:r>
+              <a:rPr sz="1300" b="1">
+                <a:solidFill>
+                  <a:srgbClr val="1B1211"/>
+                </a:solidFill>
+                <a:latin typeface="Red Hat Display"/>
+              </a:rPr>
+              <a:t>Promotion is a merge</a:t>
+            </a:r>
+          </a:p>
+          <a:p>
+            <a:pPr algn="l">
+              <a:spcAft>
+                <a:spcPts val="0"/>
+              </a:spcAft>
+            </a:pPr>
+            <a:r>
+              <a:rPr sz="1000" b="0">
+                <a:solidFill>
+                  <a:srgbClr val="54423E"/>
+                </a:solidFill>
+                <a:latin typeface="Red Hat Text"/>
+              </a:rPr>
+              <a:t>Repo, AAP and knowledge base update together, and a person decides. Nothing runs from a chat window.</a:t>
+            </a:r>
+          </a:p>
+        </p:txBody>
+      </p:sp>
+      <p:sp>
+        <p:nvSpPr>
+          <p:cNvPr id="47" name="Rectangle 46"/>
+          <p:cNvSpPr/>
+          <p:nvPr/>
+        </p:nvSpPr>
+        <p:spPr>
+          <a:xfrm>
+            <a:off x="8960889" y="5321808"/>
+            <a:ext cx="41148" cy="1371600"/>
+          </a:xfrm>
+          <a:prstGeom prst="rect">
+            <a:avLst/>
+          </a:prstGeom>
+          <a:solidFill>
+            <a:srgbClr val="CC0000"/>
+          </a:solidFill>
+          <a:ln>
+            <a:noFill/>
+          </a:ln>
+          <a:effectLst/>
+        </p:spPr>
+        <p:style>
+          <a:lnRef idx="1">
+            <a:schemeClr val="accent1"/>
+          </a:lnRef>
+          <a:fillRef idx="3">
+            <a:schemeClr val="accent1"/>
+          </a:fillRef>
+          <a:effectRef idx="2">
+            <a:schemeClr val="accent1"/>
+          </a:effectRef>
+          <a:fontRef idx="minor">
+            <a:schemeClr val="lt1"/>
+          </a:fontRef>
+        </p:style>
+        <p:txBody>
+          <a:bodyPr rtlCol="0" anchor="ctr"/>
+          <a:lstStyle/>
+          <a:p>
+            <a:pPr algn="ctr"/>
+          </a:p>
+        </p:txBody>
+      </p:sp>
+      <p:sp>
+        <p:nvSpPr>
+          <p:cNvPr id="48" name="TextBox 47"/>
+          <p:cNvSpPr txBox="1"/>
+          <p:nvPr/>
+        </p:nvSpPr>
+        <p:spPr>
+          <a:xfrm>
+            <a:off x="9107193" y="5276088"/>
+            <a:ext cx="2307259" cy="1371600"/>
+          </a:xfrm>
+          <a:prstGeom prst="rect">
+            <a:avLst/>
+          </a:prstGeom>
+          <a:noFill/>
+        </p:spPr>
+        <p:txBody>
+          <a:bodyPr wrap="square">
+            <a:spAutoFit/>
+          </a:bodyPr>
+          <a:lstStyle/>
+          <a:p>
+            <a:pPr algn="l">
+              <a:spcAft>
+                <a:spcPts val="300"/>
+              </a:spcAft>
+            </a:pPr>
+            <a:r>
+              <a:rPr sz="850" b="1">
+                <a:solidFill>
+                  <a:srgbClr val="7E6A64"/>
+                </a:solidFill>
+                <a:latin typeface="Red Hat Mono"/>
+              </a:rPr>
+              <a:t>TAKEAWAY</a:t>
+            </a:r>
+          </a:p>
+          <a:p>
+            <a:pPr algn="l">
+              <a:spcAft>
+                <a:spcPts val="300"/>
+              </a:spcAft>
+            </a:pPr>
+            <a:r>
+              <a:rPr sz="1300" b="1">
+                <a:solidFill>
+                  <a:srgbClr val="1B1211"/>
+                </a:solidFill>
+                <a:latin typeface="Red Hat Display"/>
+              </a:rPr>
+              <a:t>Ask, then probe</a:t>
+            </a:r>
+          </a:p>
+          <a:p>
+            <a:pPr algn="l">
+              <a:spcAft>
+                <a:spcPts val="0"/>
+              </a:spcAft>
+            </a:pPr>
+            <a:r>
+              <a:rPr sz="1000" b="0">
+                <a:solidFill>
+                  <a:srgbClr val="54423E"/>
+                </a:solidFill>
+                <a:latin typeface="Red Hat Text"/>
+              </a:rPr>
+              <a:t>The assistant's tools are approved job templates, so "how is server8?" becomes a job with evidence, not a guess.</a:t>
+            </a:r>
+          </a:p>
+        </p:txBody>
+      </p:sp>
+    </p:spTree>
+  </p:cSld>
+  <p:clrMapOvr>
+    <a:masterClrMapping/>
+  </p:clrMapOvr>
+</p:sld>
+</file>
+
+<file path=ppt/slides/slide11.xml><?xml version="1.0" encoding="utf-8"?>
 <p:sld xmlns:a="http://schemas.openxmlformats.org/drawingml/2006/main" xmlns:p="http://schemas.openxmlformats.org/presentationml/2006/main" xmlns:r="http://schemas.openxmlformats.org/officeDocument/2006/relationships">
   <p:cSld>
     <p:bg>
@@ -18697,7 +21409,7 @@
                 </a:solidFill>
                 <a:latin typeface="Red Hat Text"/>
               </a:rPr>
-              <a:t>An hour where we run the seven labs together, show and tell, and find the point in the stack where you want to prove value. That scopes the pilot.</a:t>
+              <a:t>An hour where we run the eight labs together, show and tell, and find the point in the stack where you want to prove value. That scopes the pilot.</a:t>
             </a:r>
           </a:p>
         </p:txBody>
@@ -19225,7 +21937,7 @@
                 </a:solidFill>
                 <a:latin typeface="Red Hat Text"/>
               </a:rPr>
-              <a:t>Everything from today — deck, labs, guides — at nommsweymx.github.io/redhat-ai-tax-labs. The seven labs are the commands your engineers will run on day one. Follow it on your own: …/adventure.html.</a:t>
+              <a:t>Everything from today — deck, labs, guides — at nommsweymx.github.io/redhat-ai-tax-labs. The eight labs are the commands your engineers will run on day one. Follow it on your own: …/adventure.html.</a:t>
             </a:r>
           </a:p>
         </p:txBody>
@@ -20002,7 +22714,7 @@
                 </a:solidFill>
                 <a:latin typeface="Red Hat Display"/>
               </a:rPr>
-              <a:t>Seven labs — real commands, run them yourself</a:t>
+              <a:t>Eight labs — real commands, run them yourself</a:t>
             </a:r>
           </a:p>
         </p:txBody>
@@ -20055,8 +22767,8 @@
           <p:nvPr/>
         </p:nvGraphicFramePr>
         <p:xfrm>
-          <a:off x="777240" y="2834640"/>
-          <a:ext cx="10607040" cy="2633472"/>
+          <a:off x="777240" y="2788920"/>
+          <a:ext cx="10607040" cy="2962656"/>
         </p:xfrm>
         <a:graphic>
           <a:graphicData uri="http://schemas.openxmlformats.org/drawingml/2006/table">
@@ -20790,6 +23502,96 @@
                   </a:tcPr>
                 </a:tc>
               </a:tr>
+              <a:tr h="329184">
+                <a:tc>
+                  <a:txBody>
+                    <a:bodyPr wrap="square"/>
+                    <a:lstStyle/>
+                    <a:p>
+                      <a:r>
+                        <a:rPr sz="1200" b="0">
+                          <a:solidFill>
+                            <a:srgbClr val="1B1211"/>
+                          </a:solidFill>
+                          <a:latin typeface="Red Hat Mono"/>
+                        </a:rPr>
+                        <a:t>08</a:t>
+                      </a:r>
+                    </a:p>
+                  </a:txBody>
+                  <a:tcPr marL="109728" marR="109728" marT="45720" marB="45720">
+                    <a:solidFill>
+                      <a:srgbClr val="FBF9F8"/>
+                    </a:solidFill>
+                  </a:tcPr>
+                </a:tc>
+                <a:tc>
+                  <a:txBody>
+                    <a:bodyPr wrap="square"/>
+                    <a:lstStyle/>
+                    <a:p>
+                      <a:r>
+                        <a:rPr sz="1200" b="0">
+                          <a:solidFill>
+                            <a:srgbClr val="1B1211"/>
+                          </a:solidFill>
+                          <a:latin typeface="Red Hat Text"/>
+                        </a:rPr>
+                        <a:t>One loop, end to end</a:t>
+                      </a:r>
+                    </a:p>
+                  </a:txBody>
+                  <a:tcPr marL="109728" marR="109728" marT="45720" marB="45720">
+                    <a:solidFill>
+                      <a:srgbClr val="FBF9F8"/>
+                    </a:solidFill>
+                  </a:tcPr>
+                </a:tc>
+                <a:tc>
+                  <a:txBody>
+                    <a:bodyPr wrap="square"/>
+                    <a:lstStyle/>
+                    <a:p>
+                      <a:r>
+                        <a:rPr sz="1200" b="0">
+                          <a:solidFill>
+                            <a:srgbClr val="1B1211"/>
+                          </a:solidFill>
+                          <a:latin typeface="Red Hat Mono"/>
+                        </a:rPr>
+                        <a:t>OpenShift AI · Lightspeed · EDA</a:t>
+                      </a:r>
+                    </a:p>
+                  </a:txBody>
+                  <a:tcPr marL="109728" marR="109728" marT="45720" marB="45720">
+                    <a:solidFill>
+                      <a:srgbClr val="FBF9F8"/>
+                    </a:solidFill>
+                  </a:tcPr>
+                </a:tc>
+                <a:tc>
+                  <a:txBody>
+                    <a:bodyPr wrap="square"/>
+                    <a:lstStyle/>
+                    <a:p>
+                      <a:r>
+                        <a:rPr sz="1200" b="0">
+                          <a:solidFill>
+                            <a:srgbClr val="1B1211"/>
+                          </a:solidFill>
+                          <a:latin typeface="Red Hat Mono"/>
+                        </a:rPr>
+                        <a:t>data → judgement</a:t>
+                      </a:r>
+                    </a:p>
+                  </a:txBody>
+                  <a:tcPr marL="109728" marR="109728" marT="45720" marB="45720">
+                    <a:solidFill>
+                      <a:srgbClr val="FBF9F8"/>
+                    </a:solidFill>
+                  </a:tcPr>
+                </a:tc>
+              </a:tr>
             </a:tbl>
           </a:graphicData>
         </a:graphic>
@@ -20802,8 +23604,8 @@
         </p:nvSpPr>
         <p:spPr>
           <a:xfrm>
-            <a:off x="777240" y="5577840"/>
-            <a:ext cx="10515600" cy="1005840"/>
+            <a:off x="777240" y="5870448"/>
+            <a:ext cx="10515600" cy="914400"/>
           </a:xfrm>
           <a:prstGeom prst="rect">
             <a:avLst/>
@@ -20818,7 +23620,7 @@
           <a:p>
             <a:pPr algn="l">
               <a:spcAft>
-                <a:spcPts val="500"/>
+                <a:spcPts val="400"/>
               </a:spcAft>
             </a:pPr>
             <a:r>
@@ -20844,7 +23646,7 @@
                 </a:solidFill>
                 <a:latin typeface="Red Hat Text"/>
               </a:rPr>
-              <a:t>No public model endpoint, no internet connection at inference time, no rewrite of a system of record. The labs run the upstream bits on a laptop; what an agency accredits is the supported Red Hat product built from them.</a:t>
+              <a:t>No public model endpoint, no internet connection at inference time, no rewrite of a system of record. The labs run the upstream bits on a laptop; what an agency accredits is the supported Red Hat product built from them. Lab 08 chains the whole loop.</a:t>
             </a:r>
           </a:p>
         </p:txBody>

--- a/slides/exports/redhat-ai-tax-administration.pptx
+++ b/slides/exports/redhat-ai-tax-administration.pptx
@@ -862,7 +862,7 @@
           <a:lstStyle/>
           <a:p>
             <a:r>
-              <a:t>Walk the flow left to right. The red stages already have a human reviewer in the loop, which makes them honest places to start. Exam selection is deliberately gray: that is a determination affecting a taxpayer, and it needs a much heavier governance conversation. Saying this unprompted buys enormous credibility.</a:t>
+              <a:t>Walk the eight stations left to right, the same eight as the graphic (G): AI reads, classifies, grounds and drafts on the first four; a person reviews and signs on five and six; automation sends the notice; operations close the loop. The first four are where language models earn their keep first — high-volume, text-heavy, and a human reviewer is already in the loop, which makes them the honest places to start. Exam selection is deliberately NOT on this rail (an earlier version of the slide showed it held back): that is a determination affecting a taxpayer and needs a much heavier governance conversation — saying so unprompted buys enormous credibility. Two rules of thumb: start where a human already reviews the output; and automate the toil around the model, not just the model. Worth naming: most of the effort in production AI is provisioning, patching, scaling and data collection — an automation problem, already solved. GRAPHIC (G) — Where AI actually lands in the filing lifecycle: An eight-station rail, Intake, Classification, Guidance, Drafting, Review, Decision, Notice and Operations, with five red call-outs over the first five stations; notice that the fifth call-out is a human reviewer and Decision has no call-out at all. Talk to it: (1) Read the rail against the ladder: Intake through Drafting turn data into information and knowledge; Review and Decision are where a person supplies the judgement that stays human. (2) The four AI cards sit where a reviewer already checks the output; neither this graphic nor the slide puts AI on exam selection, because a taxpayer determination needs governance first. (3) Operations closes the loop: what Review corrects and Notice sends goes back into the knowledge base between seasons, and pooled GPUs absorb the 6× April surge on a fixed workforce. (4) One platform under all eight stations: the model comes to the data, the seams stay boring, and controls accredited once for Intake are inherited all the way to Operations.</a:t>
             </a:r>
           </a:p>
         </p:txBody>
@@ -14074,7 +14074,7 @@
               </a:spcAft>
             </a:pPr>
             <a:r>
-              <a:rPr sz="3400" b="1">
+              <a:rPr sz="3000" b="1">
                 <a:solidFill>
                   <a:srgbClr val="1B1211"/>
                 </a:solidFill>
@@ -14119,23 +14119,2327 @@
                 </a:solidFill>
                 <a:latin typeface="Red Hat Text"/>
               </a:rPr>
-              <a:t>Red stages ship with a human on the signature. The gray one waits for governance.</a:t>
-            </a:r>
-          </a:p>
-        </p:txBody>
-      </p:sp>
-      <p:sp>
-        <p:nvSpPr>
-          <p:cNvPr id="14" name="Chevron 13"/>
+              <a:t>AI lands on the first four stages, where a reviewer already checks the output; the decision stays with a person; operations close the loop.</a:t>
+            </a:r>
+          </a:p>
+        </p:txBody>
+      </p:sp>
+      <p:sp>
+        <p:nvSpPr>
+          <p:cNvPr id="14" name="Rounded Rectangle 13"/>
           <p:cNvSpPr/>
           <p:nvPr/>
         </p:nvSpPr>
         <p:spPr>
           <a:xfrm>
-            <a:off x="777240" y="2148840"/>
-            <a:ext cx="1810512" cy="777240"/>
-          </a:xfrm>
-          <a:prstGeom prst="chevron">
+            <a:off x="777240" y="2176272"/>
+            <a:ext cx="2453563" cy="1207008"/>
+          </a:xfrm>
+          <a:prstGeom prst="roundRect">
+            <a:avLst>
+              <a:gd name="adj" fmla="val 8000"/>
+            </a:avLst>
+          </a:prstGeom>
+          <a:solidFill>
+            <a:srgbClr val="FFFFFF"/>
+          </a:solidFill>
+          <a:ln w="9525">
+            <a:solidFill>
+              <a:srgbClr val="CFC2BE"/>
+            </a:solidFill>
+          </a:ln>
+          <a:effectLst/>
+        </p:spPr>
+        <p:style>
+          <a:lnRef idx="1">
+            <a:schemeClr val="accent1"/>
+          </a:lnRef>
+          <a:fillRef idx="3">
+            <a:schemeClr val="accent1"/>
+          </a:fillRef>
+          <a:effectRef idx="2">
+            <a:schemeClr val="accent1"/>
+          </a:effectRef>
+          <a:fontRef idx="minor">
+            <a:schemeClr val="lt1"/>
+          </a:fontRef>
+        </p:style>
+        <p:txBody>
+          <a:bodyPr rtlCol="0" anchor="ctr"/>
+          <a:lstStyle/>
+          <a:p>
+            <a:pPr algn="ctr"/>
+          </a:p>
+        </p:txBody>
+      </p:sp>
+      <p:sp>
+        <p:nvSpPr>
+          <p:cNvPr id="15" name="Rectangle 14"/>
+          <p:cNvSpPr/>
+          <p:nvPr/>
+        </p:nvSpPr>
+        <p:spPr>
+          <a:xfrm>
+            <a:off x="868680" y="2176272"/>
+            <a:ext cx="2270683" cy="45720"/>
+          </a:xfrm>
+          <a:prstGeom prst="rect">
+            <a:avLst/>
+          </a:prstGeom>
+          <a:solidFill>
+            <a:srgbClr val="C2410C"/>
+          </a:solidFill>
+          <a:ln>
+            <a:noFill/>
+          </a:ln>
+          <a:effectLst/>
+        </p:spPr>
+        <p:style>
+          <a:lnRef idx="1">
+            <a:schemeClr val="accent1"/>
+          </a:lnRef>
+          <a:fillRef idx="3">
+            <a:schemeClr val="accent1"/>
+          </a:fillRef>
+          <a:effectRef idx="2">
+            <a:schemeClr val="accent1"/>
+          </a:effectRef>
+          <a:fontRef idx="minor">
+            <a:schemeClr val="lt1"/>
+          </a:fontRef>
+        </p:style>
+        <p:txBody>
+          <a:bodyPr rtlCol="0" anchor="ctr"/>
+          <a:lstStyle/>
+          <a:p>
+            <a:pPr algn="ctr"/>
+          </a:p>
+        </p:txBody>
+      </p:sp>
+      <p:sp>
+        <p:nvSpPr>
+          <p:cNvPr id="16" name="Oval 15"/>
+          <p:cNvSpPr/>
+          <p:nvPr/>
+        </p:nvSpPr>
+        <p:spPr>
+          <a:xfrm>
+            <a:off x="923544" y="2359152"/>
+            <a:ext cx="329184" cy="329184"/>
+          </a:xfrm>
+          <a:prstGeom prst="ellipse">
+            <a:avLst/>
+          </a:prstGeom>
+          <a:solidFill>
+            <a:srgbClr val="C2410C"/>
+          </a:solidFill>
+          <a:ln>
+            <a:noFill/>
+          </a:ln>
+          <a:effectLst/>
+        </p:spPr>
+        <p:style>
+          <a:lnRef idx="1">
+            <a:schemeClr val="accent1"/>
+          </a:lnRef>
+          <a:fillRef idx="3">
+            <a:schemeClr val="accent1"/>
+          </a:fillRef>
+          <a:effectRef idx="2">
+            <a:schemeClr val="accent1"/>
+          </a:effectRef>
+          <a:fontRef idx="minor">
+            <a:schemeClr val="lt1"/>
+          </a:fontRef>
+        </p:style>
+        <p:txBody>
+          <a:bodyPr rtlCol="0" anchor="ctr" lIns="0" rIns="0" tIns="0" bIns="0"/>
+          <a:lstStyle/>
+          <a:p>
+            <a:pPr algn="ctr"/>
+            <a:r>
+              <a:rPr sz="900" b="1">
+                <a:solidFill>
+                  <a:srgbClr val="FFFFFF"/>
+                </a:solidFill>
+                <a:latin typeface="Red Hat Mono"/>
+              </a:rPr>
+              <a:t>01</a:t>
+            </a:r>
+          </a:p>
+        </p:txBody>
+      </p:sp>
+      <p:sp>
+        <p:nvSpPr>
+          <p:cNvPr id="17" name="TextBox 16"/>
+          <p:cNvSpPr txBox="1"/>
+          <p:nvPr/>
+        </p:nvSpPr>
+        <p:spPr>
+          <a:xfrm>
+            <a:off x="1325880" y="2286000"/>
+            <a:ext cx="1795195" cy="685800"/>
+          </a:xfrm>
+          <a:prstGeom prst="rect">
+            <a:avLst/>
+          </a:prstGeom>
+          <a:noFill/>
+        </p:spPr>
+        <p:txBody>
+          <a:bodyPr wrap="square">
+            <a:spAutoFit/>
+          </a:bodyPr>
+          <a:lstStyle/>
+          <a:p>
+            <a:pPr algn="l">
+              <a:spcAft>
+                <a:spcPts val="200"/>
+              </a:spcAft>
+            </a:pPr>
+            <a:r>
+              <a:rPr sz="1300" b="1">
+                <a:solidFill>
+                  <a:srgbClr val="1B1211"/>
+                </a:solidFill>
+                <a:latin typeface="Red Hat Display"/>
+              </a:rPr>
+              <a:t>Intake</a:t>
+            </a:r>
+          </a:p>
+          <a:p>
+            <a:pPr algn="l">
+              <a:spcAft>
+                <a:spcPts val="0"/>
+              </a:spcAft>
+            </a:pPr>
+            <a:r>
+              <a:rPr sz="950" b="0">
+                <a:solidFill>
+                  <a:srgbClr val="54423E"/>
+                </a:solidFill>
+                <a:latin typeface="Red Hat Text"/>
+              </a:rPr>
+              <a:t>Capture correspondence from any channel</a:t>
+            </a:r>
+          </a:p>
+        </p:txBody>
+      </p:sp>
+      <p:sp>
+        <p:nvSpPr>
+          <p:cNvPr id="18" name="Rounded Rectangle 17"/>
+          <p:cNvSpPr/>
+          <p:nvPr/>
+        </p:nvSpPr>
+        <p:spPr>
+          <a:xfrm>
+            <a:off x="1325880" y="2999232"/>
+            <a:ext cx="1600200" cy="246888"/>
+          </a:xfrm>
+          <a:prstGeom prst="roundRect">
+            <a:avLst>
+              <a:gd name="adj" fmla="val 50000"/>
+            </a:avLst>
+          </a:prstGeom>
+          <a:solidFill>
+            <a:srgbClr val="F6E4DD"/>
+          </a:solidFill>
+          <a:ln>
+            <a:noFill/>
+          </a:ln>
+          <a:effectLst/>
+        </p:spPr>
+        <p:style>
+          <a:lnRef idx="1">
+            <a:schemeClr val="accent1"/>
+          </a:lnRef>
+          <a:fillRef idx="3">
+            <a:schemeClr val="accent1"/>
+          </a:fillRef>
+          <a:effectRef idx="2">
+            <a:schemeClr val="accent1"/>
+          </a:effectRef>
+          <a:fontRef idx="minor">
+            <a:schemeClr val="lt1"/>
+          </a:fontRef>
+        </p:style>
+        <p:txBody>
+          <a:bodyPr rtlCol="0" anchor="ctr" lIns="45720" rIns="45720" tIns="0" bIns="0" wrap="none"/>
+          <a:lstStyle/>
+          <a:p>
+            <a:pPr algn="ctr"/>
+            <a:r>
+              <a:rPr sz="900" b="1">
+                <a:solidFill>
+                  <a:srgbClr val="C2410C"/>
+                </a:solidFill>
+                <a:latin typeface="Red Hat Mono"/>
+              </a:rPr>
+              <a:t>AI reads it</a:t>
+            </a:r>
+          </a:p>
+        </p:txBody>
+      </p:sp>
+      <p:sp>
+        <p:nvSpPr>
+          <p:cNvPr id="19" name="Right Arrow 18"/>
+          <p:cNvSpPr/>
+          <p:nvPr/>
+        </p:nvSpPr>
+        <p:spPr>
+          <a:xfrm>
+            <a:off x="3285667" y="2697480"/>
+            <a:ext cx="164592" cy="164592"/>
+          </a:xfrm>
+          <a:prstGeom prst="rightArrow">
+            <a:avLst/>
+          </a:prstGeom>
+          <a:solidFill>
+            <a:srgbClr val="7E6A64"/>
+          </a:solidFill>
+          <a:ln>
+            <a:noFill/>
+          </a:ln>
+          <a:effectLst/>
+        </p:spPr>
+        <p:style>
+          <a:lnRef idx="1">
+            <a:schemeClr val="accent1"/>
+          </a:lnRef>
+          <a:fillRef idx="3">
+            <a:schemeClr val="accent1"/>
+          </a:fillRef>
+          <a:effectRef idx="2">
+            <a:schemeClr val="accent1"/>
+          </a:effectRef>
+          <a:fontRef idx="minor">
+            <a:schemeClr val="lt1"/>
+          </a:fontRef>
+        </p:style>
+        <p:txBody>
+          <a:bodyPr rtlCol="0" anchor="ctr"/>
+          <a:lstStyle/>
+          <a:p>
+            <a:pPr algn="ctr"/>
+          </a:p>
+        </p:txBody>
+      </p:sp>
+      <p:sp>
+        <p:nvSpPr>
+          <p:cNvPr id="20" name="Rounded Rectangle 19"/>
+          <p:cNvSpPr/>
+          <p:nvPr/>
+        </p:nvSpPr>
+        <p:spPr>
+          <a:xfrm>
+            <a:off x="3505123" y="2176272"/>
+            <a:ext cx="2453563" cy="1207008"/>
+          </a:xfrm>
+          <a:prstGeom prst="roundRect">
+            <a:avLst>
+              <a:gd name="adj" fmla="val 8000"/>
+            </a:avLst>
+          </a:prstGeom>
+          <a:solidFill>
+            <a:srgbClr val="FFFFFF"/>
+          </a:solidFill>
+          <a:ln w="9525">
+            <a:solidFill>
+              <a:srgbClr val="CFC2BE"/>
+            </a:solidFill>
+          </a:ln>
+          <a:effectLst/>
+        </p:spPr>
+        <p:style>
+          <a:lnRef idx="1">
+            <a:schemeClr val="accent1"/>
+          </a:lnRef>
+          <a:fillRef idx="3">
+            <a:schemeClr val="accent1"/>
+          </a:fillRef>
+          <a:effectRef idx="2">
+            <a:schemeClr val="accent1"/>
+          </a:effectRef>
+          <a:fontRef idx="minor">
+            <a:schemeClr val="lt1"/>
+          </a:fontRef>
+        </p:style>
+        <p:txBody>
+          <a:bodyPr rtlCol="0" anchor="ctr"/>
+          <a:lstStyle/>
+          <a:p>
+            <a:pPr algn="ctr"/>
+          </a:p>
+        </p:txBody>
+      </p:sp>
+      <p:sp>
+        <p:nvSpPr>
+          <p:cNvPr id="21" name="Rectangle 20"/>
+          <p:cNvSpPr/>
+          <p:nvPr/>
+        </p:nvSpPr>
+        <p:spPr>
+          <a:xfrm>
+            <a:off x="3596563" y="2176272"/>
+            <a:ext cx="2270683" cy="45720"/>
+          </a:xfrm>
+          <a:prstGeom prst="rect">
+            <a:avLst/>
+          </a:prstGeom>
+          <a:solidFill>
+            <a:srgbClr val="C2410C"/>
+          </a:solidFill>
+          <a:ln>
+            <a:noFill/>
+          </a:ln>
+          <a:effectLst/>
+        </p:spPr>
+        <p:style>
+          <a:lnRef idx="1">
+            <a:schemeClr val="accent1"/>
+          </a:lnRef>
+          <a:fillRef idx="3">
+            <a:schemeClr val="accent1"/>
+          </a:fillRef>
+          <a:effectRef idx="2">
+            <a:schemeClr val="accent1"/>
+          </a:effectRef>
+          <a:fontRef idx="minor">
+            <a:schemeClr val="lt1"/>
+          </a:fontRef>
+        </p:style>
+        <p:txBody>
+          <a:bodyPr rtlCol="0" anchor="ctr"/>
+          <a:lstStyle/>
+          <a:p>
+            <a:pPr algn="ctr"/>
+          </a:p>
+        </p:txBody>
+      </p:sp>
+      <p:sp>
+        <p:nvSpPr>
+          <p:cNvPr id="22" name="Oval 21"/>
+          <p:cNvSpPr/>
+          <p:nvPr/>
+        </p:nvSpPr>
+        <p:spPr>
+          <a:xfrm>
+            <a:off x="3651427" y="2359152"/>
+            <a:ext cx="329184" cy="329184"/>
+          </a:xfrm>
+          <a:prstGeom prst="ellipse">
+            <a:avLst/>
+          </a:prstGeom>
+          <a:solidFill>
+            <a:srgbClr val="C2410C"/>
+          </a:solidFill>
+          <a:ln>
+            <a:noFill/>
+          </a:ln>
+          <a:effectLst/>
+        </p:spPr>
+        <p:style>
+          <a:lnRef idx="1">
+            <a:schemeClr val="accent1"/>
+          </a:lnRef>
+          <a:fillRef idx="3">
+            <a:schemeClr val="accent1"/>
+          </a:fillRef>
+          <a:effectRef idx="2">
+            <a:schemeClr val="accent1"/>
+          </a:effectRef>
+          <a:fontRef idx="minor">
+            <a:schemeClr val="lt1"/>
+          </a:fontRef>
+        </p:style>
+        <p:txBody>
+          <a:bodyPr rtlCol="0" anchor="ctr" lIns="0" rIns="0" tIns="0" bIns="0"/>
+          <a:lstStyle/>
+          <a:p>
+            <a:pPr algn="ctr"/>
+            <a:r>
+              <a:rPr sz="900" b="1">
+                <a:solidFill>
+                  <a:srgbClr val="FFFFFF"/>
+                </a:solidFill>
+                <a:latin typeface="Red Hat Mono"/>
+              </a:rPr>
+              <a:t>02</a:t>
+            </a:r>
+          </a:p>
+        </p:txBody>
+      </p:sp>
+      <p:sp>
+        <p:nvSpPr>
+          <p:cNvPr id="23" name="TextBox 22"/>
+          <p:cNvSpPr txBox="1"/>
+          <p:nvPr/>
+        </p:nvSpPr>
+        <p:spPr>
+          <a:xfrm>
+            <a:off x="4053763" y="2286000"/>
+            <a:ext cx="1795195" cy="685800"/>
+          </a:xfrm>
+          <a:prstGeom prst="rect">
+            <a:avLst/>
+          </a:prstGeom>
+          <a:noFill/>
+        </p:spPr>
+        <p:txBody>
+          <a:bodyPr wrap="square">
+            <a:spAutoFit/>
+          </a:bodyPr>
+          <a:lstStyle/>
+          <a:p>
+            <a:pPr algn="l">
+              <a:spcAft>
+                <a:spcPts val="200"/>
+              </a:spcAft>
+            </a:pPr>
+            <a:r>
+              <a:rPr sz="1300" b="1">
+                <a:solidFill>
+                  <a:srgbClr val="1B1211"/>
+                </a:solidFill>
+                <a:latin typeface="Red Hat Display"/>
+              </a:rPr>
+              <a:t>Classification</a:t>
+            </a:r>
+          </a:p>
+          <a:p>
+            <a:pPr algn="l">
+              <a:spcAft>
+                <a:spcPts val="0"/>
+              </a:spcAft>
+            </a:pPr>
+            <a:r>
+              <a:rPr sz="950" b="0">
+                <a:solidFill>
+                  <a:srgbClr val="54423E"/>
+                </a:solidFill>
+                <a:latin typeface="Red Hat Text"/>
+              </a:rPr>
+              <a:t>Understand intent, route to the case type</a:t>
+            </a:r>
+          </a:p>
+        </p:txBody>
+      </p:sp>
+      <p:sp>
+        <p:nvSpPr>
+          <p:cNvPr id="24" name="Rounded Rectangle 23"/>
+          <p:cNvSpPr/>
+          <p:nvPr/>
+        </p:nvSpPr>
+        <p:spPr>
+          <a:xfrm>
+            <a:off x="4053763" y="2999232"/>
+            <a:ext cx="1600200" cy="246888"/>
+          </a:xfrm>
+          <a:prstGeom prst="roundRect">
+            <a:avLst>
+              <a:gd name="adj" fmla="val 50000"/>
+            </a:avLst>
+          </a:prstGeom>
+          <a:solidFill>
+            <a:srgbClr val="F6E4DD"/>
+          </a:solidFill>
+          <a:ln>
+            <a:noFill/>
+          </a:ln>
+          <a:effectLst/>
+        </p:spPr>
+        <p:style>
+          <a:lnRef idx="1">
+            <a:schemeClr val="accent1"/>
+          </a:lnRef>
+          <a:fillRef idx="3">
+            <a:schemeClr val="accent1"/>
+          </a:fillRef>
+          <a:effectRef idx="2">
+            <a:schemeClr val="accent1"/>
+          </a:effectRef>
+          <a:fontRef idx="minor">
+            <a:schemeClr val="lt1"/>
+          </a:fontRef>
+        </p:style>
+        <p:txBody>
+          <a:bodyPr rtlCol="0" anchor="ctr" lIns="45720" rIns="45720" tIns="0" bIns="0" wrap="none"/>
+          <a:lstStyle/>
+          <a:p>
+            <a:pPr algn="ctr"/>
+            <a:r>
+              <a:rPr sz="900" b="1">
+                <a:solidFill>
+                  <a:srgbClr val="C2410C"/>
+                </a:solidFill>
+                <a:latin typeface="Red Hat Mono"/>
+              </a:rPr>
+              <a:t>AI classifies</a:t>
+            </a:r>
+          </a:p>
+        </p:txBody>
+      </p:sp>
+      <p:sp>
+        <p:nvSpPr>
+          <p:cNvPr id="25" name="Right Arrow 24"/>
+          <p:cNvSpPr/>
+          <p:nvPr/>
+        </p:nvSpPr>
+        <p:spPr>
+          <a:xfrm>
+            <a:off x="6013550" y="2697480"/>
+            <a:ext cx="164592" cy="164592"/>
+          </a:xfrm>
+          <a:prstGeom prst="rightArrow">
+            <a:avLst/>
+          </a:prstGeom>
+          <a:solidFill>
+            <a:srgbClr val="7E6A64"/>
+          </a:solidFill>
+          <a:ln>
+            <a:noFill/>
+          </a:ln>
+          <a:effectLst/>
+        </p:spPr>
+        <p:style>
+          <a:lnRef idx="1">
+            <a:schemeClr val="accent1"/>
+          </a:lnRef>
+          <a:fillRef idx="3">
+            <a:schemeClr val="accent1"/>
+          </a:fillRef>
+          <a:effectRef idx="2">
+            <a:schemeClr val="accent1"/>
+          </a:effectRef>
+          <a:fontRef idx="minor">
+            <a:schemeClr val="lt1"/>
+          </a:fontRef>
+        </p:style>
+        <p:txBody>
+          <a:bodyPr rtlCol="0" anchor="ctr"/>
+          <a:lstStyle/>
+          <a:p>
+            <a:pPr algn="ctr"/>
+          </a:p>
+        </p:txBody>
+      </p:sp>
+      <p:sp>
+        <p:nvSpPr>
+          <p:cNvPr id="26" name="Rounded Rectangle 25"/>
+          <p:cNvSpPr/>
+          <p:nvPr/>
+        </p:nvSpPr>
+        <p:spPr>
+          <a:xfrm>
+            <a:off x="6233006" y="2176272"/>
+            <a:ext cx="2453563" cy="1207008"/>
+          </a:xfrm>
+          <a:prstGeom prst="roundRect">
+            <a:avLst>
+              <a:gd name="adj" fmla="val 8000"/>
+            </a:avLst>
+          </a:prstGeom>
+          <a:solidFill>
+            <a:srgbClr val="FFFFFF"/>
+          </a:solidFill>
+          <a:ln w="9525">
+            <a:solidFill>
+              <a:srgbClr val="CFC2BE"/>
+            </a:solidFill>
+          </a:ln>
+          <a:effectLst/>
+        </p:spPr>
+        <p:style>
+          <a:lnRef idx="1">
+            <a:schemeClr val="accent1"/>
+          </a:lnRef>
+          <a:fillRef idx="3">
+            <a:schemeClr val="accent1"/>
+          </a:fillRef>
+          <a:effectRef idx="2">
+            <a:schemeClr val="accent1"/>
+          </a:effectRef>
+          <a:fontRef idx="minor">
+            <a:schemeClr val="lt1"/>
+          </a:fontRef>
+        </p:style>
+        <p:txBody>
+          <a:bodyPr rtlCol="0" anchor="ctr"/>
+          <a:lstStyle/>
+          <a:p>
+            <a:pPr algn="ctr"/>
+          </a:p>
+        </p:txBody>
+      </p:sp>
+      <p:sp>
+        <p:nvSpPr>
+          <p:cNvPr id="27" name="Rectangle 26"/>
+          <p:cNvSpPr/>
+          <p:nvPr/>
+        </p:nvSpPr>
+        <p:spPr>
+          <a:xfrm>
+            <a:off x="6324446" y="2176272"/>
+            <a:ext cx="2270683" cy="45720"/>
+          </a:xfrm>
+          <a:prstGeom prst="rect">
+            <a:avLst/>
+          </a:prstGeom>
+          <a:solidFill>
+            <a:srgbClr val="1E7A55"/>
+          </a:solidFill>
+          <a:ln>
+            <a:noFill/>
+          </a:ln>
+          <a:effectLst/>
+        </p:spPr>
+        <p:style>
+          <a:lnRef idx="1">
+            <a:schemeClr val="accent1"/>
+          </a:lnRef>
+          <a:fillRef idx="3">
+            <a:schemeClr val="accent1"/>
+          </a:fillRef>
+          <a:effectRef idx="2">
+            <a:schemeClr val="accent1"/>
+          </a:effectRef>
+          <a:fontRef idx="minor">
+            <a:schemeClr val="lt1"/>
+          </a:fontRef>
+        </p:style>
+        <p:txBody>
+          <a:bodyPr rtlCol="0" anchor="ctr"/>
+          <a:lstStyle/>
+          <a:p>
+            <a:pPr algn="ctr"/>
+          </a:p>
+        </p:txBody>
+      </p:sp>
+      <p:sp>
+        <p:nvSpPr>
+          <p:cNvPr id="28" name="Oval 27"/>
+          <p:cNvSpPr/>
+          <p:nvPr/>
+        </p:nvSpPr>
+        <p:spPr>
+          <a:xfrm>
+            <a:off x="6379310" y="2359152"/>
+            <a:ext cx="329184" cy="329184"/>
+          </a:xfrm>
+          <a:prstGeom prst="ellipse">
+            <a:avLst/>
+          </a:prstGeom>
+          <a:solidFill>
+            <a:srgbClr val="1E7A55"/>
+          </a:solidFill>
+          <a:ln>
+            <a:noFill/>
+          </a:ln>
+          <a:effectLst/>
+        </p:spPr>
+        <p:style>
+          <a:lnRef idx="1">
+            <a:schemeClr val="accent1"/>
+          </a:lnRef>
+          <a:fillRef idx="3">
+            <a:schemeClr val="accent1"/>
+          </a:fillRef>
+          <a:effectRef idx="2">
+            <a:schemeClr val="accent1"/>
+          </a:effectRef>
+          <a:fontRef idx="minor">
+            <a:schemeClr val="lt1"/>
+          </a:fontRef>
+        </p:style>
+        <p:txBody>
+          <a:bodyPr rtlCol="0" anchor="ctr" lIns="0" rIns="0" tIns="0" bIns="0"/>
+          <a:lstStyle/>
+          <a:p>
+            <a:pPr algn="ctr"/>
+            <a:r>
+              <a:rPr sz="900" b="1">
+                <a:solidFill>
+                  <a:srgbClr val="FFFFFF"/>
+                </a:solidFill>
+                <a:latin typeface="Red Hat Mono"/>
+              </a:rPr>
+              <a:t>03</a:t>
+            </a:r>
+          </a:p>
+        </p:txBody>
+      </p:sp>
+      <p:sp>
+        <p:nvSpPr>
+          <p:cNvPr id="29" name="TextBox 28"/>
+          <p:cNvSpPr txBox="1"/>
+          <p:nvPr/>
+        </p:nvSpPr>
+        <p:spPr>
+          <a:xfrm>
+            <a:off x="6781646" y="2286000"/>
+            <a:ext cx="1795195" cy="685800"/>
+          </a:xfrm>
+          <a:prstGeom prst="rect">
+            <a:avLst/>
+          </a:prstGeom>
+          <a:noFill/>
+        </p:spPr>
+        <p:txBody>
+          <a:bodyPr wrap="square">
+            <a:spAutoFit/>
+          </a:bodyPr>
+          <a:lstStyle/>
+          <a:p>
+            <a:pPr algn="l">
+              <a:spcAft>
+                <a:spcPts val="200"/>
+              </a:spcAft>
+            </a:pPr>
+            <a:r>
+              <a:rPr sz="1300" b="1">
+                <a:solidFill>
+                  <a:srgbClr val="1B1211"/>
+                </a:solidFill>
+                <a:latin typeface="Red Hat Display"/>
+              </a:rPr>
+              <a:t>Guidance</a:t>
+            </a:r>
+          </a:p>
+          <a:p>
+            <a:pPr algn="l">
+              <a:spcAft>
+                <a:spcPts val="0"/>
+              </a:spcAft>
+            </a:pPr>
+            <a:r>
+              <a:rPr sz="950" b="0">
+                <a:solidFill>
+                  <a:srgbClr val="54423E"/>
+                </a:solidFill>
+                <a:latin typeface="Red Hat Text"/>
+              </a:rPr>
+              <a:t>Rules, policy and precedent</a:t>
+            </a:r>
+          </a:p>
+        </p:txBody>
+      </p:sp>
+      <p:sp>
+        <p:nvSpPr>
+          <p:cNvPr id="30" name="Rounded Rectangle 29"/>
+          <p:cNvSpPr/>
+          <p:nvPr/>
+        </p:nvSpPr>
+        <p:spPr>
+          <a:xfrm>
+            <a:off x="6781646" y="2999232"/>
+            <a:ext cx="1600200" cy="246888"/>
+          </a:xfrm>
+          <a:prstGeom prst="roundRect">
+            <a:avLst>
+              <a:gd name="adj" fmla="val 50000"/>
+            </a:avLst>
+          </a:prstGeom>
+          <a:solidFill>
+            <a:srgbClr val="E0ECE7"/>
+          </a:solidFill>
+          <a:ln>
+            <a:noFill/>
+          </a:ln>
+          <a:effectLst/>
+        </p:spPr>
+        <p:style>
+          <a:lnRef idx="1">
+            <a:schemeClr val="accent1"/>
+          </a:lnRef>
+          <a:fillRef idx="3">
+            <a:schemeClr val="accent1"/>
+          </a:fillRef>
+          <a:effectRef idx="2">
+            <a:schemeClr val="accent1"/>
+          </a:effectRef>
+          <a:fontRef idx="minor">
+            <a:schemeClr val="lt1"/>
+          </a:fontRef>
+        </p:style>
+        <p:txBody>
+          <a:bodyPr rtlCol="0" anchor="ctr" lIns="45720" rIns="45720" tIns="0" bIns="0" wrap="none"/>
+          <a:lstStyle/>
+          <a:p>
+            <a:pPr algn="ctr"/>
+            <a:r>
+              <a:rPr sz="900" b="1">
+                <a:solidFill>
+                  <a:srgbClr val="1E7A55"/>
+                </a:solidFill>
+                <a:latin typeface="Red Hat Mono"/>
+              </a:rPr>
+              <a:t>AI grounds and cites</a:t>
+            </a:r>
+          </a:p>
+        </p:txBody>
+      </p:sp>
+      <p:sp>
+        <p:nvSpPr>
+          <p:cNvPr id="31" name="Right Arrow 30"/>
+          <p:cNvSpPr/>
+          <p:nvPr/>
+        </p:nvSpPr>
+        <p:spPr>
+          <a:xfrm>
+            <a:off x="8741433" y="2697480"/>
+            <a:ext cx="164592" cy="164592"/>
+          </a:xfrm>
+          <a:prstGeom prst="rightArrow">
+            <a:avLst/>
+          </a:prstGeom>
+          <a:solidFill>
+            <a:srgbClr val="7E6A64"/>
+          </a:solidFill>
+          <a:ln>
+            <a:noFill/>
+          </a:ln>
+          <a:effectLst/>
+        </p:spPr>
+        <p:style>
+          <a:lnRef idx="1">
+            <a:schemeClr val="accent1"/>
+          </a:lnRef>
+          <a:fillRef idx="3">
+            <a:schemeClr val="accent1"/>
+          </a:fillRef>
+          <a:effectRef idx="2">
+            <a:schemeClr val="accent1"/>
+          </a:effectRef>
+          <a:fontRef idx="minor">
+            <a:schemeClr val="lt1"/>
+          </a:fontRef>
+        </p:style>
+        <p:txBody>
+          <a:bodyPr rtlCol="0" anchor="ctr"/>
+          <a:lstStyle/>
+          <a:p>
+            <a:pPr algn="ctr"/>
+          </a:p>
+        </p:txBody>
+      </p:sp>
+      <p:sp>
+        <p:nvSpPr>
+          <p:cNvPr id="32" name="Rounded Rectangle 31"/>
+          <p:cNvSpPr/>
+          <p:nvPr/>
+        </p:nvSpPr>
+        <p:spPr>
+          <a:xfrm>
+            <a:off x="8960889" y="2176272"/>
+            <a:ext cx="2453563" cy="1207008"/>
+          </a:xfrm>
+          <a:prstGeom prst="roundRect">
+            <a:avLst>
+              <a:gd name="adj" fmla="val 8000"/>
+            </a:avLst>
+          </a:prstGeom>
+          <a:solidFill>
+            <a:srgbClr val="FFFFFF"/>
+          </a:solidFill>
+          <a:ln w="9525">
+            <a:solidFill>
+              <a:srgbClr val="CFC2BE"/>
+            </a:solidFill>
+          </a:ln>
+          <a:effectLst/>
+        </p:spPr>
+        <p:style>
+          <a:lnRef idx="1">
+            <a:schemeClr val="accent1"/>
+          </a:lnRef>
+          <a:fillRef idx="3">
+            <a:schemeClr val="accent1"/>
+          </a:fillRef>
+          <a:effectRef idx="2">
+            <a:schemeClr val="accent1"/>
+          </a:effectRef>
+          <a:fontRef idx="minor">
+            <a:schemeClr val="lt1"/>
+          </a:fontRef>
+        </p:style>
+        <p:txBody>
+          <a:bodyPr rtlCol="0" anchor="ctr"/>
+          <a:lstStyle/>
+          <a:p>
+            <a:pPr algn="ctr"/>
+          </a:p>
+        </p:txBody>
+      </p:sp>
+      <p:sp>
+        <p:nvSpPr>
+          <p:cNvPr id="33" name="Rectangle 32"/>
+          <p:cNvSpPr/>
+          <p:nvPr/>
+        </p:nvSpPr>
+        <p:spPr>
+          <a:xfrm>
+            <a:off x="9052329" y="2176272"/>
+            <a:ext cx="2270683" cy="45720"/>
+          </a:xfrm>
+          <a:prstGeom prst="rect">
+            <a:avLst/>
+          </a:prstGeom>
+          <a:solidFill>
+            <a:srgbClr val="1E7A55"/>
+          </a:solidFill>
+          <a:ln>
+            <a:noFill/>
+          </a:ln>
+          <a:effectLst/>
+        </p:spPr>
+        <p:style>
+          <a:lnRef idx="1">
+            <a:schemeClr val="accent1"/>
+          </a:lnRef>
+          <a:fillRef idx="3">
+            <a:schemeClr val="accent1"/>
+          </a:fillRef>
+          <a:effectRef idx="2">
+            <a:schemeClr val="accent1"/>
+          </a:effectRef>
+          <a:fontRef idx="minor">
+            <a:schemeClr val="lt1"/>
+          </a:fontRef>
+        </p:style>
+        <p:txBody>
+          <a:bodyPr rtlCol="0" anchor="ctr"/>
+          <a:lstStyle/>
+          <a:p>
+            <a:pPr algn="ctr"/>
+          </a:p>
+        </p:txBody>
+      </p:sp>
+      <p:sp>
+        <p:nvSpPr>
+          <p:cNvPr id="34" name="Oval 33"/>
+          <p:cNvSpPr/>
+          <p:nvPr/>
+        </p:nvSpPr>
+        <p:spPr>
+          <a:xfrm>
+            <a:off x="9107193" y="2359152"/>
+            <a:ext cx="329184" cy="329184"/>
+          </a:xfrm>
+          <a:prstGeom prst="ellipse">
+            <a:avLst/>
+          </a:prstGeom>
+          <a:solidFill>
+            <a:srgbClr val="1E7A55"/>
+          </a:solidFill>
+          <a:ln>
+            <a:noFill/>
+          </a:ln>
+          <a:effectLst/>
+        </p:spPr>
+        <p:style>
+          <a:lnRef idx="1">
+            <a:schemeClr val="accent1"/>
+          </a:lnRef>
+          <a:fillRef idx="3">
+            <a:schemeClr val="accent1"/>
+          </a:fillRef>
+          <a:effectRef idx="2">
+            <a:schemeClr val="accent1"/>
+          </a:effectRef>
+          <a:fontRef idx="minor">
+            <a:schemeClr val="lt1"/>
+          </a:fontRef>
+        </p:style>
+        <p:txBody>
+          <a:bodyPr rtlCol="0" anchor="ctr" lIns="0" rIns="0" tIns="0" bIns="0"/>
+          <a:lstStyle/>
+          <a:p>
+            <a:pPr algn="ctr"/>
+            <a:r>
+              <a:rPr sz="900" b="1">
+                <a:solidFill>
+                  <a:srgbClr val="FFFFFF"/>
+                </a:solidFill>
+                <a:latin typeface="Red Hat Mono"/>
+              </a:rPr>
+              <a:t>04</a:t>
+            </a:r>
+          </a:p>
+        </p:txBody>
+      </p:sp>
+      <p:sp>
+        <p:nvSpPr>
+          <p:cNvPr id="35" name="TextBox 34"/>
+          <p:cNvSpPr txBox="1"/>
+          <p:nvPr/>
+        </p:nvSpPr>
+        <p:spPr>
+          <a:xfrm>
+            <a:off x="9509529" y="2286000"/>
+            <a:ext cx="1795195" cy="685800"/>
+          </a:xfrm>
+          <a:prstGeom prst="rect">
+            <a:avLst/>
+          </a:prstGeom>
+          <a:noFill/>
+        </p:spPr>
+        <p:txBody>
+          <a:bodyPr wrap="square">
+            <a:spAutoFit/>
+          </a:bodyPr>
+          <a:lstStyle/>
+          <a:p>
+            <a:pPr algn="l">
+              <a:spcAft>
+                <a:spcPts val="200"/>
+              </a:spcAft>
+            </a:pPr>
+            <a:r>
+              <a:rPr sz="1300" b="1">
+                <a:solidFill>
+                  <a:srgbClr val="1B1211"/>
+                </a:solidFill>
+                <a:latin typeface="Red Hat Display"/>
+              </a:rPr>
+              <a:t>Drafting</a:t>
+            </a:r>
+          </a:p>
+          <a:p>
+            <a:pPr algn="l">
+              <a:spcAft>
+                <a:spcPts val="0"/>
+              </a:spcAft>
+            </a:pPr>
+            <a:r>
+              <a:rPr sz="950" b="0">
+                <a:solidFill>
+                  <a:srgbClr val="54423E"/>
+                </a:solidFill>
+                <a:latin typeface="Red Hat Text"/>
+              </a:rPr>
+              <a:t>Letters, responses, memos, with citations</a:t>
+            </a:r>
+          </a:p>
+        </p:txBody>
+      </p:sp>
+      <p:sp>
+        <p:nvSpPr>
+          <p:cNvPr id="36" name="Rounded Rectangle 35"/>
+          <p:cNvSpPr/>
+          <p:nvPr/>
+        </p:nvSpPr>
+        <p:spPr>
+          <a:xfrm>
+            <a:off x="9509529" y="2999232"/>
+            <a:ext cx="1600200" cy="246888"/>
+          </a:xfrm>
+          <a:prstGeom prst="roundRect">
+            <a:avLst>
+              <a:gd name="adj" fmla="val 50000"/>
+            </a:avLst>
+          </a:prstGeom>
+          <a:solidFill>
+            <a:srgbClr val="E0ECE7"/>
+          </a:solidFill>
+          <a:ln>
+            <a:noFill/>
+          </a:ln>
+          <a:effectLst/>
+        </p:spPr>
+        <p:style>
+          <a:lnRef idx="1">
+            <a:schemeClr val="accent1"/>
+          </a:lnRef>
+          <a:fillRef idx="3">
+            <a:schemeClr val="accent1"/>
+          </a:fillRef>
+          <a:effectRef idx="2">
+            <a:schemeClr val="accent1"/>
+          </a:effectRef>
+          <a:fontRef idx="minor">
+            <a:schemeClr val="lt1"/>
+          </a:fontRef>
+        </p:style>
+        <p:txBody>
+          <a:bodyPr rtlCol="0" anchor="ctr" lIns="45720" rIns="45720" tIns="0" bIns="0" wrap="none"/>
+          <a:lstStyle/>
+          <a:p>
+            <a:pPr algn="ctr"/>
+            <a:r>
+              <a:rPr sz="900" b="1">
+                <a:solidFill>
+                  <a:srgbClr val="1E7A55"/>
+                </a:solidFill>
+                <a:latin typeface="Red Hat Mono"/>
+              </a:rPr>
+              <a:t>AI drafts</a:t>
+            </a:r>
+          </a:p>
+        </p:txBody>
+      </p:sp>
+      <p:sp>
+        <p:nvSpPr>
+          <p:cNvPr id="37" name="Rounded Rectangle 36"/>
+          <p:cNvSpPr/>
+          <p:nvPr/>
+        </p:nvSpPr>
+        <p:spPr>
+          <a:xfrm>
+            <a:off x="777240" y="3584448"/>
+            <a:ext cx="2453563" cy="1207008"/>
+          </a:xfrm>
+          <a:prstGeom prst="roundRect">
+            <a:avLst>
+              <a:gd name="adj" fmla="val 8000"/>
+            </a:avLst>
+          </a:prstGeom>
+          <a:solidFill>
+            <a:srgbClr val="FFFFFF"/>
+          </a:solidFill>
+          <a:ln w="9525">
+            <a:solidFill>
+              <a:srgbClr val="CFC2BE"/>
+            </a:solidFill>
+          </a:ln>
+          <a:effectLst/>
+        </p:spPr>
+        <p:style>
+          <a:lnRef idx="1">
+            <a:schemeClr val="accent1"/>
+          </a:lnRef>
+          <a:fillRef idx="3">
+            <a:schemeClr val="accent1"/>
+          </a:fillRef>
+          <a:effectRef idx="2">
+            <a:schemeClr val="accent1"/>
+          </a:effectRef>
+          <a:fontRef idx="minor">
+            <a:schemeClr val="lt1"/>
+          </a:fontRef>
+        </p:style>
+        <p:txBody>
+          <a:bodyPr rtlCol="0" anchor="ctr"/>
+          <a:lstStyle/>
+          <a:p>
+            <a:pPr algn="ctr"/>
+          </a:p>
+        </p:txBody>
+      </p:sp>
+      <p:sp>
+        <p:nvSpPr>
+          <p:cNvPr id="38" name="Rectangle 37"/>
+          <p:cNvSpPr/>
+          <p:nvPr/>
+        </p:nvSpPr>
+        <p:spPr>
+          <a:xfrm>
+            <a:off x="868680" y="3584448"/>
+            <a:ext cx="2270683" cy="45720"/>
+          </a:xfrm>
+          <a:prstGeom prst="rect">
+            <a:avLst/>
+          </a:prstGeom>
+          <a:solidFill>
+            <a:srgbClr val="5B2E91"/>
+          </a:solidFill>
+          <a:ln>
+            <a:noFill/>
+          </a:ln>
+          <a:effectLst/>
+        </p:spPr>
+        <p:style>
+          <a:lnRef idx="1">
+            <a:schemeClr val="accent1"/>
+          </a:lnRef>
+          <a:fillRef idx="3">
+            <a:schemeClr val="accent1"/>
+          </a:fillRef>
+          <a:effectRef idx="2">
+            <a:schemeClr val="accent1"/>
+          </a:effectRef>
+          <a:fontRef idx="minor">
+            <a:schemeClr val="lt1"/>
+          </a:fontRef>
+        </p:style>
+        <p:txBody>
+          <a:bodyPr rtlCol="0" anchor="ctr"/>
+          <a:lstStyle/>
+          <a:p>
+            <a:pPr algn="ctr"/>
+          </a:p>
+        </p:txBody>
+      </p:sp>
+      <p:sp>
+        <p:nvSpPr>
+          <p:cNvPr id="39" name="Oval 38"/>
+          <p:cNvSpPr/>
+          <p:nvPr/>
+        </p:nvSpPr>
+        <p:spPr>
+          <a:xfrm>
+            <a:off x="923544" y="3767328"/>
+            <a:ext cx="329184" cy="329184"/>
+          </a:xfrm>
+          <a:prstGeom prst="ellipse">
+            <a:avLst/>
+          </a:prstGeom>
+          <a:solidFill>
+            <a:srgbClr val="5B2E91"/>
+          </a:solidFill>
+          <a:ln>
+            <a:noFill/>
+          </a:ln>
+          <a:effectLst/>
+        </p:spPr>
+        <p:style>
+          <a:lnRef idx="1">
+            <a:schemeClr val="accent1"/>
+          </a:lnRef>
+          <a:fillRef idx="3">
+            <a:schemeClr val="accent1"/>
+          </a:fillRef>
+          <a:effectRef idx="2">
+            <a:schemeClr val="accent1"/>
+          </a:effectRef>
+          <a:fontRef idx="minor">
+            <a:schemeClr val="lt1"/>
+          </a:fontRef>
+        </p:style>
+        <p:txBody>
+          <a:bodyPr rtlCol="0" anchor="ctr" lIns="0" rIns="0" tIns="0" bIns="0"/>
+          <a:lstStyle/>
+          <a:p>
+            <a:pPr algn="ctr"/>
+            <a:r>
+              <a:rPr sz="900" b="1">
+                <a:solidFill>
+                  <a:srgbClr val="FFFFFF"/>
+                </a:solidFill>
+                <a:latin typeface="Red Hat Mono"/>
+              </a:rPr>
+              <a:t>05</a:t>
+            </a:r>
+          </a:p>
+        </p:txBody>
+      </p:sp>
+      <p:sp>
+        <p:nvSpPr>
+          <p:cNvPr id="40" name="TextBox 39"/>
+          <p:cNvSpPr txBox="1"/>
+          <p:nvPr/>
+        </p:nvSpPr>
+        <p:spPr>
+          <a:xfrm>
+            <a:off x="1325880" y="3694176"/>
+            <a:ext cx="1795195" cy="685800"/>
+          </a:xfrm>
+          <a:prstGeom prst="rect">
+            <a:avLst/>
+          </a:prstGeom>
+          <a:noFill/>
+        </p:spPr>
+        <p:txBody>
+          <a:bodyPr wrap="square">
+            <a:spAutoFit/>
+          </a:bodyPr>
+          <a:lstStyle/>
+          <a:p>
+            <a:pPr algn="l">
+              <a:spcAft>
+                <a:spcPts val="200"/>
+              </a:spcAft>
+            </a:pPr>
+            <a:r>
+              <a:rPr sz="1300" b="1">
+                <a:solidFill>
+                  <a:srgbClr val="1B1211"/>
+                </a:solidFill>
+                <a:latin typeface="Red Hat Display"/>
+              </a:rPr>
+              <a:t>Review</a:t>
+            </a:r>
+          </a:p>
+          <a:p>
+            <a:pPr algn="l">
+              <a:spcAft>
+                <a:spcPts val="0"/>
+              </a:spcAft>
+            </a:pPr>
+            <a:r>
+              <a:rPr sz="950" b="0">
+                <a:solidFill>
+                  <a:srgbClr val="54423E"/>
+                </a:solidFill>
+                <a:latin typeface="Red Hat Text"/>
+              </a:rPr>
+              <a:t>Check accuracy, add judgment, approve</a:t>
+            </a:r>
+          </a:p>
+        </p:txBody>
+      </p:sp>
+      <p:sp>
+        <p:nvSpPr>
+          <p:cNvPr id="41" name="Rounded Rectangle 40"/>
+          <p:cNvSpPr/>
+          <p:nvPr/>
+        </p:nvSpPr>
+        <p:spPr>
+          <a:xfrm>
+            <a:off x="1325880" y="4407408"/>
+            <a:ext cx="1600200" cy="246888"/>
+          </a:xfrm>
+          <a:prstGeom prst="roundRect">
+            <a:avLst>
+              <a:gd name="adj" fmla="val 50000"/>
+            </a:avLst>
+          </a:prstGeom>
+          <a:solidFill>
+            <a:srgbClr val="E8E2F0"/>
+          </a:solidFill>
+          <a:ln>
+            <a:noFill/>
+          </a:ln>
+          <a:effectLst/>
+        </p:spPr>
+        <p:style>
+          <a:lnRef idx="1">
+            <a:schemeClr val="accent1"/>
+          </a:lnRef>
+          <a:fillRef idx="3">
+            <a:schemeClr val="accent1"/>
+          </a:fillRef>
+          <a:effectRef idx="2">
+            <a:schemeClr val="accent1"/>
+          </a:effectRef>
+          <a:fontRef idx="minor">
+            <a:schemeClr val="lt1"/>
+          </a:fontRef>
+        </p:style>
+        <p:txBody>
+          <a:bodyPr rtlCol="0" anchor="ctr" lIns="45720" rIns="45720" tIns="0" bIns="0" wrap="none"/>
+          <a:lstStyle/>
+          <a:p>
+            <a:pPr algn="ctr"/>
+            <a:r>
+              <a:rPr sz="900" b="1">
+                <a:solidFill>
+                  <a:srgbClr val="5B2E91"/>
+                </a:solidFill>
+                <a:latin typeface="Red Hat Mono"/>
+              </a:rPr>
+              <a:t>human in the loop</a:t>
+            </a:r>
+          </a:p>
+        </p:txBody>
+      </p:sp>
+      <p:sp>
+        <p:nvSpPr>
+          <p:cNvPr id="42" name="Right Arrow 41"/>
+          <p:cNvSpPr/>
+          <p:nvPr/>
+        </p:nvSpPr>
+        <p:spPr>
+          <a:xfrm>
+            <a:off x="3285667" y="4105656"/>
+            <a:ext cx="164592" cy="164592"/>
+          </a:xfrm>
+          <a:prstGeom prst="rightArrow">
+            <a:avLst/>
+          </a:prstGeom>
+          <a:solidFill>
+            <a:srgbClr val="7E6A64"/>
+          </a:solidFill>
+          <a:ln>
+            <a:noFill/>
+          </a:ln>
+          <a:effectLst/>
+        </p:spPr>
+        <p:style>
+          <a:lnRef idx="1">
+            <a:schemeClr val="accent1"/>
+          </a:lnRef>
+          <a:fillRef idx="3">
+            <a:schemeClr val="accent1"/>
+          </a:fillRef>
+          <a:effectRef idx="2">
+            <a:schemeClr val="accent1"/>
+          </a:effectRef>
+          <a:fontRef idx="minor">
+            <a:schemeClr val="lt1"/>
+          </a:fontRef>
+        </p:style>
+        <p:txBody>
+          <a:bodyPr rtlCol="0" anchor="ctr"/>
+          <a:lstStyle/>
+          <a:p>
+            <a:pPr algn="ctr"/>
+          </a:p>
+        </p:txBody>
+      </p:sp>
+      <p:sp>
+        <p:nvSpPr>
+          <p:cNvPr id="43" name="Rounded Rectangle 42"/>
+          <p:cNvSpPr/>
+          <p:nvPr/>
+        </p:nvSpPr>
+        <p:spPr>
+          <a:xfrm>
+            <a:off x="3505123" y="3584448"/>
+            <a:ext cx="2453563" cy="1207008"/>
+          </a:xfrm>
+          <a:prstGeom prst="roundRect">
+            <a:avLst>
+              <a:gd name="adj" fmla="val 8000"/>
+            </a:avLst>
+          </a:prstGeom>
+          <a:solidFill>
+            <a:srgbClr val="FFFFFF"/>
+          </a:solidFill>
+          <a:ln w="9525">
+            <a:solidFill>
+              <a:srgbClr val="CFC2BE"/>
+            </a:solidFill>
+          </a:ln>
+          <a:effectLst/>
+        </p:spPr>
+        <p:style>
+          <a:lnRef idx="1">
+            <a:schemeClr val="accent1"/>
+          </a:lnRef>
+          <a:fillRef idx="3">
+            <a:schemeClr val="accent1"/>
+          </a:fillRef>
+          <a:effectRef idx="2">
+            <a:schemeClr val="accent1"/>
+          </a:effectRef>
+          <a:fontRef idx="minor">
+            <a:schemeClr val="lt1"/>
+          </a:fontRef>
+        </p:style>
+        <p:txBody>
+          <a:bodyPr rtlCol="0" anchor="ctr"/>
+          <a:lstStyle/>
+          <a:p>
+            <a:pPr algn="ctr"/>
+          </a:p>
+        </p:txBody>
+      </p:sp>
+      <p:sp>
+        <p:nvSpPr>
+          <p:cNvPr id="44" name="Rectangle 43"/>
+          <p:cNvSpPr/>
+          <p:nvPr/>
+        </p:nvSpPr>
+        <p:spPr>
+          <a:xfrm>
+            <a:off x="3596563" y="3584448"/>
+            <a:ext cx="2270683" cy="45720"/>
+          </a:xfrm>
+          <a:prstGeom prst="rect">
+            <a:avLst/>
+          </a:prstGeom>
+          <a:solidFill>
+            <a:srgbClr val="5B2E91"/>
+          </a:solidFill>
+          <a:ln>
+            <a:noFill/>
+          </a:ln>
+          <a:effectLst/>
+        </p:spPr>
+        <p:style>
+          <a:lnRef idx="1">
+            <a:schemeClr val="accent1"/>
+          </a:lnRef>
+          <a:fillRef idx="3">
+            <a:schemeClr val="accent1"/>
+          </a:fillRef>
+          <a:effectRef idx="2">
+            <a:schemeClr val="accent1"/>
+          </a:effectRef>
+          <a:fontRef idx="minor">
+            <a:schemeClr val="lt1"/>
+          </a:fontRef>
+        </p:style>
+        <p:txBody>
+          <a:bodyPr rtlCol="0" anchor="ctr"/>
+          <a:lstStyle/>
+          <a:p>
+            <a:pPr algn="ctr"/>
+          </a:p>
+        </p:txBody>
+      </p:sp>
+      <p:sp>
+        <p:nvSpPr>
+          <p:cNvPr id="45" name="Oval 44"/>
+          <p:cNvSpPr/>
+          <p:nvPr/>
+        </p:nvSpPr>
+        <p:spPr>
+          <a:xfrm>
+            <a:off x="3651427" y="3767328"/>
+            <a:ext cx="329184" cy="329184"/>
+          </a:xfrm>
+          <a:prstGeom prst="ellipse">
+            <a:avLst/>
+          </a:prstGeom>
+          <a:solidFill>
+            <a:srgbClr val="5B2E91"/>
+          </a:solidFill>
+          <a:ln>
+            <a:noFill/>
+          </a:ln>
+          <a:effectLst/>
+        </p:spPr>
+        <p:style>
+          <a:lnRef idx="1">
+            <a:schemeClr val="accent1"/>
+          </a:lnRef>
+          <a:fillRef idx="3">
+            <a:schemeClr val="accent1"/>
+          </a:fillRef>
+          <a:effectRef idx="2">
+            <a:schemeClr val="accent1"/>
+          </a:effectRef>
+          <a:fontRef idx="minor">
+            <a:schemeClr val="lt1"/>
+          </a:fontRef>
+        </p:style>
+        <p:txBody>
+          <a:bodyPr rtlCol="0" anchor="ctr" lIns="0" rIns="0" tIns="0" bIns="0"/>
+          <a:lstStyle/>
+          <a:p>
+            <a:pPr algn="ctr"/>
+            <a:r>
+              <a:rPr sz="900" b="1">
+                <a:solidFill>
+                  <a:srgbClr val="FFFFFF"/>
+                </a:solidFill>
+                <a:latin typeface="Red Hat Mono"/>
+              </a:rPr>
+              <a:t>06</a:t>
+            </a:r>
+          </a:p>
+        </p:txBody>
+      </p:sp>
+      <p:sp>
+        <p:nvSpPr>
+          <p:cNvPr id="46" name="TextBox 45"/>
+          <p:cNvSpPr txBox="1"/>
+          <p:nvPr/>
+        </p:nvSpPr>
+        <p:spPr>
+          <a:xfrm>
+            <a:off x="4053763" y="3694176"/>
+            <a:ext cx="1795195" cy="685800"/>
+          </a:xfrm>
+          <a:prstGeom prst="rect">
+            <a:avLst/>
+          </a:prstGeom>
+          <a:noFill/>
+        </p:spPr>
+        <p:txBody>
+          <a:bodyPr wrap="square">
+            <a:spAutoFit/>
+          </a:bodyPr>
+          <a:lstStyle/>
+          <a:p>
+            <a:pPr algn="l">
+              <a:spcAft>
+                <a:spcPts val="200"/>
+              </a:spcAft>
+            </a:pPr>
+            <a:r>
+              <a:rPr sz="1300" b="1">
+                <a:solidFill>
+                  <a:srgbClr val="1B1211"/>
+                </a:solidFill>
+                <a:latin typeface="Red Hat Display"/>
+              </a:rPr>
+              <a:t>Decision</a:t>
+            </a:r>
+          </a:p>
+          <a:p>
+            <a:pPr algn="l">
+              <a:spcAft>
+                <a:spcPts val="0"/>
+              </a:spcAft>
+            </a:pPr>
+            <a:r>
+              <a:rPr sz="950" b="0">
+                <a:solidFill>
+                  <a:srgbClr val="54423E"/>
+                </a:solidFill>
+                <a:latin typeface="Red Hat Text"/>
+              </a:rPr>
+              <a:t>Finalize and issue the outcome</a:t>
+            </a:r>
+          </a:p>
+        </p:txBody>
+      </p:sp>
+      <p:sp>
+        <p:nvSpPr>
+          <p:cNvPr id="47" name="Rounded Rectangle 46"/>
+          <p:cNvSpPr/>
+          <p:nvPr/>
+        </p:nvSpPr>
+        <p:spPr>
+          <a:xfrm>
+            <a:off x="4053763" y="4407408"/>
+            <a:ext cx="1600200" cy="246888"/>
+          </a:xfrm>
+          <a:prstGeom prst="roundRect">
+            <a:avLst>
+              <a:gd name="adj" fmla="val 50000"/>
+            </a:avLst>
+          </a:prstGeom>
+          <a:solidFill>
+            <a:srgbClr val="E8E2F0"/>
+          </a:solidFill>
+          <a:ln>
+            <a:noFill/>
+          </a:ln>
+          <a:effectLst/>
+        </p:spPr>
+        <p:style>
+          <a:lnRef idx="1">
+            <a:schemeClr val="accent1"/>
+          </a:lnRef>
+          <a:fillRef idx="3">
+            <a:schemeClr val="accent1"/>
+          </a:fillRef>
+          <a:effectRef idx="2">
+            <a:schemeClr val="accent1"/>
+          </a:effectRef>
+          <a:fontRef idx="minor">
+            <a:schemeClr val="lt1"/>
+          </a:fontRef>
+        </p:style>
+        <p:txBody>
+          <a:bodyPr rtlCol="0" anchor="ctr" lIns="45720" rIns="45720" tIns="0" bIns="0" wrap="none"/>
+          <a:lstStyle/>
+          <a:p>
+            <a:pPr algn="ctr"/>
+            <a:r>
+              <a:rPr sz="900" b="1">
+                <a:solidFill>
+                  <a:srgbClr val="5B2E91"/>
+                </a:solidFill>
+                <a:latin typeface="Red Hat Mono"/>
+              </a:rPr>
+              <a:t>a person signs</a:t>
+            </a:r>
+          </a:p>
+        </p:txBody>
+      </p:sp>
+      <p:sp>
+        <p:nvSpPr>
+          <p:cNvPr id="48" name="Right Arrow 47"/>
+          <p:cNvSpPr/>
+          <p:nvPr/>
+        </p:nvSpPr>
+        <p:spPr>
+          <a:xfrm>
+            <a:off x="6013550" y="4105656"/>
+            <a:ext cx="164592" cy="164592"/>
+          </a:xfrm>
+          <a:prstGeom prst="rightArrow">
+            <a:avLst/>
+          </a:prstGeom>
+          <a:solidFill>
+            <a:srgbClr val="7E6A64"/>
+          </a:solidFill>
+          <a:ln>
+            <a:noFill/>
+          </a:ln>
+          <a:effectLst/>
+        </p:spPr>
+        <p:style>
+          <a:lnRef idx="1">
+            <a:schemeClr val="accent1"/>
+          </a:lnRef>
+          <a:fillRef idx="3">
+            <a:schemeClr val="accent1"/>
+          </a:fillRef>
+          <a:effectRef idx="2">
+            <a:schemeClr val="accent1"/>
+          </a:effectRef>
+          <a:fontRef idx="minor">
+            <a:schemeClr val="lt1"/>
+          </a:fontRef>
+        </p:style>
+        <p:txBody>
+          <a:bodyPr rtlCol="0" anchor="ctr"/>
+          <a:lstStyle/>
+          <a:p>
+            <a:pPr algn="ctr"/>
+          </a:p>
+        </p:txBody>
+      </p:sp>
+      <p:sp>
+        <p:nvSpPr>
+          <p:cNvPr id="49" name="Rounded Rectangle 48"/>
+          <p:cNvSpPr/>
+          <p:nvPr/>
+        </p:nvSpPr>
+        <p:spPr>
+          <a:xfrm>
+            <a:off x="6233006" y="3584448"/>
+            <a:ext cx="2453563" cy="1207008"/>
+          </a:xfrm>
+          <a:prstGeom prst="roundRect">
+            <a:avLst>
+              <a:gd name="adj" fmla="val 8000"/>
+            </a:avLst>
+          </a:prstGeom>
+          <a:solidFill>
+            <a:srgbClr val="FFFFFF"/>
+          </a:solidFill>
+          <a:ln w="9525">
+            <a:solidFill>
+              <a:srgbClr val="CFC2BE"/>
+            </a:solidFill>
+          </a:ln>
+          <a:effectLst/>
+        </p:spPr>
+        <p:style>
+          <a:lnRef idx="1">
+            <a:schemeClr val="accent1"/>
+          </a:lnRef>
+          <a:fillRef idx="3">
+            <a:schemeClr val="accent1"/>
+          </a:fillRef>
+          <a:effectRef idx="2">
+            <a:schemeClr val="accent1"/>
+          </a:effectRef>
+          <a:fontRef idx="minor">
+            <a:schemeClr val="lt1"/>
+          </a:fontRef>
+        </p:style>
+        <p:txBody>
+          <a:bodyPr rtlCol="0" anchor="ctr"/>
+          <a:lstStyle/>
+          <a:p>
+            <a:pPr algn="ctr"/>
+          </a:p>
+        </p:txBody>
+      </p:sp>
+      <p:sp>
+        <p:nvSpPr>
+          <p:cNvPr id="50" name="Rectangle 49"/>
+          <p:cNvSpPr/>
+          <p:nvPr/>
+        </p:nvSpPr>
+        <p:spPr>
+          <a:xfrm>
+            <a:off x="6324446" y="3584448"/>
+            <a:ext cx="2270683" cy="45720"/>
+          </a:xfrm>
+          <a:prstGeom prst="rect">
+            <a:avLst/>
+          </a:prstGeom>
+          <a:solidFill>
+            <a:srgbClr val="5B2E91"/>
+          </a:solidFill>
+          <a:ln>
+            <a:noFill/>
+          </a:ln>
+          <a:effectLst/>
+        </p:spPr>
+        <p:style>
+          <a:lnRef idx="1">
+            <a:schemeClr val="accent1"/>
+          </a:lnRef>
+          <a:fillRef idx="3">
+            <a:schemeClr val="accent1"/>
+          </a:fillRef>
+          <a:effectRef idx="2">
+            <a:schemeClr val="accent1"/>
+          </a:effectRef>
+          <a:fontRef idx="minor">
+            <a:schemeClr val="lt1"/>
+          </a:fontRef>
+        </p:style>
+        <p:txBody>
+          <a:bodyPr rtlCol="0" anchor="ctr"/>
+          <a:lstStyle/>
+          <a:p>
+            <a:pPr algn="ctr"/>
+          </a:p>
+        </p:txBody>
+      </p:sp>
+      <p:sp>
+        <p:nvSpPr>
+          <p:cNvPr id="51" name="Oval 50"/>
+          <p:cNvSpPr/>
+          <p:nvPr/>
+        </p:nvSpPr>
+        <p:spPr>
+          <a:xfrm>
+            <a:off x="6379310" y="3767328"/>
+            <a:ext cx="329184" cy="329184"/>
+          </a:xfrm>
+          <a:prstGeom prst="ellipse">
+            <a:avLst/>
+          </a:prstGeom>
+          <a:solidFill>
+            <a:srgbClr val="5B2E91"/>
+          </a:solidFill>
+          <a:ln>
+            <a:noFill/>
+          </a:ln>
+          <a:effectLst/>
+        </p:spPr>
+        <p:style>
+          <a:lnRef idx="1">
+            <a:schemeClr val="accent1"/>
+          </a:lnRef>
+          <a:fillRef idx="3">
+            <a:schemeClr val="accent1"/>
+          </a:fillRef>
+          <a:effectRef idx="2">
+            <a:schemeClr val="accent1"/>
+          </a:effectRef>
+          <a:fontRef idx="minor">
+            <a:schemeClr val="lt1"/>
+          </a:fontRef>
+        </p:style>
+        <p:txBody>
+          <a:bodyPr rtlCol="0" anchor="ctr" lIns="0" rIns="0" tIns="0" bIns="0"/>
+          <a:lstStyle/>
+          <a:p>
+            <a:pPr algn="ctr"/>
+            <a:r>
+              <a:rPr sz="900" b="1">
+                <a:solidFill>
+                  <a:srgbClr val="FFFFFF"/>
+                </a:solidFill>
+                <a:latin typeface="Red Hat Mono"/>
+              </a:rPr>
+              <a:t>07</a:t>
+            </a:r>
+          </a:p>
+        </p:txBody>
+      </p:sp>
+      <p:sp>
+        <p:nvSpPr>
+          <p:cNvPr id="52" name="TextBox 51"/>
+          <p:cNvSpPr txBox="1"/>
+          <p:nvPr/>
+        </p:nvSpPr>
+        <p:spPr>
+          <a:xfrm>
+            <a:off x="6781646" y="3694176"/>
+            <a:ext cx="1795195" cy="685800"/>
+          </a:xfrm>
+          <a:prstGeom prst="rect">
+            <a:avLst/>
+          </a:prstGeom>
+          <a:noFill/>
+        </p:spPr>
+        <p:txBody>
+          <a:bodyPr wrap="square">
+            <a:spAutoFit/>
+          </a:bodyPr>
+          <a:lstStyle/>
+          <a:p>
+            <a:pPr algn="l">
+              <a:spcAft>
+                <a:spcPts val="200"/>
+              </a:spcAft>
+            </a:pPr>
+            <a:r>
+              <a:rPr sz="1300" b="1">
+                <a:solidFill>
+                  <a:srgbClr val="1B1211"/>
+                </a:solidFill>
+                <a:latin typeface="Red Hat Display"/>
+              </a:rPr>
+              <a:t>Notice</a:t>
+            </a:r>
+          </a:p>
+          <a:p>
+            <a:pPr algn="l">
+              <a:spcAft>
+                <a:spcPts val="0"/>
+              </a:spcAft>
+            </a:pPr>
+            <a:r>
+              <a:rPr sz="950" b="0">
+                <a:solidFill>
+                  <a:srgbClr val="54423E"/>
+                </a:solidFill>
+                <a:latin typeface="Red Hat Text"/>
+              </a:rPr>
+              <a:t>Send letters and update records</a:t>
+            </a:r>
+          </a:p>
+        </p:txBody>
+      </p:sp>
+      <p:sp>
+        <p:nvSpPr>
+          <p:cNvPr id="53" name="Rounded Rectangle 52"/>
+          <p:cNvSpPr/>
+          <p:nvPr/>
+        </p:nvSpPr>
+        <p:spPr>
+          <a:xfrm>
+            <a:off x="6781646" y="4407408"/>
+            <a:ext cx="1600200" cy="246888"/>
+          </a:xfrm>
+          <a:prstGeom prst="roundRect">
+            <a:avLst>
+              <a:gd name="adj" fmla="val 50000"/>
+            </a:avLst>
+          </a:prstGeom>
+          <a:solidFill>
+            <a:srgbClr val="E8E2F0"/>
+          </a:solidFill>
+          <a:ln>
+            <a:noFill/>
+          </a:ln>
+          <a:effectLst/>
+        </p:spPr>
+        <p:style>
+          <a:lnRef idx="1">
+            <a:schemeClr val="accent1"/>
+          </a:lnRef>
+          <a:fillRef idx="3">
+            <a:schemeClr val="accent1"/>
+          </a:fillRef>
+          <a:effectRef idx="2">
+            <a:schemeClr val="accent1"/>
+          </a:effectRef>
+          <a:fontRef idx="minor">
+            <a:schemeClr val="lt1"/>
+          </a:fontRef>
+        </p:style>
+        <p:txBody>
+          <a:bodyPr rtlCol="0" anchor="ctr" lIns="45720" rIns="45720" tIns="0" bIns="0" wrap="none"/>
+          <a:lstStyle/>
+          <a:p>
+            <a:pPr algn="ctr"/>
+            <a:r>
+              <a:rPr sz="900" b="1">
+                <a:solidFill>
+                  <a:srgbClr val="5B2E91"/>
+                </a:solidFill>
+                <a:latin typeface="Red Hat Mono"/>
+              </a:rPr>
+              <a:t>automation executes</a:t>
+            </a:r>
+          </a:p>
+        </p:txBody>
+      </p:sp>
+      <p:sp>
+        <p:nvSpPr>
+          <p:cNvPr id="54" name="Right Arrow 53"/>
+          <p:cNvSpPr/>
+          <p:nvPr/>
+        </p:nvSpPr>
+        <p:spPr>
+          <a:xfrm>
+            <a:off x="8741433" y="4105656"/>
+            <a:ext cx="164592" cy="164592"/>
+          </a:xfrm>
+          <a:prstGeom prst="rightArrow">
+            <a:avLst/>
+          </a:prstGeom>
+          <a:solidFill>
+            <a:srgbClr val="7E6A64"/>
+          </a:solidFill>
+          <a:ln>
+            <a:noFill/>
+          </a:ln>
+          <a:effectLst/>
+        </p:spPr>
+        <p:style>
+          <a:lnRef idx="1">
+            <a:schemeClr val="accent1"/>
+          </a:lnRef>
+          <a:fillRef idx="3">
+            <a:schemeClr val="accent1"/>
+          </a:fillRef>
+          <a:effectRef idx="2">
+            <a:schemeClr val="accent1"/>
+          </a:effectRef>
+          <a:fontRef idx="minor">
+            <a:schemeClr val="lt1"/>
+          </a:fontRef>
+        </p:style>
+        <p:txBody>
+          <a:bodyPr rtlCol="0" anchor="ctr"/>
+          <a:lstStyle/>
+          <a:p>
+            <a:pPr algn="ctr"/>
+          </a:p>
+        </p:txBody>
+      </p:sp>
+      <p:sp>
+        <p:nvSpPr>
+          <p:cNvPr id="55" name="Rounded Rectangle 54"/>
+          <p:cNvSpPr/>
+          <p:nvPr/>
+        </p:nvSpPr>
+        <p:spPr>
+          <a:xfrm>
+            <a:off x="8960889" y="3584448"/>
+            <a:ext cx="2453563" cy="1207008"/>
+          </a:xfrm>
+          <a:prstGeom prst="roundRect">
+            <a:avLst>
+              <a:gd name="adj" fmla="val 8000"/>
+            </a:avLst>
+          </a:prstGeom>
+          <a:solidFill>
+            <a:srgbClr val="FFFFFF"/>
+          </a:solidFill>
+          <a:ln w="9525">
+            <a:solidFill>
+              <a:srgbClr val="CFC2BE"/>
+            </a:solidFill>
+          </a:ln>
+          <a:effectLst/>
+        </p:spPr>
+        <p:style>
+          <a:lnRef idx="1">
+            <a:schemeClr val="accent1"/>
+          </a:lnRef>
+          <a:fillRef idx="3">
+            <a:schemeClr val="accent1"/>
+          </a:fillRef>
+          <a:effectRef idx="2">
+            <a:schemeClr val="accent1"/>
+          </a:effectRef>
+          <a:fontRef idx="minor">
+            <a:schemeClr val="lt1"/>
+          </a:fontRef>
+        </p:style>
+        <p:txBody>
+          <a:bodyPr rtlCol="0" anchor="ctr"/>
+          <a:lstStyle/>
+          <a:p>
+            <a:pPr algn="ctr"/>
+          </a:p>
+        </p:txBody>
+      </p:sp>
+      <p:sp>
+        <p:nvSpPr>
+          <p:cNvPr id="56" name="Rectangle 55"/>
+          <p:cNvSpPr/>
+          <p:nvPr/>
+        </p:nvSpPr>
+        <p:spPr>
+          <a:xfrm>
+            <a:off x="9052329" y="3584448"/>
+            <a:ext cx="2270683" cy="45720"/>
+          </a:xfrm>
+          <a:prstGeom prst="rect">
+            <a:avLst/>
+          </a:prstGeom>
+          <a:solidFill>
+            <a:srgbClr val="1E7A55"/>
+          </a:solidFill>
+          <a:ln>
+            <a:noFill/>
+          </a:ln>
+          <a:effectLst/>
+        </p:spPr>
+        <p:style>
+          <a:lnRef idx="1">
+            <a:schemeClr val="accent1"/>
+          </a:lnRef>
+          <a:fillRef idx="3">
+            <a:schemeClr val="accent1"/>
+          </a:fillRef>
+          <a:effectRef idx="2">
+            <a:schemeClr val="accent1"/>
+          </a:effectRef>
+          <a:fontRef idx="minor">
+            <a:schemeClr val="lt1"/>
+          </a:fontRef>
+        </p:style>
+        <p:txBody>
+          <a:bodyPr rtlCol="0" anchor="ctr"/>
+          <a:lstStyle/>
+          <a:p>
+            <a:pPr algn="ctr"/>
+          </a:p>
+        </p:txBody>
+      </p:sp>
+      <p:sp>
+        <p:nvSpPr>
+          <p:cNvPr id="57" name="Oval 56"/>
+          <p:cNvSpPr/>
+          <p:nvPr/>
+        </p:nvSpPr>
+        <p:spPr>
+          <a:xfrm>
+            <a:off x="9107193" y="3767328"/>
+            <a:ext cx="329184" cy="329184"/>
+          </a:xfrm>
+          <a:prstGeom prst="ellipse">
+            <a:avLst/>
+          </a:prstGeom>
+          <a:solidFill>
+            <a:srgbClr val="1E7A55"/>
+          </a:solidFill>
+          <a:ln>
+            <a:noFill/>
+          </a:ln>
+          <a:effectLst/>
+        </p:spPr>
+        <p:style>
+          <a:lnRef idx="1">
+            <a:schemeClr val="accent1"/>
+          </a:lnRef>
+          <a:fillRef idx="3">
+            <a:schemeClr val="accent1"/>
+          </a:fillRef>
+          <a:effectRef idx="2">
+            <a:schemeClr val="accent1"/>
+          </a:effectRef>
+          <a:fontRef idx="minor">
+            <a:schemeClr val="lt1"/>
+          </a:fontRef>
+        </p:style>
+        <p:txBody>
+          <a:bodyPr rtlCol="0" anchor="ctr" lIns="0" rIns="0" tIns="0" bIns="0"/>
+          <a:lstStyle/>
+          <a:p>
+            <a:pPr algn="ctr"/>
+            <a:r>
+              <a:rPr sz="900" b="1">
+                <a:solidFill>
+                  <a:srgbClr val="FFFFFF"/>
+                </a:solidFill>
+                <a:latin typeface="Red Hat Mono"/>
+              </a:rPr>
+              <a:t>08</a:t>
+            </a:r>
+          </a:p>
+        </p:txBody>
+      </p:sp>
+      <p:sp>
+        <p:nvSpPr>
+          <p:cNvPr id="58" name="TextBox 57"/>
+          <p:cNvSpPr txBox="1"/>
+          <p:nvPr/>
+        </p:nvSpPr>
+        <p:spPr>
+          <a:xfrm>
+            <a:off x="9509529" y="3694176"/>
+            <a:ext cx="1795195" cy="685800"/>
+          </a:xfrm>
+          <a:prstGeom prst="rect">
+            <a:avLst/>
+          </a:prstGeom>
+          <a:noFill/>
+        </p:spPr>
+        <p:txBody>
+          <a:bodyPr wrap="square">
+            <a:spAutoFit/>
+          </a:bodyPr>
+          <a:lstStyle/>
+          <a:p>
+            <a:pPr algn="l">
+              <a:spcAft>
+                <a:spcPts val="200"/>
+              </a:spcAft>
+            </a:pPr>
+            <a:r>
+              <a:rPr sz="1300" b="1">
+                <a:solidFill>
+                  <a:srgbClr val="1B1211"/>
+                </a:solidFill>
+                <a:latin typeface="Red Hat Display"/>
+              </a:rPr>
+              <a:t>Operations</a:t>
+            </a:r>
+          </a:p>
+          <a:p>
+            <a:pPr algn="l">
+              <a:spcAft>
+                <a:spcPts val="0"/>
+              </a:spcAft>
+            </a:pPr>
+            <a:r>
+              <a:rPr sz="950" b="0">
+                <a:solidFill>
+                  <a:srgbClr val="54423E"/>
+                </a:solidFill>
+                <a:latin typeface="Red Hat Text"/>
+              </a:rPr>
+              <a:t>Track performance, learn and improve</a:t>
+            </a:r>
+          </a:p>
+        </p:txBody>
+      </p:sp>
+      <p:sp>
+        <p:nvSpPr>
+          <p:cNvPr id="59" name="Rounded Rectangle 58"/>
+          <p:cNvSpPr/>
+          <p:nvPr/>
+        </p:nvSpPr>
+        <p:spPr>
+          <a:xfrm>
+            <a:off x="9509529" y="4407408"/>
+            <a:ext cx="1600200" cy="246888"/>
+          </a:xfrm>
+          <a:prstGeom prst="roundRect">
+            <a:avLst>
+              <a:gd name="adj" fmla="val 50000"/>
+            </a:avLst>
+          </a:prstGeom>
+          <a:solidFill>
+            <a:srgbClr val="E0ECE7"/>
+          </a:solidFill>
+          <a:ln>
+            <a:noFill/>
+          </a:ln>
+          <a:effectLst/>
+        </p:spPr>
+        <p:style>
+          <a:lnRef idx="1">
+            <a:schemeClr val="accent1"/>
+          </a:lnRef>
+          <a:fillRef idx="3">
+            <a:schemeClr val="accent1"/>
+          </a:fillRef>
+          <a:effectRef idx="2">
+            <a:schemeClr val="accent1"/>
+          </a:effectRef>
+          <a:fontRef idx="minor">
+            <a:schemeClr val="lt1"/>
+          </a:fontRef>
+        </p:style>
+        <p:txBody>
+          <a:bodyPr rtlCol="0" anchor="ctr" lIns="45720" rIns="45720" tIns="0" bIns="0" wrap="none"/>
+          <a:lstStyle/>
+          <a:p>
+            <a:pPr algn="ctr"/>
+            <a:r>
+              <a:rPr sz="900" b="1">
+                <a:solidFill>
+                  <a:srgbClr val="1E7A55"/>
+                </a:solidFill>
+                <a:latin typeface="Red Hat Mono"/>
+              </a:rPr>
+              <a:t>the loop closes</a:t>
+            </a:r>
+          </a:p>
+        </p:txBody>
+      </p:sp>
+      <p:sp>
+        <p:nvSpPr>
+          <p:cNvPr id="60" name="Rectangle 59"/>
+          <p:cNvSpPr/>
+          <p:nvPr/>
+        </p:nvSpPr>
+        <p:spPr>
+          <a:xfrm>
+            <a:off x="777240" y="5029200"/>
+            <a:ext cx="41148" cy="1280160"/>
+          </a:xfrm>
+          <a:prstGeom prst="rect">
             <a:avLst/>
           </a:prstGeom>
           <a:solidFill>
@@ -14161,44 +16465,23 @@
           </a:fontRef>
         </p:style>
         <p:txBody>
-          <a:bodyPr rtlCol="0" anchor="ctr" wrap="square"/>
+          <a:bodyPr rtlCol="0" anchor="ctr"/>
           <a:lstStyle/>
           <a:p>
             <a:pPr algn="ctr"/>
-            <a:r>
-              <a:rPr sz="1200" b="1">
-                <a:solidFill>
-                  <a:srgbClr val="FFFFFF"/>
-                </a:solidFill>
-                <a:latin typeface="Red Hat Display"/>
-              </a:rPr>
-              <a:t>Intake &amp;</a:t>
-            </a:r>
-          </a:p>
-          <a:p>
-            <a:pPr algn="ctr"/>
-            <a:r>
-              <a:rPr sz="1200" b="1">
-                <a:solidFill>
-                  <a:srgbClr val="FFFFFF"/>
-                </a:solidFill>
-                <a:latin typeface="Red Hat Display"/>
-              </a:rPr>
-              <a:t>classification</a:t>
-            </a:r>
-          </a:p>
-        </p:txBody>
-      </p:sp>
-      <p:sp>
-        <p:nvSpPr>
-          <p:cNvPr id="15" name="TextBox 14"/>
+          </a:p>
+        </p:txBody>
+      </p:sp>
+      <p:sp>
+        <p:nvSpPr>
+          <p:cNvPr id="61" name="TextBox 60"/>
           <p:cNvSpPr txBox="1"/>
           <p:nvPr/>
         </p:nvSpPr>
         <p:spPr>
           <a:xfrm>
-            <a:off x="886968" y="3063240"/>
-            <a:ext cx="1719072" cy="566928"/>
+            <a:off x="941832" y="5029200"/>
+            <a:ext cx="5007711" cy="1280160"/>
           </a:xfrm>
           <a:prstGeom prst="rect">
             <a:avLst/>
@@ -14211,90 +16494,51 @@
           </a:bodyPr>
           <a:lstStyle/>
           <a:p>
-            <a:pPr algn="ctr">
+            <a:pPr algn="l">
+              <a:spcAft>
+                <a:spcPts val="600"/>
+              </a:spcAft>
+            </a:pPr>
+            <a:r>
+              <a:rPr sz="1500" b="1">
+                <a:solidFill>
+                  <a:srgbClr val="1B1211"/>
+                </a:solidFill>
+                <a:latin typeface="Red Hat Display"/>
+              </a:rPr>
+              <a:t>Start where a human already reviews the output</a:t>
+            </a:r>
+          </a:p>
+          <a:p>
+            <a:pPr algn="l">
               <a:spcAft>
                 <a:spcPts val="0"/>
               </a:spcAft>
             </a:pPr>
             <a:r>
-              <a:rPr sz="1000" b="0">
+              <a:rPr sz="1200" b="0">
                 <a:solidFill>
                   <a:srgbClr val="54423E"/>
                 </a:solidFill>
                 <a:latin typeface="Red Hat Text"/>
               </a:rPr>
-              <a:t>Route by intent, not keyword</a:t>
-            </a:r>
-          </a:p>
-        </p:txBody>
-      </p:sp>
-      <p:sp>
-        <p:nvSpPr>
-          <p:cNvPr id="16" name="Rounded Rectangle 15"/>
+              <a:t>If a person signs the letter today, a model that drafts it changes throughput without changing accountability.</a:t>
+            </a:r>
+          </a:p>
+        </p:txBody>
+      </p:sp>
+      <p:sp>
+        <p:nvSpPr>
+          <p:cNvPr id="62" name="Rectangle 61"/>
           <p:cNvSpPr/>
           <p:nvPr/>
         </p:nvSpPr>
         <p:spPr>
           <a:xfrm>
-            <a:off x="978408" y="3685032"/>
-            <a:ext cx="1389888" cy="274320"/>
-          </a:xfrm>
-          <a:prstGeom prst="roundRect">
-            <a:avLst>
-              <a:gd name="adj" fmla="val 50000"/>
-            </a:avLst>
-          </a:prstGeom>
-          <a:solidFill>
-            <a:srgbClr val="FBEAE8"/>
-          </a:solidFill>
-          <a:ln>
-            <a:noFill/>
-          </a:ln>
-          <a:effectLst/>
-        </p:spPr>
-        <p:style>
-          <a:lnRef idx="1">
-            <a:schemeClr val="accent1"/>
-          </a:lnRef>
-          <a:fillRef idx="3">
-            <a:schemeClr val="accent1"/>
-          </a:fillRef>
-          <a:effectRef idx="2">
-            <a:schemeClr val="accent1"/>
-          </a:effectRef>
-          <a:fontRef idx="minor">
-            <a:schemeClr val="lt1"/>
-          </a:fontRef>
-        </p:style>
-        <p:txBody>
-          <a:bodyPr rtlCol="0" anchor="ctr" wrap="none"/>
-          <a:lstStyle/>
-          <a:p>
-            <a:pPr algn="ctr"/>
-            <a:r>
-              <a:rPr sz="850" b="1">
-                <a:solidFill>
-                  <a:srgbClr val="A30000"/>
-                </a:solidFill>
-                <a:latin typeface="Red Hat Mono"/>
-              </a:rPr>
-              <a:t>human in the loop</a:t>
-            </a:r>
-          </a:p>
-        </p:txBody>
-      </p:sp>
-      <p:sp>
-        <p:nvSpPr>
-          <p:cNvPr id="17" name="Chevron 16"/>
-          <p:cNvSpPr/>
-          <p:nvPr/>
-        </p:nvSpPr>
-        <p:spPr>
-          <a:xfrm>
-            <a:off x="2606040" y="2148840"/>
-            <a:ext cx="1810512" cy="777240"/>
-          </a:xfrm>
-          <a:prstGeom prst="chevron">
+            <a:off x="6242151" y="5029200"/>
+            <a:ext cx="41148" cy="1280160"/>
+          </a:xfrm>
+          <a:prstGeom prst="rect">
             <a:avLst/>
           </a:prstGeom>
           <a:solidFill>
@@ -14320,893 +16564,23 @@
           </a:fontRef>
         </p:style>
         <p:txBody>
-          <a:bodyPr rtlCol="0" anchor="ctr" wrap="square"/>
+          <a:bodyPr rtlCol="0" anchor="ctr"/>
           <a:lstStyle/>
           <a:p>
             <a:pPr algn="ctr"/>
-            <a:r>
-              <a:rPr sz="1200" b="1">
-                <a:solidFill>
-                  <a:srgbClr val="FFFFFF"/>
-                </a:solidFill>
-                <a:latin typeface="Red Hat Display"/>
-              </a:rPr>
-              <a:t>Validation</a:t>
-            </a:r>
-          </a:p>
-        </p:txBody>
-      </p:sp>
-      <p:sp>
-        <p:nvSpPr>
-          <p:cNvPr id="18" name="TextBox 17"/>
+          </a:p>
+        </p:txBody>
+      </p:sp>
+      <p:sp>
+        <p:nvSpPr>
+          <p:cNvPr id="63" name="TextBox 62"/>
           <p:cNvSpPr txBox="1"/>
           <p:nvPr/>
         </p:nvSpPr>
         <p:spPr>
           <a:xfrm>
-            <a:off x="2715768" y="3063240"/>
-            <a:ext cx="1719072" cy="566928"/>
-          </a:xfrm>
-          <a:prstGeom prst="rect">
-            <a:avLst/>
-          </a:prstGeom>
-          <a:noFill/>
-        </p:spPr>
-        <p:txBody>
-          <a:bodyPr wrap="square">
-            <a:spAutoFit/>
-          </a:bodyPr>
-          <a:lstStyle/>
-          <a:p>
-            <a:pPr algn="ctr">
-              <a:spcAft>
-                <a:spcPts val="0"/>
-              </a:spcAft>
-            </a:pPr>
-            <a:r>
-              <a:rPr sz="1000" b="0">
-                <a:solidFill>
-                  <a:srgbClr val="54423E"/>
-                </a:solidFill>
-                <a:latin typeface="Red Hat Text"/>
-              </a:rPr>
-              <a:t>Catch gaps before a case is opened</a:t>
-            </a:r>
-          </a:p>
-        </p:txBody>
-      </p:sp>
-      <p:sp>
-        <p:nvSpPr>
-          <p:cNvPr id="19" name="Rounded Rectangle 18"/>
-          <p:cNvSpPr/>
-          <p:nvPr/>
-        </p:nvSpPr>
-        <p:spPr>
-          <a:xfrm>
-            <a:off x="2807208" y="3685032"/>
-            <a:ext cx="1389888" cy="274320"/>
-          </a:xfrm>
-          <a:prstGeom prst="roundRect">
-            <a:avLst>
-              <a:gd name="adj" fmla="val 50000"/>
-            </a:avLst>
-          </a:prstGeom>
-          <a:solidFill>
-            <a:srgbClr val="FBEAE8"/>
-          </a:solidFill>
-          <a:ln>
-            <a:noFill/>
-          </a:ln>
-          <a:effectLst/>
-        </p:spPr>
-        <p:style>
-          <a:lnRef idx="1">
-            <a:schemeClr val="accent1"/>
-          </a:lnRef>
-          <a:fillRef idx="3">
-            <a:schemeClr val="accent1"/>
-          </a:fillRef>
-          <a:effectRef idx="2">
-            <a:schemeClr val="accent1"/>
-          </a:effectRef>
-          <a:fontRef idx="minor">
-            <a:schemeClr val="lt1"/>
-          </a:fontRef>
-        </p:style>
-        <p:txBody>
-          <a:bodyPr rtlCol="0" anchor="ctr" wrap="none"/>
-          <a:lstStyle/>
-          <a:p>
-            <a:pPr algn="ctr"/>
-            <a:r>
-              <a:rPr sz="850" b="1">
-                <a:solidFill>
-                  <a:srgbClr val="A30000"/>
-                </a:solidFill>
-                <a:latin typeface="Red Hat Mono"/>
-              </a:rPr>
-              <a:t>human in the loop</a:t>
-            </a:r>
-          </a:p>
-        </p:txBody>
-      </p:sp>
-      <p:sp>
-        <p:nvSpPr>
-          <p:cNvPr id="20" name="Chevron 19"/>
-          <p:cNvSpPr/>
-          <p:nvPr/>
-        </p:nvSpPr>
-        <p:spPr>
-          <a:xfrm>
-            <a:off x="4434840" y="2148840"/>
-            <a:ext cx="1810512" cy="777240"/>
-          </a:xfrm>
-          <a:prstGeom prst="chevron">
-            <a:avLst/>
-          </a:prstGeom>
-          <a:solidFill>
-            <a:srgbClr val="CC0000"/>
-          </a:solidFill>
-          <a:ln>
-            <a:noFill/>
-          </a:ln>
-          <a:effectLst/>
-        </p:spPr>
-        <p:style>
-          <a:lnRef idx="1">
-            <a:schemeClr val="accent1"/>
-          </a:lnRef>
-          <a:fillRef idx="3">
-            <a:schemeClr val="accent1"/>
-          </a:fillRef>
-          <a:effectRef idx="2">
-            <a:schemeClr val="accent1"/>
-          </a:effectRef>
-          <a:fontRef idx="minor">
-            <a:schemeClr val="lt1"/>
-          </a:fontRef>
-        </p:style>
-        <p:txBody>
-          <a:bodyPr rtlCol="0" anchor="ctr" wrap="square"/>
-          <a:lstStyle/>
-          <a:p>
-            <a:pPr algn="ctr"/>
-            <a:r>
-              <a:rPr sz="1200" b="1">
-                <a:solidFill>
-                  <a:srgbClr val="FFFFFF"/>
-                </a:solidFill>
-                <a:latin typeface="Red Hat Display"/>
-              </a:rPr>
-              <a:t>Correspondence</a:t>
-            </a:r>
-          </a:p>
-        </p:txBody>
-      </p:sp>
-      <p:sp>
-        <p:nvSpPr>
-          <p:cNvPr id="21" name="TextBox 20"/>
-          <p:cNvSpPr txBox="1"/>
-          <p:nvPr/>
-        </p:nvSpPr>
-        <p:spPr>
-          <a:xfrm>
-            <a:off x="4544568" y="3063240"/>
-            <a:ext cx="1719072" cy="566928"/>
-          </a:xfrm>
-          <a:prstGeom prst="rect">
-            <a:avLst/>
-          </a:prstGeom>
-          <a:noFill/>
-        </p:spPr>
-        <p:txBody>
-          <a:bodyPr wrap="square">
-            <a:spAutoFit/>
-          </a:bodyPr>
-          <a:lstStyle/>
-          <a:p>
-            <a:pPr algn="ctr">
-              <a:spcAft>
-                <a:spcPts val="0"/>
-              </a:spcAft>
-            </a:pPr>
-            <a:r>
-              <a:rPr sz="1000" b="0">
-                <a:solidFill>
-                  <a:srgbClr val="54423E"/>
-                </a:solidFill>
-                <a:latin typeface="Red Hat Text"/>
-              </a:rPr>
-              <a:t>Draft; a reviewer edits and signs</a:t>
-            </a:r>
-          </a:p>
-        </p:txBody>
-      </p:sp>
-      <p:sp>
-        <p:nvSpPr>
-          <p:cNvPr id="22" name="Rounded Rectangle 21"/>
-          <p:cNvSpPr/>
-          <p:nvPr/>
-        </p:nvSpPr>
-        <p:spPr>
-          <a:xfrm>
-            <a:off x="4636008" y="3685032"/>
-            <a:ext cx="1389888" cy="274320"/>
-          </a:xfrm>
-          <a:prstGeom prst="roundRect">
-            <a:avLst>
-              <a:gd name="adj" fmla="val 50000"/>
-            </a:avLst>
-          </a:prstGeom>
-          <a:solidFill>
-            <a:srgbClr val="FBEAE8"/>
-          </a:solidFill>
-          <a:ln>
-            <a:noFill/>
-          </a:ln>
-          <a:effectLst/>
-        </p:spPr>
-        <p:style>
-          <a:lnRef idx="1">
-            <a:schemeClr val="accent1"/>
-          </a:lnRef>
-          <a:fillRef idx="3">
-            <a:schemeClr val="accent1"/>
-          </a:fillRef>
-          <a:effectRef idx="2">
-            <a:schemeClr val="accent1"/>
-          </a:effectRef>
-          <a:fontRef idx="minor">
-            <a:schemeClr val="lt1"/>
-          </a:fontRef>
-        </p:style>
-        <p:txBody>
-          <a:bodyPr rtlCol="0" anchor="ctr" wrap="none"/>
-          <a:lstStyle/>
-          <a:p>
-            <a:pPr algn="ctr"/>
-            <a:r>
-              <a:rPr sz="850" b="1">
-                <a:solidFill>
-                  <a:srgbClr val="A30000"/>
-                </a:solidFill>
-                <a:latin typeface="Red Hat Mono"/>
-              </a:rPr>
-              <a:t>human in the loop</a:t>
-            </a:r>
-          </a:p>
-        </p:txBody>
-      </p:sp>
-      <p:sp>
-        <p:nvSpPr>
-          <p:cNvPr id="23" name="Chevron 22"/>
-          <p:cNvSpPr/>
-          <p:nvPr/>
-        </p:nvSpPr>
-        <p:spPr>
-          <a:xfrm>
-            <a:off x="6263640" y="2148840"/>
-            <a:ext cx="1810512" cy="777240"/>
-          </a:xfrm>
-          <a:prstGeom prst="chevron">
-            <a:avLst/>
-          </a:prstGeom>
-          <a:solidFill>
-            <a:srgbClr val="CFC2BE"/>
-          </a:solidFill>
-          <a:ln>
-            <a:noFill/>
-          </a:ln>
-          <a:effectLst/>
-        </p:spPr>
-        <p:style>
-          <a:lnRef idx="1">
-            <a:schemeClr val="accent1"/>
-          </a:lnRef>
-          <a:fillRef idx="3">
-            <a:schemeClr val="accent1"/>
-          </a:fillRef>
-          <a:effectRef idx="2">
-            <a:schemeClr val="accent1"/>
-          </a:effectRef>
-          <a:fontRef idx="minor">
-            <a:schemeClr val="lt1"/>
-          </a:fontRef>
-        </p:style>
-        <p:txBody>
-          <a:bodyPr rtlCol="0" anchor="ctr" wrap="square"/>
-          <a:lstStyle/>
-          <a:p>
-            <a:pPr algn="ctr"/>
-            <a:r>
-              <a:rPr sz="1200" b="1">
-                <a:solidFill>
-                  <a:srgbClr val="1B1211"/>
-                </a:solidFill>
-                <a:latin typeface="Red Hat Display"/>
-              </a:rPr>
-              <a:t>Exam</a:t>
-            </a:r>
-          </a:p>
-          <a:p>
-            <a:pPr algn="ctr"/>
-            <a:r>
-              <a:rPr sz="1200" b="1">
-                <a:solidFill>
-                  <a:srgbClr val="1B1211"/>
-                </a:solidFill>
-                <a:latin typeface="Red Hat Display"/>
-              </a:rPr>
-              <a:t>selection</a:t>
-            </a:r>
-          </a:p>
-        </p:txBody>
-      </p:sp>
-      <p:sp>
-        <p:nvSpPr>
-          <p:cNvPr id="24" name="TextBox 23"/>
-          <p:cNvSpPr txBox="1"/>
-          <p:nvPr/>
-        </p:nvSpPr>
-        <p:spPr>
-          <a:xfrm>
-            <a:off x="6373368" y="3063240"/>
-            <a:ext cx="1719072" cy="566928"/>
-          </a:xfrm>
-          <a:prstGeom prst="rect">
-            <a:avLst/>
-          </a:prstGeom>
-          <a:noFill/>
-        </p:spPr>
-        <p:txBody>
-          <a:bodyPr wrap="square">
-            <a:spAutoFit/>
-          </a:bodyPr>
-          <a:lstStyle/>
-          <a:p>
-            <a:pPr algn="ctr">
-              <a:spcAft>
-                <a:spcPts val="0"/>
-              </a:spcAft>
-            </a:pPr>
-            <a:r>
-              <a:rPr sz="1000" b="0">
-                <a:solidFill>
-                  <a:srgbClr val="54423E"/>
-                </a:solidFill>
-                <a:latin typeface="Red Hat Text"/>
-              </a:rPr>
-              <a:t>Taxpayer determinations</a:t>
-            </a:r>
-          </a:p>
-        </p:txBody>
-      </p:sp>
-      <p:sp>
-        <p:nvSpPr>
-          <p:cNvPr id="25" name="Rounded Rectangle 24"/>
-          <p:cNvSpPr/>
-          <p:nvPr/>
-        </p:nvSpPr>
-        <p:spPr>
-          <a:xfrm>
-            <a:off x="6464808" y="3685032"/>
-            <a:ext cx="1389888" cy="274320"/>
-          </a:xfrm>
-          <a:prstGeom prst="roundRect">
-            <a:avLst>
-              <a:gd name="adj" fmla="val 50000"/>
-            </a:avLst>
-          </a:prstGeom>
-          <a:solidFill>
-            <a:srgbClr val="F4EFED"/>
-          </a:solidFill>
-          <a:ln>
-            <a:noFill/>
-          </a:ln>
-          <a:effectLst/>
-        </p:spPr>
-        <p:style>
-          <a:lnRef idx="1">
-            <a:schemeClr val="accent1"/>
-          </a:lnRef>
-          <a:fillRef idx="3">
-            <a:schemeClr val="accent1"/>
-          </a:fillRef>
-          <a:effectRef idx="2">
-            <a:schemeClr val="accent1"/>
-          </a:effectRef>
-          <a:fontRef idx="minor">
-            <a:schemeClr val="lt1"/>
-          </a:fontRef>
-        </p:style>
-        <p:txBody>
-          <a:bodyPr rtlCol="0" anchor="ctr" wrap="none"/>
-          <a:lstStyle/>
-          <a:p>
-            <a:pPr algn="ctr"/>
-            <a:r>
-              <a:rPr sz="850" b="1">
-                <a:solidFill>
-                  <a:srgbClr val="7E6A64"/>
-                </a:solidFill>
-                <a:latin typeface="Red Hat Mono"/>
-              </a:rPr>
-              <a:t>governance first</a:t>
-            </a:r>
-          </a:p>
-        </p:txBody>
-      </p:sp>
-      <p:sp>
-        <p:nvSpPr>
-          <p:cNvPr id="26" name="Chevron 25"/>
-          <p:cNvSpPr/>
-          <p:nvPr/>
-        </p:nvSpPr>
-        <p:spPr>
-          <a:xfrm>
-            <a:off x="8092440" y="2148840"/>
-            <a:ext cx="1810512" cy="777240"/>
-          </a:xfrm>
-          <a:prstGeom prst="chevron">
-            <a:avLst/>
-          </a:prstGeom>
-          <a:solidFill>
-            <a:srgbClr val="CC0000"/>
-          </a:solidFill>
-          <a:ln>
-            <a:noFill/>
-          </a:ln>
-          <a:effectLst/>
-        </p:spPr>
-        <p:style>
-          <a:lnRef idx="1">
-            <a:schemeClr val="accent1"/>
-          </a:lnRef>
-          <a:fillRef idx="3">
-            <a:schemeClr val="accent1"/>
-          </a:fillRef>
-          <a:effectRef idx="2">
-            <a:schemeClr val="accent1"/>
-          </a:effectRef>
-          <a:fontRef idx="minor">
-            <a:schemeClr val="lt1"/>
-          </a:fontRef>
-        </p:style>
-        <p:txBody>
-          <a:bodyPr rtlCol="0" anchor="ctr" wrap="square"/>
-          <a:lstStyle/>
-          <a:p>
-            <a:pPr algn="ctr"/>
-            <a:r>
-              <a:rPr sz="1200" b="1">
-                <a:solidFill>
-                  <a:srgbClr val="FFFFFF"/>
-                </a:solidFill>
-                <a:latin typeface="Red Hat Display"/>
-              </a:rPr>
-              <a:t>Collections</a:t>
-            </a:r>
-          </a:p>
-          <a:p>
-            <a:pPr algn="ctr"/>
-            <a:r>
-              <a:rPr sz="1200" b="1">
-                <a:solidFill>
-                  <a:srgbClr val="FFFFFF"/>
-                </a:solidFill>
-                <a:latin typeface="Red Hat Display"/>
-              </a:rPr>
-              <a:t>support</a:t>
-            </a:r>
-          </a:p>
-        </p:txBody>
-      </p:sp>
-      <p:sp>
-        <p:nvSpPr>
-          <p:cNvPr id="27" name="TextBox 26"/>
-          <p:cNvSpPr txBox="1"/>
-          <p:nvPr/>
-        </p:nvSpPr>
-        <p:spPr>
-          <a:xfrm>
-            <a:off x="8202168" y="3063240"/>
-            <a:ext cx="1719072" cy="566928"/>
-          </a:xfrm>
-          <a:prstGeom prst="rect">
-            <a:avLst/>
-          </a:prstGeom>
-          <a:noFill/>
-        </p:spPr>
-        <p:txBody>
-          <a:bodyPr wrap="square">
-            <a:spAutoFit/>
-          </a:bodyPr>
-          <a:lstStyle/>
-          <a:p>
-            <a:pPr algn="ctr">
-              <a:spcAft>
-                <a:spcPts val="0"/>
-              </a:spcAft>
-            </a:pPr>
-            <a:r>
-              <a:rPr sz="1000" b="0">
-                <a:solidFill>
-                  <a:srgbClr val="54423E"/>
-                </a:solidFill>
-                <a:latin typeface="Red Hat Text"/>
-              </a:rPr>
-              <a:t>Brief the officer before the case</a:t>
-            </a:r>
-          </a:p>
-        </p:txBody>
-      </p:sp>
-      <p:sp>
-        <p:nvSpPr>
-          <p:cNvPr id="28" name="Rounded Rectangle 27"/>
-          <p:cNvSpPr/>
-          <p:nvPr/>
-        </p:nvSpPr>
-        <p:spPr>
-          <a:xfrm>
-            <a:off x="8293608" y="3685032"/>
-            <a:ext cx="1389888" cy="274320"/>
-          </a:xfrm>
-          <a:prstGeom prst="roundRect">
-            <a:avLst>
-              <a:gd name="adj" fmla="val 50000"/>
-            </a:avLst>
-          </a:prstGeom>
-          <a:solidFill>
-            <a:srgbClr val="FBEAE8"/>
-          </a:solidFill>
-          <a:ln>
-            <a:noFill/>
-          </a:ln>
-          <a:effectLst/>
-        </p:spPr>
-        <p:style>
-          <a:lnRef idx="1">
-            <a:schemeClr val="accent1"/>
-          </a:lnRef>
-          <a:fillRef idx="3">
-            <a:schemeClr val="accent1"/>
-          </a:fillRef>
-          <a:effectRef idx="2">
-            <a:schemeClr val="accent1"/>
-          </a:effectRef>
-          <a:fontRef idx="minor">
-            <a:schemeClr val="lt1"/>
-          </a:fontRef>
-        </p:style>
-        <p:txBody>
-          <a:bodyPr rtlCol="0" anchor="ctr" wrap="none"/>
-          <a:lstStyle/>
-          <a:p>
-            <a:pPr algn="ctr"/>
-            <a:r>
-              <a:rPr sz="850" b="1">
-                <a:solidFill>
-                  <a:srgbClr val="A30000"/>
-                </a:solidFill>
-                <a:latin typeface="Red Hat Mono"/>
-              </a:rPr>
-              <a:t>human in the loop</a:t>
-            </a:r>
-          </a:p>
-        </p:txBody>
-      </p:sp>
-      <p:sp>
-        <p:nvSpPr>
-          <p:cNvPr id="29" name="Chevron 28"/>
-          <p:cNvSpPr/>
-          <p:nvPr/>
-        </p:nvSpPr>
-        <p:spPr>
-          <a:xfrm>
-            <a:off x="9921240" y="2148840"/>
-            <a:ext cx="1810512" cy="777240"/>
-          </a:xfrm>
-          <a:prstGeom prst="chevron">
-            <a:avLst/>
-          </a:prstGeom>
-          <a:solidFill>
-            <a:srgbClr val="CC0000"/>
-          </a:solidFill>
-          <a:ln>
-            <a:noFill/>
-          </a:ln>
-          <a:effectLst/>
-        </p:spPr>
-        <p:style>
-          <a:lnRef idx="1">
-            <a:schemeClr val="accent1"/>
-          </a:lnRef>
-          <a:fillRef idx="3">
-            <a:schemeClr val="accent1"/>
-          </a:fillRef>
-          <a:effectRef idx="2">
-            <a:schemeClr val="accent1"/>
-          </a:effectRef>
-          <a:fontRef idx="minor">
-            <a:schemeClr val="lt1"/>
-          </a:fontRef>
-        </p:style>
-        <p:txBody>
-          <a:bodyPr rtlCol="0" anchor="ctr" wrap="square"/>
-          <a:lstStyle/>
-          <a:p>
-            <a:pPr algn="ctr"/>
-            <a:r>
-              <a:rPr sz="1200" b="1">
-                <a:solidFill>
-                  <a:srgbClr val="FFFFFF"/>
-                </a:solidFill>
-                <a:latin typeface="Red Hat Display"/>
-              </a:rPr>
-              <a:t>Taxpayer</a:t>
-            </a:r>
-          </a:p>
-          <a:p>
-            <a:pPr algn="ctr"/>
-            <a:r>
-              <a:rPr sz="1200" b="1">
-                <a:solidFill>
-                  <a:srgbClr val="FFFFFF"/>
-                </a:solidFill>
-                <a:latin typeface="Red Hat Display"/>
-              </a:rPr>
-              <a:t>service</a:t>
-            </a:r>
-          </a:p>
-        </p:txBody>
-      </p:sp>
-      <p:sp>
-        <p:nvSpPr>
-          <p:cNvPr id="30" name="TextBox 29"/>
-          <p:cNvSpPr txBox="1"/>
-          <p:nvPr/>
-        </p:nvSpPr>
-        <p:spPr>
-          <a:xfrm>
-            <a:off x="10030968" y="3063240"/>
-            <a:ext cx="1719072" cy="566928"/>
-          </a:xfrm>
-          <a:prstGeom prst="rect">
-            <a:avLst/>
-          </a:prstGeom>
-          <a:noFill/>
-        </p:spPr>
-        <p:txBody>
-          <a:bodyPr wrap="square">
-            <a:spAutoFit/>
-          </a:bodyPr>
-          <a:lstStyle/>
-          <a:p>
-            <a:pPr algn="ctr">
-              <a:spcAft>
-                <a:spcPts val="0"/>
-              </a:spcAft>
-            </a:pPr>
-            <a:r>
-              <a:rPr sz="1000" b="0">
-                <a:solidFill>
-                  <a:srgbClr val="54423E"/>
-                </a:solidFill>
-                <a:latin typeface="Red Hat Text"/>
-              </a:rPr>
-              <a:t>Answers carry their citation</a:t>
-            </a:r>
-          </a:p>
-        </p:txBody>
-      </p:sp>
-      <p:sp>
-        <p:nvSpPr>
-          <p:cNvPr id="31" name="Rounded Rectangle 30"/>
-          <p:cNvSpPr/>
-          <p:nvPr/>
-        </p:nvSpPr>
-        <p:spPr>
-          <a:xfrm>
-            <a:off x="10122408" y="3685032"/>
-            <a:ext cx="1389888" cy="274320"/>
-          </a:xfrm>
-          <a:prstGeom prst="roundRect">
-            <a:avLst>
-              <a:gd name="adj" fmla="val 50000"/>
-            </a:avLst>
-          </a:prstGeom>
-          <a:solidFill>
-            <a:srgbClr val="FBEAE8"/>
-          </a:solidFill>
-          <a:ln>
-            <a:noFill/>
-          </a:ln>
-          <a:effectLst/>
-        </p:spPr>
-        <p:style>
-          <a:lnRef idx="1">
-            <a:schemeClr val="accent1"/>
-          </a:lnRef>
-          <a:fillRef idx="3">
-            <a:schemeClr val="accent1"/>
-          </a:fillRef>
-          <a:effectRef idx="2">
-            <a:schemeClr val="accent1"/>
-          </a:effectRef>
-          <a:fontRef idx="minor">
-            <a:schemeClr val="lt1"/>
-          </a:fontRef>
-        </p:style>
-        <p:txBody>
-          <a:bodyPr rtlCol="0" anchor="ctr" wrap="none"/>
-          <a:lstStyle/>
-          <a:p>
-            <a:pPr algn="ctr"/>
-            <a:r>
-              <a:rPr sz="850" b="1">
-                <a:solidFill>
-                  <a:srgbClr val="A30000"/>
-                </a:solidFill>
-                <a:latin typeface="Red Hat Mono"/>
-              </a:rPr>
-              <a:t>human in the loop</a:t>
-            </a:r>
-          </a:p>
-        </p:txBody>
-      </p:sp>
-      <p:sp>
-        <p:nvSpPr>
-          <p:cNvPr id="32" name="Rectangle 31"/>
-          <p:cNvSpPr/>
-          <p:nvPr/>
-        </p:nvSpPr>
-        <p:spPr>
-          <a:xfrm>
-            <a:off x="777240" y="4617720"/>
-            <a:ext cx="41148" cy="1371600"/>
-          </a:xfrm>
-          <a:prstGeom prst="rect">
-            <a:avLst/>
-          </a:prstGeom>
-          <a:solidFill>
-            <a:srgbClr val="CC0000"/>
-          </a:solidFill>
-          <a:ln>
-            <a:noFill/>
-          </a:ln>
-          <a:effectLst/>
-        </p:spPr>
-        <p:style>
-          <a:lnRef idx="1">
-            <a:schemeClr val="accent1"/>
-          </a:lnRef>
-          <a:fillRef idx="3">
-            <a:schemeClr val="accent1"/>
-          </a:fillRef>
-          <a:effectRef idx="2">
-            <a:schemeClr val="accent1"/>
-          </a:effectRef>
-          <a:fontRef idx="minor">
-            <a:schemeClr val="lt1"/>
-          </a:fontRef>
-        </p:style>
-        <p:txBody>
-          <a:bodyPr rtlCol="0" anchor="ctr"/>
-          <a:lstStyle/>
-          <a:p>
-            <a:pPr algn="ctr"/>
-          </a:p>
-        </p:txBody>
-      </p:sp>
-      <p:sp>
-        <p:nvSpPr>
-          <p:cNvPr id="33" name="TextBox 32"/>
-          <p:cNvSpPr txBox="1"/>
-          <p:nvPr/>
-        </p:nvSpPr>
-        <p:spPr>
-          <a:xfrm>
-            <a:off x="941832" y="4617720"/>
-            <a:ext cx="5007711" cy="1371600"/>
-          </a:xfrm>
-          <a:prstGeom prst="rect">
-            <a:avLst/>
-          </a:prstGeom>
-          <a:noFill/>
-        </p:spPr>
-        <p:txBody>
-          <a:bodyPr wrap="square">
-            <a:spAutoFit/>
-          </a:bodyPr>
-          <a:lstStyle/>
-          <a:p>
-            <a:pPr algn="l">
-              <a:spcAft>
-                <a:spcPts val="600"/>
-              </a:spcAft>
-            </a:pPr>
-            <a:r>
-              <a:rPr sz="1500" b="1">
-                <a:solidFill>
-                  <a:srgbClr val="1B1211"/>
-                </a:solidFill>
-                <a:latin typeface="Red Hat Display"/>
-              </a:rPr>
-              <a:t>Start where a human already reviews the output</a:t>
-            </a:r>
-          </a:p>
-          <a:p>
-            <a:pPr algn="l">
-              <a:spcAft>
-                <a:spcPts val="0"/>
-              </a:spcAft>
-            </a:pPr>
-            <a:r>
-              <a:rPr sz="1200" b="0">
-                <a:solidFill>
-                  <a:srgbClr val="54423E"/>
-                </a:solidFill>
-                <a:latin typeface="Red Hat Text"/>
-              </a:rPr>
-              <a:t>If a person signs the letter today, a model that drafts it changes throughput without changing accountability.</a:t>
-            </a:r>
-          </a:p>
-        </p:txBody>
-      </p:sp>
-      <p:sp>
-        <p:nvSpPr>
-          <p:cNvPr id="34" name="Rectangle 33"/>
-          <p:cNvSpPr/>
-          <p:nvPr/>
-        </p:nvSpPr>
-        <p:spPr>
-          <a:xfrm>
-            <a:off x="6242151" y="4617720"/>
-            <a:ext cx="41148" cy="1371600"/>
-          </a:xfrm>
-          <a:prstGeom prst="rect">
-            <a:avLst/>
-          </a:prstGeom>
-          <a:solidFill>
-            <a:srgbClr val="CC0000"/>
-          </a:solidFill>
-          <a:ln>
-            <a:noFill/>
-          </a:ln>
-          <a:effectLst/>
-        </p:spPr>
-        <p:style>
-          <a:lnRef idx="1">
-            <a:schemeClr val="accent1"/>
-          </a:lnRef>
-          <a:fillRef idx="3">
-            <a:schemeClr val="accent1"/>
-          </a:fillRef>
-          <a:effectRef idx="2">
-            <a:schemeClr val="accent1"/>
-          </a:effectRef>
-          <a:fontRef idx="minor">
-            <a:schemeClr val="lt1"/>
-          </a:fontRef>
-        </p:style>
-        <p:txBody>
-          <a:bodyPr rtlCol="0" anchor="ctr"/>
-          <a:lstStyle/>
-          <a:p>
-            <a:pPr algn="ctr"/>
-          </a:p>
-        </p:txBody>
-      </p:sp>
-      <p:sp>
-        <p:nvSpPr>
-          <p:cNvPr id="35" name="TextBox 34"/>
-          <p:cNvSpPr txBox="1"/>
-          <p:nvPr/>
-        </p:nvSpPr>
-        <p:spPr>
-          <a:xfrm>
-            <a:off x="6406743" y="4617720"/>
-            <a:ext cx="5007711" cy="1371600"/>
+            <a:off x="6406743" y="5029200"/>
+            <a:ext cx="5007711" cy="1280160"/>
           </a:xfrm>
           <a:prstGeom prst="rect">
             <a:avLst/>

--- a/slides/exports/redhat-ai-tax-administration.pptx
+++ b/slides/exports/redhat-ai-tax-administration.pptx
@@ -512,7 +512,7 @@
           <a:lstStyle/>
           <a:p>
             <a:r>
-              <a:t>Jon Keam and Brad Scalio present. Open by naming the room: Red Hat, Four Inc. and Carahsoft. Frame the hour — foundations, then the platform story, then live terminal, 5 for questions. The promise: every claim we make today, we run in a shell before you leave.</a:t>
+              <a:t>Brad drives, Jon adds color commentary. Open by naming the room: Red Hat, Four Inc. and Carahsoft. THE PYRAMID, the only graphic on this slide and the spine of the hour; read it bottom to top. 01 Data, the base and the widest layer: what happened, uninterpreted (returns, transcripts, calls, logs, telemetry); nothing above it exists without it, and where it lives decides the architecture. 02 Information: data put in context for one case (a score, a classification, a diagnosis); what predictive AI and inference produce; a model makes the estimate, a person checks it. 03 Knowledge: information that informs an outcome (guidance, precedent, runbooks), the institution's memory, retrievable and cited; generative AI grounded in approved sources works here; if it cannot cite, it is not knowledge. 04 Judgement, the apex: a determination a named person signs; deliberately human, automation executes what was decided and never decides. The arrow up the side: data informs every layer, so anything higher up the stack has to trace back down to data or it is decoration. The label at the apex: the end state is knowing, knowing enough to decide, with the evidence in hand. WHY WE ARE HERE: not to sell a model. Every technology in the hour is tagged with the layer it serves, and every claim gets run in a shell before you leave. The test for anything we show, and for anything a vendor shows you: which layer does it move work up, and which problem in your queue does that solve? Solve a problem someone has; do not invent a solution to one no one has. If a proposal cannot name the layer and the problem, it is technology looking for a mission. Frame the hour: foundations, then the platform story, then live terminal, 5 for questions.</a:t>
             </a:r>
           </a:p>
         </p:txBody>
@@ -4740,8 +4740,8 @@
         </p:nvSpPr>
         <p:spPr>
           <a:xfrm>
-            <a:off x="777240" y="1874519"/>
-            <a:ext cx="10241280" cy="310896"/>
+            <a:off x="777240" y="1600200"/>
+            <a:ext cx="4389120" cy="457200"/>
           </a:xfrm>
           <a:prstGeom prst="rect">
             <a:avLst/>
@@ -4760,7 +4760,7 @@
               </a:spcAft>
             </a:pPr>
             <a:r>
-              <a:rPr sz="1200" b="1">
+              <a:rPr sz="1100" b="1">
                 <a:solidFill>
                   <a:srgbClr val="CC0000"/>
                 </a:solidFill>
@@ -4779,8 +4779,8 @@
         </p:nvSpPr>
         <p:spPr>
           <a:xfrm>
-            <a:off x="777240" y="2331720"/>
-            <a:ext cx="9692640" cy="1828800"/>
+            <a:off x="777240" y="2057400"/>
+            <a:ext cx="4389120" cy="1828800"/>
           </a:xfrm>
           <a:prstGeom prst="rect">
             <a:avLst/>
@@ -4799,7 +4799,7 @@
               </a:spcAft>
             </a:pPr>
             <a:r>
-              <a:rPr sz="4400" b="1">
+              <a:rPr sz="3200" b="1">
                 <a:solidFill>
                   <a:srgbClr val="1B1211"/>
                 </a:solidFill>
@@ -4818,8 +4818,8 @@
         </p:nvSpPr>
         <p:spPr>
           <a:xfrm>
-            <a:off x="777240" y="4343400"/>
-            <a:ext cx="8595360" cy="1005840"/>
+            <a:off x="777240" y="3931920"/>
+            <a:ext cx="4389120" cy="1280160"/>
           </a:xfrm>
           <a:prstGeom prst="rect">
             <a:avLst/>
@@ -4838,7 +4838,7 @@
               </a:spcAft>
             </a:pPr>
             <a:r>
-              <a:rPr sz="1700" b="0">
+              <a:rPr sz="1300" b="0">
                 <a:solidFill>
                   <a:srgbClr val="54423E"/>
                 </a:solidFill>
@@ -4857,8 +4857,8 @@
         </p:nvSpPr>
         <p:spPr>
           <a:xfrm>
-            <a:off x="777240" y="5349240"/>
-            <a:ext cx="8595360" cy="365760"/>
+            <a:off x="777240" y="5257800"/>
+            <a:ext cx="4389120" cy="457200"/>
           </a:xfrm>
           <a:prstGeom prst="rect">
             <a:avLst/>
@@ -4877,13 +4877,1299 @@
               </a:spcAft>
             </a:pPr>
             <a:r>
-              <a:rPr sz="1400" b="1">
+              <a:rPr sz="1100" b="1">
                 <a:solidFill>
                   <a:srgbClr val="54423E"/>
                 </a:solidFill>
                 <a:latin typeface="Red Hat Text"/>
               </a:rPr>
               <a:t>Presented by Jon Keam (jkeam@redhat.com) and Brad Scalio (bscalio@redhat.com)</a:t>
+            </a:r>
+          </a:p>
+        </p:txBody>
+      </p:sp>
+      <p:sp>
+        <p:nvSpPr>
+          <p:cNvPr id="15" name="TextBox 14"/>
+          <p:cNvSpPr txBox="1"/>
+          <p:nvPr/>
+        </p:nvSpPr>
+        <p:spPr>
+          <a:xfrm>
+            <a:off x="5257800" y="1033272"/>
+            <a:ext cx="3062737" cy="228600"/>
+          </a:xfrm>
+          <a:prstGeom prst="rect">
+            <a:avLst/>
+          </a:prstGeom>
+          <a:noFill/>
+        </p:spPr>
+        <p:txBody>
+          <a:bodyPr wrap="square">
+            <a:spAutoFit/>
+          </a:bodyPr>
+          <a:lstStyle/>
+          <a:p>
+            <a:pPr algn="l">
+              <a:spcAft>
+                <a:spcPts val="0"/>
+              </a:spcAft>
+            </a:pPr>
+            <a:r>
+              <a:rPr sz="700" b="1">
+                <a:solidFill>
+                  <a:srgbClr val="5B2E91"/>
+                </a:solidFill>
+                <a:latin typeface="Red Hat Mono"/>
+              </a:rPr>
+              <a:t>THE END STATE: KNOWING ENOUGH TO DECIDE</a:t>
+            </a:r>
+          </a:p>
+        </p:txBody>
+      </p:sp>
+      <p:sp>
+        <p:nvSpPr>
+          <p:cNvPr id="16" name="Freeform 15"/>
+          <p:cNvSpPr/>
+          <p:nvPr/>
+        </p:nvSpPr>
+        <p:spPr>
+          <a:xfrm>
+            <a:off x="6307978" y="1336852"/>
+            <a:ext cx="688061" cy="823876"/>
+          </a:xfrm>
+          <a:custGeom>
+            <a:avLst/>
+            <a:gdLst/>
+            <a:ahLst/>
+            <a:cxnLst/>
+            <a:rect l="l" t="t" r="r" b="b"/>
+            <a:pathLst>
+              <a:path w="688061" h="823876">
+                <a:moveTo>
+                  <a:pt x="339509" y="0"/>
+                </a:moveTo>
+                <a:lnTo>
+                  <a:pt x="348552" y="0"/>
+                </a:lnTo>
+                <a:lnTo>
+                  <a:pt x="688061" y="823876"/>
+                </a:lnTo>
+                <a:lnTo>
+                  <a:pt x="0" y="823876"/>
+                </a:lnTo>
+                <a:close/>
+              </a:path>
+            </a:pathLst>
+          </a:custGeom>
+          <a:solidFill>
+            <a:srgbClr val="5B2E91"/>
+          </a:solidFill>
+          <a:ln>
+            <a:noFill/>
+          </a:ln>
+          <a:effectLst/>
+        </p:spPr>
+        <p:txBody>
+          <a:bodyPr rtlCol="0" anchor="ctr"/>
+          <a:lstStyle/>
+          <a:p>
+            <a:pPr algn="ctr"/>
+          </a:p>
+        </p:txBody>
+      </p:sp>
+      <p:sp>
+        <p:nvSpPr>
+          <p:cNvPr id="17" name="TextBox 16"/>
+          <p:cNvSpPr txBox="1"/>
+          <p:nvPr/>
+        </p:nvSpPr>
+        <p:spPr>
+          <a:xfrm>
+            <a:off x="6377688" y="1648206"/>
+            <a:ext cx="548640" cy="201168"/>
+          </a:xfrm>
+          <a:prstGeom prst="rect">
+            <a:avLst/>
+          </a:prstGeom>
+          <a:noFill/>
+        </p:spPr>
+        <p:txBody>
+          <a:bodyPr wrap="square">
+            <a:spAutoFit/>
+          </a:bodyPr>
+          <a:lstStyle/>
+          <a:p>
+            <a:pPr algn="ctr">
+              <a:spcAft>
+                <a:spcPts val="0"/>
+              </a:spcAft>
+            </a:pPr>
+            <a:r>
+              <a:rPr sz="900" b="1">
+                <a:solidFill>
+                  <a:srgbClr val="FFFFFF"/>
+                </a:solidFill>
+                <a:latin typeface="Red Hat Mono"/>
+              </a:rPr>
+              <a:t>04</a:t>
+            </a:r>
+          </a:p>
+        </p:txBody>
+      </p:sp>
+      <p:cxnSp>
+        <p:nvCxnSpPr>
+          <p:cNvPr id="18" name="Connector 17"/>
+          <p:cNvCxnSpPr/>
+          <p:nvPr/>
+        </p:nvCxnSpPr>
+        <p:spPr>
+          <a:xfrm>
+            <a:off x="6872004" y="1748790"/>
+            <a:ext cx="1247365" cy="0"/>
+          </a:xfrm>
+          <a:prstGeom prst="line">
+            <a:avLst/>
+          </a:prstGeom>
+          <a:ln w="9525">
+            <a:solidFill>
+              <a:srgbClr val="CFC2BE"/>
+            </a:solidFill>
+          </a:ln>
+        </p:spPr>
+        <p:style>
+          <a:lnRef idx="2">
+            <a:schemeClr val="accent1"/>
+          </a:lnRef>
+          <a:fillRef idx="0">
+            <a:schemeClr val="accent1"/>
+          </a:fillRef>
+          <a:effectRef idx="1">
+            <a:schemeClr val="accent1"/>
+          </a:effectRef>
+          <a:fontRef idx="minor">
+            <a:schemeClr val="tx1"/>
+          </a:fontRef>
+        </p:style>
+      </p:cxnSp>
+      <p:sp>
+        <p:nvSpPr>
+          <p:cNvPr id="19" name="TextBox 18"/>
+          <p:cNvSpPr txBox="1"/>
+          <p:nvPr/>
+        </p:nvSpPr>
+        <p:spPr>
+          <a:xfrm>
+            <a:off x="8466841" y="1392174"/>
+            <a:ext cx="2947614" cy="713232"/>
+          </a:xfrm>
+          <a:prstGeom prst="rect">
+            <a:avLst/>
+          </a:prstGeom>
+          <a:noFill/>
+        </p:spPr>
+        <p:txBody>
+          <a:bodyPr wrap="square">
+            <a:spAutoFit/>
+          </a:bodyPr>
+          <a:lstStyle/>
+          <a:p>
+            <a:pPr algn="l">
+              <a:spcAft>
+                <a:spcPts val="100"/>
+              </a:spcAft>
+            </a:pPr>
+            <a:r>
+              <a:rPr sz="700" b="1">
+                <a:solidFill>
+                  <a:srgbClr val="5B2E91"/>
+                </a:solidFill>
+                <a:latin typeface="Red Hat Mono"/>
+              </a:rPr>
+              <a:t>JUDGEMENT</a:t>
+            </a:r>
+          </a:p>
+          <a:p>
+            <a:pPr algn="l">
+              <a:spcAft>
+                <a:spcPts val="200"/>
+              </a:spcAft>
+            </a:pPr>
+            <a:r>
+              <a:rPr sz="1000" b="1">
+                <a:solidFill>
+                  <a:srgbClr val="1B1211"/>
+                </a:solidFill>
+                <a:latin typeface="Red Hat Display"/>
+              </a:rPr>
+              <a:t>What will we do, and who signs?</a:t>
+            </a:r>
+          </a:p>
+          <a:p>
+            <a:pPr algn="l">
+              <a:spcAft>
+                <a:spcPts val="200"/>
+              </a:spcAft>
+            </a:pPr>
+            <a:r>
+              <a:rPr sz="750" b="0">
+                <a:solidFill>
+                  <a:srgbClr val="54423E"/>
+                </a:solidFill>
+                <a:latin typeface="Red Hat Text"/>
+              </a:rPr>
+              <a:t>A determination a named person signs. Deliberately human: automation executes it and never decides.</a:t>
+            </a:r>
+          </a:p>
+          <a:p>
+            <a:pPr algn="l">
+              <a:spcAft>
+                <a:spcPts val="0"/>
+              </a:spcAft>
+            </a:pPr>
+            <a:r>
+              <a:rPr sz="600" b="1">
+                <a:solidFill>
+                  <a:srgbClr val="7E6A64"/>
+                </a:solidFill>
+                <a:latin typeface="Red Hat Mono"/>
+              </a:rPr>
+              <a:t>PEOPLE DECIDE · ANSIBLE EXECUTES · SIGSTORE RECORDS</a:t>
+            </a:r>
+          </a:p>
+        </p:txBody>
+      </p:sp>
+      <p:sp>
+        <p:nvSpPr>
+          <p:cNvPr id="20" name="Freeform 19"/>
+          <p:cNvSpPr/>
+          <p:nvPr/>
+        </p:nvSpPr>
+        <p:spPr>
+          <a:xfrm>
+            <a:off x="6246013" y="2182672"/>
+            <a:ext cx="811991" cy="128424"/>
+          </a:xfrm>
+          <a:custGeom>
+            <a:avLst/>
+            <a:gdLst/>
+            <a:ahLst/>
+            <a:cxnLst/>
+            <a:rect l="l" t="t" r="r" b="b"/>
+            <a:pathLst>
+              <a:path w="811991" h="128424">
+                <a:moveTo>
+                  <a:pt x="52922" y="0"/>
+                </a:moveTo>
+                <a:lnTo>
+                  <a:pt x="759069" y="0"/>
+                </a:lnTo>
+                <a:lnTo>
+                  <a:pt x="811991" y="128424"/>
+                </a:lnTo>
+                <a:lnTo>
+                  <a:pt x="0" y="128424"/>
+                </a:lnTo>
+                <a:close/>
+              </a:path>
+            </a:pathLst>
+          </a:custGeom>
+          <a:solidFill>
+            <a:srgbClr val="1D4ED8"/>
+          </a:solidFill>
+          <a:ln>
+            <a:noFill/>
+          </a:ln>
+          <a:effectLst/>
+        </p:spPr>
+        <p:txBody>
+          <a:bodyPr rtlCol="0" anchor="ctr"/>
+          <a:lstStyle/>
+          <a:p>
+            <a:pPr algn="ctr"/>
+          </a:p>
+        </p:txBody>
+      </p:sp>
+      <p:sp>
+        <p:nvSpPr>
+          <p:cNvPr id="21" name="Freeform 20"/>
+          <p:cNvSpPr/>
+          <p:nvPr/>
+        </p:nvSpPr>
+        <p:spPr>
+          <a:xfrm>
+            <a:off x="5901333" y="2333040"/>
+            <a:ext cx="1501350" cy="814478"/>
+          </a:xfrm>
+          <a:custGeom>
+            <a:avLst/>
+            <a:gdLst/>
+            <a:ahLst/>
+            <a:cxnLst/>
+            <a:rect l="l" t="t" r="r" b="b"/>
+            <a:pathLst>
+              <a:path w="1501350" h="814478">
+                <a:moveTo>
+                  <a:pt x="335637" y="0"/>
+                </a:moveTo>
+                <a:lnTo>
+                  <a:pt x="1165714" y="0"/>
+                </a:lnTo>
+                <a:lnTo>
+                  <a:pt x="1501350" y="814478"/>
+                </a:lnTo>
+                <a:lnTo>
+                  <a:pt x="0" y="814478"/>
+                </a:lnTo>
+                <a:close/>
+              </a:path>
+            </a:pathLst>
+          </a:custGeom>
+          <a:solidFill>
+            <a:srgbClr val="1E7A55"/>
+          </a:solidFill>
+          <a:ln>
+            <a:noFill/>
+          </a:ln>
+          <a:effectLst/>
+        </p:spPr>
+        <p:txBody>
+          <a:bodyPr rtlCol="0" anchor="ctr"/>
+          <a:lstStyle/>
+          <a:p>
+            <a:pPr algn="ctr"/>
+          </a:p>
+        </p:txBody>
+      </p:sp>
+      <p:sp>
+        <p:nvSpPr>
+          <p:cNvPr id="22" name="TextBox 21"/>
+          <p:cNvSpPr txBox="1"/>
+          <p:nvPr/>
+        </p:nvSpPr>
+        <p:spPr>
+          <a:xfrm>
+            <a:off x="6377688" y="2639695"/>
+            <a:ext cx="548640" cy="201168"/>
+          </a:xfrm>
+          <a:prstGeom prst="rect">
+            <a:avLst/>
+          </a:prstGeom>
+          <a:noFill/>
+        </p:spPr>
+        <p:txBody>
+          <a:bodyPr wrap="square">
+            <a:spAutoFit/>
+          </a:bodyPr>
+          <a:lstStyle/>
+          <a:p>
+            <a:pPr algn="ctr">
+              <a:spcAft>
+                <a:spcPts val="0"/>
+              </a:spcAft>
+            </a:pPr>
+            <a:r>
+              <a:rPr sz="900" b="1">
+                <a:solidFill>
+                  <a:srgbClr val="FFFFFF"/>
+                </a:solidFill>
+                <a:latin typeface="Red Hat Mono"/>
+              </a:rPr>
+              <a:t>03</a:t>
+            </a:r>
+          </a:p>
+        </p:txBody>
+      </p:sp>
+      <p:cxnSp>
+        <p:nvCxnSpPr>
+          <p:cNvPr id="23" name="Connector 22"/>
+          <p:cNvCxnSpPr/>
+          <p:nvPr/>
+        </p:nvCxnSpPr>
+        <p:spPr>
+          <a:xfrm>
+            <a:off x="7280585" y="2740279"/>
+            <a:ext cx="838784" cy="0"/>
+          </a:xfrm>
+          <a:prstGeom prst="line">
+            <a:avLst/>
+          </a:prstGeom>
+          <a:ln w="9525">
+            <a:solidFill>
+              <a:srgbClr val="CFC2BE"/>
+            </a:solidFill>
+          </a:ln>
+        </p:spPr>
+        <p:style>
+          <a:lnRef idx="2">
+            <a:schemeClr val="accent1"/>
+          </a:lnRef>
+          <a:fillRef idx="0">
+            <a:schemeClr val="accent1"/>
+          </a:fillRef>
+          <a:effectRef idx="1">
+            <a:schemeClr val="accent1"/>
+          </a:effectRef>
+          <a:fontRef idx="minor">
+            <a:schemeClr val="tx1"/>
+          </a:fontRef>
+        </p:style>
+      </p:cxnSp>
+      <p:sp>
+        <p:nvSpPr>
+          <p:cNvPr id="24" name="TextBox 23"/>
+          <p:cNvSpPr txBox="1"/>
+          <p:nvPr/>
+        </p:nvSpPr>
+        <p:spPr>
+          <a:xfrm>
+            <a:off x="8466841" y="2383663"/>
+            <a:ext cx="2947614" cy="713232"/>
+          </a:xfrm>
+          <a:prstGeom prst="rect">
+            <a:avLst/>
+          </a:prstGeom>
+          <a:noFill/>
+        </p:spPr>
+        <p:txBody>
+          <a:bodyPr wrap="square">
+            <a:spAutoFit/>
+          </a:bodyPr>
+          <a:lstStyle/>
+          <a:p>
+            <a:pPr algn="l">
+              <a:spcAft>
+                <a:spcPts val="100"/>
+              </a:spcAft>
+            </a:pPr>
+            <a:r>
+              <a:rPr sz="700" b="1">
+                <a:solidFill>
+                  <a:srgbClr val="1E7A55"/>
+                </a:solidFill>
+                <a:latin typeface="Red Hat Mono"/>
+              </a:rPr>
+              <a:t>KNOWLEDGE</a:t>
+            </a:r>
+          </a:p>
+          <a:p>
+            <a:pPr algn="l">
+              <a:spcAft>
+                <a:spcPts val="200"/>
+              </a:spcAft>
+            </a:pPr>
+            <a:r>
+              <a:rPr sz="1000" b="1">
+                <a:solidFill>
+                  <a:srgbClr val="1B1211"/>
+                </a:solidFill>
+                <a:latin typeface="Red Hat Display"/>
+              </a:rPr>
+              <a:t>What do we know that bears on this?</a:t>
+            </a:r>
+          </a:p>
+          <a:p>
+            <a:pPr algn="l">
+              <a:spcAft>
+                <a:spcPts val="200"/>
+              </a:spcAft>
+            </a:pPr>
+            <a:r>
+              <a:rPr sz="750" b="0">
+                <a:solidFill>
+                  <a:srgbClr val="54423E"/>
+                </a:solidFill>
+                <a:latin typeface="Red Hat Text"/>
+              </a:rPr>
+              <a:t>Information that informs an outcome: guidance, precedent, runbooks. The institution’s memory, retrievable and cited.</a:t>
+            </a:r>
+          </a:p>
+          <a:p>
+            <a:pPr algn="l">
+              <a:spcAft>
+                <a:spcPts val="0"/>
+              </a:spcAft>
+            </a:pPr>
+            <a:r>
+              <a:rPr sz="600" b="1">
+                <a:solidFill>
+                  <a:srgbClr val="7E6A64"/>
+                </a:solidFill>
+                <a:latin typeface="Red Hat Mono"/>
+              </a:rPr>
+              <a:t>GENERATIVE AI · GROUNDED IN APPROVED SOURCES · CITED</a:t>
+            </a:r>
+          </a:p>
+        </p:txBody>
+      </p:sp>
+      <p:sp>
+        <p:nvSpPr>
+          <p:cNvPr id="25" name="Freeform 24"/>
+          <p:cNvSpPr/>
+          <p:nvPr/>
+        </p:nvSpPr>
+        <p:spPr>
+          <a:xfrm>
+            <a:off x="5843241" y="3169462"/>
+            <a:ext cx="1617534" cy="119026"/>
+          </a:xfrm>
+          <a:custGeom>
+            <a:avLst/>
+            <a:gdLst/>
+            <a:ahLst/>
+            <a:cxnLst/>
+            <a:rect l="l" t="t" r="r" b="b"/>
+            <a:pathLst>
+              <a:path w="1617534" h="119026">
+                <a:moveTo>
+                  <a:pt x="49049" y="0"/>
+                </a:moveTo>
+                <a:lnTo>
+                  <a:pt x="1568485" y="0"/>
+                </a:lnTo>
+                <a:lnTo>
+                  <a:pt x="1617534" y="119026"/>
+                </a:lnTo>
+                <a:lnTo>
+                  <a:pt x="0" y="119026"/>
+                </a:lnTo>
+                <a:close/>
+              </a:path>
+            </a:pathLst>
+          </a:custGeom>
+          <a:solidFill>
+            <a:srgbClr val="D99A00"/>
+          </a:solidFill>
+          <a:ln>
+            <a:noFill/>
+          </a:ln>
+          <a:effectLst/>
+        </p:spPr>
+        <p:txBody>
+          <a:bodyPr rtlCol="0" anchor="ctr"/>
+          <a:lstStyle/>
+          <a:p>
+            <a:pPr algn="ctr"/>
+          </a:p>
+        </p:txBody>
+      </p:sp>
+      <p:sp>
+        <p:nvSpPr>
+          <p:cNvPr id="26" name="Freeform 25"/>
+          <p:cNvSpPr/>
+          <p:nvPr/>
+        </p:nvSpPr>
+        <p:spPr>
+          <a:xfrm>
+            <a:off x="5533417" y="3310432"/>
+            <a:ext cx="2237183" cy="729896"/>
+          </a:xfrm>
+          <a:custGeom>
+            <a:avLst/>
+            <a:gdLst/>
+            <a:ahLst/>
+            <a:cxnLst/>
+            <a:rect l="l" t="t" r="r" b="b"/>
+            <a:pathLst>
+              <a:path w="2237183" h="729896">
+                <a:moveTo>
+                  <a:pt x="300781" y="0"/>
+                </a:moveTo>
+                <a:lnTo>
+                  <a:pt x="1936401" y="0"/>
+                </a:lnTo>
+                <a:lnTo>
+                  <a:pt x="2237183" y="729896"/>
+                </a:lnTo>
+                <a:lnTo>
+                  <a:pt x="0" y="729896"/>
+                </a:lnTo>
+                <a:close/>
+              </a:path>
+            </a:pathLst>
+          </a:custGeom>
+          <a:solidFill>
+            <a:srgbClr val="C2410C"/>
+          </a:solidFill>
+          <a:ln>
+            <a:noFill/>
+          </a:ln>
+          <a:effectLst/>
+        </p:spPr>
+        <p:txBody>
+          <a:bodyPr rtlCol="0" anchor="ctr"/>
+          <a:lstStyle/>
+          <a:p>
+            <a:pPr algn="ctr"/>
+          </a:p>
+        </p:txBody>
+      </p:sp>
+      <p:sp>
+        <p:nvSpPr>
+          <p:cNvPr id="27" name="TextBox 26"/>
+          <p:cNvSpPr txBox="1"/>
+          <p:nvPr/>
+        </p:nvSpPr>
+        <p:spPr>
+          <a:xfrm>
+            <a:off x="6377688" y="3574796"/>
+            <a:ext cx="548640" cy="201168"/>
+          </a:xfrm>
+          <a:prstGeom prst="rect">
+            <a:avLst/>
+          </a:prstGeom>
+          <a:noFill/>
+        </p:spPr>
+        <p:txBody>
+          <a:bodyPr wrap="square">
+            <a:spAutoFit/>
+          </a:bodyPr>
+          <a:lstStyle/>
+          <a:p>
+            <a:pPr algn="ctr">
+              <a:spcAft>
+                <a:spcPts val="0"/>
+              </a:spcAft>
+            </a:pPr>
+            <a:r>
+              <a:rPr sz="900" b="1">
+                <a:solidFill>
+                  <a:srgbClr val="FFFFFF"/>
+                </a:solidFill>
+                <a:latin typeface="Red Hat Mono"/>
+              </a:rPr>
+              <a:t>02</a:t>
+            </a:r>
+          </a:p>
+        </p:txBody>
+      </p:sp>
+      <p:cxnSp>
+        <p:nvCxnSpPr>
+          <p:cNvPr id="28" name="Connector 27"/>
+          <p:cNvCxnSpPr/>
+          <p:nvPr/>
+        </p:nvCxnSpPr>
+        <p:spPr>
+          <a:xfrm>
+            <a:off x="7665929" y="3675380"/>
+            <a:ext cx="453440" cy="0"/>
+          </a:xfrm>
+          <a:prstGeom prst="line">
+            <a:avLst/>
+          </a:prstGeom>
+          <a:ln w="9525">
+            <a:solidFill>
+              <a:srgbClr val="CFC2BE"/>
+            </a:solidFill>
+          </a:ln>
+        </p:spPr>
+        <p:style>
+          <a:lnRef idx="2">
+            <a:schemeClr val="accent1"/>
+          </a:lnRef>
+          <a:fillRef idx="0">
+            <a:schemeClr val="accent1"/>
+          </a:fillRef>
+          <a:effectRef idx="1">
+            <a:schemeClr val="accent1"/>
+          </a:effectRef>
+          <a:fontRef idx="minor">
+            <a:schemeClr val="tx1"/>
+          </a:fontRef>
+        </p:style>
+      </p:cxnSp>
+      <p:sp>
+        <p:nvSpPr>
+          <p:cNvPr id="29" name="TextBox 28"/>
+          <p:cNvSpPr txBox="1"/>
+          <p:nvPr/>
+        </p:nvSpPr>
+        <p:spPr>
+          <a:xfrm>
+            <a:off x="8466841" y="3245612"/>
+            <a:ext cx="2947614" cy="713232"/>
+          </a:xfrm>
+          <a:prstGeom prst="rect">
+            <a:avLst/>
+          </a:prstGeom>
+          <a:noFill/>
+        </p:spPr>
+        <p:txBody>
+          <a:bodyPr wrap="square">
+            <a:spAutoFit/>
+          </a:bodyPr>
+          <a:lstStyle/>
+          <a:p>
+            <a:pPr algn="l">
+              <a:spcAft>
+                <a:spcPts val="100"/>
+              </a:spcAft>
+            </a:pPr>
+            <a:r>
+              <a:rPr sz="700" b="1">
+                <a:solidFill>
+                  <a:srgbClr val="C2410C"/>
+                </a:solidFill>
+                <a:latin typeface="Red Hat Mono"/>
+              </a:rPr>
+              <a:t>INFORMATION</a:t>
+            </a:r>
+          </a:p>
+          <a:p>
+            <a:pPr algn="l">
+              <a:spcAft>
+                <a:spcPts val="200"/>
+              </a:spcAft>
+            </a:pPr>
+            <a:r>
+              <a:rPr sz="1000" b="1">
+                <a:solidFill>
+                  <a:srgbClr val="1B1211"/>
+                </a:solidFill>
+                <a:latin typeface="Red Hat Display"/>
+              </a:rPr>
+              <a:t>What does it mean for this case?</a:t>
+            </a:r>
+          </a:p>
+          <a:p>
+            <a:pPr algn="l">
+              <a:spcAft>
+                <a:spcPts val="200"/>
+              </a:spcAft>
+            </a:pPr>
+            <a:r>
+              <a:rPr sz="750" b="0">
+                <a:solidFill>
+                  <a:srgbClr val="54423E"/>
+                </a:solidFill>
+                <a:latin typeface="Red Hat Text"/>
+              </a:rPr>
+              <a:t>Data in context: a score, a classification, a diagnosis, a metric. A model estimates it; a person checks it.</a:t>
+            </a:r>
+          </a:p>
+          <a:p>
+            <a:pPr algn="l">
+              <a:spcAft>
+                <a:spcPts val="0"/>
+              </a:spcAft>
+            </a:pPr>
+            <a:r>
+              <a:rPr sz="600" b="1">
+                <a:solidFill>
+                  <a:srgbClr val="7E6A64"/>
+                </a:solidFill>
+                <a:latin typeface="Red Hat Mono"/>
+              </a:rPr>
+              <a:t>PREDICTIVE AI · INFERENCE</a:t>
+            </a:r>
+          </a:p>
+        </p:txBody>
+      </p:sp>
+      <p:sp>
+        <p:nvSpPr>
+          <p:cNvPr id="30" name="Freeform 29"/>
+          <p:cNvSpPr/>
+          <p:nvPr/>
+        </p:nvSpPr>
+        <p:spPr>
+          <a:xfrm>
+            <a:off x="5262321" y="4062272"/>
+            <a:ext cx="2779375" cy="635916"/>
+          </a:xfrm>
+          <a:custGeom>
+            <a:avLst/>
+            <a:gdLst/>
+            <a:ahLst/>
+            <a:cxnLst/>
+            <a:rect l="l" t="t" r="r" b="b"/>
+            <a:pathLst>
+              <a:path w="2779375" h="635916">
+                <a:moveTo>
+                  <a:pt x="262053" y="0"/>
+                </a:moveTo>
+                <a:lnTo>
+                  <a:pt x="2517321" y="0"/>
+                </a:lnTo>
+                <a:lnTo>
+                  <a:pt x="2779375" y="635916"/>
+                </a:lnTo>
+                <a:lnTo>
+                  <a:pt x="0" y="635916"/>
+                </a:lnTo>
+                <a:close/>
+              </a:path>
+            </a:pathLst>
+          </a:custGeom>
+          <a:solidFill>
+            <a:srgbClr val="CC0000"/>
+          </a:solidFill>
+          <a:ln>
+            <a:noFill/>
+          </a:ln>
+          <a:effectLst/>
+        </p:spPr>
+        <p:txBody>
+          <a:bodyPr rtlCol="0" anchor="ctr"/>
+          <a:lstStyle/>
+          <a:p>
+            <a:pPr algn="ctr"/>
+          </a:p>
+        </p:txBody>
+      </p:sp>
+      <p:sp>
+        <p:nvSpPr>
+          <p:cNvPr id="31" name="TextBox 30"/>
+          <p:cNvSpPr txBox="1"/>
+          <p:nvPr/>
+        </p:nvSpPr>
+        <p:spPr>
+          <a:xfrm>
+            <a:off x="6377688" y="4279646"/>
+            <a:ext cx="548640" cy="201168"/>
+          </a:xfrm>
+          <a:prstGeom prst="rect">
+            <a:avLst/>
+          </a:prstGeom>
+          <a:noFill/>
+        </p:spPr>
+        <p:txBody>
+          <a:bodyPr wrap="square">
+            <a:spAutoFit/>
+          </a:bodyPr>
+          <a:lstStyle/>
+          <a:p>
+            <a:pPr algn="ctr">
+              <a:spcAft>
+                <a:spcPts val="0"/>
+              </a:spcAft>
+            </a:pPr>
+            <a:r>
+              <a:rPr sz="900" b="1">
+                <a:solidFill>
+                  <a:srgbClr val="FFFFFF"/>
+                </a:solidFill>
+                <a:latin typeface="Red Hat Mono"/>
+              </a:rPr>
+              <a:t>01</a:t>
+            </a:r>
+          </a:p>
+        </p:txBody>
+      </p:sp>
+      <p:cxnSp>
+        <p:nvCxnSpPr>
+          <p:cNvPr id="32" name="Connector 31"/>
+          <p:cNvCxnSpPr/>
+          <p:nvPr/>
+        </p:nvCxnSpPr>
+        <p:spPr>
+          <a:xfrm>
+            <a:off x="7956389" y="4380230"/>
+            <a:ext cx="162980" cy="0"/>
+          </a:xfrm>
+          <a:prstGeom prst="line">
+            <a:avLst/>
+          </a:prstGeom>
+          <a:ln w="9525">
+            <a:solidFill>
+              <a:srgbClr val="CFC2BE"/>
+            </a:solidFill>
+          </a:ln>
+        </p:spPr>
+        <p:style>
+          <a:lnRef idx="2">
+            <a:schemeClr val="accent1"/>
+          </a:lnRef>
+          <a:fillRef idx="0">
+            <a:schemeClr val="accent1"/>
+          </a:fillRef>
+          <a:effectRef idx="1">
+            <a:schemeClr val="accent1"/>
+          </a:effectRef>
+          <a:fontRef idx="minor">
+            <a:schemeClr val="tx1"/>
+          </a:fontRef>
+        </p:style>
+      </p:cxnSp>
+      <p:sp>
+        <p:nvSpPr>
+          <p:cNvPr id="33" name="TextBox 32"/>
+          <p:cNvSpPr txBox="1"/>
+          <p:nvPr/>
+        </p:nvSpPr>
+        <p:spPr>
+          <a:xfrm>
+            <a:off x="8466841" y="4133342"/>
+            <a:ext cx="2947614" cy="713232"/>
+          </a:xfrm>
+          <a:prstGeom prst="rect">
+            <a:avLst/>
+          </a:prstGeom>
+          <a:noFill/>
+        </p:spPr>
+        <p:txBody>
+          <a:bodyPr wrap="square">
+            <a:spAutoFit/>
+          </a:bodyPr>
+          <a:lstStyle/>
+          <a:p>
+            <a:pPr algn="l">
+              <a:spcAft>
+                <a:spcPts val="100"/>
+              </a:spcAft>
+            </a:pPr>
+            <a:r>
+              <a:rPr sz="700" b="1">
+                <a:solidFill>
+                  <a:srgbClr val="CC0000"/>
+                </a:solidFill>
+                <a:latin typeface="Red Hat Mono"/>
+              </a:rPr>
+              <a:t>DATA</a:t>
+            </a:r>
+          </a:p>
+          <a:p>
+            <a:pPr algn="l">
+              <a:spcAft>
+                <a:spcPts val="200"/>
+              </a:spcAft>
+            </a:pPr>
+            <a:r>
+              <a:rPr sz="1000" b="1">
+                <a:solidFill>
+                  <a:srgbClr val="1B1211"/>
+                </a:solidFill>
+                <a:latin typeface="Red Hat Display"/>
+              </a:rPr>
+              <a:t>What happened?</a:t>
+            </a:r>
+          </a:p>
+          <a:p>
+            <a:pPr algn="l">
+              <a:spcAft>
+                <a:spcPts val="200"/>
+              </a:spcAft>
+            </a:pPr>
+            <a:r>
+              <a:rPr sz="750" b="0">
+                <a:solidFill>
+                  <a:srgbClr val="54423E"/>
+                </a:solidFill>
+                <a:latin typeface="Red Hat Text"/>
+              </a:rPr>
+              <a:t>Uninterpreted: returns, transcripts, calls, logs, telemetry. Where it lives decides the architecture.</a:t>
+            </a:r>
+          </a:p>
+          <a:p>
+            <a:pPr algn="l">
+              <a:spcAft>
+                <a:spcPts val="0"/>
+              </a:spcAft>
+            </a:pPr>
+            <a:r>
+              <a:rPr sz="600" b="1">
+                <a:solidFill>
+                  <a:srgbClr val="7E6A64"/>
+                </a:solidFill>
+                <a:latin typeface="Red Hat Mono"/>
+              </a:rPr>
+              <a:t>THE PLATFORM · INGEST · STORE · GOVERN</a:t>
+            </a:r>
+          </a:p>
+        </p:txBody>
+      </p:sp>
+      <p:sp>
+        <p:nvSpPr>
+          <p:cNvPr id="34" name="Freeform 33"/>
+          <p:cNvSpPr/>
+          <p:nvPr/>
+        </p:nvSpPr>
+        <p:spPr>
+          <a:xfrm>
+            <a:off x="5257800" y="1325880"/>
+            <a:ext cx="2788417" cy="3383280"/>
+          </a:xfrm>
+          <a:custGeom>
+            <a:avLst/>
+            <a:gdLst/>
+            <a:ahLst/>
+            <a:cxnLst/>
+            <a:rect l="l" t="t" r="r" b="b"/>
+            <a:pathLst>
+              <a:path w="2788417" h="3383280">
+                <a:moveTo>
+                  <a:pt x="1394208" y="0"/>
+                </a:moveTo>
+                <a:lnTo>
+                  <a:pt x="2788417" y="3383280"/>
+                </a:lnTo>
+                <a:lnTo>
+                  <a:pt x="0" y="3383280"/>
+                </a:lnTo>
+                <a:close/>
+              </a:path>
+            </a:pathLst>
+          </a:custGeom>
+          <a:noFill/>
+          <a:ln w="6350">
+            <a:solidFill>
+              <a:srgbClr val="CFC2BE"/>
+            </a:solidFill>
+          </a:ln>
+          <a:effectLst/>
+        </p:spPr>
+        <p:txBody>
+          <a:bodyPr rtlCol="0" anchor="ctr"/>
+          <a:lstStyle/>
+          <a:p>
+            <a:pPr algn="ctr"/>
+          </a:p>
+        </p:txBody>
+      </p:sp>
+      <p:cxnSp>
+        <p:nvCxnSpPr>
+          <p:cNvPr id="35" name="Connector 34"/>
+          <p:cNvCxnSpPr/>
+          <p:nvPr/>
+        </p:nvCxnSpPr>
+        <p:spPr>
+          <a:xfrm flipV="1">
+            <a:off x="8174233" y="1435608"/>
+            <a:ext cx="0" cy="3273552"/>
+          </a:xfrm>
+          <a:prstGeom prst="line">
+            <a:avLst/>
+          </a:prstGeom>
+          <a:ln w="13970">
+            <a:solidFill>
+              <a:srgbClr val="7E6A64"/>
+            </a:solidFill>
+          </a:ln>
+        </p:spPr>
+        <p:style>
+          <a:lnRef idx="2">
+            <a:schemeClr val="accent1"/>
+          </a:lnRef>
+          <a:fillRef idx="0">
+            <a:schemeClr val="accent1"/>
+          </a:fillRef>
+          <a:effectRef idx="1">
+            <a:schemeClr val="accent1"/>
+          </a:effectRef>
+          <a:fontRef idx="minor">
+            <a:schemeClr val="tx1"/>
+          </a:fontRef>
+        </p:style>
+      </p:cxnSp>
+      <p:sp>
+        <p:nvSpPr>
+          <p:cNvPr id="36" name="Isosceles Triangle 35"/>
+          <p:cNvSpPr/>
+          <p:nvPr/>
+        </p:nvSpPr>
+        <p:spPr>
+          <a:xfrm>
+            <a:off x="8128513" y="1325880"/>
+            <a:ext cx="91440" cy="118872"/>
+          </a:xfrm>
+          <a:prstGeom prst="triangle">
+            <a:avLst/>
+          </a:prstGeom>
+          <a:solidFill>
+            <a:srgbClr val="7E6A64"/>
+          </a:solidFill>
+          <a:ln>
+            <a:noFill/>
+          </a:ln>
+          <a:effectLst/>
+        </p:spPr>
+        <p:style>
+          <a:lnRef idx="1">
+            <a:schemeClr val="accent1"/>
+          </a:lnRef>
+          <a:fillRef idx="3">
+            <a:schemeClr val="accent1"/>
+          </a:fillRef>
+          <a:effectRef idx="2">
+            <a:schemeClr val="accent1"/>
+          </a:effectRef>
+          <a:fontRef idx="minor">
+            <a:schemeClr val="lt1"/>
+          </a:fontRef>
+        </p:style>
+        <p:txBody>
+          <a:bodyPr rtlCol="0" anchor="ctr"/>
+          <a:lstStyle/>
+          <a:p>
+            <a:pPr algn="ctr"/>
+          </a:p>
+        </p:txBody>
+      </p:sp>
+      <p:sp>
+        <p:nvSpPr>
+          <p:cNvPr id="37" name="TextBox 36"/>
+          <p:cNvSpPr txBox="1"/>
+          <p:nvPr/>
+        </p:nvSpPr>
+        <p:spPr>
+          <a:xfrm rot="16200000">
+            <a:off x="6894073" y="2907792"/>
+            <a:ext cx="2743200" cy="219456"/>
+          </a:xfrm>
+          <a:prstGeom prst="rect">
+            <a:avLst/>
+          </a:prstGeom>
+          <a:noFill/>
+        </p:spPr>
+        <p:txBody>
+          <a:bodyPr wrap="square">
+            <a:spAutoFit/>
+          </a:bodyPr>
+          <a:lstStyle/>
+          <a:p>
+            <a:pPr algn="ctr">
+              <a:spcAft>
+                <a:spcPts val="0"/>
+              </a:spcAft>
+            </a:pPr>
+            <a:r>
+              <a:rPr sz="650" b="1">
+                <a:solidFill>
+                  <a:srgbClr val="7E6A64"/>
+                </a:solidFill>
+                <a:latin typeface="Red Hat Mono"/>
+              </a:rPr>
+              <a:t>DATA INFORMS EVERY LAYER</a:t>
+            </a:r>
+          </a:p>
+        </p:txBody>
+      </p:sp>
+      <p:sp>
+        <p:nvSpPr>
+          <p:cNvPr id="38" name="Rounded Rectangle 37"/>
+          <p:cNvSpPr/>
+          <p:nvPr/>
+        </p:nvSpPr>
+        <p:spPr>
+          <a:xfrm>
+            <a:off x="5257800" y="4892040"/>
+            <a:ext cx="6156655" cy="384048"/>
+          </a:xfrm>
+          <a:prstGeom prst="roundRect">
+            <a:avLst>
+              <a:gd name="adj" fmla="val 20000"/>
+            </a:avLst>
+          </a:prstGeom>
+          <a:solidFill>
+            <a:srgbClr val="F4EFED"/>
+          </a:solidFill>
+          <a:ln w="9525">
+            <a:solidFill>
+              <a:srgbClr val="E6DDDA"/>
+            </a:solidFill>
+          </a:ln>
+          <a:effectLst/>
+        </p:spPr>
+        <p:style>
+          <a:lnRef idx="1">
+            <a:schemeClr val="accent1"/>
+          </a:lnRef>
+          <a:fillRef idx="3">
+            <a:schemeClr val="accent1"/>
+          </a:fillRef>
+          <a:effectRef idx="2">
+            <a:schemeClr val="accent1"/>
+          </a:effectRef>
+          <a:fontRef idx="minor">
+            <a:schemeClr val="lt1"/>
+          </a:fontRef>
+        </p:style>
+        <p:txBody>
+          <a:bodyPr rtlCol="0" anchor="ctr"/>
+          <a:lstStyle/>
+          <a:p>
+            <a:pPr algn="ctr"/>
+          </a:p>
+        </p:txBody>
+      </p:sp>
+      <p:sp>
+        <p:nvSpPr>
+          <p:cNvPr id="39" name="Rectangle 38"/>
+          <p:cNvSpPr/>
+          <p:nvPr/>
+        </p:nvSpPr>
+        <p:spPr>
+          <a:xfrm>
+            <a:off x="5257800" y="4892040"/>
+            <a:ext cx="45720" cy="384048"/>
+          </a:xfrm>
+          <a:prstGeom prst="rect">
+            <a:avLst/>
+          </a:prstGeom>
+          <a:solidFill>
+            <a:srgbClr val="CC0000"/>
+          </a:solidFill>
+          <a:ln>
+            <a:noFill/>
+          </a:ln>
+          <a:effectLst/>
+        </p:spPr>
+        <p:style>
+          <a:lnRef idx="1">
+            <a:schemeClr val="accent1"/>
+          </a:lnRef>
+          <a:fillRef idx="3">
+            <a:schemeClr val="accent1"/>
+          </a:fillRef>
+          <a:effectRef idx="2">
+            <a:schemeClr val="accent1"/>
+          </a:effectRef>
+          <a:fontRef idx="minor">
+            <a:schemeClr val="lt1"/>
+          </a:fontRef>
+        </p:style>
+        <p:txBody>
+          <a:bodyPr rtlCol="0" anchor="ctr"/>
+          <a:lstStyle/>
+          <a:p>
+            <a:pPr algn="ctr"/>
+          </a:p>
+        </p:txBody>
+      </p:sp>
+      <p:sp>
+        <p:nvSpPr>
+          <p:cNvPr id="40" name="TextBox 39"/>
+          <p:cNvSpPr txBox="1"/>
+          <p:nvPr/>
+        </p:nvSpPr>
+        <p:spPr>
+          <a:xfrm>
+            <a:off x="5349240" y="4956048"/>
+            <a:ext cx="5973775" cy="274320"/>
+          </a:xfrm>
+          <a:prstGeom prst="rect">
+            <a:avLst/>
+          </a:prstGeom>
+          <a:noFill/>
+        </p:spPr>
+        <p:txBody>
+          <a:bodyPr wrap="square">
+            <a:spAutoFit/>
+          </a:bodyPr>
+          <a:lstStyle/>
+          <a:p>
+            <a:pPr algn="ctr">
+              <a:spcAft>
+                <a:spcPts val="0"/>
+              </a:spcAft>
+            </a:pPr>
+            <a:r>
+              <a:rPr sz="1000" b="1">
+                <a:solidFill>
+                  <a:srgbClr val="1B1211"/>
+                </a:solidFill>
+                <a:latin typeface="Red Hat Display"/>
+              </a:rPr>
+              <a:t>Solve a problem someone has. Don’t invent a solution to one no one has.</a:t>
             </a:r>
           </a:p>
         </p:txBody>
